--- a/static/ppts/G6_Sci_T1_Measurement.pptx
+++ b/static/ppts/G6_Sci_T1_Measurement.pptx
@@ -10,10 +10,9 @@
     <p:sldId id="258" r:id="rId4"/>
     <p:sldId id="259" r:id="rId5"/>
     <p:sldId id="260" r:id="rId6"/>
-    <p:sldId id="261" r:id="rId7"/>
   </p:sldIdLst>
   <p:notesMasterIdLst>
-    <p:notesMasterId r:id="rId8"/>
+    <p:notesMasterId r:id="rId7"/>
   </p:notesMasterIdLst>
   <p:sldSz cx="9144000" cy="5143500"/>
   <p:notesSz cx="5143500" cy="9144000"/>
@@ -901,94 +900,6 @@
 </p:notes>
 </file>
 
-<file path=ppt/notesSlides/notesSlide6.xml><?xml version="1.0" encoding="utf-8"?>
-<p:notes xmlns:a="http://schemas.openxmlformats.org/drawingml/2006/main" xmlns:r="http://schemas.openxmlformats.org/officeDocument/2006/relationships" xmlns:p="http://schemas.openxmlformats.org/presentationml/2006/main">
-  <p:cSld>
-    <p:spTree>
-      <p:nvGrpSpPr>
-        <p:cNvPr id="1" name=""/>
-        <p:cNvGrpSpPr/>
-        <p:nvPr/>
-      </p:nvGrpSpPr>
-      <p:grpSpPr>
-        <a:xfrm>
-          <a:off x="0" y="0"/>
-          <a:ext cx="0" cy="0"/>
-          <a:chOff x="0" y="0"/>
-          <a:chExt cx="0" cy="0"/>
-        </a:xfrm>
-      </p:grpSpPr>
-      <p:sp>
-        <p:nvSpPr>
-          <p:cNvPr id="2" name="Slide Image Placeholder 1"/>
-          <p:cNvSpPr>
-            <a:spLocks noGrp="1" noRot="1" noChangeAspect="1"/>
-          </p:cNvSpPr>
-          <p:nvPr>
-            <p:ph type="sldImg"/>
-          </p:nvPr>
-        </p:nvSpPr>
-        <p:spPr/>
-      </p:sp>
-      <p:sp>
-        <p:nvSpPr>
-          <p:cNvPr id="3" name="Notes Placeholder 2"/>
-          <p:cNvSpPr>
-            <a:spLocks noGrp="1"/>
-          </p:cNvSpPr>
-          <p:nvPr>
-            <p:ph type="body" idx="1"/>
-          </p:nvPr>
-        </p:nvSpPr>
-        <p:spPr/>
-        <p:txBody>
-          <a:bodyPr/>
-          <a:lstStyle/>
-          <a:p>
-            <a:r>
-              <a:rPr lang="en-US" dirty="0"/>
-              <a:t/>
-            </a:r>
-            <a:endParaRPr lang="en-US" dirty="0"/>
-          </a:p>
-        </p:txBody>
-      </p:sp>
-      <p:sp>
-        <p:nvSpPr>
-          <p:cNvPr id="4" name="Slide Number Placeholder 3"/>
-          <p:cNvSpPr>
-            <a:spLocks noGrp="1"/>
-          </p:cNvSpPr>
-          <p:nvPr>
-            <p:ph type="sldNum" sz="quarter" idx="10"/>
-          </p:nvPr>
-        </p:nvSpPr>
-        <p:spPr/>
-        <p:txBody>
-          <a:bodyPr/>
-          <a:lstStyle/>
-          <a:p>
-            <a:fld id="{F7021451-1387-4CA6-816F-3879F97B5CBC}" type="slidenum">
-              <a:rPr lang="en-US"/>
-              <a:t>6</a:t>
-            </a:fld>
-            <a:endParaRPr lang="en-US"/>
-          </a:p>
-        </p:txBody>
-      </p:sp>
-    </p:spTree>
-    <p:extLst>
-      <p:ext uri="{BB962C8B-B14F-4D97-AF65-F5344CB8AC3E}">
-        <p14:creationId xmlns:p14="http://schemas.microsoft.com/office/powerpoint/2010/main" val="1024086991"/>
-      </p:ext>
-    </p:extLst>
-  </p:cSld>
-  <p:clrMapOvr>
-    <a:masterClrMapping/>
-  </p:clrMapOvr>
-</p:notes>
-</file>
-
 <file path=ppt/slideLayouts/slideLayout1.xml><?xml version="1.0" encoding="utf-8"?>
 <p:sldLayout xmlns:a="http://schemas.openxmlformats.org/drawingml/2006/main" xmlns:r="http://schemas.openxmlformats.org/officeDocument/2006/relationships" xmlns:p="http://schemas.openxmlformats.org/presentationml/2006/main" preserve="1">
   <p:cSld name="DEFAULT">
@@ -1302,7 +1213,7 @@
     <p:bg>
       <p:bgPr>
         <a:solidFill>
-          <a:srgbClr val="1A7A6F"/>
+          <a:srgbClr val="1B2A4A"/>
         </a:solidFill>
       </p:bgPr>
     </p:bg>
@@ -1322,14 +1233,34 @@
       </p:grpSpPr>
       <p:sp>
         <p:nvSpPr>
-          <p:cNvPr id="2" name="Text 0"/>
-          <p:cNvSpPr/>
-          <p:nvPr/>
-        </p:nvSpPr>
-        <p:spPr>
-          <a:xfrm>
-            <a:off x="731520" y="1371600"/>
-            <a:ext cx="7680960" cy="1371600"/>
+          <p:cNvPr id="2" name="Shape 0"/>
+          <p:cNvSpPr/>
+          <p:nvPr/>
+        </p:nvSpPr>
+        <p:spPr>
+          <a:xfrm>
+            <a:off x="0" y="0"/>
+            <a:ext cx="109728" cy="5143500"/>
+          </a:xfrm>
+          <a:prstGeom prst="rect">
+            <a:avLst/>
+          </a:prstGeom>
+          <a:solidFill>
+            <a:srgbClr val="2A9D8F"/>
+          </a:solidFill>
+          <a:ln/>
+        </p:spPr>
+      </p:sp>
+      <p:sp>
+        <p:nvSpPr>
+          <p:cNvPr id="3" name="Text 1"/>
+          <p:cNvSpPr/>
+          <p:nvPr/>
+        </p:nvSpPr>
+        <p:spPr>
+          <a:xfrm>
+            <a:off x="731520" y="1280160"/>
+            <a:ext cx="7772400" cy="1371600"/>
           </a:xfrm>
           <a:prstGeom prst="rect">
             <a:avLst/>
@@ -1345,30 +1276,69 @@
               <a:buNone/>
             </a:pPr>
             <a:r>
-              <a:rPr lang="en-US" sz="4000" b="1" dirty="0">
+              <a:rPr lang="en-US" sz="3600" b="1" dirty="0">
                 <a:solidFill>
                   <a:srgbClr val="FFFFFF"/>
+                </a:solidFill>
+                <a:latin typeface="Georgia" pitchFamily="34" charset="0"/>
+                <a:ea typeface="Georgia" pitchFamily="34" charset="-122"/>
+                <a:cs typeface="Georgia" pitchFamily="34" charset="-120"/>
+              </a:rPr>
+              <a:t>Measurement &amp; Units</a:t>
+            </a:r>
+            <a:endParaRPr lang="en-US" sz="3600" dirty="0"/>
+          </a:p>
+        </p:txBody>
+      </p:sp>
+      <p:sp>
+        <p:nvSpPr>
+          <p:cNvPr id="4" name="Text 2"/>
+          <p:cNvSpPr/>
+          <p:nvPr/>
+        </p:nvSpPr>
+        <p:spPr>
+          <a:xfrm>
+            <a:off x="731520" y="2743200"/>
+            <a:ext cx="7772400" cy="548640"/>
+          </a:xfrm>
+          <a:prstGeom prst="rect">
+            <a:avLst/>
+          </a:prstGeom>
+          <a:noFill/>
+          <a:ln/>
+        </p:spPr>
+        <p:txBody>
+          <a:bodyPr wrap="square" rtlCol="0" anchor="ctr"/>
+          <a:lstStyle/>
+          <a:p>
+            <a:pPr indent="0" marL="0">
+              <a:buNone/>
+            </a:pPr>
+            <a:r>
+              <a:rPr lang="en-US" sz="1600" dirty="0">
+                <a:solidFill>
+                  <a:srgbClr val="9B9690"/>
                 </a:solidFill>
                 <a:latin typeface="Calibri" pitchFamily="34" charset="0"/>
                 <a:ea typeface="Calibri" pitchFamily="34" charset="-122"/>
                 <a:cs typeface="Calibri" pitchFamily="34" charset="-120"/>
               </a:rPr>
-              <a:t>Measurement &amp; Units</a:t>
-            </a:r>
-            <a:endParaRPr lang="en-US" sz="4000" dirty="0"/>
-          </a:p>
-        </p:txBody>
-      </p:sp>
-      <p:sp>
-        <p:nvSpPr>
-          <p:cNvPr id="3" name="Text 1"/>
-          <p:cNvSpPr/>
-          <p:nvPr/>
-        </p:nvSpPr>
-        <p:spPr>
-          <a:xfrm>
-            <a:off x="731520" y="2926080"/>
-            <a:ext cx="7680960" cy="548640"/>
+              <a:t>G6 Science · Scientific Skills</a:t>
+            </a:r>
+            <a:endParaRPr lang="en-US" sz="1600" dirty="0"/>
+          </a:p>
+        </p:txBody>
+      </p:sp>
+      <p:sp>
+        <p:nvSpPr>
+          <p:cNvPr id="5" name="Text 3"/>
+          <p:cNvSpPr/>
+          <p:nvPr/>
+        </p:nvSpPr>
+        <p:spPr>
+          <a:xfrm>
+            <a:off x="731520" y="4389120"/>
+            <a:ext cx="7772400" cy="457200"/>
           </a:xfrm>
           <a:prstGeom prst="rect">
             <a:avLst/>
@@ -1384,17 +1354,17 @@
               <a:buNone/>
             </a:pPr>
             <a:r>
-              <a:rPr lang="en-US" sz="1600" i="1" dirty="0">
-                <a:solidFill>
-                  <a:srgbClr val="FFFFFF"/>
+              <a:rPr lang="en-US" sz="1000" dirty="0">
+                <a:solidFill>
+                  <a:srgbClr val="6B6660"/>
                 </a:solidFill>
                 <a:latin typeface="Calibri" pitchFamily="34" charset="0"/>
                 <a:ea typeface="Calibri" pitchFamily="34" charset="-122"/>
                 <a:cs typeface="Calibri" pitchFamily="34" charset="-120"/>
               </a:rPr>
-              <a:t>Grade 6 Science · Mr Zocchi</a:t>
-            </a:r>
-            <a:endParaRPr lang="en-US" sz="1600" dirty="0"/>
+              <a:t>Mr Zocchi · mrzocchi.com</a:t>
+            </a:r>
+            <a:endParaRPr lang="en-US" sz="1000" dirty="0"/>
           </a:p>
         </p:txBody>
       </p:sp>
@@ -1409,6 +1379,13 @@
 <file path=ppt/slides/slide2.xml><?xml version="1.0" encoding="utf-8"?>
 <p:sld xmlns:a="http://schemas.openxmlformats.org/drawingml/2006/main" xmlns:r="http://schemas.openxmlformats.org/officeDocument/2006/relationships" xmlns:p="http://schemas.openxmlformats.org/presentationml/2006/main">
   <p:cSld name="Slide 2">
+    <p:bg>
+      <p:bgPr>
+        <a:solidFill>
+          <a:srgbClr val="FFFFFF"/>
+        </a:solidFill>
+      </p:bgPr>
+    </p:bg>
     <p:spTree>
       <p:nvGrpSpPr>
         <p:cNvPr id="1" name=""/>
@@ -1432,13 +1409,13 @@
         <p:spPr>
           <a:xfrm>
             <a:off x="0" y="0"/>
-            <a:ext cx="9144000" cy="548640"/>
-          </a:xfrm>
-          <a:prstGeom prst="rect">
-            <a:avLst/>
-          </a:prstGeom>
-          <a:solidFill>
-            <a:srgbClr val="1A7A6F"/>
+            <a:ext cx="9144000" cy="54864"/>
+          </a:xfrm>
+          <a:prstGeom prst="rect">
+            <a:avLst/>
+          </a:prstGeom>
+          <a:solidFill>
+            <a:srgbClr val="2A9D8F"/>
           </a:solidFill>
           <a:ln/>
         </p:spPr>
@@ -1451,8 +1428,8 @@
         </p:nvSpPr>
         <p:spPr>
           <a:xfrm>
-            <a:off x="457200" y="45720"/>
-            <a:ext cx="8229600" cy="457200"/>
+            <a:off x="548640" y="274320"/>
+            <a:ext cx="8046720" cy="640080"/>
           </a:xfrm>
           <a:prstGeom prst="rect">
             <a:avLst/>
@@ -1461,125 +1438,186 @@
           <a:ln/>
         </p:spPr>
         <p:txBody>
-          <a:bodyPr wrap="square" rtlCol="0" anchor="ctr"/>
+          <a:bodyPr wrap="square" lIns="0" tIns="0" rIns="0" bIns="0" rtlCol="0" anchor="ctr"/>
           <a:lstStyle/>
           <a:p>
             <a:pPr indent="0" marL="0">
               <a:buNone/>
             </a:pPr>
             <a:r>
-              <a:rPr lang="en-US" sz="1800" b="1" dirty="0">
-                <a:solidFill>
-                  <a:srgbClr val="FFFFFF"/>
+              <a:rPr lang="en-US" sz="2600" b="1" dirty="0">
+                <a:solidFill>
+                  <a:srgbClr val="1B2A4A"/>
+                </a:solidFill>
+                <a:latin typeface="Georgia" pitchFamily="34" charset="0"/>
+                <a:ea typeface="Georgia" pitchFamily="34" charset="-122"/>
+                <a:cs typeface="Georgia" pitchFamily="34" charset="-120"/>
+              </a:rPr>
+              <a:t>Why Measurement Matters</a:t>
+            </a:r>
+            <a:endParaRPr lang="en-US" sz="2600" dirty="0"/>
+          </a:p>
+        </p:txBody>
+      </p:sp>
+      <p:sp>
+        <p:nvSpPr>
+          <p:cNvPr id="4" name="Text 2"/>
+          <p:cNvSpPr/>
+          <p:nvPr/>
+        </p:nvSpPr>
+        <p:spPr>
+          <a:xfrm>
+            <a:off x="548640" y="1097280"/>
+            <a:ext cx="8046720" cy="3474720"/>
+          </a:xfrm>
+          <a:prstGeom prst="rect">
+            <a:avLst/>
+          </a:prstGeom>
+          <a:noFill/>
+          <a:ln/>
+        </p:spPr>
+        <p:txBody>
+          <a:bodyPr wrap="square" rtlCol="0" anchor="t"/>
+          <a:lstStyle/>
+          <a:p>
+            <a:pPr marL="342900" indent="-342900">
+              <a:spcAft>
+                <a:spcPts val="800"/>
+              </a:spcAft>
+              <a:buSzPct val="100000"/>
+              <a:buChar char="•"/>
+            </a:pPr>
+            <a:r>
+              <a:rPr lang="en-US" sz="1500" dirty="0">
+                <a:solidFill>
+                  <a:srgbClr val="3D3A36"/>
                 </a:solidFill>
                 <a:latin typeface="Calibri" pitchFamily="34" charset="0"/>
                 <a:ea typeface="Calibri" pitchFamily="34" charset="-122"/>
                 <a:cs typeface="Calibri" pitchFamily="34" charset="-120"/>
               </a:rPr>
-              <a:t>Why we measure</a:t>
-            </a:r>
-            <a:endParaRPr lang="en-US" sz="1800" dirty="0"/>
-          </a:p>
-        </p:txBody>
-      </p:sp>
-      <p:sp>
-        <p:nvSpPr>
-          <p:cNvPr id="4" name="Text 2"/>
-          <p:cNvSpPr/>
-          <p:nvPr/>
-        </p:nvSpPr>
-        <p:spPr>
-          <a:xfrm>
-            <a:off x="731520" y="1097280"/>
-            <a:ext cx="7680960" cy="3200400"/>
-          </a:xfrm>
-          <a:prstGeom prst="rect">
-            <a:avLst/>
-          </a:prstGeom>
-          <a:noFill/>
-          <a:ln/>
-        </p:spPr>
-        <p:txBody>
-          <a:bodyPr wrap="square" rtlCol="0" anchor="ctr"/>
-          <a:lstStyle/>
-          <a:p>
-            <a:pPr indent="0" marL="0">
-              <a:buNone/>
-            </a:pPr>
-            <a:r>
-              <a:rPr lang="en-US" sz="1600" dirty="0">
-                <a:solidFill>
-                  <a:srgbClr val="363636"/>
+              <a:t>Science depends on accurate measurements, not guesses</a:t>
+            </a:r>
+            <a:endParaRPr lang="en-US" sz="1500" dirty="0"/>
+          </a:p>
+          <a:p>
+            <a:pPr marL="342900" indent="-342900">
+              <a:spcAft>
+                <a:spcPts val="800"/>
+              </a:spcAft>
+              <a:buSzPct val="100000"/>
+              <a:buChar char="•"/>
+            </a:pPr>
+            <a:r>
+              <a:rPr lang="en-US" sz="1500" dirty="0">
+                <a:solidFill>
+                  <a:srgbClr val="3D3A36"/>
                 </a:solidFill>
                 <a:latin typeface="Calibri" pitchFamily="34" charset="0"/>
                 <a:ea typeface="Calibri" pitchFamily="34" charset="-122"/>
                 <a:cs typeface="Calibri" pitchFamily="34" charset="-120"/>
               </a:rPr>
-              <a:t>Content for: Why we measure</a:t>
-            </a:r>
-            <a:endParaRPr lang="en-US" sz="1600" dirty="0"/>
-          </a:p>
-          <a:p>
-            <a:pPr indent="0" marL="0">
-              <a:buNone/>
-            </a:pPr>
-            <a:endParaRPr lang="en-US" sz="1600" dirty="0"/>
-          </a:p>
-          <a:p>
-            <a:pPr indent="0" marL="0">
-              <a:buNone/>
-            </a:pPr>
-            <a:r>
-              <a:rPr lang="en-US" sz="1600" dirty="0">
-                <a:solidFill>
-                  <a:srgbClr val="363636"/>
+              <a:t>We use standard units so everyone understands our results</a:t>
+            </a:r>
+            <a:endParaRPr lang="en-US" sz="1500" dirty="0"/>
+          </a:p>
+          <a:p>
+            <a:pPr marL="342900" indent="-342900">
+              <a:spcAft>
+                <a:spcPts val="800"/>
+              </a:spcAft>
+              <a:buSzPct val="100000"/>
+              <a:buChar char="•"/>
+            </a:pPr>
+            <a:r>
+              <a:rPr lang="en-US" sz="1500" dirty="0">
+                <a:solidFill>
+                  <a:srgbClr val="3D3A36"/>
                 </a:solidFill>
                 <a:latin typeface="Calibri" pitchFamily="34" charset="0"/>
                 <a:ea typeface="Calibri" pitchFamily="34" charset="-122"/>
                 <a:cs typeface="Calibri" pitchFamily="34" charset="-120"/>
               </a:rPr>
-              <a:t>Key points will be covered in class.</a:t>
-            </a:r>
-            <a:endParaRPr lang="en-US" sz="1600" dirty="0"/>
-          </a:p>
-        </p:txBody>
-      </p:sp>
-      <p:sp>
-        <p:nvSpPr>
-          <p:cNvPr id="5" name="Text 3"/>
-          <p:cNvSpPr/>
-          <p:nvPr/>
-        </p:nvSpPr>
-        <p:spPr>
-          <a:xfrm>
-            <a:off x="7772400" y="4663440"/>
-            <a:ext cx="1097280" cy="365760"/>
-          </a:xfrm>
-          <a:prstGeom prst="rect">
-            <a:avLst/>
-          </a:prstGeom>
-          <a:noFill/>
-          <a:ln/>
-        </p:spPr>
-        <p:txBody>
-          <a:bodyPr wrap="square" rtlCol="0" anchor="ctr"/>
-          <a:lstStyle/>
-          <a:p>
-            <a:pPr algn="r" indent="0" marL="0">
-              <a:buNone/>
-            </a:pPr>
-            <a:r>
-              <a:rPr lang="en-US" sz="1000" dirty="0">
-                <a:solidFill>
-                  <a:srgbClr val="999999"/>
+              <a:t>The metric system (SI units) is used worldwide in science</a:t>
+            </a:r>
+            <a:endParaRPr lang="en-US" sz="1500" dirty="0"/>
+          </a:p>
+          <a:p>
+            <a:pPr marL="342900" indent="-342900">
+              <a:spcAft>
+                <a:spcPts val="800"/>
+              </a:spcAft>
+              <a:buSzPct val="100000"/>
+              <a:buChar char="•"/>
+            </a:pPr>
+            <a:r>
+              <a:rPr lang="en-US" sz="1500" dirty="0">
+                <a:solidFill>
+                  <a:srgbClr val="3D3A36"/>
                 </a:solidFill>
                 <a:latin typeface="Calibri" pitchFamily="34" charset="0"/>
                 <a:ea typeface="Calibri" pitchFamily="34" charset="-122"/>
                 <a:cs typeface="Calibri" pitchFamily="34" charset="-120"/>
               </a:rPr>
-              <a:t>2 / 6</a:t>
-            </a:r>
-            <a:endParaRPr lang="en-US" sz="1000" dirty="0"/>
+              <a:t>Choosing the right tool and unit is part of good experimental design</a:t>
+            </a:r>
+            <a:endParaRPr lang="en-US" sz="1500" dirty="0"/>
+          </a:p>
+        </p:txBody>
+      </p:sp>
+      <p:sp>
+        <p:nvSpPr>
+          <p:cNvPr id="5" name="Shape 3"/>
+          <p:cNvSpPr/>
+          <p:nvPr/>
+        </p:nvSpPr>
+        <p:spPr>
+          <a:xfrm>
+            <a:off x="548640" y="4754880"/>
+            <a:ext cx="8046720" cy="9144"/>
+          </a:xfrm>
+          <a:prstGeom prst="rect">
+            <a:avLst/>
+          </a:prstGeom>
+          <a:solidFill>
+            <a:srgbClr val="F3F1EE"/>
+          </a:solidFill>
+          <a:ln/>
+        </p:spPr>
+      </p:sp>
+      <p:sp>
+        <p:nvSpPr>
+          <p:cNvPr id="6" name="Text 4"/>
+          <p:cNvSpPr/>
+          <p:nvPr/>
+        </p:nvSpPr>
+        <p:spPr>
+          <a:xfrm>
+            <a:off x="548640" y="4800600"/>
+            <a:ext cx="3657600" cy="274320"/>
+          </a:xfrm>
+          <a:prstGeom prst="rect">
+            <a:avLst/>
+          </a:prstGeom>
+          <a:noFill/>
+          <a:ln/>
+        </p:spPr>
+        <p:txBody>
+          <a:bodyPr wrap="square" rtlCol="0" anchor="ctr"/>
+          <a:lstStyle/>
+          <a:p>
+            <a:pPr indent="0" marL="0">
+              <a:buNone/>
+            </a:pPr>
+            <a:r>
+              <a:rPr lang="en-US" sz="800" dirty="0">
+                <a:solidFill>
+                  <a:srgbClr val="9B9690"/>
+                </a:solidFill>
+              </a:rPr>
+              <a:t>mrzocchi.com</a:t>
+            </a:r>
+            <a:endParaRPr lang="en-US" sz="800" dirty="0"/>
           </a:p>
         </p:txBody>
       </p:sp>
@@ -1594,6 +1632,13 @@
 <file path=ppt/slides/slide3.xml><?xml version="1.0" encoding="utf-8"?>
 <p:sld xmlns:a="http://schemas.openxmlformats.org/drawingml/2006/main" xmlns:r="http://schemas.openxmlformats.org/officeDocument/2006/relationships" xmlns:p="http://schemas.openxmlformats.org/presentationml/2006/main">
   <p:cSld name="Slide 3">
+    <p:bg>
+      <p:bgPr>
+        <a:solidFill>
+          <a:srgbClr val="FAF8F5"/>
+        </a:solidFill>
+      </p:bgPr>
+    </p:bg>
     <p:spTree>
       <p:nvGrpSpPr>
         <p:cNvPr id="1" name=""/>
@@ -1617,13 +1662,13 @@
         <p:spPr>
           <a:xfrm>
             <a:off x="0" y="0"/>
-            <a:ext cx="9144000" cy="548640"/>
-          </a:xfrm>
-          <a:prstGeom prst="rect">
-            <a:avLst/>
-          </a:prstGeom>
-          <a:solidFill>
-            <a:srgbClr val="1A7A6F"/>
+            <a:ext cx="9144000" cy="54864"/>
+          </a:xfrm>
+          <a:prstGeom prst="rect">
+            <a:avLst/>
+          </a:prstGeom>
+          <a:solidFill>
+            <a:srgbClr val="2A9D8F"/>
           </a:solidFill>
           <a:ln/>
         </p:spPr>
@@ -1636,8 +1681,94 @@
         </p:nvSpPr>
         <p:spPr>
           <a:xfrm>
-            <a:off x="457200" y="45720"/>
-            <a:ext cx="8229600" cy="457200"/>
+            <a:off x="548640" y="274320"/>
+            <a:ext cx="8046720" cy="640080"/>
+          </a:xfrm>
+          <a:prstGeom prst="rect">
+            <a:avLst/>
+          </a:prstGeom>
+          <a:noFill/>
+          <a:ln/>
+        </p:spPr>
+        <p:txBody>
+          <a:bodyPr wrap="square" lIns="0" tIns="0" rIns="0" bIns="0" rtlCol="0" anchor="ctr"/>
+          <a:lstStyle/>
+          <a:p>
+            <a:pPr indent="0" marL="0">
+              <a:buNone/>
+            </a:pPr>
+            <a:r>
+              <a:rPr lang="en-US" sz="2600" b="1" dirty="0">
+                <a:solidFill>
+                  <a:srgbClr val="1B2A4A"/>
+                </a:solidFill>
+                <a:latin typeface="Georgia" pitchFamily="34" charset="0"/>
+                <a:ea typeface="Georgia" pitchFamily="34" charset="-122"/>
+                <a:cs typeface="Georgia" pitchFamily="34" charset="-120"/>
+              </a:rPr>
+              <a:t>SI Units</a:t>
+            </a:r>
+            <a:endParaRPr lang="en-US" sz="2600" dirty="0"/>
+          </a:p>
+        </p:txBody>
+      </p:sp>
+      <p:sp>
+        <p:nvSpPr>
+          <p:cNvPr id="4" name="Shape 2"/>
+          <p:cNvSpPr/>
+          <p:nvPr/>
+        </p:nvSpPr>
+        <p:spPr>
+          <a:xfrm>
+            <a:off x="548640" y="1097280"/>
+            <a:ext cx="3749040" cy="594360"/>
+          </a:xfrm>
+          <a:prstGeom prst="rect">
+            <a:avLst/>
+          </a:prstGeom>
+          <a:solidFill>
+            <a:srgbClr val="FFFFFF"/>
+          </a:solidFill>
+          <a:ln/>
+          <a:effectLst>
+            <a:outerShdw sx="100000" sy="100000" kx="0" ky="0" algn="bl" rotWithShape="0" blurRad="50800" dist="25400" dir="8100000">
+              <a:srgbClr val="000000">
+                <a:alpha val="10000"/>
+              </a:srgbClr>
+            </a:outerShdw>
+          </a:effectLst>
+        </p:spPr>
+      </p:sp>
+      <p:sp>
+        <p:nvSpPr>
+          <p:cNvPr id="5" name="Shape 3"/>
+          <p:cNvSpPr/>
+          <p:nvPr/>
+        </p:nvSpPr>
+        <p:spPr>
+          <a:xfrm>
+            <a:off x="548640" y="1097280"/>
+            <a:ext cx="54864" cy="594360"/>
+          </a:xfrm>
+          <a:prstGeom prst="rect">
+            <a:avLst/>
+          </a:prstGeom>
+          <a:solidFill>
+            <a:srgbClr val="2A9D8F"/>
+          </a:solidFill>
+          <a:ln/>
+        </p:spPr>
+      </p:sp>
+      <p:sp>
+        <p:nvSpPr>
+          <p:cNvPr id="6" name="Text 4"/>
+          <p:cNvSpPr/>
+          <p:nvPr/>
+        </p:nvSpPr>
+        <p:spPr>
+          <a:xfrm>
+            <a:off x="685800" y="1143000"/>
+            <a:ext cx="3520440" cy="502920"/>
           </a:xfrm>
           <a:prstGeom prst="rect">
             <a:avLst/>
@@ -1653,30 +1784,88 @@
               <a:buNone/>
             </a:pPr>
             <a:r>
-              <a:rPr lang="en-US" sz="1800" b="1" dirty="0">
-                <a:solidFill>
-                  <a:srgbClr val="FFFFFF"/>
-                </a:solidFill>
-                <a:latin typeface="Calibri" pitchFamily="34" charset="0"/>
-                <a:ea typeface="Calibri" pitchFamily="34" charset="-122"/>
-                <a:cs typeface="Calibri" pitchFamily="34" charset="-120"/>
-              </a:rPr>
-              <a:t>SI units</a:t>
-            </a:r>
-            <a:endParaRPr lang="en-US" sz="1800" dirty="0"/>
-          </a:p>
-        </p:txBody>
-      </p:sp>
-      <p:sp>
-        <p:nvSpPr>
-          <p:cNvPr id="4" name="Text 2"/>
-          <p:cNvSpPr/>
-          <p:nvPr/>
-        </p:nvSpPr>
-        <p:spPr>
-          <a:xfrm>
-            <a:off x="731520" y="1097280"/>
-            <a:ext cx="7680960" cy="3200400"/>
+              <a:rPr lang="en-US" sz="1200" b="1" dirty="0">
+                <a:solidFill>
+                  <a:srgbClr val="1B2A4A"/>
+                </a:solidFill>
+              </a:rPr>
+              <a:t>Length</a:t>
+            </a:r>
+            <a:endParaRPr lang="en-US" sz="1200" dirty="0"/>
+          </a:p>
+          <a:p>
+            <a:pPr indent="0" marL="0">
+              <a:buNone/>
+            </a:pPr>
+            <a:r>
+              <a:rPr lang="en-US" sz="1000" dirty="0">
+                <a:solidFill>
+                  <a:srgbClr val="6B6660"/>
+                </a:solidFill>
+              </a:rPr>
+              <a:t>Metres (m), centimetres (cm), millimetres (mm)</a:t>
+            </a:r>
+            <a:endParaRPr lang="en-US" sz="1200" dirty="0"/>
+          </a:p>
+        </p:txBody>
+      </p:sp>
+      <p:sp>
+        <p:nvSpPr>
+          <p:cNvPr id="7" name="Shape 5"/>
+          <p:cNvSpPr/>
+          <p:nvPr/>
+        </p:nvSpPr>
+        <p:spPr>
+          <a:xfrm>
+            <a:off x="4480560" y="1097280"/>
+            <a:ext cx="3749040" cy="594360"/>
+          </a:xfrm>
+          <a:prstGeom prst="rect">
+            <a:avLst/>
+          </a:prstGeom>
+          <a:solidFill>
+            <a:srgbClr val="FFFFFF"/>
+          </a:solidFill>
+          <a:ln/>
+          <a:effectLst>
+            <a:outerShdw sx="100000" sy="100000" kx="0" ky="0" algn="bl" rotWithShape="0" blurRad="50800" dist="25400" dir="8100000">
+              <a:srgbClr val="000000">
+                <a:alpha val="10000"/>
+              </a:srgbClr>
+            </a:outerShdw>
+          </a:effectLst>
+        </p:spPr>
+      </p:sp>
+      <p:sp>
+        <p:nvSpPr>
+          <p:cNvPr id="8" name="Shape 6"/>
+          <p:cNvSpPr/>
+          <p:nvPr/>
+        </p:nvSpPr>
+        <p:spPr>
+          <a:xfrm>
+            <a:off x="4480560" y="1097280"/>
+            <a:ext cx="54864" cy="594360"/>
+          </a:xfrm>
+          <a:prstGeom prst="rect">
+            <a:avLst/>
+          </a:prstGeom>
+          <a:solidFill>
+            <a:srgbClr val="2A9D8F"/>
+          </a:solidFill>
+          <a:ln/>
+        </p:spPr>
+      </p:sp>
+      <p:sp>
+        <p:nvSpPr>
+          <p:cNvPr id="9" name="Text 7"/>
+          <p:cNvSpPr/>
+          <p:nvPr/>
+        </p:nvSpPr>
+        <p:spPr>
+          <a:xfrm>
+            <a:off x="4617720" y="1143000"/>
+            <a:ext cx="3520440" cy="502920"/>
           </a:xfrm>
           <a:prstGeom prst="rect">
             <a:avLst/>
@@ -1692,53 +1881,185 @@
               <a:buNone/>
             </a:pPr>
             <a:r>
-              <a:rPr lang="en-US" sz="1600" dirty="0">
-                <a:solidFill>
-                  <a:srgbClr val="363636"/>
-                </a:solidFill>
-                <a:latin typeface="Calibri" pitchFamily="34" charset="0"/>
-                <a:ea typeface="Calibri" pitchFamily="34" charset="-122"/>
-                <a:cs typeface="Calibri" pitchFamily="34" charset="-120"/>
-              </a:rPr>
-              <a:t>Content for: SI units</a:t>
-            </a:r>
-            <a:endParaRPr lang="en-US" sz="1600" dirty="0"/>
+              <a:rPr lang="en-US" sz="1200" b="1" dirty="0">
+                <a:solidFill>
+                  <a:srgbClr val="1B2A4A"/>
+                </a:solidFill>
+              </a:rPr>
+              <a:t>Mass</a:t>
+            </a:r>
+            <a:endParaRPr lang="en-US" sz="1200" dirty="0"/>
           </a:p>
           <a:p>
             <a:pPr indent="0" marL="0">
               <a:buNone/>
             </a:pPr>
-            <a:endParaRPr lang="en-US" sz="1600" dirty="0"/>
-          </a:p>
+            <a:r>
+              <a:rPr lang="en-US" sz="1000" dirty="0">
+                <a:solidFill>
+                  <a:srgbClr val="6B6660"/>
+                </a:solidFill>
+              </a:rPr>
+              <a:t>Kilograms (kg), grams (g)</a:t>
+            </a:r>
+            <a:endParaRPr lang="en-US" sz="1200" dirty="0"/>
+          </a:p>
+        </p:txBody>
+      </p:sp>
+      <p:sp>
+        <p:nvSpPr>
+          <p:cNvPr id="10" name="Shape 8"/>
+          <p:cNvSpPr/>
+          <p:nvPr/>
+        </p:nvSpPr>
+        <p:spPr>
+          <a:xfrm>
+            <a:off x="548640" y="1828800"/>
+            <a:ext cx="3749040" cy="594360"/>
+          </a:xfrm>
+          <a:prstGeom prst="rect">
+            <a:avLst/>
+          </a:prstGeom>
+          <a:solidFill>
+            <a:srgbClr val="FFFFFF"/>
+          </a:solidFill>
+          <a:ln/>
+          <a:effectLst>
+            <a:outerShdw sx="100000" sy="100000" kx="0" ky="0" algn="bl" rotWithShape="0" blurRad="50800" dist="25400" dir="8100000">
+              <a:srgbClr val="000000">
+                <a:alpha val="10000"/>
+              </a:srgbClr>
+            </a:outerShdw>
+          </a:effectLst>
+        </p:spPr>
+      </p:sp>
+      <p:sp>
+        <p:nvSpPr>
+          <p:cNvPr id="11" name="Shape 9"/>
+          <p:cNvSpPr/>
+          <p:nvPr/>
+        </p:nvSpPr>
+        <p:spPr>
+          <a:xfrm>
+            <a:off x="548640" y="1828800"/>
+            <a:ext cx="54864" cy="594360"/>
+          </a:xfrm>
+          <a:prstGeom prst="rect">
+            <a:avLst/>
+          </a:prstGeom>
+          <a:solidFill>
+            <a:srgbClr val="2A9D8F"/>
+          </a:solidFill>
+          <a:ln/>
+        </p:spPr>
+      </p:sp>
+      <p:sp>
+        <p:nvSpPr>
+          <p:cNvPr id="12" name="Text 10"/>
+          <p:cNvSpPr/>
+          <p:nvPr/>
+        </p:nvSpPr>
+        <p:spPr>
+          <a:xfrm>
+            <a:off x="685800" y="1874520"/>
+            <a:ext cx="3520440" cy="502920"/>
+          </a:xfrm>
+          <a:prstGeom prst="rect">
+            <a:avLst/>
+          </a:prstGeom>
+          <a:noFill/>
+          <a:ln/>
+        </p:spPr>
+        <p:txBody>
+          <a:bodyPr wrap="square" rtlCol="0" anchor="ctr"/>
+          <a:lstStyle/>
           <a:p>
             <a:pPr indent="0" marL="0">
               <a:buNone/>
             </a:pPr>
             <a:r>
-              <a:rPr lang="en-US" sz="1600" dirty="0">
-                <a:solidFill>
-                  <a:srgbClr val="363636"/>
-                </a:solidFill>
-                <a:latin typeface="Calibri" pitchFamily="34" charset="0"/>
-                <a:ea typeface="Calibri" pitchFamily="34" charset="-122"/>
-                <a:cs typeface="Calibri" pitchFamily="34" charset="-120"/>
-              </a:rPr>
-              <a:t>Key points will be covered in class.</a:t>
-            </a:r>
-            <a:endParaRPr lang="en-US" sz="1600" dirty="0"/>
-          </a:p>
-        </p:txBody>
-      </p:sp>
-      <p:sp>
-        <p:nvSpPr>
-          <p:cNvPr id="5" name="Text 3"/>
-          <p:cNvSpPr/>
-          <p:nvPr/>
-        </p:nvSpPr>
-        <p:spPr>
-          <a:xfrm>
-            <a:off x="7772400" y="4663440"/>
-            <a:ext cx="1097280" cy="365760"/>
+              <a:rPr lang="en-US" sz="1200" b="1" dirty="0">
+                <a:solidFill>
+                  <a:srgbClr val="1B2A4A"/>
+                </a:solidFill>
+              </a:rPr>
+              <a:t>Volume</a:t>
+            </a:r>
+            <a:endParaRPr lang="en-US" sz="1200" dirty="0"/>
+          </a:p>
+          <a:p>
+            <a:pPr indent="0" marL="0">
+              <a:buNone/>
+            </a:pPr>
+            <a:r>
+              <a:rPr lang="en-US" sz="1000" dirty="0">
+                <a:solidFill>
+                  <a:srgbClr val="6B6660"/>
+                </a:solidFill>
+              </a:rPr>
+              <a:t>Litres (L), millilitres (mL), cubic cm (cm³)</a:t>
+            </a:r>
+            <a:endParaRPr lang="en-US" sz="1200" dirty="0"/>
+          </a:p>
+        </p:txBody>
+      </p:sp>
+      <p:sp>
+        <p:nvSpPr>
+          <p:cNvPr id="13" name="Shape 11"/>
+          <p:cNvSpPr/>
+          <p:nvPr/>
+        </p:nvSpPr>
+        <p:spPr>
+          <a:xfrm>
+            <a:off x="4480560" y="1828800"/>
+            <a:ext cx="3749040" cy="594360"/>
+          </a:xfrm>
+          <a:prstGeom prst="rect">
+            <a:avLst/>
+          </a:prstGeom>
+          <a:solidFill>
+            <a:srgbClr val="FFFFFF"/>
+          </a:solidFill>
+          <a:ln/>
+          <a:effectLst>
+            <a:outerShdw sx="100000" sy="100000" kx="0" ky="0" algn="bl" rotWithShape="0" blurRad="50800" dist="25400" dir="8100000">
+              <a:srgbClr val="000000">
+                <a:alpha val="10000"/>
+              </a:srgbClr>
+            </a:outerShdw>
+          </a:effectLst>
+        </p:spPr>
+      </p:sp>
+      <p:sp>
+        <p:nvSpPr>
+          <p:cNvPr id="14" name="Shape 12"/>
+          <p:cNvSpPr/>
+          <p:nvPr/>
+        </p:nvSpPr>
+        <p:spPr>
+          <a:xfrm>
+            <a:off x="4480560" y="1828800"/>
+            <a:ext cx="54864" cy="594360"/>
+          </a:xfrm>
+          <a:prstGeom prst="rect">
+            <a:avLst/>
+          </a:prstGeom>
+          <a:solidFill>
+            <a:srgbClr val="2A9D8F"/>
+          </a:solidFill>
+          <a:ln/>
+        </p:spPr>
+      </p:sp>
+      <p:sp>
+        <p:nvSpPr>
+          <p:cNvPr id="15" name="Text 13"/>
+          <p:cNvSpPr/>
+          <p:nvPr/>
+        </p:nvSpPr>
+        <p:spPr>
+          <a:xfrm>
+            <a:off x="4617720" y="1874520"/>
+            <a:ext cx="3520440" cy="502920"/>
           </a:xfrm>
           <a:prstGeom prst="rect">
             <a:avLst/>
@@ -1750,21 +2071,262 @@
           <a:bodyPr wrap="square" rtlCol="0" anchor="ctr"/>
           <a:lstStyle/>
           <a:p>
-            <a:pPr algn="r" indent="0" marL="0">
+            <a:pPr indent="0" marL="0">
               <a:buNone/>
             </a:pPr>
             <a:r>
+              <a:rPr lang="en-US" sz="1200" b="1" dirty="0">
+                <a:solidFill>
+                  <a:srgbClr val="1B2A4A"/>
+                </a:solidFill>
+              </a:rPr>
+              <a:t>Temperature</a:t>
+            </a:r>
+            <a:endParaRPr lang="en-US" sz="1200" dirty="0"/>
+          </a:p>
+          <a:p>
+            <a:pPr indent="0" marL="0">
+              <a:buNone/>
+            </a:pPr>
+            <a:r>
               <a:rPr lang="en-US" sz="1000" dirty="0">
                 <a:solidFill>
-                  <a:srgbClr val="999999"/>
-                </a:solidFill>
-                <a:latin typeface="Calibri" pitchFamily="34" charset="0"/>
-                <a:ea typeface="Calibri" pitchFamily="34" charset="-122"/>
-                <a:cs typeface="Calibri" pitchFamily="34" charset="-120"/>
-              </a:rPr>
-              <a:t>3 / 6</a:t>
-            </a:r>
-            <a:endParaRPr lang="en-US" sz="1000" dirty="0"/>
+                  <a:srgbClr val="6B6660"/>
+                </a:solidFill>
+              </a:rPr>
+              <a:t>Degrees Celsius (°C)</a:t>
+            </a:r>
+            <a:endParaRPr lang="en-US" sz="1200" dirty="0"/>
+          </a:p>
+        </p:txBody>
+      </p:sp>
+      <p:sp>
+        <p:nvSpPr>
+          <p:cNvPr id="16" name="Shape 14"/>
+          <p:cNvSpPr/>
+          <p:nvPr/>
+        </p:nvSpPr>
+        <p:spPr>
+          <a:xfrm>
+            <a:off x="548640" y="2560320"/>
+            <a:ext cx="3749040" cy="594360"/>
+          </a:xfrm>
+          <a:prstGeom prst="rect">
+            <a:avLst/>
+          </a:prstGeom>
+          <a:solidFill>
+            <a:srgbClr val="FFFFFF"/>
+          </a:solidFill>
+          <a:ln/>
+          <a:effectLst>
+            <a:outerShdw sx="100000" sy="100000" kx="0" ky="0" algn="bl" rotWithShape="0" blurRad="50800" dist="25400" dir="8100000">
+              <a:srgbClr val="000000">
+                <a:alpha val="10000"/>
+              </a:srgbClr>
+            </a:outerShdw>
+          </a:effectLst>
+        </p:spPr>
+      </p:sp>
+      <p:sp>
+        <p:nvSpPr>
+          <p:cNvPr id="17" name="Shape 15"/>
+          <p:cNvSpPr/>
+          <p:nvPr/>
+        </p:nvSpPr>
+        <p:spPr>
+          <a:xfrm>
+            <a:off x="548640" y="2560320"/>
+            <a:ext cx="54864" cy="594360"/>
+          </a:xfrm>
+          <a:prstGeom prst="rect">
+            <a:avLst/>
+          </a:prstGeom>
+          <a:solidFill>
+            <a:srgbClr val="2A9D8F"/>
+          </a:solidFill>
+          <a:ln/>
+        </p:spPr>
+      </p:sp>
+      <p:sp>
+        <p:nvSpPr>
+          <p:cNvPr id="18" name="Text 16"/>
+          <p:cNvSpPr/>
+          <p:nvPr/>
+        </p:nvSpPr>
+        <p:spPr>
+          <a:xfrm>
+            <a:off x="685800" y="2606040"/>
+            <a:ext cx="3520440" cy="502920"/>
+          </a:xfrm>
+          <a:prstGeom prst="rect">
+            <a:avLst/>
+          </a:prstGeom>
+          <a:noFill/>
+          <a:ln/>
+        </p:spPr>
+        <p:txBody>
+          <a:bodyPr wrap="square" rtlCol="0" anchor="ctr"/>
+          <a:lstStyle/>
+          <a:p>
+            <a:pPr indent="0" marL="0">
+              <a:buNone/>
+            </a:pPr>
+            <a:r>
+              <a:rPr lang="en-US" sz="1200" b="1" dirty="0">
+                <a:solidFill>
+                  <a:srgbClr val="1B2A4A"/>
+                </a:solidFill>
+              </a:rPr>
+              <a:t>Time</a:t>
+            </a:r>
+            <a:endParaRPr lang="en-US" sz="1200" dirty="0"/>
+          </a:p>
+          <a:p>
+            <a:pPr indent="0" marL="0">
+              <a:buNone/>
+            </a:pPr>
+            <a:r>
+              <a:rPr lang="en-US" sz="1000" dirty="0">
+                <a:solidFill>
+                  <a:srgbClr val="6B6660"/>
+                </a:solidFill>
+              </a:rPr>
+              <a:t>Seconds (s), minutes (min), hours (h)</a:t>
+            </a:r>
+            <a:endParaRPr lang="en-US" sz="1200" dirty="0"/>
+          </a:p>
+        </p:txBody>
+      </p:sp>
+      <p:sp>
+        <p:nvSpPr>
+          <p:cNvPr id="19" name="Shape 17"/>
+          <p:cNvSpPr/>
+          <p:nvPr/>
+        </p:nvSpPr>
+        <p:spPr>
+          <a:xfrm>
+            <a:off x="4480560" y="2560320"/>
+            <a:ext cx="3749040" cy="594360"/>
+          </a:xfrm>
+          <a:prstGeom prst="rect">
+            <a:avLst/>
+          </a:prstGeom>
+          <a:solidFill>
+            <a:srgbClr val="FFFFFF"/>
+          </a:solidFill>
+          <a:ln/>
+          <a:effectLst>
+            <a:outerShdw sx="100000" sy="100000" kx="0" ky="0" algn="bl" rotWithShape="0" blurRad="50800" dist="25400" dir="8100000">
+              <a:srgbClr val="000000">
+                <a:alpha val="10000"/>
+              </a:srgbClr>
+            </a:outerShdw>
+          </a:effectLst>
+        </p:spPr>
+      </p:sp>
+      <p:sp>
+        <p:nvSpPr>
+          <p:cNvPr id="20" name="Shape 18"/>
+          <p:cNvSpPr/>
+          <p:nvPr/>
+        </p:nvSpPr>
+        <p:spPr>
+          <a:xfrm>
+            <a:off x="4480560" y="2560320"/>
+            <a:ext cx="54864" cy="594360"/>
+          </a:xfrm>
+          <a:prstGeom prst="rect">
+            <a:avLst/>
+          </a:prstGeom>
+          <a:solidFill>
+            <a:srgbClr val="2A9D8F"/>
+          </a:solidFill>
+          <a:ln/>
+        </p:spPr>
+      </p:sp>
+      <p:sp>
+        <p:nvSpPr>
+          <p:cNvPr id="21" name="Text 19"/>
+          <p:cNvSpPr/>
+          <p:nvPr/>
+        </p:nvSpPr>
+        <p:spPr>
+          <a:xfrm>
+            <a:off x="4617720" y="2606040"/>
+            <a:ext cx="3520440" cy="502920"/>
+          </a:xfrm>
+          <a:prstGeom prst="rect">
+            <a:avLst/>
+          </a:prstGeom>
+          <a:noFill/>
+          <a:ln/>
+        </p:spPr>
+        <p:txBody>
+          <a:bodyPr wrap="square" rtlCol="0" anchor="ctr"/>
+          <a:lstStyle/>
+          <a:p>
+            <a:pPr indent="0" marL="0">
+              <a:buNone/>
+            </a:pPr>
+            <a:r>
+              <a:rPr lang="en-US" sz="1200" b="1" dirty="0">
+                <a:solidFill>
+                  <a:srgbClr val="1B2A4A"/>
+                </a:solidFill>
+              </a:rPr>
+              <a:t>Force</a:t>
+            </a:r>
+            <a:endParaRPr lang="en-US" sz="1200" dirty="0"/>
+          </a:p>
+          <a:p>
+            <a:pPr indent="0" marL="0">
+              <a:buNone/>
+            </a:pPr>
+            <a:r>
+              <a:rPr lang="en-US" sz="1000" dirty="0">
+                <a:solidFill>
+                  <a:srgbClr val="6B6660"/>
+                </a:solidFill>
+              </a:rPr>
+              <a:t>Newtons (N)</a:t>
+            </a:r>
+            <a:endParaRPr lang="en-US" sz="1200" dirty="0"/>
+          </a:p>
+        </p:txBody>
+      </p:sp>
+      <p:sp>
+        <p:nvSpPr>
+          <p:cNvPr id="22" name="Text 20"/>
+          <p:cNvSpPr/>
+          <p:nvPr/>
+        </p:nvSpPr>
+        <p:spPr>
+          <a:xfrm>
+            <a:off x="548640" y="4800600"/>
+            <a:ext cx="3657600" cy="274320"/>
+          </a:xfrm>
+          <a:prstGeom prst="rect">
+            <a:avLst/>
+          </a:prstGeom>
+          <a:noFill/>
+          <a:ln/>
+        </p:spPr>
+        <p:txBody>
+          <a:bodyPr wrap="square" rtlCol="0" anchor="ctr"/>
+          <a:lstStyle/>
+          <a:p>
+            <a:pPr indent="0" marL="0">
+              <a:buNone/>
+            </a:pPr>
+            <a:r>
+              <a:rPr lang="en-US" sz="800" dirty="0">
+                <a:solidFill>
+                  <a:srgbClr val="9B9690"/>
+                </a:solidFill>
+              </a:rPr>
+              <a:t>mrzocchi.com</a:t>
+            </a:r>
+            <a:endParaRPr lang="en-US" sz="800" dirty="0"/>
           </a:p>
         </p:txBody>
       </p:sp>
@@ -1779,6 +2341,13 @@
 <file path=ppt/slides/slide4.xml><?xml version="1.0" encoding="utf-8"?>
 <p:sld xmlns:a="http://schemas.openxmlformats.org/drawingml/2006/main" xmlns:r="http://schemas.openxmlformats.org/officeDocument/2006/relationships" xmlns:p="http://schemas.openxmlformats.org/presentationml/2006/main">
   <p:cSld name="Slide 4">
+    <p:bg>
+      <p:bgPr>
+        <a:solidFill>
+          <a:srgbClr val="FFFFFF"/>
+        </a:solidFill>
+      </p:bgPr>
+    </p:bg>
     <p:spTree>
       <p:nvGrpSpPr>
         <p:cNvPr id="1" name=""/>
@@ -1802,13 +2371,13 @@
         <p:spPr>
           <a:xfrm>
             <a:off x="0" y="0"/>
-            <a:ext cx="9144000" cy="548640"/>
-          </a:xfrm>
-          <a:prstGeom prst="rect">
-            <a:avLst/>
-          </a:prstGeom>
-          <a:solidFill>
-            <a:srgbClr val="1A7A6F"/>
+            <a:ext cx="9144000" cy="54864"/>
+          </a:xfrm>
+          <a:prstGeom prst="rect">
+            <a:avLst/>
+          </a:prstGeom>
+          <a:solidFill>
+            <a:srgbClr val="2A9D8F"/>
           </a:solidFill>
           <a:ln/>
         </p:spPr>
@@ -1821,8 +2390,8 @@
         </p:nvSpPr>
         <p:spPr>
           <a:xfrm>
-            <a:off x="457200" y="45720"/>
-            <a:ext cx="8229600" cy="457200"/>
+            <a:off x="548640" y="274320"/>
+            <a:ext cx="8046720" cy="640080"/>
           </a:xfrm>
           <a:prstGeom prst="rect">
             <a:avLst/>
@@ -1831,125 +2400,207 @@
           <a:ln/>
         </p:spPr>
         <p:txBody>
-          <a:bodyPr wrap="square" rtlCol="0" anchor="ctr"/>
+          <a:bodyPr wrap="square" lIns="0" tIns="0" rIns="0" bIns="0" rtlCol="0" anchor="ctr"/>
           <a:lstStyle/>
           <a:p>
             <a:pPr indent="0" marL="0">
               <a:buNone/>
             </a:pPr>
             <a:r>
-              <a:rPr lang="en-US" sz="1800" b="1" dirty="0">
-                <a:solidFill>
-                  <a:srgbClr val="FFFFFF"/>
+              <a:rPr lang="en-US" sz="2600" b="1" dirty="0">
+                <a:solidFill>
+                  <a:srgbClr val="1B2A4A"/>
+                </a:solidFill>
+                <a:latin typeface="Georgia" pitchFamily="34" charset="0"/>
+                <a:ea typeface="Georgia" pitchFamily="34" charset="-122"/>
+                <a:cs typeface="Georgia" pitchFamily="34" charset="-120"/>
+              </a:rPr>
+              <a:t>Making Accurate Measurements</a:t>
+            </a:r>
+            <a:endParaRPr lang="en-US" sz="2600" dirty="0"/>
+          </a:p>
+        </p:txBody>
+      </p:sp>
+      <p:sp>
+        <p:nvSpPr>
+          <p:cNvPr id="4" name="Text 2"/>
+          <p:cNvSpPr/>
+          <p:nvPr/>
+        </p:nvSpPr>
+        <p:spPr>
+          <a:xfrm>
+            <a:off x="548640" y="1097280"/>
+            <a:ext cx="8046720" cy="3474720"/>
+          </a:xfrm>
+          <a:prstGeom prst="rect">
+            <a:avLst/>
+          </a:prstGeom>
+          <a:noFill/>
+          <a:ln/>
+        </p:spPr>
+        <p:txBody>
+          <a:bodyPr wrap="square" rtlCol="0" anchor="t"/>
+          <a:lstStyle/>
+          <a:p>
+            <a:pPr marL="342900" indent="-342900">
+              <a:spcAft>
+                <a:spcPts val="800"/>
+              </a:spcAft>
+              <a:buSzPct val="100000"/>
+              <a:buChar char="•"/>
+            </a:pPr>
+            <a:r>
+              <a:rPr lang="en-US" sz="1500" dirty="0">
+                <a:solidFill>
+                  <a:srgbClr val="3D3A36"/>
                 </a:solidFill>
                 <a:latin typeface="Calibri" pitchFamily="34" charset="0"/>
                 <a:ea typeface="Calibri" pitchFamily="34" charset="-122"/>
                 <a:cs typeface="Calibri" pitchFamily="34" charset="-120"/>
               </a:rPr>
-              <a:t>Measuring length, mass, volume</a:t>
-            </a:r>
-            <a:endParaRPr lang="en-US" sz="1800" dirty="0"/>
-          </a:p>
-        </p:txBody>
-      </p:sp>
-      <p:sp>
-        <p:nvSpPr>
-          <p:cNvPr id="4" name="Text 2"/>
-          <p:cNvSpPr/>
-          <p:nvPr/>
-        </p:nvSpPr>
-        <p:spPr>
-          <a:xfrm>
-            <a:off x="731520" y="1097280"/>
-            <a:ext cx="7680960" cy="3200400"/>
-          </a:xfrm>
-          <a:prstGeom prst="rect">
-            <a:avLst/>
-          </a:prstGeom>
-          <a:noFill/>
-          <a:ln/>
-        </p:spPr>
-        <p:txBody>
-          <a:bodyPr wrap="square" rtlCol="0" anchor="ctr"/>
-          <a:lstStyle/>
-          <a:p>
-            <a:pPr indent="0" marL="0">
-              <a:buNone/>
-            </a:pPr>
-            <a:r>
-              <a:rPr lang="en-US" sz="1600" dirty="0">
-                <a:solidFill>
-                  <a:srgbClr val="363636"/>
+              <a:t>Read scales at eye level to avoid parallax error</a:t>
+            </a:r>
+            <a:endParaRPr lang="en-US" sz="1500" dirty="0"/>
+          </a:p>
+          <a:p>
+            <a:pPr marL="342900" indent="-342900">
+              <a:spcAft>
+                <a:spcPts val="800"/>
+              </a:spcAft>
+              <a:buSzPct val="100000"/>
+              <a:buChar char="•"/>
+            </a:pPr>
+            <a:r>
+              <a:rPr lang="en-US" sz="1500" dirty="0">
+                <a:solidFill>
+                  <a:srgbClr val="3D3A36"/>
                 </a:solidFill>
                 <a:latin typeface="Calibri" pitchFamily="34" charset="0"/>
                 <a:ea typeface="Calibri" pitchFamily="34" charset="-122"/>
                 <a:cs typeface="Calibri" pitchFamily="34" charset="-120"/>
               </a:rPr>
-              <a:t>Content for: Measuring length, mass, volume</a:t>
-            </a:r>
-            <a:endParaRPr lang="en-US" sz="1600" dirty="0"/>
-          </a:p>
-          <a:p>
-            <a:pPr indent="0" marL="0">
-              <a:buNone/>
-            </a:pPr>
-            <a:endParaRPr lang="en-US" sz="1600" dirty="0"/>
-          </a:p>
-          <a:p>
-            <a:pPr indent="0" marL="0">
-              <a:buNone/>
-            </a:pPr>
-            <a:r>
-              <a:rPr lang="en-US" sz="1600" dirty="0">
-                <a:solidFill>
-                  <a:srgbClr val="363636"/>
+              <a:t>Take multiple measurements and calculate the mean (average)</a:t>
+            </a:r>
+            <a:endParaRPr lang="en-US" sz="1500" dirty="0"/>
+          </a:p>
+          <a:p>
+            <a:pPr marL="342900" indent="-342900">
+              <a:spcAft>
+                <a:spcPts val="800"/>
+              </a:spcAft>
+              <a:buSzPct val="100000"/>
+              <a:buChar char="•"/>
+            </a:pPr>
+            <a:r>
+              <a:rPr lang="en-US" sz="1500" dirty="0">
+                <a:solidFill>
+                  <a:srgbClr val="3D3A36"/>
                 </a:solidFill>
                 <a:latin typeface="Calibri" pitchFamily="34" charset="0"/>
                 <a:ea typeface="Calibri" pitchFamily="34" charset="-122"/>
                 <a:cs typeface="Calibri" pitchFamily="34" charset="-120"/>
               </a:rPr>
-              <a:t>Key points will be covered in class.</a:t>
-            </a:r>
-            <a:endParaRPr lang="en-US" sz="1600" dirty="0"/>
-          </a:p>
-        </p:txBody>
-      </p:sp>
-      <p:sp>
-        <p:nvSpPr>
-          <p:cNvPr id="5" name="Text 3"/>
-          <p:cNvSpPr/>
-          <p:nvPr/>
-        </p:nvSpPr>
-        <p:spPr>
-          <a:xfrm>
-            <a:off x="7772400" y="4663440"/>
-            <a:ext cx="1097280" cy="365760"/>
-          </a:xfrm>
-          <a:prstGeom prst="rect">
-            <a:avLst/>
-          </a:prstGeom>
-          <a:noFill/>
-          <a:ln/>
-        </p:spPr>
-        <p:txBody>
-          <a:bodyPr wrap="square" rtlCol="0" anchor="ctr"/>
-          <a:lstStyle/>
-          <a:p>
-            <a:pPr algn="r" indent="0" marL="0">
-              <a:buNone/>
-            </a:pPr>
-            <a:r>
-              <a:rPr lang="en-US" sz="1000" dirty="0">
-                <a:solidFill>
-                  <a:srgbClr val="999999"/>
+              <a:t>Record ALL measurements immediately — don't rely on memory</a:t>
+            </a:r>
+            <a:endParaRPr lang="en-US" sz="1500" dirty="0"/>
+          </a:p>
+          <a:p>
+            <a:pPr marL="342900" indent="-342900">
+              <a:spcAft>
+                <a:spcPts val="800"/>
+              </a:spcAft>
+              <a:buSzPct val="100000"/>
+              <a:buChar char="•"/>
+            </a:pPr>
+            <a:r>
+              <a:rPr lang="en-US" sz="1500" dirty="0">
+                <a:solidFill>
+                  <a:srgbClr val="3D3A36"/>
                 </a:solidFill>
                 <a:latin typeface="Calibri" pitchFamily="34" charset="0"/>
                 <a:ea typeface="Calibri" pitchFamily="34" charset="-122"/>
                 <a:cs typeface="Calibri" pitchFamily="34" charset="-120"/>
               </a:rPr>
-              <a:t>4 / 6</a:t>
-            </a:r>
-            <a:endParaRPr lang="en-US" sz="1000" dirty="0"/>
+              <a:t>Use the smallest division for the most precise reading</a:t>
+            </a:r>
+            <a:endParaRPr lang="en-US" sz="1500" dirty="0"/>
+          </a:p>
+          <a:p>
+            <a:pPr marL="342900" indent="-342900">
+              <a:spcAft>
+                <a:spcPts val="800"/>
+              </a:spcAft>
+              <a:buSzPct val="100000"/>
+              <a:buChar char="•"/>
+            </a:pPr>
+            <a:r>
+              <a:rPr lang="en-US" sz="1500" dirty="0">
+                <a:solidFill>
+                  <a:srgbClr val="3D3A36"/>
+                </a:solidFill>
+                <a:latin typeface="Calibri" pitchFamily="34" charset="0"/>
+                <a:ea typeface="Calibri" pitchFamily="34" charset="-122"/>
+                <a:cs typeface="Calibri" pitchFamily="34" charset="-120"/>
+              </a:rPr>
+              <a:t>Always include the UNIT with every measurement</a:t>
+            </a:r>
+            <a:endParaRPr lang="en-US" sz="1500" dirty="0"/>
+          </a:p>
+        </p:txBody>
+      </p:sp>
+      <p:sp>
+        <p:nvSpPr>
+          <p:cNvPr id="5" name="Shape 3"/>
+          <p:cNvSpPr/>
+          <p:nvPr/>
+        </p:nvSpPr>
+        <p:spPr>
+          <a:xfrm>
+            <a:off x="548640" y="4754880"/>
+            <a:ext cx="8046720" cy="9144"/>
+          </a:xfrm>
+          <a:prstGeom prst="rect">
+            <a:avLst/>
+          </a:prstGeom>
+          <a:solidFill>
+            <a:srgbClr val="F3F1EE"/>
+          </a:solidFill>
+          <a:ln/>
+        </p:spPr>
+      </p:sp>
+      <p:sp>
+        <p:nvSpPr>
+          <p:cNvPr id="6" name="Text 4"/>
+          <p:cNvSpPr/>
+          <p:nvPr/>
+        </p:nvSpPr>
+        <p:spPr>
+          <a:xfrm>
+            <a:off x="548640" y="4800600"/>
+            <a:ext cx="3657600" cy="274320"/>
+          </a:xfrm>
+          <a:prstGeom prst="rect">
+            <a:avLst/>
+          </a:prstGeom>
+          <a:noFill/>
+          <a:ln/>
+        </p:spPr>
+        <p:txBody>
+          <a:bodyPr wrap="square" rtlCol="0" anchor="ctr"/>
+          <a:lstStyle/>
+          <a:p>
+            <a:pPr indent="0" marL="0">
+              <a:buNone/>
+            </a:pPr>
+            <a:r>
+              <a:rPr lang="en-US" sz="800" dirty="0">
+                <a:solidFill>
+                  <a:srgbClr val="9B9690"/>
+                </a:solidFill>
+              </a:rPr>
+              <a:t>mrzocchi.com</a:t>
+            </a:r>
+            <a:endParaRPr lang="en-US" sz="800" dirty="0"/>
           </a:p>
         </p:txBody>
       </p:sp>
@@ -1964,6 +2615,13 @@
 <file path=ppt/slides/slide5.xml><?xml version="1.0" encoding="utf-8"?>
 <p:sld xmlns:a="http://schemas.openxmlformats.org/drawingml/2006/main" xmlns:r="http://schemas.openxmlformats.org/officeDocument/2006/relationships" xmlns:p="http://schemas.openxmlformats.org/presentationml/2006/main">
   <p:cSld name="Slide 5">
+    <p:bg>
+      <p:bgPr>
+        <a:solidFill>
+          <a:srgbClr val="1B2A4A"/>
+        </a:solidFill>
+      </p:bgPr>
+    </p:bg>
     <p:spTree>
       <p:nvGrpSpPr>
         <p:cNvPr id="1" name=""/>
@@ -1987,13 +2645,13 @@
         <p:spPr>
           <a:xfrm>
             <a:off x="0" y="0"/>
-            <a:ext cx="9144000" cy="548640"/>
-          </a:xfrm>
-          <a:prstGeom prst="rect">
-            <a:avLst/>
-          </a:prstGeom>
-          <a:solidFill>
-            <a:srgbClr val="1A7A6F"/>
+            <a:ext cx="9144000" cy="54864"/>
+          </a:xfrm>
+          <a:prstGeom prst="rect">
+            <a:avLst/>
+          </a:prstGeom>
+          <a:solidFill>
+            <a:srgbClr val="2A9D8F"/>
           </a:solidFill>
           <a:ln/>
         </p:spPr>
@@ -2006,8 +2664,8 @@
         </p:nvSpPr>
         <p:spPr>
           <a:xfrm>
-            <a:off x="457200" y="45720"/>
-            <a:ext cx="8229600" cy="457200"/>
+            <a:off x="548640" y="457200"/>
+            <a:ext cx="8046720" cy="640080"/>
           </a:xfrm>
           <a:prstGeom prst="rect">
             <a:avLst/>
@@ -2023,176 +2681,136 @@
               <a:buNone/>
             </a:pPr>
             <a:r>
-              <a:rPr lang="en-US" sz="1800" b="1" dirty="0">
+              <a:rPr lang="en-US" sz="2800" b="1" dirty="0">
                 <a:solidFill>
                   <a:srgbClr val="FFFFFF"/>
+                </a:solidFill>
+                <a:latin typeface="Georgia" pitchFamily="34" charset="0"/>
+                <a:ea typeface="Georgia" pitchFamily="34" charset="-122"/>
+                <a:cs typeface="Georgia" pitchFamily="34" charset="-120"/>
+              </a:rPr>
+              <a:t>Key Takeaways</a:t>
+            </a:r>
+            <a:endParaRPr lang="en-US" sz="2800" dirty="0"/>
+          </a:p>
+        </p:txBody>
+      </p:sp>
+      <p:sp>
+        <p:nvSpPr>
+          <p:cNvPr id="4" name="Text 2"/>
+          <p:cNvSpPr/>
+          <p:nvPr/>
+        </p:nvSpPr>
+        <p:spPr>
+          <a:xfrm>
+            <a:off x="731520" y="1371600"/>
+            <a:ext cx="7680960" cy="3200400"/>
+          </a:xfrm>
+          <a:prstGeom prst="rect">
+            <a:avLst/>
+          </a:prstGeom>
+          <a:noFill/>
+          <a:ln/>
+        </p:spPr>
+        <p:txBody>
+          <a:bodyPr wrap="square" rtlCol="0" anchor="t"/>
+          <a:lstStyle/>
+          <a:p>
+            <a:pPr marL="342900" indent="-342900">
+              <a:spcAft>
+                <a:spcPts val="1000"/>
+              </a:spcAft>
+              <a:buSzPct val="100000"/>
+              <a:buChar char="•"/>
+            </a:pPr>
+            <a:r>
+              <a:rPr lang="en-US" sz="1600" dirty="0">
+                <a:solidFill>
+                  <a:srgbClr val="CADCFC"/>
                 </a:solidFill>
                 <a:latin typeface="Calibri" pitchFamily="34" charset="0"/>
                 <a:ea typeface="Calibri" pitchFamily="34" charset="-122"/>
                 <a:cs typeface="Calibri" pitchFamily="34" charset="-120"/>
               </a:rPr>
-              <a:t>Reading scales accurately</a:t>
-            </a:r>
-            <a:endParaRPr lang="en-US" sz="1800" dirty="0"/>
-          </a:p>
-        </p:txBody>
-      </p:sp>
-      <p:sp>
-        <p:nvSpPr>
-          <p:cNvPr id="4" name="Text 2"/>
-          <p:cNvSpPr/>
-          <p:nvPr/>
-        </p:nvSpPr>
-        <p:spPr>
-          <a:xfrm>
-            <a:off x="731520" y="1097280"/>
-            <a:ext cx="7680960" cy="3200400"/>
-          </a:xfrm>
-          <a:prstGeom prst="rect">
-            <a:avLst/>
-          </a:prstGeom>
-          <a:noFill/>
-          <a:ln/>
-        </p:spPr>
-        <p:txBody>
-          <a:bodyPr wrap="square" rtlCol="0" anchor="ctr"/>
-          <a:lstStyle/>
-          <a:p>
-            <a:pPr indent="0" marL="0">
-              <a:buNone/>
+              <a:t>Always use SI units in science</a:t>
+            </a:r>
+            <a:endParaRPr lang="en-US" sz="1600" dirty="0"/>
+          </a:p>
+          <a:p>
+            <a:pPr marL="342900" indent="-342900">
+              <a:spcAft>
+                <a:spcPts val="1000"/>
+              </a:spcAft>
+              <a:buSzPct val="100000"/>
+              <a:buChar char="•"/>
             </a:pPr>
             <a:r>
               <a:rPr lang="en-US" sz="1600" dirty="0">
                 <a:solidFill>
-                  <a:srgbClr val="363636"/>
+                  <a:srgbClr val="CADCFC"/>
                 </a:solidFill>
                 <a:latin typeface="Calibri" pitchFamily="34" charset="0"/>
                 <a:ea typeface="Calibri" pitchFamily="34" charset="-122"/>
                 <a:cs typeface="Calibri" pitchFamily="34" charset="-120"/>
               </a:rPr>
-              <a:t>Content for: Reading scales accurately</a:t>
+              <a:t>Take multiple readings and calculate the mean</a:t>
             </a:r>
             <a:endParaRPr lang="en-US" sz="1600" dirty="0"/>
           </a:p>
           <a:p>
-            <a:pPr indent="0" marL="0">
-              <a:buNone/>
-            </a:pPr>
-            <a:endParaRPr lang="en-US" sz="1600" dirty="0"/>
-          </a:p>
-          <a:p>
-            <a:pPr indent="0" marL="0">
-              <a:buNone/>
+            <a:pPr marL="342900" indent="-342900">
+              <a:spcAft>
+                <a:spcPts val="1000"/>
+              </a:spcAft>
+              <a:buSzPct val="100000"/>
+              <a:buChar char="•"/>
             </a:pPr>
             <a:r>
               <a:rPr lang="en-US" sz="1600" dirty="0">
                 <a:solidFill>
-                  <a:srgbClr val="363636"/>
+                  <a:srgbClr val="CADCFC"/>
                 </a:solidFill>
                 <a:latin typeface="Calibri" pitchFamily="34" charset="0"/>
                 <a:ea typeface="Calibri" pitchFamily="34" charset="-122"/>
                 <a:cs typeface="Calibri" pitchFamily="34" charset="-120"/>
               </a:rPr>
-              <a:t>Key points will be covered in class.</a:t>
+              <a:t>Read scales at eye level</a:t>
             </a:r>
             <a:endParaRPr lang="en-US" sz="1600" dirty="0"/>
           </a:p>
-        </p:txBody>
-      </p:sp>
-      <p:sp>
-        <p:nvSpPr>
-          <p:cNvPr id="5" name="Text 3"/>
-          <p:cNvSpPr/>
-          <p:nvPr/>
-        </p:nvSpPr>
-        <p:spPr>
-          <a:xfrm>
-            <a:off x="7772400" y="4663440"/>
-            <a:ext cx="1097280" cy="365760"/>
-          </a:xfrm>
-          <a:prstGeom prst="rect">
-            <a:avLst/>
-          </a:prstGeom>
-          <a:noFill/>
-          <a:ln/>
-        </p:spPr>
-        <p:txBody>
-          <a:bodyPr wrap="square" rtlCol="0" anchor="ctr"/>
-          <a:lstStyle/>
-          <a:p>
-            <a:pPr algn="r" indent="0" marL="0">
-              <a:buNone/>
-            </a:pPr>
-            <a:r>
-              <a:rPr lang="en-US" sz="1000" dirty="0">
-                <a:solidFill>
-                  <a:srgbClr val="999999"/>
+          <a:p>
+            <a:pPr marL="342900" indent="-342900">
+              <a:spcAft>
+                <a:spcPts val="1000"/>
+              </a:spcAft>
+              <a:buSzPct val="100000"/>
+              <a:buChar char="•"/>
+            </a:pPr>
+            <a:r>
+              <a:rPr lang="en-US" sz="1600" dirty="0">
+                <a:solidFill>
+                  <a:srgbClr val="CADCFC"/>
                 </a:solidFill>
                 <a:latin typeface="Calibri" pitchFamily="34" charset="0"/>
                 <a:ea typeface="Calibri" pitchFamily="34" charset="-122"/>
                 <a:cs typeface="Calibri" pitchFamily="34" charset="-120"/>
               </a:rPr>
-              <a:t>5 / 6</a:t>
-            </a:r>
-            <a:endParaRPr lang="en-US" sz="1000" dirty="0"/>
-          </a:p>
-        </p:txBody>
-      </p:sp>
-    </p:spTree>
-  </p:cSld>
-  <p:clrMapOvr>
-    <a:masterClrMapping/>
-  </p:clrMapOvr>
-</p:sld>
-</file>
-
-<file path=ppt/slides/slide6.xml><?xml version="1.0" encoding="utf-8"?>
-<p:sld xmlns:a="http://schemas.openxmlformats.org/drawingml/2006/main" xmlns:r="http://schemas.openxmlformats.org/officeDocument/2006/relationships" xmlns:p="http://schemas.openxmlformats.org/presentationml/2006/main">
-  <p:cSld name="Slide 6">
-    <p:spTree>
-      <p:nvGrpSpPr>
-        <p:cNvPr id="1" name=""/>
-        <p:cNvGrpSpPr/>
-        <p:nvPr/>
-      </p:nvGrpSpPr>
-      <p:grpSpPr>
-        <a:xfrm>
-          <a:off x="0" y="0"/>
-          <a:ext cx="0" cy="0"/>
-          <a:chOff x="0" y="0"/>
-          <a:chExt cx="0" cy="0"/>
-        </a:xfrm>
-      </p:grpSpPr>
-      <p:sp>
-        <p:nvSpPr>
-          <p:cNvPr id="2" name="Shape 0"/>
-          <p:cNvSpPr/>
-          <p:nvPr/>
-        </p:nvSpPr>
-        <p:spPr>
-          <a:xfrm>
-            <a:off x="0" y="0"/>
-            <a:ext cx="9144000" cy="548640"/>
-          </a:xfrm>
-          <a:prstGeom prst="rect">
-            <a:avLst/>
-          </a:prstGeom>
-          <a:solidFill>
-            <a:srgbClr val="1A7A6F"/>
-          </a:solidFill>
-          <a:ln/>
-        </p:spPr>
-      </p:sp>
-      <p:sp>
-        <p:nvSpPr>
-          <p:cNvPr id="3" name="Text 1"/>
-          <p:cNvSpPr/>
-          <p:nvPr/>
-        </p:nvSpPr>
-        <p:spPr>
-          <a:xfrm>
-            <a:off x="457200" y="45720"/>
-            <a:ext cx="8229600" cy="457200"/>
+              <a:t>Record measurements with the correct unit immediately</a:t>
+            </a:r>
+            <a:endParaRPr lang="en-US" sz="1600" dirty="0"/>
+          </a:p>
+        </p:txBody>
+      </p:sp>
+      <p:sp>
+        <p:nvSpPr>
+          <p:cNvPr id="5" name="Text 3"/>
+          <p:cNvSpPr/>
+          <p:nvPr/>
+        </p:nvSpPr>
+        <p:spPr>
+          <a:xfrm>
+            <a:off x="548640" y="4572000"/>
+            <a:ext cx="3657600" cy="274320"/>
           </a:xfrm>
           <a:prstGeom prst="rect">
             <a:avLst/>
@@ -2208,116 +2826,12 @@
               <a:buNone/>
             </a:pPr>
             <a:r>
-              <a:rPr lang="en-US" sz="1800" b="1" dirty="0">
-                <a:solidFill>
-                  <a:srgbClr val="FFFFFF"/>
-                </a:solidFill>
-                <a:latin typeface="Calibri" pitchFamily="34" charset="0"/>
-                <a:ea typeface="Calibri" pitchFamily="34" charset="-122"/>
-                <a:cs typeface="Calibri" pitchFamily="34" charset="-120"/>
-              </a:rPr>
-              <a:t>Significant figures intro</a:t>
-            </a:r>
-            <a:endParaRPr lang="en-US" sz="1800" dirty="0"/>
-          </a:p>
-        </p:txBody>
-      </p:sp>
-      <p:sp>
-        <p:nvSpPr>
-          <p:cNvPr id="4" name="Text 2"/>
-          <p:cNvSpPr/>
-          <p:nvPr/>
-        </p:nvSpPr>
-        <p:spPr>
-          <a:xfrm>
-            <a:off x="731520" y="1097280"/>
-            <a:ext cx="7680960" cy="3200400"/>
-          </a:xfrm>
-          <a:prstGeom prst="rect">
-            <a:avLst/>
-          </a:prstGeom>
-          <a:noFill/>
-          <a:ln/>
-        </p:spPr>
-        <p:txBody>
-          <a:bodyPr wrap="square" rtlCol="0" anchor="ctr"/>
-          <a:lstStyle/>
-          <a:p>
-            <a:pPr indent="0" marL="0">
-              <a:buNone/>
-            </a:pPr>
-            <a:r>
-              <a:rPr lang="en-US" sz="1600" dirty="0">
-                <a:solidFill>
-                  <a:srgbClr val="363636"/>
-                </a:solidFill>
-                <a:latin typeface="Calibri" pitchFamily="34" charset="0"/>
-                <a:ea typeface="Calibri" pitchFamily="34" charset="-122"/>
-                <a:cs typeface="Calibri" pitchFamily="34" charset="-120"/>
-              </a:rPr>
-              <a:t>Content for: Significant figures intro</a:t>
-            </a:r>
-            <a:endParaRPr lang="en-US" sz="1600" dirty="0"/>
-          </a:p>
-          <a:p>
-            <a:pPr indent="0" marL="0">
-              <a:buNone/>
-            </a:pPr>
-            <a:endParaRPr lang="en-US" sz="1600" dirty="0"/>
-          </a:p>
-          <a:p>
-            <a:pPr indent="0" marL="0">
-              <a:buNone/>
-            </a:pPr>
-            <a:r>
-              <a:rPr lang="en-US" sz="1600" dirty="0">
-                <a:solidFill>
-                  <a:srgbClr val="363636"/>
-                </a:solidFill>
-                <a:latin typeface="Calibri" pitchFamily="34" charset="0"/>
-                <a:ea typeface="Calibri" pitchFamily="34" charset="-122"/>
-                <a:cs typeface="Calibri" pitchFamily="34" charset="-120"/>
-              </a:rPr>
-              <a:t>Key points will be covered in class.</a:t>
-            </a:r>
-            <a:endParaRPr lang="en-US" sz="1600" dirty="0"/>
-          </a:p>
-        </p:txBody>
-      </p:sp>
-      <p:sp>
-        <p:nvSpPr>
-          <p:cNvPr id="5" name="Text 3"/>
-          <p:cNvSpPr/>
-          <p:nvPr/>
-        </p:nvSpPr>
-        <p:spPr>
-          <a:xfrm>
-            <a:off x="7772400" y="4663440"/>
-            <a:ext cx="1097280" cy="365760"/>
-          </a:xfrm>
-          <a:prstGeom prst="rect">
-            <a:avLst/>
-          </a:prstGeom>
-          <a:noFill/>
-          <a:ln/>
-        </p:spPr>
-        <p:txBody>
-          <a:bodyPr wrap="square" rtlCol="0" anchor="ctr"/>
-          <a:lstStyle/>
-          <a:p>
-            <a:pPr algn="r" indent="0" marL="0">
-              <a:buNone/>
-            </a:pPr>
-            <a:r>
               <a:rPr lang="en-US" sz="1000" dirty="0">
                 <a:solidFill>
-                  <a:srgbClr val="999999"/>
-                </a:solidFill>
-                <a:latin typeface="Calibri" pitchFamily="34" charset="0"/>
-                <a:ea typeface="Calibri" pitchFamily="34" charset="-122"/>
-                <a:cs typeface="Calibri" pitchFamily="34" charset="-120"/>
-              </a:rPr>
-              <a:t>6 / 6</a:t>
+                  <a:srgbClr val="6B6660"/>
+                </a:solidFill>
+              </a:rPr>
+              <a:t>mrzocchi.com</a:t>
             </a:r>
             <a:endParaRPr lang="en-US" sz="1000" dirty="0"/>
           </a:p>

--- a/static/ppts/G6_Sci_T1_Measurement.pptx
+++ b/static/ppts/G6_Sci_T1_Measurement.pptx
@@ -10,9 +10,10 @@
     <p:sldId id="258" r:id="rId4"/>
     <p:sldId id="259" r:id="rId5"/>
     <p:sldId id="260" r:id="rId6"/>
+    <p:sldId id="261" r:id="rId7"/>
   </p:sldIdLst>
   <p:notesMasterIdLst>
-    <p:notesMasterId r:id="rId7"/>
+    <p:notesMasterId r:id="rId8"/>
   </p:notesMasterIdLst>
   <p:sldSz cx="9144000" cy="5143500"/>
   <p:notesSz cx="5143500" cy="9144000"/>
@@ -900,6 +901,94 @@
 </p:notes>
 </file>
 
+<file path=ppt/notesSlides/notesSlide6.xml><?xml version="1.0" encoding="utf-8"?>
+<p:notes xmlns:a="http://schemas.openxmlformats.org/drawingml/2006/main" xmlns:r="http://schemas.openxmlformats.org/officeDocument/2006/relationships" xmlns:p="http://schemas.openxmlformats.org/presentationml/2006/main">
+  <p:cSld>
+    <p:spTree>
+      <p:nvGrpSpPr>
+        <p:cNvPr id="1" name=""/>
+        <p:cNvGrpSpPr/>
+        <p:nvPr/>
+      </p:nvGrpSpPr>
+      <p:grpSpPr>
+        <a:xfrm>
+          <a:off x="0" y="0"/>
+          <a:ext cx="0" cy="0"/>
+          <a:chOff x="0" y="0"/>
+          <a:chExt cx="0" cy="0"/>
+        </a:xfrm>
+      </p:grpSpPr>
+      <p:sp>
+        <p:nvSpPr>
+          <p:cNvPr id="2" name="Slide Image Placeholder 1"/>
+          <p:cNvSpPr>
+            <a:spLocks noGrp="1" noRot="1" noChangeAspect="1"/>
+          </p:cNvSpPr>
+          <p:nvPr>
+            <p:ph type="sldImg"/>
+          </p:nvPr>
+        </p:nvSpPr>
+        <p:spPr/>
+      </p:sp>
+      <p:sp>
+        <p:nvSpPr>
+          <p:cNvPr id="3" name="Notes Placeholder 2"/>
+          <p:cNvSpPr>
+            <a:spLocks noGrp="1"/>
+          </p:cNvSpPr>
+          <p:nvPr>
+            <p:ph type="body" idx="1"/>
+          </p:nvPr>
+        </p:nvSpPr>
+        <p:spPr/>
+        <p:txBody>
+          <a:bodyPr/>
+          <a:lstStyle/>
+          <a:p>
+            <a:r>
+              <a:rPr lang="en-US" dirty="0"/>
+              <a:t/>
+            </a:r>
+            <a:endParaRPr lang="en-US" dirty="0"/>
+          </a:p>
+        </p:txBody>
+      </p:sp>
+      <p:sp>
+        <p:nvSpPr>
+          <p:cNvPr id="4" name="Slide Number Placeholder 3"/>
+          <p:cNvSpPr>
+            <a:spLocks noGrp="1"/>
+          </p:cNvSpPr>
+          <p:nvPr>
+            <p:ph type="sldNum" sz="quarter" idx="10"/>
+          </p:nvPr>
+        </p:nvSpPr>
+        <p:spPr/>
+        <p:txBody>
+          <a:bodyPr/>
+          <a:lstStyle/>
+          <a:p>
+            <a:fld id="{F7021451-1387-4CA6-816F-3879F97B5CBC}" type="slidenum">
+              <a:rPr lang="en-US"/>
+              <a:t>6</a:t>
+            </a:fld>
+            <a:endParaRPr lang="en-US"/>
+          </a:p>
+        </p:txBody>
+      </p:sp>
+    </p:spTree>
+    <p:extLst>
+      <p:ext uri="{BB962C8B-B14F-4D97-AF65-F5344CB8AC3E}">
+        <p14:creationId xmlns:p14="http://schemas.microsoft.com/office/powerpoint/2010/main" val="1024086991"/>
+      </p:ext>
+    </p:extLst>
+  </p:cSld>
+  <p:clrMapOvr>
+    <a:masterClrMapping/>
+  </p:clrMapOvr>
+</p:notes>
+</file>
+
 <file path=ppt/slideLayouts/slideLayout1.xml><?xml version="1.0" encoding="utf-8"?>
 <p:sldLayout xmlns:a="http://schemas.openxmlformats.org/drawingml/2006/main" xmlns:r="http://schemas.openxmlformats.org/officeDocument/2006/relationships" xmlns:p="http://schemas.openxmlformats.org/presentationml/2006/main" preserve="1">
   <p:cSld name="DEFAULT">
@@ -1259,7 +1348,7 @@
         </p:nvSpPr>
         <p:spPr>
           <a:xfrm>
-            <a:off x="731520" y="1280160"/>
+            <a:off x="731520" y="1097280"/>
             <a:ext cx="7772400" cy="1371600"/>
           </a:xfrm>
           <a:prstGeom prst="rect">
@@ -1276,7 +1365,7 @@
               <a:buNone/>
             </a:pPr>
             <a:r>
-              <a:rPr lang="en-US" sz="3600" b="1" dirty="0">
+              <a:rPr lang="en-US" sz="4000" b="1" dirty="0">
                 <a:solidFill>
                   <a:srgbClr val="FFFFFF"/>
                 </a:solidFill>
@@ -1286,7 +1375,7 @@
               </a:rPr>
               <a:t>Measurement &amp; Units</a:t>
             </a:r>
-            <a:endParaRPr lang="en-US" sz="3600" dirty="0"/>
+            <a:endParaRPr lang="en-US" sz="4000" dirty="0"/>
           </a:p>
         </p:txBody>
       </p:sp>
@@ -1298,7 +1387,7 @@
         </p:nvSpPr>
         <p:spPr>
           <a:xfrm>
-            <a:off x="731520" y="2743200"/>
+            <a:off x="731520" y="2560320"/>
             <a:ext cx="7772400" cy="548640"/>
           </a:xfrm>
           <a:prstGeom prst="rect">
@@ -1317,13 +1406,13 @@
             <a:r>
               <a:rPr lang="en-US" sz="1600" dirty="0">
                 <a:solidFill>
-                  <a:srgbClr val="9B9690"/>
-                </a:solidFill>
-                <a:latin typeface="Calibri" pitchFamily="34" charset="0"/>
-                <a:ea typeface="Calibri" pitchFamily="34" charset="-122"/>
-                <a:cs typeface="Calibri" pitchFamily="34" charset="-120"/>
-              </a:rPr>
-              <a:t>G6 Science · Scientific Skills</a:t>
+                  <a:srgbClr val="E9C46A"/>
+                </a:solidFill>
+                <a:latin typeface="Calibri" pitchFamily="34" charset="0"/>
+                <a:ea typeface="Calibri" pitchFamily="34" charset="-122"/>
+                <a:cs typeface="Calibri" pitchFamily="34" charset="-120"/>
+              </a:rPr>
+              <a:t>Grade 6 Science · Mr Zocchi</a:t>
             </a:r>
             <a:endParaRPr lang="en-US" sz="1600" dirty="0"/>
           </a:p>
@@ -1331,14 +1420,36 @@
       </p:sp>
       <p:sp>
         <p:nvSpPr>
-          <p:cNvPr id="5" name="Text 3"/>
-          <p:cNvSpPr/>
-          <p:nvPr/>
-        </p:nvSpPr>
-        <p:spPr>
-          <a:xfrm>
-            <a:off x="731520" y="4389120"/>
-            <a:ext cx="7772400" cy="457200"/>
+          <p:cNvPr id="5" name="Shape 3"/>
+          <p:cNvSpPr/>
+          <p:nvPr/>
+        </p:nvSpPr>
+        <p:spPr>
+          <a:xfrm>
+            <a:off x="731520" y="3474720"/>
+            <a:ext cx="2011680" cy="411480"/>
+          </a:xfrm>
+          <a:prstGeom prst="roundRect">
+            <a:avLst>
+              <a:gd name="adj" fmla="val 17778"/>
+            </a:avLst>
+          </a:prstGeom>
+          <a:solidFill>
+            <a:srgbClr val="2A9D8F"/>
+          </a:solidFill>
+          <a:ln/>
+        </p:spPr>
+      </p:sp>
+      <p:sp>
+        <p:nvSpPr>
+          <p:cNvPr id="6" name="Text 4"/>
+          <p:cNvSpPr/>
+          <p:nvPr/>
+        </p:nvSpPr>
+        <p:spPr>
+          <a:xfrm>
+            <a:off x="731520" y="3474720"/>
+            <a:ext cx="2011680" cy="411480"/>
           </a:xfrm>
           <a:prstGeom prst="rect">
             <a:avLst/>
@@ -1350,21 +1461,21 @@
           <a:bodyPr wrap="square" rtlCol="0" anchor="ctr"/>
           <a:lstStyle/>
           <a:p>
-            <a:pPr indent="0" marL="0">
+            <a:pPr algn="ctr" indent="0" marL="0">
               <a:buNone/>
             </a:pPr>
             <a:r>
-              <a:rPr lang="en-US" sz="1000" dirty="0">
-                <a:solidFill>
-                  <a:srgbClr val="6B6660"/>
-                </a:solidFill>
-                <a:latin typeface="Calibri" pitchFamily="34" charset="0"/>
-                <a:ea typeface="Calibri" pitchFamily="34" charset="-122"/>
-                <a:cs typeface="Calibri" pitchFamily="34" charset="-120"/>
-              </a:rPr>
-              <a:t>Mr Zocchi · mrzocchi.com</a:t>
-            </a:r>
-            <a:endParaRPr lang="en-US" sz="1000" dirty="0"/>
+              <a:rPr lang="en-US" sz="1200" b="1" dirty="0">
+                <a:solidFill>
+                  <a:srgbClr val="FFFFFF"/>
+                </a:solidFill>
+                <a:latin typeface="Calibri" pitchFamily="34" charset="0"/>
+                <a:ea typeface="Calibri" pitchFamily="34" charset="-122"/>
+                <a:cs typeface="Calibri" pitchFamily="34" charset="-120"/>
+              </a:rPr>
+              <a:t>Term 1 · Scientific Skills</a:t>
+            </a:r>
+            <a:endParaRPr lang="en-US" sz="1200" dirty="0"/>
           </a:p>
         </p:txBody>
       </p:sp>
@@ -1382,7 +1493,7 @@
     <p:bg>
       <p:bgPr>
         <a:solidFill>
-          <a:srgbClr val="FFFFFF"/>
+          <a:srgbClr val="FAF8F5"/>
         </a:solidFill>
       </p:bgPr>
     </p:bg>
@@ -1428,8 +1539,8 @@
         </p:nvSpPr>
         <p:spPr>
           <a:xfrm>
-            <a:off x="548640" y="274320"/>
-            <a:ext cx="8046720" cy="640080"/>
+            <a:off x="7772400" y="4709160"/>
+            <a:ext cx="1097280" cy="320040"/>
           </a:xfrm>
           <a:prstGeom prst="rect">
             <a:avLst/>
@@ -1438,14 +1549,105 @@
           <a:ln/>
         </p:spPr>
         <p:txBody>
-          <a:bodyPr wrap="square" lIns="0" tIns="0" rIns="0" bIns="0" rtlCol="0" anchor="ctr"/>
+          <a:bodyPr wrap="square" rtlCol="0" anchor="ctr"/>
+          <a:lstStyle/>
+          <a:p>
+            <a:pPr algn="r" indent="0" marL="0">
+              <a:buNone/>
+            </a:pPr>
+            <a:r>
+              <a:rPr lang="en-US" sz="900" dirty="0">
+                <a:solidFill>
+                  <a:srgbClr val="6B6660"/>
+                </a:solidFill>
+                <a:latin typeface="Calibri" pitchFamily="34" charset="0"/>
+                <a:ea typeface="Calibri" pitchFamily="34" charset="-122"/>
+                <a:cs typeface="Calibri" pitchFamily="34" charset="-120"/>
+              </a:rPr>
+              <a:t>2 / 6</a:t>
+            </a:r>
+            <a:endParaRPr lang="en-US" sz="900" dirty="0"/>
+          </a:p>
+        </p:txBody>
+      </p:sp>
+      <p:sp>
+        <p:nvSpPr>
+          <p:cNvPr id="4" name="Shape 2"/>
+          <p:cNvSpPr/>
+          <p:nvPr/>
+        </p:nvSpPr>
+        <p:spPr>
+          <a:xfrm>
+            <a:off x="1371600" y="914400"/>
+            <a:ext cx="6400800" cy="3200400"/>
+          </a:xfrm>
+          <a:prstGeom prst="rect">
+            <a:avLst/>
+          </a:prstGeom>
+          <a:solidFill>
+            <a:srgbClr val="FFFFFF"/>
+          </a:solidFill>
+          <a:ln w="12700">
+            <a:solidFill>
+              <a:srgbClr val="E5E2DC"/>
+            </a:solidFill>
+            <a:prstDash val="solid"/>
+          </a:ln>
+          <a:effectLst>
+            <a:outerShdw sx="100000" sy="100000" kx="0" ky="0" algn="bl" rotWithShape="0" blurRad="50800" dist="25400" dir="8100000">
+              <a:srgbClr val="000000">
+                <a:alpha val="10000"/>
+              </a:srgbClr>
+            </a:outerShdw>
+          </a:effectLst>
+        </p:spPr>
+      </p:sp>
+      <p:sp>
+        <p:nvSpPr>
+          <p:cNvPr id="5" name="Shape 3"/>
+          <p:cNvSpPr/>
+          <p:nvPr/>
+        </p:nvSpPr>
+        <p:spPr>
+          <a:xfrm>
+            <a:off x="1371600" y="914400"/>
+            <a:ext cx="91440" cy="3200400"/>
+          </a:xfrm>
+          <a:prstGeom prst="rect">
+            <a:avLst/>
+          </a:prstGeom>
+          <a:solidFill>
+            <a:srgbClr val="2A9D8F"/>
+          </a:solidFill>
+          <a:ln/>
+        </p:spPr>
+      </p:sp>
+      <p:sp>
+        <p:nvSpPr>
+          <p:cNvPr id="6" name="Text 4"/>
+          <p:cNvSpPr/>
+          <p:nvPr/>
+        </p:nvSpPr>
+        <p:spPr>
+          <a:xfrm>
+            <a:off x="1828800" y="1097280"/>
+            <a:ext cx="5669280" cy="640080"/>
+          </a:xfrm>
+          <a:prstGeom prst="rect">
+            <a:avLst/>
+          </a:prstGeom>
+          <a:noFill/>
+          <a:ln/>
+        </p:spPr>
+        <p:txBody>
+          <a:bodyPr wrap="square" rtlCol="0" anchor="ctr"/>
           <a:lstStyle/>
           <a:p>
             <a:pPr indent="0" marL="0">
               <a:buNone/>
             </a:pPr>
             <a:r>
-              <a:rPr lang="en-US" sz="2600" b="1" dirty="0">
+              <a:rPr lang="en-US" sz="2400" b="1" dirty="0">
                 <a:solidFill>
                   <a:srgbClr val="1B2A4A"/>
                 </a:solidFill>
@@ -1455,20 +1657,20 @@
               </a:rPr>
               <a:t>Why Measurement Matters</a:t>
             </a:r>
-            <a:endParaRPr lang="en-US" sz="2600" dirty="0"/>
-          </a:p>
-        </p:txBody>
-      </p:sp>
-      <p:sp>
-        <p:nvSpPr>
-          <p:cNvPr id="4" name="Text 2"/>
-          <p:cNvSpPr/>
-          <p:nvPr/>
-        </p:nvSpPr>
-        <p:spPr>
-          <a:xfrm>
-            <a:off x="548640" y="1097280"/>
-            <a:ext cx="8046720" cy="3474720"/>
+            <a:endParaRPr lang="en-US" sz="2400" dirty="0"/>
+          </a:p>
+        </p:txBody>
+      </p:sp>
+      <p:sp>
+        <p:nvSpPr>
+          <p:cNvPr id="7" name="Text 5"/>
+          <p:cNvSpPr/>
+          <p:nvPr/>
+        </p:nvSpPr>
+        <p:spPr>
+          <a:xfrm>
+            <a:off x="1828800" y="1828800"/>
+            <a:ext cx="5669280" cy="2011680"/>
           </a:xfrm>
           <a:prstGeom prst="rect">
             <a:avLst/>
@@ -1480,12 +1682,11 @@
           <a:bodyPr wrap="square" rtlCol="0" anchor="t"/>
           <a:lstStyle/>
           <a:p>
-            <a:pPr marL="342900" indent="-342900">
-              <a:spcAft>
-                <a:spcPts val="800"/>
-              </a:spcAft>
-              <a:buSzPct val="100000"/>
-              <a:buChar char="•"/>
+            <a:pPr indent="0" marL="0">
+              <a:lnSpc>
+                <a:spcPct val="130000"/>
+              </a:lnSpc>
+              <a:buNone/>
             </a:pPr>
             <a:r>
               <a:rPr lang="en-US" sz="1500" dirty="0">
@@ -1496,128 +1697,9 @@
                 <a:ea typeface="Calibri" pitchFamily="34" charset="-122"/>
                 <a:cs typeface="Calibri" pitchFamily="34" charset="-120"/>
               </a:rPr>
-              <a:t>Science depends on accurate measurements, not guesses</a:t>
+              <a:t>Science relies on accurate measurement. Without standard units, scientists around the world could not compare results. The metric system (SI units) is used universally in science because it is based on powers of 10, making conversions simple.</a:t>
             </a:r>
             <a:endParaRPr lang="en-US" sz="1500" dirty="0"/>
-          </a:p>
-          <a:p>
-            <a:pPr marL="342900" indent="-342900">
-              <a:spcAft>
-                <a:spcPts val="800"/>
-              </a:spcAft>
-              <a:buSzPct val="100000"/>
-              <a:buChar char="•"/>
-            </a:pPr>
-            <a:r>
-              <a:rPr lang="en-US" sz="1500" dirty="0">
-                <a:solidFill>
-                  <a:srgbClr val="3D3A36"/>
-                </a:solidFill>
-                <a:latin typeface="Calibri" pitchFamily="34" charset="0"/>
-                <a:ea typeface="Calibri" pitchFamily="34" charset="-122"/>
-                <a:cs typeface="Calibri" pitchFamily="34" charset="-120"/>
-              </a:rPr>
-              <a:t>We use standard units so everyone understands our results</a:t>
-            </a:r>
-            <a:endParaRPr lang="en-US" sz="1500" dirty="0"/>
-          </a:p>
-          <a:p>
-            <a:pPr marL="342900" indent="-342900">
-              <a:spcAft>
-                <a:spcPts val="800"/>
-              </a:spcAft>
-              <a:buSzPct val="100000"/>
-              <a:buChar char="•"/>
-            </a:pPr>
-            <a:r>
-              <a:rPr lang="en-US" sz="1500" dirty="0">
-                <a:solidFill>
-                  <a:srgbClr val="3D3A36"/>
-                </a:solidFill>
-                <a:latin typeface="Calibri" pitchFamily="34" charset="0"/>
-                <a:ea typeface="Calibri" pitchFamily="34" charset="-122"/>
-                <a:cs typeface="Calibri" pitchFamily="34" charset="-120"/>
-              </a:rPr>
-              <a:t>The metric system (SI units) is used worldwide in science</a:t>
-            </a:r>
-            <a:endParaRPr lang="en-US" sz="1500" dirty="0"/>
-          </a:p>
-          <a:p>
-            <a:pPr marL="342900" indent="-342900">
-              <a:spcAft>
-                <a:spcPts val="800"/>
-              </a:spcAft>
-              <a:buSzPct val="100000"/>
-              <a:buChar char="•"/>
-            </a:pPr>
-            <a:r>
-              <a:rPr lang="en-US" sz="1500" dirty="0">
-                <a:solidFill>
-                  <a:srgbClr val="3D3A36"/>
-                </a:solidFill>
-                <a:latin typeface="Calibri" pitchFamily="34" charset="0"/>
-                <a:ea typeface="Calibri" pitchFamily="34" charset="-122"/>
-                <a:cs typeface="Calibri" pitchFamily="34" charset="-120"/>
-              </a:rPr>
-              <a:t>Choosing the right tool and unit is part of good experimental design</a:t>
-            </a:r>
-            <a:endParaRPr lang="en-US" sz="1500" dirty="0"/>
-          </a:p>
-        </p:txBody>
-      </p:sp>
-      <p:sp>
-        <p:nvSpPr>
-          <p:cNvPr id="5" name="Shape 3"/>
-          <p:cNvSpPr/>
-          <p:nvPr/>
-        </p:nvSpPr>
-        <p:spPr>
-          <a:xfrm>
-            <a:off x="548640" y="4754880"/>
-            <a:ext cx="8046720" cy="9144"/>
-          </a:xfrm>
-          <a:prstGeom prst="rect">
-            <a:avLst/>
-          </a:prstGeom>
-          <a:solidFill>
-            <a:srgbClr val="F3F1EE"/>
-          </a:solidFill>
-          <a:ln/>
-        </p:spPr>
-      </p:sp>
-      <p:sp>
-        <p:nvSpPr>
-          <p:cNvPr id="6" name="Text 4"/>
-          <p:cNvSpPr/>
-          <p:nvPr/>
-        </p:nvSpPr>
-        <p:spPr>
-          <a:xfrm>
-            <a:off x="548640" y="4800600"/>
-            <a:ext cx="3657600" cy="274320"/>
-          </a:xfrm>
-          <a:prstGeom prst="rect">
-            <a:avLst/>
-          </a:prstGeom>
-          <a:noFill/>
-          <a:ln/>
-        </p:spPr>
-        <p:txBody>
-          <a:bodyPr wrap="square" rtlCol="0" anchor="ctr"/>
-          <a:lstStyle/>
-          <a:p>
-            <a:pPr indent="0" marL="0">
-              <a:buNone/>
-            </a:pPr>
-            <a:r>
-              <a:rPr lang="en-US" sz="800" dirty="0">
-                <a:solidFill>
-                  <a:srgbClr val="9B9690"/>
-                </a:solidFill>
-              </a:rPr>
-              <a:t>mrzocchi.com</a:t>
-            </a:r>
-            <a:endParaRPr lang="en-US" sz="800" dirty="0"/>
           </a:p>
         </p:txBody>
       </p:sp>
@@ -1681,8 +1763,8 @@
         </p:nvSpPr>
         <p:spPr>
           <a:xfrm>
-            <a:off x="548640" y="274320"/>
-            <a:ext cx="8046720" cy="640080"/>
+            <a:off x="7772400" y="4709160"/>
+            <a:ext cx="1097280" cy="320040"/>
           </a:xfrm>
           <a:prstGeom prst="rect">
             <a:avLst/>
@@ -1691,7 +1773,46 @@
           <a:ln/>
         </p:spPr>
         <p:txBody>
-          <a:bodyPr wrap="square" lIns="0" tIns="0" rIns="0" bIns="0" rtlCol="0" anchor="ctr"/>
+          <a:bodyPr wrap="square" rtlCol="0" anchor="ctr"/>
+          <a:lstStyle/>
+          <a:p>
+            <a:pPr algn="r" indent="0" marL="0">
+              <a:buNone/>
+            </a:pPr>
+            <a:r>
+              <a:rPr lang="en-US" sz="900" dirty="0">
+                <a:solidFill>
+                  <a:srgbClr val="6B6660"/>
+                </a:solidFill>
+                <a:latin typeface="Calibri" pitchFamily="34" charset="0"/>
+                <a:ea typeface="Calibri" pitchFamily="34" charset="-122"/>
+                <a:cs typeface="Calibri" pitchFamily="34" charset="-120"/>
+              </a:rPr>
+              <a:t>3 / 6</a:t>
+            </a:r>
+            <a:endParaRPr lang="en-US" sz="900" dirty="0"/>
+          </a:p>
+        </p:txBody>
+      </p:sp>
+      <p:sp>
+        <p:nvSpPr>
+          <p:cNvPr id="4" name="Text 2"/>
+          <p:cNvSpPr/>
+          <p:nvPr/>
+        </p:nvSpPr>
+        <p:spPr>
+          <a:xfrm>
+            <a:off x="457200" y="274320"/>
+            <a:ext cx="8229600" cy="640080"/>
+          </a:xfrm>
+          <a:prstGeom prst="rect">
+            <a:avLst/>
+          </a:prstGeom>
+          <a:noFill/>
+          <a:ln/>
+        </p:spPr>
+        <p:txBody>
+          <a:bodyPr wrap="square" rtlCol="0" anchor="ctr"/>
           <a:lstStyle/>
           <a:p>
             <a:pPr indent="0" marL="0">
@@ -1706,7 +1827,7 @@
                 <a:ea typeface="Georgia" pitchFamily="34" charset="-122"/>
                 <a:cs typeface="Georgia" pitchFamily="34" charset="-120"/>
               </a:rPr>
-              <a:t>SI Units</a:t>
+              <a:t>Key SI Units</a:t>
             </a:r>
             <a:endParaRPr lang="en-US" sz="2600" dirty="0"/>
           </a:p>
@@ -1714,14 +1835,14 @@
       </p:sp>
       <p:sp>
         <p:nvSpPr>
-          <p:cNvPr id="4" name="Shape 2"/>
-          <p:cNvSpPr/>
-          <p:nvPr/>
-        </p:nvSpPr>
-        <p:spPr>
-          <a:xfrm>
-            <a:off x="548640" y="1097280"/>
-            <a:ext cx="3749040" cy="594360"/>
+          <p:cNvPr id="5" name="Shape 3"/>
+          <p:cNvSpPr/>
+          <p:nvPr/>
+        </p:nvSpPr>
+        <p:spPr>
+          <a:xfrm>
+            <a:off x="457200" y="1188720"/>
+            <a:ext cx="2560320" cy="1828800"/>
           </a:xfrm>
           <a:prstGeom prst="rect">
             <a:avLst/>
@@ -1729,7 +1850,12 @@
           <a:solidFill>
             <a:srgbClr val="FFFFFF"/>
           </a:solidFill>
-          <a:ln/>
+          <a:ln w="12700">
+            <a:solidFill>
+              <a:srgbClr val="E5E2DC"/>
+            </a:solidFill>
+            <a:prstDash val="solid"/>
+          </a:ln>
           <a:effectLst>
             <a:outerShdw sx="100000" sy="100000" kx="0" ky="0" algn="bl" rotWithShape="0" blurRad="50800" dist="25400" dir="8100000">
               <a:srgbClr val="000000">
@@ -1741,14 +1867,14 @@
       </p:sp>
       <p:sp>
         <p:nvSpPr>
-          <p:cNvPr id="5" name="Shape 3"/>
-          <p:cNvSpPr/>
-          <p:nvPr/>
-        </p:nvSpPr>
-        <p:spPr>
-          <a:xfrm>
-            <a:off x="548640" y="1097280"/>
-            <a:ext cx="54864" cy="594360"/>
+          <p:cNvPr id="6" name="Shape 4"/>
+          <p:cNvSpPr/>
+          <p:nvPr/>
+        </p:nvSpPr>
+        <p:spPr>
+          <a:xfrm>
+            <a:off x="457200" y="1188720"/>
+            <a:ext cx="2560320" cy="54864"/>
           </a:xfrm>
           <a:prstGeom prst="rect">
             <a:avLst/>
@@ -1761,14 +1887,14 @@
       </p:sp>
       <p:sp>
         <p:nvSpPr>
-          <p:cNvPr id="6" name="Text 4"/>
-          <p:cNvSpPr/>
-          <p:nvPr/>
-        </p:nvSpPr>
-        <p:spPr>
-          <a:xfrm>
-            <a:off x="685800" y="1143000"/>
-            <a:ext cx="3520440" cy="502920"/>
+          <p:cNvPr id="7" name="Text 5"/>
+          <p:cNvSpPr/>
+          <p:nvPr/>
+        </p:nvSpPr>
+        <p:spPr>
+          <a:xfrm>
+            <a:off x="594360" y="1325880"/>
+            <a:ext cx="2286000" cy="365760"/>
           </a:xfrm>
           <a:prstGeom prst="rect">
             <a:avLst/>
@@ -1784,41 +1910,69 @@
               <a:buNone/>
             </a:pPr>
             <a:r>
-              <a:rPr lang="en-US" sz="1200" b="1" dirty="0">
+              <a:rPr lang="en-US" sz="1400" b="1" dirty="0">
                 <a:solidFill>
                   <a:srgbClr val="1B2A4A"/>
                 </a:solidFill>
-              </a:rPr>
-              <a:t>Length</a:t>
-            </a:r>
-            <a:endParaRPr lang="en-US" sz="1200" dirty="0"/>
-          </a:p>
+                <a:latin typeface="Calibri" pitchFamily="34" charset="0"/>
+                <a:ea typeface="Calibri" pitchFamily="34" charset="-122"/>
+                <a:cs typeface="Calibri" pitchFamily="34" charset="-120"/>
+              </a:rPr>
+              <a:t>Length — Metres (m)</a:t>
+            </a:r>
+            <a:endParaRPr lang="en-US" sz="1400" dirty="0"/>
+          </a:p>
+        </p:txBody>
+      </p:sp>
+      <p:sp>
+        <p:nvSpPr>
+          <p:cNvPr id="8" name="Text 6"/>
+          <p:cNvSpPr/>
+          <p:nvPr/>
+        </p:nvSpPr>
+        <p:spPr>
+          <a:xfrm>
+            <a:off x="594360" y="1737360"/>
+            <a:ext cx="2286000" cy="1097280"/>
+          </a:xfrm>
+          <a:prstGeom prst="rect">
+            <a:avLst/>
+          </a:prstGeom>
+          <a:noFill/>
+          <a:ln/>
+        </p:spPr>
+        <p:txBody>
+          <a:bodyPr wrap="square" rtlCol="0" anchor="t"/>
+          <a:lstStyle/>
           <a:p>
             <a:pPr indent="0" marL="0">
               <a:buNone/>
             </a:pPr>
             <a:r>
-              <a:rPr lang="en-US" sz="1000" dirty="0">
-                <a:solidFill>
-                  <a:srgbClr val="6B6660"/>
-                </a:solidFill>
-              </a:rPr>
-              <a:t>Metres (m), centimetres (cm), millimetres (mm)</a:t>
-            </a:r>
-            <a:endParaRPr lang="en-US" sz="1200" dirty="0"/>
-          </a:p>
-        </p:txBody>
-      </p:sp>
-      <p:sp>
-        <p:nvSpPr>
-          <p:cNvPr id="7" name="Shape 5"/>
-          <p:cNvSpPr/>
-          <p:nvPr/>
-        </p:nvSpPr>
-        <p:spPr>
-          <a:xfrm>
-            <a:off x="4480560" y="1097280"/>
-            <a:ext cx="3749040" cy="594360"/>
+              <a:rPr lang="en-US" sz="1100" dirty="0">
+                <a:solidFill>
+                  <a:srgbClr val="3D3A36"/>
+                </a:solidFill>
+                <a:latin typeface="Calibri" pitchFamily="34" charset="0"/>
+                <a:ea typeface="Calibri" pitchFamily="34" charset="-122"/>
+                <a:cs typeface="Calibri" pitchFamily="34" charset="-120"/>
+              </a:rPr>
+              <a:t>Measure with a ruler or measuring tape. 1 km = 1000 m. 1 m = 100 cm. 1 cm = 10 mm. Always read at eye level to avoid parallax error.</a:t>
+            </a:r>
+            <a:endParaRPr lang="en-US" sz="1100" dirty="0"/>
+          </a:p>
+        </p:txBody>
+      </p:sp>
+      <p:sp>
+        <p:nvSpPr>
+          <p:cNvPr id="9" name="Shape 7"/>
+          <p:cNvSpPr/>
+          <p:nvPr/>
+        </p:nvSpPr>
+        <p:spPr>
+          <a:xfrm>
+            <a:off x="3291840" y="1188720"/>
+            <a:ext cx="2560320" cy="1828800"/>
           </a:xfrm>
           <a:prstGeom prst="rect">
             <a:avLst/>
@@ -1826,7 +1980,12 @@
           <a:solidFill>
             <a:srgbClr val="FFFFFF"/>
           </a:solidFill>
-          <a:ln/>
+          <a:ln w="12700">
+            <a:solidFill>
+              <a:srgbClr val="E5E2DC"/>
+            </a:solidFill>
+            <a:prstDash val="solid"/>
+          </a:ln>
           <a:effectLst>
             <a:outerShdw sx="100000" sy="100000" kx="0" ky="0" algn="bl" rotWithShape="0" blurRad="50800" dist="25400" dir="8100000">
               <a:srgbClr val="000000">
@@ -1838,14 +1997,14 @@
       </p:sp>
       <p:sp>
         <p:nvSpPr>
-          <p:cNvPr id="8" name="Shape 6"/>
-          <p:cNvSpPr/>
-          <p:nvPr/>
-        </p:nvSpPr>
-        <p:spPr>
-          <a:xfrm>
-            <a:off x="4480560" y="1097280"/>
-            <a:ext cx="54864" cy="594360"/>
+          <p:cNvPr id="10" name="Shape 8"/>
+          <p:cNvSpPr/>
+          <p:nvPr/>
+        </p:nvSpPr>
+        <p:spPr>
+          <a:xfrm>
+            <a:off x="3291840" y="1188720"/>
+            <a:ext cx="2560320" cy="54864"/>
           </a:xfrm>
           <a:prstGeom prst="rect">
             <a:avLst/>
@@ -1858,14 +2017,14 @@
       </p:sp>
       <p:sp>
         <p:nvSpPr>
-          <p:cNvPr id="9" name="Text 7"/>
-          <p:cNvSpPr/>
-          <p:nvPr/>
-        </p:nvSpPr>
-        <p:spPr>
-          <a:xfrm>
-            <a:off x="4617720" y="1143000"/>
-            <a:ext cx="3520440" cy="502920"/>
+          <p:cNvPr id="11" name="Text 9"/>
+          <p:cNvSpPr/>
+          <p:nvPr/>
+        </p:nvSpPr>
+        <p:spPr>
+          <a:xfrm>
+            <a:off x="3429000" y="1325880"/>
+            <a:ext cx="2286000" cy="365760"/>
           </a:xfrm>
           <a:prstGeom prst="rect">
             <a:avLst/>
@@ -1881,41 +2040,69 @@
               <a:buNone/>
             </a:pPr>
             <a:r>
-              <a:rPr lang="en-US" sz="1200" b="1" dirty="0">
+              <a:rPr lang="en-US" sz="1400" b="1" dirty="0">
                 <a:solidFill>
                   <a:srgbClr val="1B2A4A"/>
                 </a:solidFill>
-              </a:rPr>
-              <a:t>Mass</a:t>
-            </a:r>
-            <a:endParaRPr lang="en-US" sz="1200" dirty="0"/>
-          </a:p>
+                <a:latin typeface="Calibri" pitchFamily="34" charset="0"/>
+                <a:ea typeface="Calibri" pitchFamily="34" charset="-122"/>
+                <a:cs typeface="Calibri" pitchFamily="34" charset="-120"/>
+              </a:rPr>
+              <a:t>Mass — Grams (g)</a:t>
+            </a:r>
+            <a:endParaRPr lang="en-US" sz="1400" dirty="0"/>
+          </a:p>
+        </p:txBody>
+      </p:sp>
+      <p:sp>
+        <p:nvSpPr>
+          <p:cNvPr id="12" name="Text 10"/>
+          <p:cNvSpPr/>
+          <p:nvPr/>
+        </p:nvSpPr>
+        <p:spPr>
+          <a:xfrm>
+            <a:off x="3429000" y="1737360"/>
+            <a:ext cx="2286000" cy="1097280"/>
+          </a:xfrm>
+          <a:prstGeom prst="rect">
+            <a:avLst/>
+          </a:prstGeom>
+          <a:noFill/>
+          <a:ln/>
+        </p:spPr>
+        <p:txBody>
+          <a:bodyPr wrap="square" rtlCol="0" anchor="t"/>
+          <a:lstStyle/>
           <a:p>
             <a:pPr indent="0" marL="0">
               <a:buNone/>
             </a:pPr>
             <a:r>
-              <a:rPr lang="en-US" sz="1000" dirty="0">
-                <a:solidFill>
-                  <a:srgbClr val="6B6660"/>
-                </a:solidFill>
-              </a:rPr>
-              <a:t>Kilograms (kg), grams (g)</a:t>
-            </a:r>
-            <a:endParaRPr lang="en-US" sz="1200" dirty="0"/>
-          </a:p>
-        </p:txBody>
-      </p:sp>
-      <p:sp>
-        <p:nvSpPr>
-          <p:cNvPr id="10" name="Shape 8"/>
-          <p:cNvSpPr/>
-          <p:nvPr/>
-        </p:nvSpPr>
-        <p:spPr>
-          <a:xfrm>
-            <a:off x="548640" y="1828800"/>
-            <a:ext cx="3749040" cy="594360"/>
+              <a:rPr lang="en-US" sz="1100" dirty="0">
+                <a:solidFill>
+                  <a:srgbClr val="3D3A36"/>
+                </a:solidFill>
+                <a:latin typeface="Calibri" pitchFamily="34" charset="0"/>
+                <a:ea typeface="Calibri" pitchFamily="34" charset="-122"/>
+                <a:cs typeface="Calibri" pitchFamily="34" charset="-120"/>
+              </a:rPr>
+              <a:t>Measure with a balance or scale. 1 kg = 1000 g. Mass is the amount of matter in an object. It does NOT change with location (unlike weight).</a:t>
+            </a:r>
+            <a:endParaRPr lang="en-US" sz="1100" dirty="0"/>
+          </a:p>
+        </p:txBody>
+      </p:sp>
+      <p:sp>
+        <p:nvSpPr>
+          <p:cNvPr id="13" name="Shape 11"/>
+          <p:cNvSpPr/>
+          <p:nvPr/>
+        </p:nvSpPr>
+        <p:spPr>
+          <a:xfrm>
+            <a:off x="6126480" y="1188720"/>
+            <a:ext cx="2560320" cy="1828800"/>
           </a:xfrm>
           <a:prstGeom prst="rect">
             <a:avLst/>
@@ -1923,7 +2110,12 @@
           <a:solidFill>
             <a:srgbClr val="FFFFFF"/>
           </a:solidFill>
-          <a:ln/>
+          <a:ln w="12700">
+            <a:solidFill>
+              <a:srgbClr val="E5E2DC"/>
+            </a:solidFill>
+            <a:prstDash val="solid"/>
+          </a:ln>
           <a:effectLst>
             <a:outerShdw sx="100000" sy="100000" kx="0" ky="0" algn="bl" rotWithShape="0" blurRad="50800" dist="25400" dir="8100000">
               <a:srgbClr val="000000">
@@ -1935,14 +2127,14 @@
       </p:sp>
       <p:sp>
         <p:nvSpPr>
-          <p:cNvPr id="11" name="Shape 9"/>
-          <p:cNvSpPr/>
-          <p:nvPr/>
-        </p:nvSpPr>
-        <p:spPr>
-          <a:xfrm>
-            <a:off x="548640" y="1828800"/>
-            <a:ext cx="54864" cy="594360"/>
+          <p:cNvPr id="14" name="Shape 12"/>
+          <p:cNvSpPr/>
+          <p:nvPr/>
+        </p:nvSpPr>
+        <p:spPr>
+          <a:xfrm>
+            <a:off x="6126480" y="1188720"/>
+            <a:ext cx="2560320" cy="54864"/>
           </a:xfrm>
           <a:prstGeom prst="rect">
             <a:avLst/>
@@ -1955,14 +2147,14 @@
       </p:sp>
       <p:sp>
         <p:nvSpPr>
-          <p:cNvPr id="12" name="Text 10"/>
-          <p:cNvSpPr/>
-          <p:nvPr/>
-        </p:nvSpPr>
-        <p:spPr>
-          <a:xfrm>
-            <a:off x="685800" y="1874520"/>
-            <a:ext cx="3520440" cy="502920"/>
+          <p:cNvPr id="15" name="Text 13"/>
+          <p:cNvSpPr/>
+          <p:nvPr/>
+        </p:nvSpPr>
+        <p:spPr>
+          <a:xfrm>
+            <a:off x="6263640" y="1325880"/>
+            <a:ext cx="2286000" cy="365760"/>
           </a:xfrm>
           <a:prstGeom prst="rect">
             <a:avLst/>
@@ -1978,355 +2170,56 @@
               <a:buNone/>
             </a:pPr>
             <a:r>
-              <a:rPr lang="en-US" sz="1200" b="1" dirty="0">
+              <a:rPr lang="en-US" sz="1400" b="1" dirty="0">
                 <a:solidFill>
                   <a:srgbClr val="1B2A4A"/>
                 </a:solidFill>
-              </a:rPr>
-              <a:t>Volume</a:t>
-            </a:r>
-            <a:endParaRPr lang="en-US" sz="1200" dirty="0"/>
-          </a:p>
+                <a:latin typeface="Calibri" pitchFamily="34" charset="0"/>
+                <a:ea typeface="Calibri" pitchFamily="34" charset="-122"/>
+                <a:cs typeface="Calibri" pitchFamily="34" charset="-120"/>
+              </a:rPr>
+              <a:t>Volume — Litres (L)</a:t>
+            </a:r>
+            <a:endParaRPr lang="en-US" sz="1400" dirty="0"/>
+          </a:p>
+        </p:txBody>
+      </p:sp>
+      <p:sp>
+        <p:nvSpPr>
+          <p:cNvPr id="16" name="Text 14"/>
+          <p:cNvSpPr/>
+          <p:nvPr/>
+        </p:nvSpPr>
+        <p:spPr>
+          <a:xfrm>
+            <a:off x="6263640" y="1737360"/>
+            <a:ext cx="2286000" cy="1097280"/>
+          </a:xfrm>
+          <a:prstGeom prst="rect">
+            <a:avLst/>
+          </a:prstGeom>
+          <a:noFill/>
+          <a:ln/>
+        </p:spPr>
+        <p:txBody>
+          <a:bodyPr wrap="square" rtlCol="0" anchor="t"/>
+          <a:lstStyle/>
           <a:p>
             <a:pPr indent="0" marL="0">
               <a:buNone/>
             </a:pPr>
             <a:r>
-              <a:rPr lang="en-US" sz="1000" dirty="0">
-                <a:solidFill>
-                  <a:srgbClr val="6B6660"/>
-                </a:solidFill>
-              </a:rPr>
-              <a:t>Litres (L), millilitres (mL), cubic cm (cm³)</a:t>
-            </a:r>
-            <a:endParaRPr lang="en-US" sz="1200" dirty="0"/>
-          </a:p>
-        </p:txBody>
-      </p:sp>
-      <p:sp>
-        <p:nvSpPr>
-          <p:cNvPr id="13" name="Shape 11"/>
-          <p:cNvSpPr/>
-          <p:nvPr/>
-        </p:nvSpPr>
-        <p:spPr>
-          <a:xfrm>
-            <a:off x="4480560" y="1828800"/>
-            <a:ext cx="3749040" cy="594360"/>
-          </a:xfrm>
-          <a:prstGeom prst="rect">
-            <a:avLst/>
-          </a:prstGeom>
-          <a:solidFill>
-            <a:srgbClr val="FFFFFF"/>
-          </a:solidFill>
-          <a:ln/>
-          <a:effectLst>
-            <a:outerShdw sx="100000" sy="100000" kx="0" ky="0" algn="bl" rotWithShape="0" blurRad="50800" dist="25400" dir="8100000">
-              <a:srgbClr val="000000">
-                <a:alpha val="10000"/>
-              </a:srgbClr>
-            </a:outerShdw>
-          </a:effectLst>
-        </p:spPr>
-      </p:sp>
-      <p:sp>
-        <p:nvSpPr>
-          <p:cNvPr id="14" name="Shape 12"/>
-          <p:cNvSpPr/>
-          <p:nvPr/>
-        </p:nvSpPr>
-        <p:spPr>
-          <a:xfrm>
-            <a:off x="4480560" y="1828800"/>
-            <a:ext cx="54864" cy="594360"/>
-          </a:xfrm>
-          <a:prstGeom prst="rect">
-            <a:avLst/>
-          </a:prstGeom>
-          <a:solidFill>
-            <a:srgbClr val="2A9D8F"/>
-          </a:solidFill>
-          <a:ln/>
-        </p:spPr>
-      </p:sp>
-      <p:sp>
-        <p:nvSpPr>
-          <p:cNvPr id="15" name="Text 13"/>
-          <p:cNvSpPr/>
-          <p:nvPr/>
-        </p:nvSpPr>
-        <p:spPr>
-          <a:xfrm>
-            <a:off x="4617720" y="1874520"/>
-            <a:ext cx="3520440" cy="502920"/>
-          </a:xfrm>
-          <a:prstGeom prst="rect">
-            <a:avLst/>
-          </a:prstGeom>
-          <a:noFill/>
-          <a:ln/>
-        </p:spPr>
-        <p:txBody>
-          <a:bodyPr wrap="square" rtlCol="0" anchor="ctr"/>
-          <a:lstStyle/>
-          <a:p>
-            <a:pPr indent="0" marL="0">
-              <a:buNone/>
-            </a:pPr>
-            <a:r>
-              <a:rPr lang="en-US" sz="1200" b="1" dirty="0">
-                <a:solidFill>
-                  <a:srgbClr val="1B2A4A"/>
-                </a:solidFill>
-              </a:rPr>
-              <a:t>Temperature</a:t>
-            </a:r>
-            <a:endParaRPr lang="en-US" sz="1200" dirty="0"/>
-          </a:p>
-          <a:p>
-            <a:pPr indent="0" marL="0">
-              <a:buNone/>
-            </a:pPr>
-            <a:r>
-              <a:rPr lang="en-US" sz="1000" dirty="0">
-                <a:solidFill>
-                  <a:srgbClr val="6B6660"/>
-                </a:solidFill>
-              </a:rPr>
-              <a:t>Degrees Celsius (°C)</a:t>
-            </a:r>
-            <a:endParaRPr lang="en-US" sz="1200" dirty="0"/>
-          </a:p>
-        </p:txBody>
-      </p:sp>
-      <p:sp>
-        <p:nvSpPr>
-          <p:cNvPr id="16" name="Shape 14"/>
-          <p:cNvSpPr/>
-          <p:nvPr/>
-        </p:nvSpPr>
-        <p:spPr>
-          <a:xfrm>
-            <a:off x="548640" y="2560320"/>
-            <a:ext cx="3749040" cy="594360"/>
-          </a:xfrm>
-          <a:prstGeom prst="rect">
-            <a:avLst/>
-          </a:prstGeom>
-          <a:solidFill>
-            <a:srgbClr val="FFFFFF"/>
-          </a:solidFill>
-          <a:ln/>
-          <a:effectLst>
-            <a:outerShdw sx="100000" sy="100000" kx="0" ky="0" algn="bl" rotWithShape="0" blurRad="50800" dist="25400" dir="8100000">
-              <a:srgbClr val="000000">
-                <a:alpha val="10000"/>
-              </a:srgbClr>
-            </a:outerShdw>
-          </a:effectLst>
-        </p:spPr>
-      </p:sp>
-      <p:sp>
-        <p:nvSpPr>
-          <p:cNvPr id="17" name="Shape 15"/>
-          <p:cNvSpPr/>
-          <p:nvPr/>
-        </p:nvSpPr>
-        <p:spPr>
-          <a:xfrm>
-            <a:off x="548640" y="2560320"/>
-            <a:ext cx="54864" cy="594360"/>
-          </a:xfrm>
-          <a:prstGeom prst="rect">
-            <a:avLst/>
-          </a:prstGeom>
-          <a:solidFill>
-            <a:srgbClr val="2A9D8F"/>
-          </a:solidFill>
-          <a:ln/>
-        </p:spPr>
-      </p:sp>
-      <p:sp>
-        <p:nvSpPr>
-          <p:cNvPr id="18" name="Text 16"/>
-          <p:cNvSpPr/>
-          <p:nvPr/>
-        </p:nvSpPr>
-        <p:spPr>
-          <a:xfrm>
-            <a:off x="685800" y="2606040"/>
-            <a:ext cx="3520440" cy="502920"/>
-          </a:xfrm>
-          <a:prstGeom prst="rect">
-            <a:avLst/>
-          </a:prstGeom>
-          <a:noFill/>
-          <a:ln/>
-        </p:spPr>
-        <p:txBody>
-          <a:bodyPr wrap="square" rtlCol="0" anchor="ctr"/>
-          <a:lstStyle/>
-          <a:p>
-            <a:pPr indent="0" marL="0">
-              <a:buNone/>
-            </a:pPr>
-            <a:r>
-              <a:rPr lang="en-US" sz="1200" b="1" dirty="0">
-                <a:solidFill>
-                  <a:srgbClr val="1B2A4A"/>
-                </a:solidFill>
-              </a:rPr>
-              <a:t>Time</a:t>
-            </a:r>
-            <a:endParaRPr lang="en-US" sz="1200" dirty="0"/>
-          </a:p>
-          <a:p>
-            <a:pPr indent="0" marL="0">
-              <a:buNone/>
-            </a:pPr>
-            <a:r>
-              <a:rPr lang="en-US" sz="1000" dirty="0">
-                <a:solidFill>
-                  <a:srgbClr val="6B6660"/>
-                </a:solidFill>
-              </a:rPr>
-              <a:t>Seconds (s), minutes (min), hours (h)</a:t>
-            </a:r>
-            <a:endParaRPr lang="en-US" sz="1200" dirty="0"/>
-          </a:p>
-        </p:txBody>
-      </p:sp>
-      <p:sp>
-        <p:nvSpPr>
-          <p:cNvPr id="19" name="Shape 17"/>
-          <p:cNvSpPr/>
-          <p:nvPr/>
-        </p:nvSpPr>
-        <p:spPr>
-          <a:xfrm>
-            <a:off x="4480560" y="2560320"/>
-            <a:ext cx="3749040" cy="594360"/>
-          </a:xfrm>
-          <a:prstGeom prst="rect">
-            <a:avLst/>
-          </a:prstGeom>
-          <a:solidFill>
-            <a:srgbClr val="FFFFFF"/>
-          </a:solidFill>
-          <a:ln/>
-          <a:effectLst>
-            <a:outerShdw sx="100000" sy="100000" kx="0" ky="0" algn="bl" rotWithShape="0" blurRad="50800" dist="25400" dir="8100000">
-              <a:srgbClr val="000000">
-                <a:alpha val="10000"/>
-              </a:srgbClr>
-            </a:outerShdw>
-          </a:effectLst>
-        </p:spPr>
-      </p:sp>
-      <p:sp>
-        <p:nvSpPr>
-          <p:cNvPr id="20" name="Shape 18"/>
-          <p:cNvSpPr/>
-          <p:nvPr/>
-        </p:nvSpPr>
-        <p:spPr>
-          <a:xfrm>
-            <a:off x="4480560" y="2560320"/>
-            <a:ext cx="54864" cy="594360"/>
-          </a:xfrm>
-          <a:prstGeom prst="rect">
-            <a:avLst/>
-          </a:prstGeom>
-          <a:solidFill>
-            <a:srgbClr val="2A9D8F"/>
-          </a:solidFill>
-          <a:ln/>
-        </p:spPr>
-      </p:sp>
-      <p:sp>
-        <p:nvSpPr>
-          <p:cNvPr id="21" name="Text 19"/>
-          <p:cNvSpPr/>
-          <p:nvPr/>
-        </p:nvSpPr>
-        <p:spPr>
-          <a:xfrm>
-            <a:off x="4617720" y="2606040"/>
-            <a:ext cx="3520440" cy="502920"/>
-          </a:xfrm>
-          <a:prstGeom prst="rect">
-            <a:avLst/>
-          </a:prstGeom>
-          <a:noFill/>
-          <a:ln/>
-        </p:spPr>
-        <p:txBody>
-          <a:bodyPr wrap="square" rtlCol="0" anchor="ctr"/>
-          <a:lstStyle/>
-          <a:p>
-            <a:pPr indent="0" marL="0">
-              <a:buNone/>
-            </a:pPr>
-            <a:r>
-              <a:rPr lang="en-US" sz="1200" b="1" dirty="0">
-                <a:solidFill>
-                  <a:srgbClr val="1B2A4A"/>
-                </a:solidFill>
-              </a:rPr>
-              <a:t>Force</a:t>
-            </a:r>
-            <a:endParaRPr lang="en-US" sz="1200" dirty="0"/>
-          </a:p>
-          <a:p>
-            <a:pPr indent="0" marL="0">
-              <a:buNone/>
-            </a:pPr>
-            <a:r>
-              <a:rPr lang="en-US" sz="1000" dirty="0">
-                <a:solidFill>
-                  <a:srgbClr val="6B6660"/>
-                </a:solidFill>
-              </a:rPr>
-              <a:t>Newtons (N)</a:t>
-            </a:r>
-            <a:endParaRPr lang="en-US" sz="1200" dirty="0"/>
-          </a:p>
-        </p:txBody>
-      </p:sp>
-      <p:sp>
-        <p:nvSpPr>
-          <p:cNvPr id="22" name="Text 20"/>
-          <p:cNvSpPr/>
-          <p:nvPr/>
-        </p:nvSpPr>
-        <p:spPr>
-          <a:xfrm>
-            <a:off x="548640" y="4800600"/>
-            <a:ext cx="3657600" cy="274320"/>
-          </a:xfrm>
-          <a:prstGeom prst="rect">
-            <a:avLst/>
-          </a:prstGeom>
-          <a:noFill/>
-          <a:ln/>
-        </p:spPr>
-        <p:txBody>
-          <a:bodyPr wrap="square" rtlCol="0" anchor="ctr"/>
-          <a:lstStyle/>
-          <a:p>
-            <a:pPr indent="0" marL="0">
-              <a:buNone/>
-            </a:pPr>
-            <a:r>
-              <a:rPr lang="en-US" sz="800" dirty="0">
-                <a:solidFill>
-                  <a:srgbClr val="9B9690"/>
-                </a:solidFill>
-              </a:rPr>
-              <a:t>mrzocchi.com</a:t>
-            </a:r>
-            <a:endParaRPr lang="en-US" sz="800" dirty="0"/>
+              <a:rPr lang="en-US" sz="1100" dirty="0">
+                <a:solidFill>
+                  <a:srgbClr val="3D3A36"/>
+                </a:solidFill>
+                <a:latin typeface="Calibri" pitchFamily="34" charset="0"/>
+                <a:ea typeface="Calibri" pitchFamily="34" charset="-122"/>
+                <a:cs typeface="Calibri" pitchFamily="34" charset="-120"/>
+              </a:rPr>
+              <a:t>Measure liquids with a measuring cylinder. 1 L = 1000 mL. Read the bottom of the meniscus at eye level. For solids, use length × width × height.</a:t>
+            </a:r>
+            <a:endParaRPr lang="en-US" sz="1100" dirty="0"/>
           </a:p>
         </p:txBody>
       </p:sp>
@@ -2344,7 +2237,7 @@
     <p:bg>
       <p:bgPr>
         <a:solidFill>
-          <a:srgbClr val="FFFFFF"/>
+          <a:srgbClr val="FAF8F5"/>
         </a:solidFill>
       </p:bgPr>
     </p:bg>
@@ -2390,8 +2283,8 @@
         </p:nvSpPr>
         <p:spPr>
           <a:xfrm>
-            <a:off x="548640" y="274320"/>
-            <a:ext cx="8046720" cy="640080"/>
+            <a:off x="7772400" y="4709160"/>
+            <a:ext cx="1097280" cy="320040"/>
           </a:xfrm>
           <a:prstGeom prst="rect">
             <a:avLst/>
@@ -2400,7 +2293,46 @@
           <a:ln/>
         </p:spPr>
         <p:txBody>
-          <a:bodyPr wrap="square" lIns="0" tIns="0" rIns="0" bIns="0" rtlCol="0" anchor="ctr"/>
+          <a:bodyPr wrap="square" rtlCol="0" anchor="ctr"/>
+          <a:lstStyle/>
+          <a:p>
+            <a:pPr algn="r" indent="0" marL="0">
+              <a:buNone/>
+            </a:pPr>
+            <a:r>
+              <a:rPr lang="en-US" sz="900" dirty="0">
+                <a:solidFill>
+                  <a:srgbClr val="6B6660"/>
+                </a:solidFill>
+                <a:latin typeface="Calibri" pitchFamily="34" charset="0"/>
+                <a:ea typeface="Calibri" pitchFamily="34" charset="-122"/>
+                <a:cs typeface="Calibri" pitchFamily="34" charset="-120"/>
+              </a:rPr>
+              <a:t>4 / 6</a:t>
+            </a:r>
+            <a:endParaRPr lang="en-US" sz="900" dirty="0"/>
+          </a:p>
+        </p:txBody>
+      </p:sp>
+      <p:sp>
+        <p:nvSpPr>
+          <p:cNvPr id="4" name="Text 2"/>
+          <p:cNvSpPr/>
+          <p:nvPr/>
+        </p:nvSpPr>
+        <p:spPr>
+          <a:xfrm>
+            <a:off x="457200" y="274320"/>
+            <a:ext cx="8229600" cy="640080"/>
+          </a:xfrm>
+          <a:prstGeom prst="rect">
+            <a:avLst/>
+          </a:prstGeom>
+          <a:noFill/>
+          <a:ln/>
+        </p:spPr>
+        <p:txBody>
+          <a:bodyPr wrap="square" rtlCol="0" anchor="ctr"/>
           <a:lstStyle/>
           <a:p>
             <a:pPr indent="0" marL="0">
@@ -2415,7 +2347,7 @@
                 <a:ea typeface="Georgia" pitchFamily="34" charset="-122"/>
                 <a:cs typeface="Georgia" pitchFamily="34" charset="-120"/>
               </a:rPr>
-              <a:t>Making Accurate Measurements</a:t>
+              <a:t>Reading Instruments Accurately</a:t>
             </a:r>
             <a:endParaRPr lang="en-US" sz="2600" dirty="0"/>
           </a:p>
@@ -2423,14 +2355,14 @@
       </p:sp>
       <p:sp>
         <p:nvSpPr>
-          <p:cNvPr id="4" name="Text 2"/>
-          <p:cNvSpPr/>
-          <p:nvPr/>
-        </p:nvSpPr>
-        <p:spPr>
-          <a:xfrm>
-            <a:off x="548640" y="1097280"/>
-            <a:ext cx="8046720" cy="3474720"/>
+          <p:cNvPr id="5" name="Text 3"/>
+          <p:cNvSpPr/>
+          <p:nvPr/>
+        </p:nvSpPr>
+        <p:spPr>
+          <a:xfrm>
+            <a:off x="457200" y="1188720"/>
+            <a:ext cx="3840480" cy="3474720"/>
           </a:xfrm>
           <a:prstGeom prst="rect">
             <a:avLst/>
@@ -2444,13 +2376,13 @@
           <a:p>
             <a:pPr marL="342900" indent="-342900">
               <a:spcAft>
-                <a:spcPts val="800"/>
+                <a:spcPts val="600"/>
               </a:spcAft>
               <a:buSzPct val="100000"/>
               <a:buChar char="•"/>
             </a:pPr>
             <a:r>
-              <a:rPr lang="en-US" sz="1500" dirty="0">
+              <a:rPr lang="en-US" sz="1400" dirty="0">
                 <a:solidFill>
                   <a:srgbClr val="3D3A36"/>
                 </a:solidFill>
@@ -2458,20 +2390,20 @@
                 <a:ea typeface="Calibri" pitchFamily="34" charset="-122"/>
                 <a:cs typeface="Calibri" pitchFamily="34" charset="-120"/>
               </a:rPr>
-              <a:t>Read scales at eye level to avoid parallax error</a:t>
-            </a:r>
-            <a:endParaRPr lang="en-US" sz="1500" dirty="0"/>
+              <a:t>Always read at eye level (not from above or below)</a:t>
+            </a:r>
+            <a:endParaRPr lang="en-US" sz="1400" dirty="0"/>
           </a:p>
           <a:p>
             <a:pPr marL="342900" indent="-342900">
               <a:spcAft>
-                <a:spcPts val="800"/>
+                <a:spcPts val="600"/>
               </a:spcAft>
               <a:buSzPct val="100000"/>
               <a:buChar char="•"/>
             </a:pPr>
             <a:r>
-              <a:rPr lang="en-US" sz="1500" dirty="0">
+              <a:rPr lang="en-US" sz="1400" dirty="0">
                 <a:solidFill>
                   <a:srgbClr val="3D3A36"/>
                 </a:solidFill>
@@ -2479,20 +2411,20 @@
                 <a:ea typeface="Calibri" pitchFamily="34" charset="-122"/>
                 <a:cs typeface="Calibri" pitchFamily="34" charset="-120"/>
               </a:rPr>
-              <a:t>Take multiple measurements and calculate the mean (average)</a:t>
-            </a:r>
-            <a:endParaRPr lang="en-US" sz="1500" dirty="0"/>
+              <a:t>For liquids, read the bottom of the meniscus (curved surface)</a:t>
+            </a:r>
+            <a:endParaRPr lang="en-US" sz="1400" dirty="0"/>
           </a:p>
           <a:p>
             <a:pPr marL="342900" indent="-342900">
               <a:spcAft>
-                <a:spcPts val="800"/>
+                <a:spcPts val="600"/>
               </a:spcAft>
               <a:buSzPct val="100000"/>
               <a:buChar char="•"/>
             </a:pPr>
             <a:r>
-              <a:rPr lang="en-US" sz="1500" dirty="0">
+              <a:rPr lang="en-US" sz="1400" dirty="0">
                 <a:solidFill>
                   <a:srgbClr val="3D3A36"/>
                 </a:solidFill>
@@ -2500,20 +2432,20 @@
                 <a:ea typeface="Calibri" pitchFamily="34" charset="-122"/>
                 <a:cs typeface="Calibri" pitchFamily="34" charset="-120"/>
               </a:rPr>
-              <a:t>Record ALL measurements immediately — don't rely on memory</a:t>
-            </a:r>
-            <a:endParaRPr lang="en-US" sz="1500" dirty="0"/>
+              <a:t>Estimate between the smallest divisions on the scale</a:t>
+            </a:r>
+            <a:endParaRPr lang="en-US" sz="1400" dirty="0"/>
           </a:p>
           <a:p>
             <a:pPr marL="342900" indent="-342900">
               <a:spcAft>
-                <a:spcPts val="800"/>
+                <a:spcPts val="600"/>
               </a:spcAft>
               <a:buSzPct val="100000"/>
               <a:buChar char="•"/>
             </a:pPr>
             <a:r>
-              <a:rPr lang="en-US" sz="1500" dirty="0">
+              <a:rPr lang="en-US" sz="1400" dirty="0">
                 <a:solidFill>
                   <a:srgbClr val="3D3A36"/>
                 </a:solidFill>
@@ -2521,20 +2453,20 @@
                 <a:ea typeface="Calibri" pitchFamily="34" charset="-122"/>
                 <a:cs typeface="Calibri" pitchFamily="34" charset="-120"/>
               </a:rPr>
-              <a:t>Use the smallest division for the most precise reading</a:t>
-            </a:r>
-            <a:endParaRPr lang="en-US" sz="1500" dirty="0"/>
+              <a:t>Record the correct unit with every measurement</a:t>
+            </a:r>
+            <a:endParaRPr lang="en-US" sz="1400" dirty="0"/>
           </a:p>
           <a:p>
             <a:pPr marL="342900" indent="-342900">
               <a:spcAft>
-                <a:spcPts val="800"/>
+                <a:spcPts val="600"/>
               </a:spcAft>
               <a:buSzPct val="100000"/>
               <a:buChar char="•"/>
             </a:pPr>
             <a:r>
-              <a:rPr lang="en-US" sz="1500" dirty="0">
+              <a:rPr lang="en-US" sz="1400" dirty="0">
                 <a:solidFill>
                   <a:srgbClr val="3D3A36"/>
                 </a:solidFill>
@@ -2542,42 +2474,74 @@
                 <a:ea typeface="Calibri" pitchFamily="34" charset="-122"/>
                 <a:cs typeface="Calibri" pitchFamily="34" charset="-120"/>
               </a:rPr>
-              <a:t>Always include the UNIT with every measurement</a:t>
-            </a:r>
-            <a:endParaRPr lang="en-US" sz="1500" dirty="0"/>
-          </a:p>
-        </p:txBody>
-      </p:sp>
-      <p:sp>
-        <p:nvSpPr>
-          <p:cNvPr id="5" name="Shape 3"/>
-          <p:cNvSpPr/>
-          <p:nvPr/>
-        </p:nvSpPr>
-        <p:spPr>
-          <a:xfrm>
-            <a:off x="548640" y="4754880"/>
-            <a:ext cx="8046720" cy="9144"/>
-          </a:xfrm>
-          <a:prstGeom prst="rect">
-            <a:avLst/>
-          </a:prstGeom>
-          <a:solidFill>
-            <a:srgbClr val="F3F1EE"/>
+              <a:t>Zero the balance before measuring mass</a:t>
+            </a:r>
+            <a:endParaRPr lang="en-US" sz="1400" dirty="0"/>
+          </a:p>
+        </p:txBody>
+      </p:sp>
+      <p:sp>
+        <p:nvSpPr>
+          <p:cNvPr id="6" name="Shape 4"/>
+          <p:cNvSpPr/>
+          <p:nvPr/>
+        </p:nvSpPr>
+        <p:spPr>
+          <a:xfrm>
+            <a:off x="4846320" y="1188720"/>
+            <a:ext cx="3840480" cy="3474720"/>
+          </a:xfrm>
+          <a:prstGeom prst="rect">
+            <a:avLst/>
+          </a:prstGeom>
+          <a:solidFill>
+            <a:srgbClr val="FFFFFF"/>
+          </a:solidFill>
+          <a:ln w="12700">
+            <a:solidFill>
+              <a:srgbClr val="E5E2DC"/>
+            </a:solidFill>
+            <a:prstDash val="solid"/>
+          </a:ln>
+          <a:effectLst>
+            <a:outerShdw sx="100000" sy="100000" kx="0" ky="0" algn="bl" rotWithShape="0" blurRad="50800" dist="25400" dir="8100000">
+              <a:srgbClr val="000000">
+                <a:alpha val="10000"/>
+              </a:srgbClr>
+            </a:outerShdw>
+          </a:effectLst>
+        </p:spPr>
+      </p:sp>
+      <p:sp>
+        <p:nvSpPr>
+          <p:cNvPr id="7" name="Shape 5"/>
+          <p:cNvSpPr/>
+          <p:nvPr/>
+        </p:nvSpPr>
+        <p:spPr>
+          <a:xfrm>
+            <a:off x="4846320" y="1188720"/>
+            <a:ext cx="3840480" cy="54864"/>
+          </a:xfrm>
+          <a:prstGeom prst="rect">
+            <a:avLst/>
+          </a:prstGeom>
+          <a:solidFill>
+            <a:srgbClr val="2A9D8F"/>
           </a:solidFill>
           <a:ln/>
         </p:spPr>
       </p:sp>
       <p:sp>
         <p:nvSpPr>
-          <p:cNvPr id="6" name="Text 4"/>
-          <p:cNvSpPr/>
-          <p:nvPr/>
-        </p:nvSpPr>
-        <p:spPr>
-          <a:xfrm>
-            <a:off x="548640" y="4800600"/>
-            <a:ext cx="3657600" cy="274320"/>
+          <p:cNvPr id="8" name="Text 6"/>
+          <p:cNvSpPr/>
+          <p:nvPr/>
+        </p:nvSpPr>
+        <p:spPr>
+          <a:xfrm>
+            <a:off x="5120640" y="1371600"/>
+            <a:ext cx="3291840" cy="3108960"/>
           </a:xfrm>
           <a:prstGeom prst="rect">
             <a:avLst/>
@@ -2586,21 +2550,156 @@
           <a:ln/>
         </p:spPr>
         <p:txBody>
-          <a:bodyPr wrap="square" rtlCol="0" anchor="ctr"/>
+          <a:bodyPr wrap="square" rtlCol="0" anchor="t"/>
           <a:lstStyle/>
           <a:p>
             <a:pPr indent="0" marL="0">
+              <a:spcAft>
+                <a:spcPts val="400"/>
+              </a:spcAft>
               <a:buNone/>
             </a:pPr>
             <a:r>
-              <a:rPr lang="en-US" sz="800" dirty="0">
-                <a:solidFill>
-                  <a:srgbClr val="9B9690"/>
-                </a:solidFill>
-              </a:rPr>
-              <a:t>mrzocchi.com</a:t>
-            </a:r>
-            <a:endParaRPr lang="en-US" sz="800" dirty="0"/>
+              <a:rPr lang="en-US" sz="1600" b="1" dirty="0">
+                <a:solidFill>
+                  <a:srgbClr val="1B2A4A"/>
+                </a:solidFill>
+                <a:latin typeface="Calibri" pitchFamily="34" charset="0"/>
+                <a:ea typeface="Calibri" pitchFamily="34" charset="-122"/>
+                <a:cs typeface="Calibri" pitchFamily="34" charset="-120"/>
+              </a:rPr>
+              <a:t>Temperature &amp; Time</a:t>
+            </a:r>
+            <a:endParaRPr lang="en-US" sz="1600" dirty="0"/>
+          </a:p>
+          <a:p>
+            <a:pPr indent="0" marL="0">
+              <a:spcAft>
+                <a:spcPts val="400"/>
+              </a:spcAft>
+              <a:buNone/>
+            </a:pPr>
+            <a:endParaRPr lang="en-US" sz="1600" dirty="0"/>
+          </a:p>
+          <a:p>
+            <a:pPr indent="0" marL="0">
+              <a:spcAft>
+                <a:spcPts val="400"/>
+              </a:spcAft>
+              <a:buNone/>
+            </a:pPr>
+            <a:r>
+              <a:rPr lang="en-US" sz="1300" dirty="0">
+                <a:solidFill>
+                  <a:srgbClr val="3D3A36"/>
+                </a:solidFill>
+                <a:latin typeface="Calibri" pitchFamily="34" charset="0"/>
+                <a:ea typeface="Calibri" pitchFamily="34" charset="-122"/>
+                <a:cs typeface="Calibri" pitchFamily="34" charset="-120"/>
+              </a:rPr>
+              <a:t>Temperature measured in degrees Celsius (°C)</a:t>
+            </a:r>
+            <a:endParaRPr lang="en-US" sz="1600" dirty="0"/>
+          </a:p>
+          <a:p>
+            <a:pPr indent="0" marL="0">
+              <a:spcAft>
+                <a:spcPts val="400"/>
+              </a:spcAft>
+              <a:buNone/>
+            </a:pPr>
+            <a:r>
+              <a:rPr lang="en-US" sz="1300" dirty="0">
+                <a:solidFill>
+                  <a:srgbClr val="3D3A36"/>
+                </a:solidFill>
+                <a:latin typeface="Calibri" pitchFamily="34" charset="0"/>
+                <a:ea typeface="Calibri" pitchFamily="34" charset="-122"/>
+                <a:cs typeface="Calibri" pitchFamily="34" charset="-120"/>
+              </a:rPr>
+              <a:t>Use a thermometer — read at eye level</a:t>
+            </a:r>
+            <a:endParaRPr lang="en-US" sz="1600" dirty="0"/>
+          </a:p>
+          <a:p>
+            <a:pPr indent="0" marL="0">
+              <a:spcAft>
+                <a:spcPts val="400"/>
+              </a:spcAft>
+              <a:buNone/>
+            </a:pPr>
+            <a:r>
+              <a:rPr lang="en-US" sz="1300" dirty="0">
+                <a:solidFill>
+                  <a:srgbClr val="3D3A36"/>
+                </a:solidFill>
+                <a:latin typeface="Calibri" pitchFamily="34" charset="0"/>
+                <a:ea typeface="Calibri" pitchFamily="34" charset="-122"/>
+                <a:cs typeface="Calibri" pitchFamily="34" charset="-120"/>
+              </a:rPr>
+              <a:t>Water freezes at 0°C, boils at 100°C</a:t>
+            </a:r>
+            <a:endParaRPr lang="en-US" sz="1600" dirty="0"/>
+          </a:p>
+          <a:p>
+            <a:pPr indent="0" marL="0">
+              <a:spcAft>
+                <a:spcPts val="400"/>
+              </a:spcAft>
+              <a:buNone/>
+            </a:pPr>
+            <a:r>
+              <a:rPr lang="en-US" sz="1300" dirty="0">
+                <a:solidFill>
+                  <a:srgbClr val="3D3A36"/>
+                </a:solidFill>
+                <a:latin typeface="Calibri" pitchFamily="34" charset="0"/>
+                <a:ea typeface="Calibri" pitchFamily="34" charset="-122"/>
+                <a:cs typeface="Calibri" pitchFamily="34" charset="-120"/>
+              </a:rPr>
+              <a:t>Time measured in seconds (s)</a:t>
+            </a:r>
+            <a:endParaRPr lang="en-US" sz="1600" dirty="0"/>
+          </a:p>
+          <a:p>
+            <a:pPr indent="0" marL="0">
+              <a:spcAft>
+                <a:spcPts val="400"/>
+              </a:spcAft>
+              <a:buNone/>
+            </a:pPr>
+            <a:r>
+              <a:rPr lang="en-US" sz="1300" dirty="0">
+                <a:solidFill>
+                  <a:srgbClr val="3D3A36"/>
+                </a:solidFill>
+                <a:latin typeface="Calibri" pitchFamily="34" charset="0"/>
+                <a:ea typeface="Calibri" pitchFamily="34" charset="-122"/>
+                <a:cs typeface="Calibri" pitchFamily="34" charset="-120"/>
+              </a:rPr>
+              <a:t>Use a stopwatch — practise reaction time</a:t>
+            </a:r>
+            <a:endParaRPr lang="en-US" sz="1600" dirty="0"/>
+          </a:p>
+          <a:p>
+            <a:pPr indent="0" marL="0">
+              <a:spcAft>
+                <a:spcPts val="400"/>
+              </a:spcAft>
+              <a:buNone/>
+            </a:pPr>
+            <a:r>
+              <a:rPr lang="en-US" sz="1300" dirty="0">
+                <a:solidFill>
+                  <a:srgbClr val="3D3A36"/>
+                </a:solidFill>
+                <a:latin typeface="Calibri" pitchFamily="34" charset="0"/>
+                <a:ea typeface="Calibri" pitchFamily="34" charset="-122"/>
+                <a:cs typeface="Calibri" pitchFamily="34" charset="-120"/>
+              </a:rPr>
+              <a:t>1 minute = 60 seconds</a:t>
+            </a:r>
+            <a:endParaRPr lang="en-US" sz="1600" dirty="0"/>
           </a:p>
         </p:txBody>
       </p:sp>
@@ -2615,6 +2714,305 @@
 <file path=ppt/slides/slide5.xml><?xml version="1.0" encoding="utf-8"?>
 <p:sld xmlns:a="http://schemas.openxmlformats.org/drawingml/2006/main" xmlns:r="http://schemas.openxmlformats.org/officeDocument/2006/relationships" xmlns:p="http://schemas.openxmlformats.org/presentationml/2006/main">
   <p:cSld name="Slide 5">
+    <p:bg>
+      <p:bgPr>
+        <a:solidFill>
+          <a:srgbClr val="FAF8F5"/>
+        </a:solidFill>
+      </p:bgPr>
+    </p:bg>
+    <p:spTree>
+      <p:nvGrpSpPr>
+        <p:cNvPr id="1" name=""/>
+        <p:cNvGrpSpPr/>
+        <p:nvPr/>
+      </p:nvGrpSpPr>
+      <p:grpSpPr>
+        <a:xfrm>
+          <a:off x="0" y="0"/>
+          <a:ext cx="0" cy="0"/>
+          <a:chOff x="0" y="0"/>
+          <a:chExt cx="0" cy="0"/>
+        </a:xfrm>
+      </p:grpSpPr>
+      <p:sp>
+        <p:nvSpPr>
+          <p:cNvPr id="2" name="Shape 0"/>
+          <p:cNvSpPr/>
+          <p:nvPr/>
+        </p:nvSpPr>
+        <p:spPr>
+          <a:xfrm>
+            <a:off x="0" y="0"/>
+            <a:ext cx="9144000" cy="54864"/>
+          </a:xfrm>
+          <a:prstGeom prst="rect">
+            <a:avLst/>
+          </a:prstGeom>
+          <a:solidFill>
+            <a:srgbClr val="2A9D8F"/>
+          </a:solidFill>
+          <a:ln/>
+        </p:spPr>
+      </p:sp>
+      <p:sp>
+        <p:nvSpPr>
+          <p:cNvPr id="3" name="Text 1"/>
+          <p:cNvSpPr/>
+          <p:nvPr/>
+        </p:nvSpPr>
+        <p:spPr>
+          <a:xfrm>
+            <a:off x="7772400" y="4709160"/>
+            <a:ext cx="1097280" cy="320040"/>
+          </a:xfrm>
+          <a:prstGeom prst="rect">
+            <a:avLst/>
+          </a:prstGeom>
+          <a:noFill/>
+          <a:ln/>
+        </p:spPr>
+        <p:txBody>
+          <a:bodyPr wrap="square" rtlCol="0" anchor="ctr"/>
+          <a:lstStyle/>
+          <a:p>
+            <a:pPr algn="r" indent="0" marL="0">
+              <a:buNone/>
+            </a:pPr>
+            <a:r>
+              <a:rPr lang="en-US" sz="900" dirty="0">
+                <a:solidFill>
+                  <a:srgbClr val="6B6660"/>
+                </a:solidFill>
+                <a:latin typeface="Calibri" pitchFamily="34" charset="0"/>
+                <a:ea typeface="Calibri" pitchFamily="34" charset="-122"/>
+                <a:cs typeface="Calibri" pitchFamily="34" charset="-120"/>
+              </a:rPr>
+              <a:t>5 / 6</a:t>
+            </a:r>
+            <a:endParaRPr lang="en-US" sz="900" dirty="0"/>
+          </a:p>
+        </p:txBody>
+      </p:sp>
+      <p:sp>
+        <p:nvSpPr>
+          <p:cNvPr id="4" name="Text 2"/>
+          <p:cNvSpPr/>
+          <p:nvPr/>
+        </p:nvSpPr>
+        <p:spPr>
+          <a:xfrm>
+            <a:off x="457200" y="274320"/>
+            <a:ext cx="8229600" cy="640080"/>
+          </a:xfrm>
+          <a:prstGeom prst="rect">
+            <a:avLst/>
+          </a:prstGeom>
+          <a:noFill/>
+          <a:ln/>
+        </p:spPr>
+        <p:txBody>
+          <a:bodyPr wrap="square" rtlCol="0" anchor="ctr"/>
+          <a:lstStyle/>
+          <a:p>
+            <a:pPr indent="0" marL="0">
+              <a:buNone/>
+            </a:pPr>
+            <a:r>
+              <a:rPr lang="en-US" sz="2600" b="1" dirty="0">
+                <a:solidFill>
+                  <a:srgbClr val="1B2A4A"/>
+                </a:solidFill>
+                <a:latin typeface="Georgia" pitchFamily="34" charset="0"/>
+                <a:ea typeface="Georgia" pitchFamily="34" charset="-122"/>
+                <a:cs typeface="Georgia" pitchFamily="34" charset="-120"/>
+              </a:rPr>
+              <a:t>Metric Prefixes &amp; Conversions</a:t>
+            </a:r>
+            <a:endParaRPr lang="en-US" sz="2600" dirty="0"/>
+          </a:p>
+        </p:txBody>
+      </p:sp>
+      <p:sp>
+        <p:nvSpPr>
+          <p:cNvPr id="5" name="Text 3"/>
+          <p:cNvSpPr/>
+          <p:nvPr/>
+        </p:nvSpPr>
+        <p:spPr>
+          <a:xfrm>
+            <a:off x="457200" y="1097280"/>
+            <a:ext cx="8229600" cy="3657600"/>
+          </a:xfrm>
+          <a:prstGeom prst="rect">
+            <a:avLst/>
+          </a:prstGeom>
+          <a:noFill/>
+          <a:ln/>
+        </p:spPr>
+        <p:txBody>
+          <a:bodyPr wrap="square" rtlCol="0" anchor="t"/>
+          <a:lstStyle/>
+          <a:p>
+            <a:pPr marL="342900" indent="-342900">
+              <a:spcAft>
+                <a:spcPts val="800"/>
+              </a:spcAft>
+              <a:buSzPct val="100000"/>
+              <a:buChar char="•"/>
+            </a:pPr>
+            <a:r>
+              <a:rPr lang="en-US" sz="1400" dirty="0">
+                <a:solidFill>
+                  <a:srgbClr val="3D3A36"/>
+                </a:solidFill>
+                <a:latin typeface="Calibri" pitchFamily="34" charset="0"/>
+                <a:ea typeface="Calibri" pitchFamily="34" charset="-122"/>
+                <a:cs typeface="Calibri" pitchFamily="34" charset="-120"/>
+              </a:rPr>
+              <a:t>kilo (k) = × 1000 — 1 km = 1000 m</a:t>
+            </a:r>
+            <a:endParaRPr lang="en-US" sz="1400" dirty="0"/>
+          </a:p>
+          <a:p>
+            <a:pPr marL="342900" indent="-342900">
+              <a:spcAft>
+                <a:spcPts val="800"/>
+              </a:spcAft>
+              <a:buSzPct val="100000"/>
+              <a:buChar char="•"/>
+            </a:pPr>
+            <a:r>
+              <a:rPr lang="en-US" sz="1400" dirty="0">
+                <a:solidFill>
+                  <a:srgbClr val="3D3A36"/>
+                </a:solidFill>
+                <a:latin typeface="Calibri" pitchFamily="34" charset="0"/>
+                <a:ea typeface="Calibri" pitchFamily="34" charset="-122"/>
+                <a:cs typeface="Calibri" pitchFamily="34" charset="-120"/>
+              </a:rPr>
+              <a:t>base unit: metre, gram, litre, second</a:t>
+            </a:r>
+            <a:endParaRPr lang="en-US" sz="1400" dirty="0"/>
+          </a:p>
+          <a:p>
+            <a:pPr marL="342900" indent="-342900">
+              <a:spcAft>
+                <a:spcPts val="800"/>
+              </a:spcAft>
+              <a:buSzPct val="100000"/>
+              <a:buChar char="•"/>
+            </a:pPr>
+            <a:r>
+              <a:rPr lang="en-US" sz="1400" dirty="0">
+                <a:solidFill>
+                  <a:srgbClr val="3D3A36"/>
+                </a:solidFill>
+                <a:latin typeface="Calibri" pitchFamily="34" charset="0"/>
+                <a:ea typeface="Calibri" pitchFamily="34" charset="-122"/>
+                <a:cs typeface="Calibri" pitchFamily="34" charset="-120"/>
+              </a:rPr>
+              <a:t>milli (m) = ÷ 1000 — 1 m = 1000 mm</a:t>
+            </a:r>
+            <a:endParaRPr lang="en-US" sz="1400" dirty="0"/>
+          </a:p>
+          <a:p>
+            <a:pPr marL="342900" indent="-342900">
+              <a:spcAft>
+                <a:spcPts val="800"/>
+              </a:spcAft>
+              <a:buSzPct val="100000"/>
+              <a:buChar char="•"/>
+            </a:pPr>
+            <a:r>
+              <a:rPr lang="en-US" sz="1400" dirty="0">
+                <a:solidFill>
+                  <a:srgbClr val="3D3A36"/>
+                </a:solidFill>
+                <a:latin typeface="Calibri" pitchFamily="34" charset="0"/>
+                <a:ea typeface="Calibri" pitchFamily="34" charset="-122"/>
+                <a:cs typeface="Calibri" pitchFamily="34" charset="-120"/>
+              </a:rPr>
+              <a:t>To convert larger → smaller: MULTIPLY</a:t>
+            </a:r>
+            <a:endParaRPr lang="en-US" sz="1400" dirty="0"/>
+          </a:p>
+          <a:p>
+            <a:pPr marL="342900" indent="-342900">
+              <a:spcAft>
+                <a:spcPts val="800"/>
+              </a:spcAft>
+              <a:buSzPct val="100000"/>
+              <a:buChar char="•"/>
+            </a:pPr>
+            <a:r>
+              <a:rPr lang="en-US" sz="1400" dirty="0">
+                <a:solidFill>
+                  <a:srgbClr val="3D3A36"/>
+                </a:solidFill>
+                <a:latin typeface="Calibri" pitchFamily="34" charset="0"/>
+                <a:ea typeface="Calibri" pitchFamily="34" charset="-122"/>
+                <a:cs typeface="Calibri" pitchFamily="34" charset="-120"/>
+              </a:rPr>
+              <a:t>To convert smaller → larger: DIVIDE</a:t>
+            </a:r>
+            <a:endParaRPr lang="en-US" sz="1400" dirty="0"/>
+          </a:p>
+          <a:p>
+            <a:pPr marL="342900" indent="-342900">
+              <a:spcAft>
+                <a:spcPts val="800"/>
+              </a:spcAft>
+              <a:buSzPct val="100000"/>
+              <a:buChar char="•"/>
+            </a:pPr>
+            <a:r>
+              <a:rPr lang="en-US" sz="1400" dirty="0">
+                <a:solidFill>
+                  <a:srgbClr val="3D3A36"/>
+                </a:solidFill>
+                <a:latin typeface="Calibri" pitchFamily="34" charset="0"/>
+                <a:ea typeface="Calibri" pitchFamily="34" charset="-122"/>
+                <a:cs typeface="Calibri" pitchFamily="34" charset="-120"/>
+              </a:rPr>
+              <a:t>Example: 2.5 km = 2.5 × 1000 = 2500 m</a:t>
+            </a:r>
+            <a:endParaRPr lang="en-US" sz="1400" dirty="0"/>
+          </a:p>
+          <a:p>
+            <a:pPr marL="342900" indent="-342900">
+              <a:spcAft>
+                <a:spcPts val="800"/>
+              </a:spcAft>
+              <a:buSzPct val="100000"/>
+              <a:buChar char="•"/>
+            </a:pPr>
+            <a:r>
+              <a:rPr lang="en-US" sz="1400" dirty="0">
+                <a:solidFill>
+                  <a:srgbClr val="3D3A36"/>
+                </a:solidFill>
+                <a:latin typeface="Calibri" pitchFamily="34" charset="0"/>
+                <a:ea typeface="Calibri" pitchFamily="34" charset="-122"/>
+                <a:cs typeface="Calibri" pitchFamily="34" charset="-120"/>
+              </a:rPr>
+              <a:t>Example: 450 mL = 450 ÷ 1000 = 0.45 L</a:t>
+            </a:r>
+            <a:endParaRPr lang="en-US" sz="1400" dirty="0"/>
+          </a:p>
+        </p:txBody>
+      </p:sp>
+    </p:spTree>
+  </p:cSld>
+  <p:clrMapOvr>
+    <a:masterClrMapping/>
+  </p:clrMapOvr>
+</p:sld>
+</file>
+
+<file path=ppt/slides/slide6.xml><?xml version="1.0" encoding="utf-8"?>
+<p:sld xmlns:a="http://schemas.openxmlformats.org/drawingml/2006/main" xmlns:r="http://schemas.openxmlformats.org/officeDocument/2006/relationships" xmlns:p="http://schemas.openxmlformats.org/presentationml/2006/main">
+  <p:cSld name="Slide 6">
     <p:bg>
       <p:bgPr>
         <a:solidFill>
@@ -2645,13 +3043,13 @@
         <p:spPr>
           <a:xfrm>
             <a:off x="0" y="0"/>
-            <a:ext cx="9144000" cy="54864"/>
-          </a:xfrm>
-          <a:prstGeom prst="rect">
-            <a:avLst/>
-          </a:prstGeom>
-          <a:solidFill>
-            <a:srgbClr val="2A9D8F"/>
+            <a:ext cx="109728" cy="5143500"/>
+          </a:xfrm>
+          <a:prstGeom prst="rect">
+            <a:avLst/>
+          </a:prstGeom>
+          <a:solidFill>
+            <a:srgbClr val="E9C46A"/>
           </a:solidFill>
           <a:ln/>
         </p:spPr>
@@ -2664,8 +3062,8 @@
         </p:nvSpPr>
         <p:spPr>
           <a:xfrm>
-            <a:off x="548640" y="457200"/>
-            <a:ext cx="8046720" cy="640080"/>
+            <a:off x="731520" y="457200"/>
+            <a:ext cx="7772400" cy="731520"/>
           </a:xfrm>
           <a:prstGeom prst="rect">
             <a:avLst/>
@@ -2681,7 +3079,7 @@
               <a:buNone/>
             </a:pPr>
             <a:r>
-              <a:rPr lang="en-US" sz="2800" b="1" dirty="0">
+              <a:rPr lang="en-US" sz="3200" b="1" dirty="0">
                 <a:solidFill>
                   <a:srgbClr val="FFFFFF"/>
                 </a:solidFill>
@@ -2691,7 +3089,7 @@
               </a:rPr>
               <a:t>Key Takeaways</a:t>
             </a:r>
-            <a:endParaRPr lang="en-US" sz="2800" dirty="0"/>
+            <a:endParaRPr lang="en-US" sz="3200" dirty="0"/>
           </a:p>
         </p:txBody>
       </p:sp>
@@ -2703,8 +3101,8 @@
         </p:nvSpPr>
         <p:spPr>
           <a:xfrm>
-            <a:off x="731520" y="1371600"/>
-            <a:ext cx="7680960" cy="3200400"/>
+            <a:off x="731520" y="1463040"/>
+            <a:ext cx="7772400" cy="3200400"/>
           </a:xfrm>
           <a:prstGeom prst="rect">
             <a:avLst/>
@@ -2724,7 +3122,7 @@
               <a:buChar char="•"/>
             </a:pPr>
             <a:r>
-              <a:rPr lang="en-US" sz="1600" dirty="0">
+              <a:rPr lang="en-US" sz="1500" dirty="0">
                 <a:solidFill>
                   <a:srgbClr val="CADCFC"/>
                 </a:solidFill>
@@ -2732,9 +3130,9 @@
                 <a:ea typeface="Calibri" pitchFamily="34" charset="-122"/>
                 <a:cs typeface="Calibri" pitchFamily="34" charset="-120"/>
               </a:rPr>
-              <a:t>Always use SI units in science</a:t>
-            </a:r>
-            <a:endParaRPr lang="en-US" sz="1600" dirty="0"/>
+              <a:t>SI units: metres (length), grams (mass), litres (volume), °C (temperature), seconds (time)</a:t>
+            </a:r>
+            <a:endParaRPr lang="en-US" sz="1500" dirty="0"/>
           </a:p>
           <a:p>
             <a:pPr marL="342900" indent="-342900">
@@ -2745,7 +3143,7 @@
               <a:buChar char="•"/>
             </a:pPr>
             <a:r>
-              <a:rPr lang="en-US" sz="1600" dirty="0">
+              <a:rPr lang="en-US" sz="1500" dirty="0">
                 <a:solidFill>
                   <a:srgbClr val="CADCFC"/>
                 </a:solidFill>
@@ -2753,9 +3151,9 @@
                 <a:ea typeface="Calibri" pitchFamily="34" charset="-122"/>
                 <a:cs typeface="Calibri" pitchFamily="34" charset="-120"/>
               </a:rPr>
-              <a:t>Take multiple readings and calculate the mean</a:t>
-            </a:r>
-            <a:endParaRPr lang="en-US" sz="1600" dirty="0"/>
+              <a:t>Always read instruments at eye level</a:t>
+            </a:r>
+            <a:endParaRPr lang="en-US" sz="1500" dirty="0"/>
           </a:p>
           <a:p>
             <a:pPr marL="342900" indent="-342900">
@@ -2766,7 +3164,7 @@
               <a:buChar char="•"/>
             </a:pPr>
             <a:r>
-              <a:rPr lang="en-US" sz="1600" dirty="0">
+              <a:rPr lang="en-US" sz="1500" dirty="0">
                 <a:solidFill>
                   <a:srgbClr val="CADCFC"/>
                 </a:solidFill>
@@ -2774,9 +3172,9 @@
                 <a:ea typeface="Calibri" pitchFamily="34" charset="-122"/>
                 <a:cs typeface="Calibri" pitchFamily="34" charset="-120"/>
               </a:rPr>
-              <a:t>Read scales at eye level</a:t>
-            </a:r>
-            <a:endParaRPr lang="en-US" sz="1600" dirty="0"/>
+              <a:t>Record units with every measurement</a:t>
+            </a:r>
+            <a:endParaRPr lang="en-US" sz="1500" dirty="0"/>
           </a:p>
           <a:p>
             <a:pPr marL="342900" indent="-342900">
@@ -2787,7 +3185,7 @@
               <a:buChar char="•"/>
             </a:pPr>
             <a:r>
-              <a:rPr lang="en-US" sz="1600" dirty="0">
+              <a:rPr lang="en-US" sz="1500" dirty="0">
                 <a:solidFill>
                   <a:srgbClr val="CADCFC"/>
                 </a:solidFill>
@@ -2795,9 +3193,30 @@
                 <a:ea typeface="Calibri" pitchFamily="34" charset="-122"/>
                 <a:cs typeface="Calibri" pitchFamily="34" charset="-120"/>
               </a:rPr>
-              <a:t>Record measurements with the correct unit immediately</a:t>
-            </a:r>
-            <a:endParaRPr lang="en-US" sz="1600" dirty="0"/>
+              <a:t>kilo = ×1000, milli = ÷1000</a:t>
+            </a:r>
+            <a:endParaRPr lang="en-US" sz="1500" dirty="0"/>
+          </a:p>
+          <a:p>
+            <a:pPr marL="342900" indent="-342900">
+              <a:spcAft>
+                <a:spcPts val="1000"/>
+              </a:spcAft>
+              <a:buSzPct val="100000"/>
+              <a:buChar char="•"/>
+            </a:pPr>
+            <a:r>
+              <a:rPr lang="en-US" sz="1500" dirty="0">
+                <a:solidFill>
+                  <a:srgbClr val="CADCFC"/>
+                </a:solidFill>
+                <a:latin typeface="Calibri" pitchFamily="34" charset="0"/>
+                <a:ea typeface="Calibri" pitchFamily="34" charset="-122"/>
+                <a:cs typeface="Calibri" pitchFamily="34" charset="-120"/>
+              </a:rPr>
+              <a:t>A fair test requires accurate, consistent measurement</a:t>
+            </a:r>
+            <a:endParaRPr lang="en-US" sz="1500" dirty="0"/>
           </a:p>
         </p:txBody>
       </p:sp>
@@ -2809,8 +3228,8 @@
         </p:nvSpPr>
         <p:spPr>
           <a:xfrm>
-            <a:off x="548640" y="4572000"/>
-            <a:ext cx="3657600" cy="274320"/>
+            <a:off x="731520" y="4572000"/>
+            <a:ext cx="7772400" cy="365760"/>
           </a:xfrm>
           <a:prstGeom prst="rect">
             <a:avLst/>
@@ -2826,14 +3245,17 @@
               <a:buNone/>
             </a:pPr>
             <a:r>
-              <a:rPr lang="en-US" sz="1000" dirty="0">
-                <a:solidFill>
-                  <a:srgbClr val="6B6660"/>
-                </a:solidFill>
+              <a:rPr lang="en-US" sz="1100" dirty="0">
+                <a:solidFill>
+                  <a:srgbClr val="E9C46A"/>
+                </a:solidFill>
+                <a:latin typeface="Calibri" pitchFamily="34" charset="0"/>
+                <a:ea typeface="Calibri" pitchFamily="34" charset="-122"/>
+                <a:cs typeface="Calibri" pitchFamily="34" charset="-120"/>
               </a:rPr>
               <a:t>mrzocchi.com</a:t>
             </a:r>
-            <a:endParaRPr lang="en-US" sz="1000" dirty="0"/>
+            <a:endParaRPr lang="en-US" sz="1100" dirty="0"/>
           </a:p>
         </p:txBody>
       </p:sp>

--- a/static/ppts/G6_Sci_T1_Measurement.pptx
+++ b/static/ppts/G6_Sci_T1_Measurement.pptx
@@ -11,9 +11,11 @@
     <p:sldId id="259" r:id="rId5"/>
     <p:sldId id="260" r:id="rId6"/>
     <p:sldId id="261" r:id="rId7"/>
+    <p:sldId id="262" r:id="rId8"/>
+    <p:sldId id="263" r:id="rId9"/>
   </p:sldIdLst>
   <p:notesMasterIdLst>
-    <p:notesMasterId r:id="rId8"/>
+    <p:notesMasterId r:id="rId10"/>
   </p:notesMasterIdLst>
   <p:sldSz cx="9144000" cy="5143500"/>
   <p:notesSz cx="5143500" cy="9144000"/>
@@ -971,6 +973,182 @@
             <a:fld id="{F7021451-1387-4CA6-816F-3879F97B5CBC}" type="slidenum">
               <a:rPr lang="en-US"/>
               <a:t>6</a:t>
+            </a:fld>
+            <a:endParaRPr lang="en-US"/>
+          </a:p>
+        </p:txBody>
+      </p:sp>
+    </p:spTree>
+    <p:extLst>
+      <p:ext uri="{BB962C8B-B14F-4D97-AF65-F5344CB8AC3E}">
+        <p14:creationId xmlns:p14="http://schemas.microsoft.com/office/powerpoint/2010/main" val="1024086991"/>
+      </p:ext>
+    </p:extLst>
+  </p:cSld>
+  <p:clrMapOvr>
+    <a:masterClrMapping/>
+  </p:clrMapOvr>
+</p:notes>
+</file>
+
+<file path=ppt/notesSlides/notesSlide7.xml><?xml version="1.0" encoding="utf-8"?>
+<p:notes xmlns:a="http://schemas.openxmlformats.org/drawingml/2006/main" xmlns:r="http://schemas.openxmlformats.org/officeDocument/2006/relationships" xmlns:p="http://schemas.openxmlformats.org/presentationml/2006/main">
+  <p:cSld>
+    <p:spTree>
+      <p:nvGrpSpPr>
+        <p:cNvPr id="1" name=""/>
+        <p:cNvGrpSpPr/>
+        <p:nvPr/>
+      </p:nvGrpSpPr>
+      <p:grpSpPr>
+        <a:xfrm>
+          <a:off x="0" y="0"/>
+          <a:ext cx="0" cy="0"/>
+          <a:chOff x="0" y="0"/>
+          <a:chExt cx="0" cy="0"/>
+        </a:xfrm>
+      </p:grpSpPr>
+      <p:sp>
+        <p:nvSpPr>
+          <p:cNvPr id="2" name="Slide Image Placeholder 1"/>
+          <p:cNvSpPr>
+            <a:spLocks noGrp="1" noRot="1" noChangeAspect="1"/>
+          </p:cNvSpPr>
+          <p:nvPr>
+            <p:ph type="sldImg"/>
+          </p:nvPr>
+        </p:nvSpPr>
+        <p:spPr/>
+      </p:sp>
+      <p:sp>
+        <p:nvSpPr>
+          <p:cNvPr id="3" name="Notes Placeholder 2"/>
+          <p:cNvSpPr>
+            <a:spLocks noGrp="1"/>
+          </p:cNvSpPr>
+          <p:nvPr>
+            <p:ph type="body" idx="1"/>
+          </p:nvPr>
+        </p:nvSpPr>
+        <p:spPr/>
+        <p:txBody>
+          <a:bodyPr/>
+          <a:lstStyle/>
+          <a:p>
+            <a:r>
+              <a:rPr lang="en-US" dirty="0"/>
+              <a:t/>
+            </a:r>
+            <a:endParaRPr lang="en-US" dirty="0"/>
+          </a:p>
+        </p:txBody>
+      </p:sp>
+      <p:sp>
+        <p:nvSpPr>
+          <p:cNvPr id="4" name="Slide Number Placeholder 3"/>
+          <p:cNvSpPr>
+            <a:spLocks noGrp="1"/>
+          </p:cNvSpPr>
+          <p:nvPr>
+            <p:ph type="sldNum" sz="quarter" idx="10"/>
+          </p:nvPr>
+        </p:nvSpPr>
+        <p:spPr/>
+        <p:txBody>
+          <a:bodyPr/>
+          <a:lstStyle/>
+          <a:p>
+            <a:fld id="{F7021451-1387-4CA6-816F-3879F97B5CBC}" type="slidenum">
+              <a:rPr lang="en-US"/>
+              <a:t>7</a:t>
+            </a:fld>
+            <a:endParaRPr lang="en-US"/>
+          </a:p>
+        </p:txBody>
+      </p:sp>
+    </p:spTree>
+    <p:extLst>
+      <p:ext uri="{BB962C8B-B14F-4D97-AF65-F5344CB8AC3E}">
+        <p14:creationId xmlns:p14="http://schemas.microsoft.com/office/powerpoint/2010/main" val="1024086991"/>
+      </p:ext>
+    </p:extLst>
+  </p:cSld>
+  <p:clrMapOvr>
+    <a:masterClrMapping/>
+  </p:clrMapOvr>
+</p:notes>
+</file>
+
+<file path=ppt/notesSlides/notesSlide8.xml><?xml version="1.0" encoding="utf-8"?>
+<p:notes xmlns:a="http://schemas.openxmlformats.org/drawingml/2006/main" xmlns:r="http://schemas.openxmlformats.org/officeDocument/2006/relationships" xmlns:p="http://schemas.openxmlformats.org/presentationml/2006/main">
+  <p:cSld>
+    <p:spTree>
+      <p:nvGrpSpPr>
+        <p:cNvPr id="1" name=""/>
+        <p:cNvGrpSpPr/>
+        <p:nvPr/>
+      </p:nvGrpSpPr>
+      <p:grpSpPr>
+        <a:xfrm>
+          <a:off x="0" y="0"/>
+          <a:ext cx="0" cy="0"/>
+          <a:chOff x="0" y="0"/>
+          <a:chExt cx="0" cy="0"/>
+        </a:xfrm>
+      </p:grpSpPr>
+      <p:sp>
+        <p:nvSpPr>
+          <p:cNvPr id="2" name="Slide Image Placeholder 1"/>
+          <p:cNvSpPr>
+            <a:spLocks noGrp="1" noRot="1" noChangeAspect="1"/>
+          </p:cNvSpPr>
+          <p:nvPr>
+            <p:ph type="sldImg"/>
+          </p:nvPr>
+        </p:nvSpPr>
+        <p:spPr/>
+      </p:sp>
+      <p:sp>
+        <p:nvSpPr>
+          <p:cNvPr id="3" name="Notes Placeholder 2"/>
+          <p:cNvSpPr>
+            <a:spLocks noGrp="1"/>
+          </p:cNvSpPr>
+          <p:nvPr>
+            <p:ph type="body" idx="1"/>
+          </p:nvPr>
+        </p:nvSpPr>
+        <p:spPr/>
+        <p:txBody>
+          <a:bodyPr/>
+          <a:lstStyle/>
+          <a:p>
+            <a:r>
+              <a:rPr lang="en-US" dirty="0"/>
+              <a:t/>
+            </a:r>
+            <a:endParaRPr lang="en-US" dirty="0"/>
+          </a:p>
+        </p:txBody>
+      </p:sp>
+      <p:sp>
+        <p:nvSpPr>
+          <p:cNvPr id="4" name="Slide Number Placeholder 3"/>
+          <p:cNvSpPr>
+            <a:spLocks noGrp="1"/>
+          </p:cNvSpPr>
+          <p:nvPr>
+            <p:ph type="sldNum" sz="quarter" idx="10"/>
+          </p:nvPr>
+        </p:nvSpPr>
+        <p:spPr/>
+        <p:txBody>
+          <a:bodyPr/>
+          <a:lstStyle/>
+          <a:p>
+            <a:fld id="{F7021451-1387-4CA6-816F-3879F97B5CBC}" type="slidenum">
+              <a:rPr lang="en-US"/>
+              <a:t>8</a:t>
             </a:fld>
             <a:endParaRPr lang="en-US"/>
           </a:p>
@@ -1299,13 +1477,6 @@
 <file path=ppt/slides/slide1.xml><?xml version="1.0" encoding="utf-8"?>
 <p:sld xmlns:a="http://schemas.openxmlformats.org/drawingml/2006/main" xmlns:r="http://schemas.openxmlformats.org/officeDocument/2006/relationships" xmlns:p="http://schemas.openxmlformats.org/presentationml/2006/main">
   <p:cSld name="Slide 1">
-    <p:bg>
-      <p:bgPr>
-        <a:solidFill>
-          <a:srgbClr val="1B2A4A"/>
-        </a:solidFill>
-      </p:bgPr>
-    </p:bg>
     <p:spTree>
       <p:nvGrpSpPr>
         <p:cNvPr id="1" name=""/>
@@ -1329,7 +1500,27 @@
         <p:spPr>
           <a:xfrm>
             <a:off x="0" y="0"/>
-            <a:ext cx="109728" cy="5143500"/>
+            <a:ext cx="9144000" cy="5143500"/>
+          </a:xfrm>
+          <a:prstGeom prst="rect">
+            <a:avLst/>
+          </a:prstGeom>
+          <a:solidFill>
+            <a:srgbClr val="1B2A4A"/>
+          </a:solidFill>
+          <a:ln/>
+        </p:spPr>
+      </p:sp>
+      <p:sp>
+        <p:nvSpPr>
+          <p:cNvPr id="3" name="Shape 1"/>
+          <p:cNvSpPr/>
+          <p:nvPr/>
+        </p:nvSpPr>
+        <p:spPr>
+          <a:xfrm>
+            <a:off x="0" y="4777740"/>
+            <a:ext cx="9144000" cy="365760"/>
           </a:xfrm>
           <a:prstGeom prst="rect">
             <a:avLst/>
@@ -1342,14 +1533,36 @@
       </p:sp>
       <p:sp>
         <p:nvSpPr>
-          <p:cNvPr id="3" name="Text 1"/>
-          <p:cNvSpPr/>
-          <p:nvPr/>
-        </p:nvSpPr>
-        <p:spPr>
-          <a:xfrm>
-            <a:off x="731520" y="1097280"/>
-            <a:ext cx="7772400" cy="1371600"/>
+          <p:cNvPr id="4" name="Shape 2"/>
+          <p:cNvSpPr/>
+          <p:nvPr/>
+        </p:nvSpPr>
+        <p:spPr>
+          <a:xfrm>
+            <a:off x="6858000" y="-1371600"/>
+            <a:ext cx="4572000" cy="4572000"/>
+          </a:xfrm>
+          <a:prstGeom prst="ellipse">
+            <a:avLst/>
+          </a:prstGeom>
+          <a:solidFill>
+            <a:srgbClr val="2A9D8F">
+              <a:alpha val="12000"/>
+            </a:srgbClr>
+          </a:solidFill>
+          <a:ln/>
+        </p:spPr>
+      </p:sp>
+      <p:sp>
+        <p:nvSpPr>
+          <p:cNvPr id="5" name="Text 3"/>
+          <p:cNvSpPr/>
+          <p:nvPr/>
+        </p:nvSpPr>
+        <p:spPr>
+          <a:xfrm>
+            <a:off x="731520" y="914400"/>
+            <a:ext cx="7680960" cy="457200"/>
           </a:xfrm>
           <a:prstGeom prst="rect">
             <a:avLst/>
@@ -1365,7 +1578,46 @@
               <a:buNone/>
             </a:pPr>
             <a:r>
-              <a:rPr lang="en-US" sz="4000" b="1" dirty="0">
+              <a:rPr lang="en-US" sz="1300" b="1" spc="500" kern="0" dirty="0">
+                <a:solidFill>
+                  <a:srgbClr val="2A9D8F"/>
+                </a:solidFill>
+                <a:latin typeface="Calibri" pitchFamily="34" charset="0"/>
+                <a:ea typeface="Calibri" pitchFamily="34" charset="-122"/>
+                <a:cs typeface="Calibri" pitchFamily="34" charset="-120"/>
+              </a:rPr>
+              <a:t>GRADE 6 SCIENCE</a:t>
+            </a:r>
+            <a:endParaRPr lang="en-US" sz="1300" dirty="0"/>
+          </a:p>
+        </p:txBody>
+      </p:sp>
+      <p:sp>
+        <p:nvSpPr>
+          <p:cNvPr id="6" name="Text 4"/>
+          <p:cNvSpPr/>
+          <p:nvPr/>
+        </p:nvSpPr>
+        <p:spPr>
+          <a:xfrm>
+            <a:off x="731520" y="1463040"/>
+            <a:ext cx="6858000" cy="1645920"/>
+          </a:xfrm>
+          <a:prstGeom prst="rect">
+            <a:avLst/>
+          </a:prstGeom>
+          <a:noFill/>
+          <a:ln/>
+        </p:spPr>
+        <p:txBody>
+          <a:bodyPr wrap="square" rtlCol="0" anchor="t"/>
+          <a:lstStyle/>
+          <a:p>
+            <a:pPr indent="0" marL="0">
+              <a:buNone/>
+            </a:pPr>
+            <a:r>
+              <a:rPr lang="en-US" sz="3800" b="1" dirty="0">
                 <a:solidFill>
                   <a:srgbClr val="FFFFFF"/>
                 </a:solidFill>
@@ -1375,20 +1627,20 @@
               </a:rPr>
               <a:t>Measurement &amp; Units</a:t>
             </a:r>
-            <a:endParaRPr lang="en-US" sz="4000" dirty="0"/>
+            <a:endParaRPr lang="en-US" sz="3800" dirty="0"/>
           </a:p>
         </p:txBody>
       </p:sp>
       <p:sp>
         <p:nvSpPr>
-          <p:cNvPr id="4" name="Text 2"/>
-          <p:cNvSpPr/>
-          <p:nvPr/>
-        </p:nvSpPr>
-        <p:spPr>
-          <a:xfrm>
-            <a:off x="731520" y="2560320"/>
-            <a:ext cx="7772400" cy="548640"/>
+          <p:cNvPr id="7" name="Text 5"/>
+          <p:cNvSpPr/>
+          <p:nvPr/>
+        </p:nvSpPr>
+        <p:spPr>
+          <a:xfrm>
+            <a:off x="731520" y="3200400"/>
+            <a:ext cx="6400800" cy="548640"/>
           </a:xfrm>
           <a:prstGeom prst="rect">
             <a:avLst/>
@@ -1404,15 +1656,15 @@
               <a:buNone/>
             </a:pPr>
             <a:r>
-              <a:rPr lang="en-US" sz="1600" dirty="0">
+              <a:rPr lang="en-US" sz="1600" i="1" dirty="0">
                 <a:solidFill>
-                  <a:srgbClr val="E9C46A"/>
+                  <a:srgbClr val="9B9690"/>
                 </a:solidFill>
                 <a:latin typeface="Calibri" pitchFamily="34" charset="0"/>
                 <a:ea typeface="Calibri" pitchFamily="34" charset="-122"/>
                 <a:cs typeface="Calibri" pitchFamily="34" charset="-120"/>
               </a:rPr>
-              <a:t>Grade 6 Science · Mr Zocchi</a:t>
+              <a:t>Accurate measurement is the foundation of science</a:t>
             </a:r>
             <a:endParaRPr lang="en-US" sz="1600" dirty="0"/>
           </a:p>
@@ -1420,36 +1672,14 @@
       </p:sp>
       <p:sp>
         <p:nvSpPr>
-          <p:cNvPr id="5" name="Shape 3"/>
-          <p:cNvSpPr/>
-          <p:nvPr/>
-        </p:nvSpPr>
-        <p:spPr>
-          <a:xfrm>
-            <a:off x="731520" y="3474720"/>
-            <a:ext cx="2011680" cy="411480"/>
-          </a:xfrm>
-          <a:prstGeom prst="roundRect">
-            <a:avLst>
-              <a:gd name="adj" fmla="val 17778"/>
-            </a:avLst>
-          </a:prstGeom>
-          <a:solidFill>
-            <a:srgbClr val="2A9D8F"/>
-          </a:solidFill>
-          <a:ln/>
-        </p:spPr>
-      </p:sp>
-      <p:sp>
-        <p:nvSpPr>
-          <p:cNvPr id="6" name="Text 4"/>
-          <p:cNvSpPr/>
-          <p:nvPr/>
-        </p:nvSpPr>
-        <p:spPr>
-          <a:xfrm>
-            <a:off x="731520" y="3474720"/>
-            <a:ext cx="2011680" cy="411480"/>
+          <p:cNvPr id="8" name="Text 6"/>
+          <p:cNvSpPr/>
+          <p:nvPr/>
+        </p:nvSpPr>
+        <p:spPr>
+          <a:xfrm>
+            <a:off x="731520" y="4297680"/>
+            <a:ext cx="2743200" cy="365760"/>
           </a:xfrm>
           <a:prstGeom prst="rect">
             <a:avLst/>
@@ -1461,21 +1691,21 @@
           <a:bodyPr wrap="square" rtlCol="0" anchor="ctr"/>
           <a:lstStyle/>
           <a:p>
-            <a:pPr algn="ctr" indent="0" marL="0">
+            <a:pPr indent="0" marL="0">
               <a:buNone/>
             </a:pPr>
             <a:r>
-              <a:rPr lang="en-US" sz="1200" b="1" dirty="0">
+              <a:rPr lang="en-US" sz="1100" dirty="0">
                 <a:solidFill>
-                  <a:srgbClr val="FFFFFF"/>
+                  <a:srgbClr val="9B9690"/>
                 </a:solidFill>
                 <a:latin typeface="Calibri" pitchFamily="34" charset="0"/>
                 <a:ea typeface="Calibri" pitchFamily="34" charset="-122"/>
                 <a:cs typeface="Calibri" pitchFamily="34" charset="-120"/>
               </a:rPr>
-              <a:t>Term 1 · Scientific Skills</a:t>
-            </a:r>
-            <a:endParaRPr lang="en-US" sz="1200" dirty="0"/>
+              <a:t>mrzocchi.com</a:t>
+            </a:r>
+            <a:endParaRPr lang="en-US" sz="1100" dirty="0"/>
           </a:p>
         </p:txBody>
       </p:sp>
@@ -1520,7 +1750,47 @@
         <p:spPr>
           <a:xfrm>
             <a:off x="0" y="0"/>
-            <a:ext cx="9144000" cy="54864"/>
+            <a:ext cx="9144000" cy="822960"/>
+          </a:xfrm>
+          <a:prstGeom prst="rect">
+            <a:avLst/>
+          </a:prstGeom>
+          <a:solidFill>
+            <a:srgbClr val="FFFFFF"/>
+          </a:solidFill>
+          <a:ln/>
+        </p:spPr>
+      </p:sp>
+      <p:sp>
+        <p:nvSpPr>
+          <p:cNvPr id="3" name="Shape 1"/>
+          <p:cNvSpPr/>
+          <p:nvPr/>
+        </p:nvSpPr>
+        <p:spPr>
+          <a:xfrm>
+            <a:off x="0" y="804672"/>
+            <a:ext cx="9144000" cy="27432"/>
+          </a:xfrm>
+          <a:prstGeom prst="rect">
+            <a:avLst/>
+          </a:prstGeom>
+          <a:solidFill>
+            <a:srgbClr val="E5E2DC"/>
+          </a:solidFill>
+          <a:ln/>
+        </p:spPr>
+      </p:sp>
+      <p:sp>
+        <p:nvSpPr>
+          <p:cNvPr id="4" name="Shape 2"/>
+          <p:cNvSpPr/>
+          <p:nvPr/>
+        </p:nvSpPr>
+        <p:spPr>
+          <a:xfrm>
+            <a:off x="548640" y="201168"/>
+            <a:ext cx="54864" cy="420624"/>
           </a:xfrm>
           <a:prstGeom prst="rect">
             <a:avLst/>
@@ -1533,14 +1803,14 @@
       </p:sp>
       <p:sp>
         <p:nvSpPr>
-          <p:cNvPr id="3" name="Text 1"/>
-          <p:cNvSpPr/>
-          <p:nvPr/>
-        </p:nvSpPr>
-        <p:spPr>
-          <a:xfrm>
-            <a:off x="7772400" y="4709160"/>
-            <a:ext cx="1097280" cy="320040"/>
+          <p:cNvPr id="5" name="Text 3"/>
+          <p:cNvSpPr/>
+          <p:nvPr/>
+        </p:nvSpPr>
+        <p:spPr>
+          <a:xfrm>
+            <a:off x="777240" y="137160"/>
+            <a:ext cx="7772400" cy="548640"/>
           </a:xfrm>
           <a:prstGeom prst="rect">
             <a:avLst/>
@@ -1549,14 +1819,139 @@
           <a:ln/>
         </p:spPr>
         <p:txBody>
-          <a:bodyPr wrap="square" rtlCol="0" anchor="ctr"/>
+          <a:bodyPr wrap="square" lIns="0" tIns="0" rIns="0" bIns="0" rtlCol="0" anchor="ctr"/>
           <a:lstStyle/>
           <a:p>
-            <a:pPr algn="r" indent="0" marL="0">
+            <a:pPr indent="0" marL="0">
               <a:buNone/>
             </a:pPr>
             <a:r>
-              <a:rPr lang="en-US" sz="900" dirty="0">
+              <a:rPr lang="en-US" sz="2000" b="1" dirty="0">
+                <a:solidFill>
+                  <a:srgbClr val="1B2A4A"/>
+                </a:solidFill>
+                <a:latin typeface="Georgia" pitchFamily="34" charset="0"/>
+                <a:ea typeface="Georgia" pitchFamily="34" charset="-122"/>
+                <a:cs typeface="Georgia" pitchFamily="34" charset="-120"/>
+              </a:rPr>
+              <a:t>Key Vocabulary</a:t>
+            </a:r>
+            <a:endParaRPr lang="en-US" sz="2000" dirty="0"/>
+          </a:p>
+        </p:txBody>
+      </p:sp>
+      <p:sp>
+        <p:nvSpPr>
+          <p:cNvPr id="6" name="Shape 4"/>
+          <p:cNvSpPr/>
+          <p:nvPr/>
+        </p:nvSpPr>
+        <p:spPr>
+          <a:xfrm>
+            <a:off x="731520" y="1051560"/>
+            <a:ext cx="3657600" cy="658368"/>
+          </a:xfrm>
+          <a:prstGeom prst="rect">
+            <a:avLst/>
+          </a:prstGeom>
+          <a:solidFill>
+            <a:srgbClr val="FFFFFF"/>
+          </a:solidFill>
+          <a:ln/>
+          <a:effectLst>
+            <a:outerShdw sx="100000" sy="100000" kx="0" ky="0" algn="bl" rotWithShape="0" blurRad="50800" dist="25400" dir="8100000">
+              <a:srgbClr val="000000">
+                <a:alpha val="10000"/>
+              </a:srgbClr>
+            </a:outerShdw>
+          </a:effectLst>
+        </p:spPr>
+      </p:sp>
+      <p:sp>
+        <p:nvSpPr>
+          <p:cNvPr id="7" name="Shape 5"/>
+          <p:cNvSpPr/>
+          <p:nvPr/>
+        </p:nvSpPr>
+        <p:spPr>
+          <a:xfrm>
+            <a:off x="731520" y="1051560"/>
+            <a:ext cx="54864" cy="658368"/>
+          </a:xfrm>
+          <a:prstGeom prst="rect">
+            <a:avLst/>
+          </a:prstGeom>
+          <a:solidFill>
+            <a:srgbClr val="2A9D8F"/>
+          </a:solidFill>
+          <a:ln/>
+        </p:spPr>
+      </p:sp>
+      <p:sp>
+        <p:nvSpPr>
+          <p:cNvPr id="8" name="Text 6"/>
+          <p:cNvSpPr/>
+          <p:nvPr/>
+        </p:nvSpPr>
+        <p:spPr>
+          <a:xfrm>
+            <a:off x="914400" y="1051560"/>
+            <a:ext cx="1463040" cy="658368"/>
+          </a:xfrm>
+          <a:prstGeom prst="rect">
+            <a:avLst/>
+          </a:prstGeom>
+          <a:noFill/>
+          <a:ln/>
+        </p:spPr>
+        <p:txBody>
+          <a:bodyPr wrap="square" lIns="0" tIns="0" rIns="0" bIns="0" rtlCol="0" anchor="ctr"/>
+          <a:lstStyle/>
+          <a:p>
+            <a:pPr indent="0" marL="0">
+              <a:buNone/>
+            </a:pPr>
+            <a:r>
+              <a:rPr lang="en-US" sz="1300" b="1" dirty="0">
+                <a:solidFill>
+                  <a:srgbClr val="1B2A4A"/>
+                </a:solidFill>
+                <a:latin typeface="Georgia" pitchFamily="34" charset="0"/>
+                <a:ea typeface="Georgia" pitchFamily="34" charset="-122"/>
+                <a:cs typeface="Georgia" pitchFamily="34" charset="-120"/>
+              </a:rPr>
+              <a:t>SI units</a:t>
+            </a:r>
+            <a:endParaRPr lang="en-US" sz="1300" dirty="0"/>
+          </a:p>
+        </p:txBody>
+      </p:sp>
+      <p:sp>
+        <p:nvSpPr>
+          <p:cNvPr id="9" name="Text 7"/>
+          <p:cNvSpPr/>
+          <p:nvPr/>
+        </p:nvSpPr>
+        <p:spPr>
+          <a:xfrm>
+            <a:off x="2377440" y="1051560"/>
+            <a:ext cx="1920240" cy="658368"/>
+          </a:xfrm>
+          <a:prstGeom prst="rect">
+            <a:avLst/>
+          </a:prstGeom>
+          <a:noFill/>
+          <a:ln/>
+        </p:spPr>
+        <p:txBody>
+          <a:bodyPr wrap="square" lIns="0" tIns="0" rIns="0" bIns="0" rtlCol="0" anchor="ctr"/>
+          <a:lstStyle/>
+          <a:p>
+            <a:pPr indent="0" marL="0">
+              <a:buNone/>
+            </a:pPr>
+            <a:r>
+              <a:rPr lang="en-US" sz="1100" dirty="0">
                 <a:solidFill>
                   <a:srgbClr val="6B6660"/>
                 </a:solidFill>
@@ -1564,22 +1959,22 @@
                 <a:ea typeface="Calibri" pitchFamily="34" charset="-122"/>
                 <a:cs typeface="Calibri" pitchFamily="34" charset="-120"/>
               </a:rPr>
-              <a:t>2 / 6</a:t>
-            </a:r>
-            <a:endParaRPr lang="en-US" sz="900" dirty="0"/>
+              <a:t>Standard units used worldwide</a:t>
+            </a:r>
+            <a:endParaRPr lang="en-US" sz="1100" dirty="0"/>
           </a:p>
         </p:txBody>
       </p:sp>
       <p:sp>
         <p:nvSpPr>
-          <p:cNvPr id="4" name="Shape 2"/>
-          <p:cNvSpPr/>
-          <p:nvPr/>
-        </p:nvSpPr>
-        <p:spPr>
-          <a:xfrm>
-            <a:off x="1371600" y="914400"/>
-            <a:ext cx="6400800" cy="3200400"/>
+          <p:cNvPr id="10" name="Shape 8"/>
+          <p:cNvSpPr/>
+          <p:nvPr/>
+        </p:nvSpPr>
+        <p:spPr>
+          <a:xfrm>
+            <a:off x="4754880" y="1051560"/>
+            <a:ext cx="3657600" cy="658368"/>
           </a:xfrm>
           <a:prstGeom prst="rect">
             <a:avLst/>
@@ -1587,12 +1982,7 @@
           <a:solidFill>
             <a:srgbClr val="FFFFFF"/>
           </a:solidFill>
-          <a:ln w="12700">
-            <a:solidFill>
-              <a:srgbClr val="E5E2DC"/>
-            </a:solidFill>
-            <a:prstDash val="solid"/>
-          </a:ln>
+          <a:ln/>
           <a:effectLst>
             <a:outerShdw sx="100000" sy="100000" kx="0" ky="0" algn="bl" rotWithShape="0" blurRad="50800" dist="25400" dir="8100000">
               <a:srgbClr val="000000">
@@ -1604,14 +1994,14 @@
       </p:sp>
       <p:sp>
         <p:nvSpPr>
-          <p:cNvPr id="5" name="Shape 3"/>
-          <p:cNvSpPr/>
-          <p:nvPr/>
-        </p:nvSpPr>
-        <p:spPr>
-          <a:xfrm>
-            <a:off x="1371600" y="914400"/>
-            <a:ext cx="91440" cy="3200400"/>
+          <p:cNvPr id="11" name="Shape 9"/>
+          <p:cNvSpPr/>
+          <p:nvPr/>
+        </p:nvSpPr>
+        <p:spPr>
+          <a:xfrm>
+            <a:off x="4754880" y="1051560"/>
+            <a:ext cx="54864" cy="658368"/>
           </a:xfrm>
           <a:prstGeom prst="rect">
             <a:avLst/>
@@ -1624,14 +2014,14 @@
       </p:sp>
       <p:sp>
         <p:nvSpPr>
-          <p:cNvPr id="6" name="Text 4"/>
-          <p:cNvSpPr/>
-          <p:nvPr/>
-        </p:nvSpPr>
-        <p:spPr>
-          <a:xfrm>
-            <a:off x="1828800" y="1097280"/>
-            <a:ext cx="5669280" cy="640080"/>
+          <p:cNvPr id="12" name="Text 10"/>
+          <p:cNvSpPr/>
+          <p:nvPr/>
+        </p:nvSpPr>
+        <p:spPr>
+          <a:xfrm>
+            <a:off x="4937760" y="1051560"/>
+            <a:ext cx="1463040" cy="658368"/>
           </a:xfrm>
           <a:prstGeom prst="rect">
             <a:avLst/>
@@ -1640,14 +2030,14 @@
           <a:ln/>
         </p:spPr>
         <p:txBody>
-          <a:bodyPr wrap="square" rtlCol="0" anchor="ctr"/>
+          <a:bodyPr wrap="square" lIns="0" tIns="0" rIns="0" bIns="0" rtlCol="0" anchor="ctr"/>
           <a:lstStyle/>
           <a:p>
             <a:pPr indent="0" marL="0">
               <a:buNone/>
             </a:pPr>
             <a:r>
-              <a:rPr lang="en-US" sz="2400" b="1" dirty="0">
+              <a:rPr lang="en-US" sz="1300" b="1" dirty="0">
                 <a:solidFill>
                   <a:srgbClr val="1B2A4A"/>
                 </a:solidFill>
@@ -1655,22 +2045,22 @@
                 <a:ea typeface="Georgia" pitchFamily="34" charset="-122"/>
                 <a:cs typeface="Georgia" pitchFamily="34" charset="-120"/>
               </a:rPr>
-              <a:t>Why Measurement Matters</a:t>
-            </a:r>
-            <a:endParaRPr lang="en-US" sz="2400" dirty="0"/>
+              <a:t>Accuracy</a:t>
+            </a:r>
+            <a:endParaRPr lang="en-US" sz="1300" dirty="0"/>
           </a:p>
         </p:txBody>
       </p:sp>
       <p:sp>
         <p:nvSpPr>
-          <p:cNvPr id="7" name="Text 5"/>
-          <p:cNvSpPr/>
-          <p:nvPr/>
-        </p:nvSpPr>
-        <p:spPr>
-          <a:xfrm>
-            <a:off x="1828800" y="1828800"/>
-            <a:ext cx="5669280" cy="2011680"/>
+          <p:cNvPr id="13" name="Text 11"/>
+          <p:cNvSpPr/>
+          <p:nvPr/>
+        </p:nvSpPr>
+        <p:spPr>
+          <a:xfrm>
+            <a:off x="6400800" y="1051560"/>
+            <a:ext cx="1920240" cy="658368"/>
           </a:xfrm>
           <a:prstGeom prst="rect">
             <a:avLst/>
@@ -1679,27 +2069,524 @@
           <a:ln/>
         </p:spPr>
         <p:txBody>
-          <a:bodyPr wrap="square" rtlCol="0" anchor="t"/>
+          <a:bodyPr wrap="square" lIns="0" tIns="0" rIns="0" bIns="0" rtlCol="0" anchor="ctr"/>
           <a:lstStyle/>
           <a:p>
             <a:pPr indent="0" marL="0">
-              <a:lnSpc>
-                <a:spcPct val="130000"/>
-              </a:lnSpc>
               <a:buNone/>
             </a:pPr>
             <a:r>
-              <a:rPr lang="en-US" sz="1500" dirty="0">
+              <a:rPr lang="en-US" sz="1100" dirty="0">
                 <a:solidFill>
-                  <a:srgbClr val="3D3A36"/>
+                  <a:srgbClr val="6B6660"/>
                 </a:solidFill>
                 <a:latin typeface="Calibri" pitchFamily="34" charset="0"/>
                 <a:ea typeface="Calibri" pitchFamily="34" charset="-122"/>
                 <a:cs typeface="Calibri" pitchFamily="34" charset="-120"/>
               </a:rPr>
-              <a:t>Science relies on accurate measurement. Without standard units, scientists around the world could not compare results. The metric system (SI units) is used universally in science because it is based on powers of 10, making conversions simple.</a:t>
-            </a:r>
-            <a:endParaRPr lang="en-US" sz="1500" dirty="0"/>
+              <a:t>How close to the true value</a:t>
+            </a:r>
+            <a:endParaRPr lang="en-US" sz="1100" dirty="0"/>
+          </a:p>
+        </p:txBody>
+      </p:sp>
+      <p:sp>
+        <p:nvSpPr>
+          <p:cNvPr id="14" name="Shape 12"/>
+          <p:cNvSpPr/>
+          <p:nvPr/>
+        </p:nvSpPr>
+        <p:spPr>
+          <a:xfrm>
+            <a:off x="731520" y="1819656"/>
+            <a:ext cx="3657600" cy="658368"/>
+          </a:xfrm>
+          <a:prstGeom prst="rect">
+            <a:avLst/>
+          </a:prstGeom>
+          <a:solidFill>
+            <a:srgbClr val="FFFFFF"/>
+          </a:solidFill>
+          <a:ln/>
+          <a:effectLst>
+            <a:outerShdw sx="100000" sy="100000" kx="0" ky="0" algn="bl" rotWithShape="0" blurRad="50800" dist="25400" dir="8100000">
+              <a:srgbClr val="000000">
+                <a:alpha val="10000"/>
+              </a:srgbClr>
+            </a:outerShdw>
+          </a:effectLst>
+        </p:spPr>
+      </p:sp>
+      <p:sp>
+        <p:nvSpPr>
+          <p:cNvPr id="15" name="Shape 13"/>
+          <p:cNvSpPr/>
+          <p:nvPr/>
+        </p:nvSpPr>
+        <p:spPr>
+          <a:xfrm>
+            <a:off x="731520" y="1819656"/>
+            <a:ext cx="54864" cy="658368"/>
+          </a:xfrm>
+          <a:prstGeom prst="rect">
+            <a:avLst/>
+          </a:prstGeom>
+          <a:solidFill>
+            <a:srgbClr val="2A9D8F"/>
+          </a:solidFill>
+          <a:ln/>
+        </p:spPr>
+      </p:sp>
+      <p:sp>
+        <p:nvSpPr>
+          <p:cNvPr id="16" name="Text 14"/>
+          <p:cNvSpPr/>
+          <p:nvPr/>
+        </p:nvSpPr>
+        <p:spPr>
+          <a:xfrm>
+            <a:off x="914400" y="1819656"/>
+            <a:ext cx="1463040" cy="658368"/>
+          </a:xfrm>
+          <a:prstGeom prst="rect">
+            <a:avLst/>
+          </a:prstGeom>
+          <a:noFill/>
+          <a:ln/>
+        </p:spPr>
+        <p:txBody>
+          <a:bodyPr wrap="square" lIns="0" tIns="0" rIns="0" bIns="0" rtlCol="0" anchor="ctr"/>
+          <a:lstStyle/>
+          <a:p>
+            <a:pPr indent="0" marL="0">
+              <a:buNone/>
+            </a:pPr>
+            <a:r>
+              <a:rPr lang="en-US" sz="1300" b="1" dirty="0">
+                <a:solidFill>
+                  <a:srgbClr val="1B2A4A"/>
+                </a:solidFill>
+                <a:latin typeface="Georgia" pitchFamily="34" charset="0"/>
+                <a:ea typeface="Georgia" pitchFamily="34" charset="-122"/>
+                <a:cs typeface="Georgia" pitchFamily="34" charset="-120"/>
+              </a:rPr>
+              <a:t>Precision</a:t>
+            </a:r>
+            <a:endParaRPr lang="en-US" sz="1300" dirty="0"/>
+          </a:p>
+        </p:txBody>
+      </p:sp>
+      <p:sp>
+        <p:nvSpPr>
+          <p:cNvPr id="17" name="Text 15"/>
+          <p:cNvSpPr/>
+          <p:nvPr/>
+        </p:nvSpPr>
+        <p:spPr>
+          <a:xfrm>
+            <a:off x="2377440" y="1819656"/>
+            <a:ext cx="1920240" cy="658368"/>
+          </a:xfrm>
+          <a:prstGeom prst="rect">
+            <a:avLst/>
+          </a:prstGeom>
+          <a:noFill/>
+          <a:ln/>
+        </p:spPr>
+        <p:txBody>
+          <a:bodyPr wrap="square" lIns="0" tIns="0" rIns="0" bIns="0" rtlCol="0" anchor="ctr"/>
+          <a:lstStyle/>
+          <a:p>
+            <a:pPr indent="0" marL="0">
+              <a:buNone/>
+            </a:pPr>
+            <a:r>
+              <a:rPr lang="en-US" sz="1100" dirty="0">
+                <a:solidFill>
+                  <a:srgbClr val="6B6660"/>
+                </a:solidFill>
+                <a:latin typeface="Calibri" pitchFamily="34" charset="0"/>
+                <a:ea typeface="Calibri" pitchFamily="34" charset="-122"/>
+                <a:cs typeface="Calibri" pitchFamily="34" charset="-120"/>
+              </a:rPr>
+              <a:t>How close repeated results are</a:t>
+            </a:r>
+            <a:endParaRPr lang="en-US" sz="1100" dirty="0"/>
+          </a:p>
+        </p:txBody>
+      </p:sp>
+      <p:sp>
+        <p:nvSpPr>
+          <p:cNvPr id="18" name="Shape 16"/>
+          <p:cNvSpPr/>
+          <p:nvPr/>
+        </p:nvSpPr>
+        <p:spPr>
+          <a:xfrm>
+            <a:off x="4754880" y="1819656"/>
+            <a:ext cx="3657600" cy="658368"/>
+          </a:xfrm>
+          <a:prstGeom prst="rect">
+            <a:avLst/>
+          </a:prstGeom>
+          <a:solidFill>
+            <a:srgbClr val="FFFFFF"/>
+          </a:solidFill>
+          <a:ln/>
+          <a:effectLst>
+            <a:outerShdw sx="100000" sy="100000" kx="0" ky="0" algn="bl" rotWithShape="0" blurRad="50800" dist="25400" dir="8100000">
+              <a:srgbClr val="000000">
+                <a:alpha val="10000"/>
+              </a:srgbClr>
+            </a:outerShdw>
+          </a:effectLst>
+        </p:spPr>
+      </p:sp>
+      <p:sp>
+        <p:nvSpPr>
+          <p:cNvPr id="19" name="Shape 17"/>
+          <p:cNvSpPr/>
+          <p:nvPr/>
+        </p:nvSpPr>
+        <p:spPr>
+          <a:xfrm>
+            <a:off x="4754880" y="1819656"/>
+            <a:ext cx="54864" cy="658368"/>
+          </a:xfrm>
+          <a:prstGeom prst="rect">
+            <a:avLst/>
+          </a:prstGeom>
+          <a:solidFill>
+            <a:srgbClr val="2A9D8F"/>
+          </a:solidFill>
+          <a:ln/>
+        </p:spPr>
+      </p:sp>
+      <p:sp>
+        <p:nvSpPr>
+          <p:cNvPr id="20" name="Text 18"/>
+          <p:cNvSpPr/>
+          <p:nvPr/>
+        </p:nvSpPr>
+        <p:spPr>
+          <a:xfrm>
+            <a:off x="4937760" y="1819656"/>
+            <a:ext cx="1463040" cy="658368"/>
+          </a:xfrm>
+          <a:prstGeom prst="rect">
+            <a:avLst/>
+          </a:prstGeom>
+          <a:noFill/>
+          <a:ln/>
+        </p:spPr>
+        <p:txBody>
+          <a:bodyPr wrap="square" lIns="0" tIns="0" rIns="0" bIns="0" rtlCol="0" anchor="ctr"/>
+          <a:lstStyle/>
+          <a:p>
+            <a:pPr indent="0" marL="0">
+              <a:buNone/>
+            </a:pPr>
+            <a:r>
+              <a:rPr lang="en-US" sz="1300" b="1" dirty="0">
+                <a:solidFill>
+                  <a:srgbClr val="1B2A4A"/>
+                </a:solidFill>
+                <a:latin typeface="Georgia" pitchFamily="34" charset="0"/>
+                <a:ea typeface="Georgia" pitchFamily="34" charset="-122"/>
+                <a:cs typeface="Georgia" pitchFamily="34" charset="-120"/>
+              </a:rPr>
+              <a:t>Meniscus</a:t>
+            </a:r>
+            <a:endParaRPr lang="en-US" sz="1300" dirty="0"/>
+          </a:p>
+        </p:txBody>
+      </p:sp>
+      <p:sp>
+        <p:nvSpPr>
+          <p:cNvPr id="21" name="Text 19"/>
+          <p:cNvSpPr/>
+          <p:nvPr/>
+        </p:nvSpPr>
+        <p:spPr>
+          <a:xfrm>
+            <a:off x="6400800" y="1819656"/>
+            <a:ext cx="1920240" cy="658368"/>
+          </a:xfrm>
+          <a:prstGeom prst="rect">
+            <a:avLst/>
+          </a:prstGeom>
+          <a:noFill/>
+          <a:ln/>
+        </p:spPr>
+        <p:txBody>
+          <a:bodyPr wrap="square" lIns="0" tIns="0" rIns="0" bIns="0" rtlCol="0" anchor="ctr"/>
+          <a:lstStyle/>
+          <a:p>
+            <a:pPr indent="0" marL="0">
+              <a:buNone/>
+            </a:pPr>
+            <a:r>
+              <a:rPr lang="en-US" sz="1100" dirty="0">
+                <a:solidFill>
+                  <a:srgbClr val="6B6660"/>
+                </a:solidFill>
+                <a:latin typeface="Calibri" pitchFamily="34" charset="0"/>
+                <a:ea typeface="Calibri" pitchFamily="34" charset="-122"/>
+                <a:cs typeface="Calibri" pitchFamily="34" charset="-120"/>
+              </a:rPr>
+              <a:t>Curved surface of a liquid</a:t>
+            </a:r>
+            <a:endParaRPr lang="en-US" sz="1100" dirty="0"/>
+          </a:p>
+        </p:txBody>
+      </p:sp>
+      <p:sp>
+        <p:nvSpPr>
+          <p:cNvPr id="22" name="Shape 20"/>
+          <p:cNvSpPr/>
+          <p:nvPr/>
+        </p:nvSpPr>
+        <p:spPr>
+          <a:xfrm>
+            <a:off x="731520" y="2587752"/>
+            <a:ext cx="3657600" cy="658368"/>
+          </a:xfrm>
+          <a:prstGeom prst="rect">
+            <a:avLst/>
+          </a:prstGeom>
+          <a:solidFill>
+            <a:srgbClr val="FFFFFF"/>
+          </a:solidFill>
+          <a:ln/>
+          <a:effectLst>
+            <a:outerShdw sx="100000" sy="100000" kx="0" ky="0" algn="bl" rotWithShape="0" blurRad="50800" dist="25400" dir="8100000">
+              <a:srgbClr val="000000">
+                <a:alpha val="10000"/>
+              </a:srgbClr>
+            </a:outerShdw>
+          </a:effectLst>
+        </p:spPr>
+      </p:sp>
+      <p:sp>
+        <p:nvSpPr>
+          <p:cNvPr id="23" name="Shape 21"/>
+          <p:cNvSpPr/>
+          <p:nvPr/>
+        </p:nvSpPr>
+        <p:spPr>
+          <a:xfrm>
+            <a:off x="731520" y="2587752"/>
+            <a:ext cx="54864" cy="658368"/>
+          </a:xfrm>
+          <a:prstGeom prst="rect">
+            <a:avLst/>
+          </a:prstGeom>
+          <a:solidFill>
+            <a:srgbClr val="2A9D8F"/>
+          </a:solidFill>
+          <a:ln/>
+        </p:spPr>
+      </p:sp>
+      <p:sp>
+        <p:nvSpPr>
+          <p:cNvPr id="24" name="Text 22"/>
+          <p:cNvSpPr/>
+          <p:nvPr/>
+        </p:nvSpPr>
+        <p:spPr>
+          <a:xfrm>
+            <a:off x="914400" y="2587752"/>
+            <a:ext cx="1463040" cy="658368"/>
+          </a:xfrm>
+          <a:prstGeom prst="rect">
+            <a:avLst/>
+          </a:prstGeom>
+          <a:noFill/>
+          <a:ln/>
+        </p:spPr>
+        <p:txBody>
+          <a:bodyPr wrap="square" lIns="0" tIns="0" rIns="0" bIns="0" rtlCol="0" anchor="ctr"/>
+          <a:lstStyle/>
+          <a:p>
+            <a:pPr indent="0" marL="0">
+              <a:buNone/>
+            </a:pPr>
+            <a:r>
+              <a:rPr lang="en-US" sz="1300" b="1" dirty="0">
+                <a:solidFill>
+                  <a:srgbClr val="1B2A4A"/>
+                </a:solidFill>
+                <a:latin typeface="Georgia" pitchFamily="34" charset="0"/>
+                <a:ea typeface="Georgia" pitchFamily="34" charset="-122"/>
+                <a:cs typeface="Georgia" pitchFamily="34" charset="-120"/>
+              </a:rPr>
+              <a:t>Resolution</a:t>
+            </a:r>
+            <a:endParaRPr lang="en-US" sz="1300" dirty="0"/>
+          </a:p>
+        </p:txBody>
+      </p:sp>
+      <p:sp>
+        <p:nvSpPr>
+          <p:cNvPr id="25" name="Text 23"/>
+          <p:cNvSpPr/>
+          <p:nvPr/>
+        </p:nvSpPr>
+        <p:spPr>
+          <a:xfrm>
+            <a:off x="2377440" y="2587752"/>
+            <a:ext cx="1920240" cy="658368"/>
+          </a:xfrm>
+          <a:prstGeom prst="rect">
+            <a:avLst/>
+          </a:prstGeom>
+          <a:noFill/>
+          <a:ln/>
+        </p:spPr>
+        <p:txBody>
+          <a:bodyPr wrap="square" lIns="0" tIns="0" rIns="0" bIns="0" rtlCol="0" anchor="ctr"/>
+          <a:lstStyle/>
+          <a:p>
+            <a:pPr indent="0" marL="0">
+              <a:buNone/>
+            </a:pPr>
+            <a:r>
+              <a:rPr lang="en-US" sz="1100" dirty="0">
+                <a:solidFill>
+                  <a:srgbClr val="6B6660"/>
+                </a:solidFill>
+                <a:latin typeface="Calibri" pitchFamily="34" charset="0"/>
+                <a:ea typeface="Calibri" pitchFamily="34" charset="-122"/>
+                <a:cs typeface="Calibri" pitchFamily="34" charset="-120"/>
+              </a:rPr>
+              <a:t>Smallest change an instrument can detect</a:t>
+            </a:r>
+            <a:endParaRPr lang="en-US" sz="1100" dirty="0"/>
+          </a:p>
+        </p:txBody>
+      </p:sp>
+      <p:sp>
+        <p:nvSpPr>
+          <p:cNvPr id="26" name="Shape 24"/>
+          <p:cNvSpPr/>
+          <p:nvPr/>
+        </p:nvSpPr>
+        <p:spPr>
+          <a:xfrm>
+            <a:off x="4754880" y="2587752"/>
+            <a:ext cx="3657600" cy="658368"/>
+          </a:xfrm>
+          <a:prstGeom prst="rect">
+            <a:avLst/>
+          </a:prstGeom>
+          <a:solidFill>
+            <a:srgbClr val="FFFFFF"/>
+          </a:solidFill>
+          <a:ln/>
+          <a:effectLst>
+            <a:outerShdw sx="100000" sy="100000" kx="0" ky="0" algn="bl" rotWithShape="0" blurRad="50800" dist="25400" dir="8100000">
+              <a:srgbClr val="000000">
+                <a:alpha val="10000"/>
+              </a:srgbClr>
+            </a:outerShdw>
+          </a:effectLst>
+        </p:spPr>
+      </p:sp>
+      <p:sp>
+        <p:nvSpPr>
+          <p:cNvPr id="27" name="Shape 25"/>
+          <p:cNvSpPr/>
+          <p:nvPr/>
+        </p:nvSpPr>
+        <p:spPr>
+          <a:xfrm>
+            <a:off x="4754880" y="2587752"/>
+            <a:ext cx="54864" cy="658368"/>
+          </a:xfrm>
+          <a:prstGeom prst="rect">
+            <a:avLst/>
+          </a:prstGeom>
+          <a:solidFill>
+            <a:srgbClr val="2A9D8F"/>
+          </a:solidFill>
+          <a:ln/>
+        </p:spPr>
+      </p:sp>
+      <p:sp>
+        <p:nvSpPr>
+          <p:cNvPr id="28" name="Text 26"/>
+          <p:cNvSpPr/>
+          <p:nvPr/>
+        </p:nvSpPr>
+        <p:spPr>
+          <a:xfrm>
+            <a:off x="4937760" y="2587752"/>
+            <a:ext cx="1463040" cy="658368"/>
+          </a:xfrm>
+          <a:prstGeom prst="rect">
+            <a:avLst/>
+          </a:prstGeom>
+          <a:noFill/>
+          <a:ln/>
+        </p:spPr>
+        <p:txBody>
+          <a:bodyPr wrap="square" lIns="0" tIns="0" rIns="0" bIns="0" rtlCol="0" anchor="ctr"/>
+          <a:lstStyle/>
+          <a:p>
+            <a:pPr indent="0" marL="0">
+              <a:buNone/>
+            </a:pPr>
+            <a:r>
+              <a:rPr lang="en-US" sz="1300" b="1" dirty="0">
+                <a:solidFill>
+                  <a:srgbClr val="1B2A4A"/>
+                </a:solidFill>
+                <a:latin typeface="Georgia" pitchFamily="34" charset="0"/>
+                <a:ea typeface="Georgia" pitchFamily="34" charset="-122"/>
+                <a:cs typeface="Georgia" pitchFamily="34" charset="-120"/>
+              </a:rPr>
+              <a:t>Uncertainty</a:t>
+            </a:r>
+            <a:endParaRPr lang="en-US" sz="1300" dirty="0"/>
+          </a:p>
+        </p:txBody>
+      </p:sp>
+      <p:sp>
+        <p:nvSpPr>
+          <p:cNvPr id="29" name="Text 27"/>
+          <p:cNvSpPr/>
+          <p:nvPr/>
+        </p:nvSpPr>
+        <p:spPr>
+          <a:xfrm>
+            <a:off x="6400800" y="2587752"/>
+            <a:ext cx="1920240" cy="658368"/>
+          </a:xfrm>
+          <a:prstGeom prst="rect">
+            <a:avLst/>
+          </a:prstGeom>
+          <a:noFill/>
+          <a:ln/>
+        </p:spPr>
+        <p:txBody>
+          <a:bodyPr wrap="square" lIns="0" tIns="0" rIns="0" bIns="0" rtlCol="0" anchor="ctr"/>
+          <a:lstStyle/>
+          <a:p>
+            <a:pPr indent="0" marL="0">
+              <a:buNone/>
+            </a:pPr>
+            <a:r>
+              <a:rPr lang="en-US" sz="1100" dirty="0">
+                <a:solidFill>
+                  <a:srgbClr val="6B6660"/>
+                </a:solidFill>
+                <a:latin typeface="Calibri" pitchFamily="34" charset="0"/>
+                <a:ea typeface="Calibri" pitchFamily="34" charset="-122"/>
+                <a:cs typeface="Calibri" pitchFamily="34" charset="-120"/>
+              </a:rPr>
+              <a:t>Range of possible error</a:t>
+            </a:r>
+            <a:endParaRPr lang="en-US" sz="1100" dirty="0"/>
           </a:p>
         </p:txBody>
       </p:sp>
@@ -1744,7 +2631,47 @@
         <p:spPr>
           <a:xfrm>
             <a:off x="0" y="0"/>
-            <a:ext cx="9144000" cy="54864"/>
+            <a:ext cx="9144000" cy="822960"/>
+          </a:xfrm>
+          <a:prstGeom prst="rect">
+            <a:avLst/>
+          </a:prstGeom>
+          <a:solidFill>
+            <a:srgbClr val="FFFFFF"/>
+          </a:solidFill>
+          <a:ln/>
+        </p:spPr>
+      </p:sp>
+      <p:sp>
+        <p:nvSpPr>
+          <p:cNvPr id="3" name="Shape 1"/>
+          <p:cNvSpPr/>
+          <p:nvPr/>
+        </p:nvSpPr>
+        <p:spPr>
+          <a:xfrm>
+            <a:off x="0" y="804672"/>
+            <a:ext cx="9144000" cy="27432"/>
+          </a:xfrm>
+          <a:prstGeom prst="rect">
+            <a:avLst/>
+          </a:prstGeom>
+          <a:solidFill>
+            <a:srgbClr val="E5E2DC"/>
+          </a:solidFill>
+          <a:ln/>
+        </p:spPr>
+      </p:sp>
+      <p:sp>
+        <p:nvSpPr>
+          <p:cNvPr id="4" name="Shape 2"/>
+          <p:cNvSpPr/>
+          <p:nvPr/>
+        </p:nvSpPr>
+        <p:spPr>
+          <a:xfrm>
+            <a:off x="548640" y="201168"/>
+            <a:ext cx="54864" cy="420624"/>
           </a:xfrm>
           <a:prstGeom prst="rect">
             <a:avLst/>
@@ -1757,14 +2684,14 @@
       </p:sp>
       <p:sp>
         <p:nvSpPr>
-          <p:cNvPr id="3" name="Text 1"/>
-          <p:cNvSpPr/>
-          <p:nvPr/>
-        </p:nvSpPr>
-        <p:spPr>
-          <a:xfrm>
-            <a:off x="7772400" y="4709160"/>
-            <a:ext cx="1097280" cy="320040"/>
+          <p:cNvPr id="5" name="Text 3"/>
+          <p:cNvSpPr/>
+          <p:nvPr/>
+        </p:nvSpPr>
+        <p:spPr>
+          <a:xfrm>
+            <a:off x="777240" y="137160"/>
+            <a:ext cx="7772400" cy="548640"/>
           </a:xfrm>
           <a:prstGeom prst="rect">
             <a:avLst/>
@@ -1773,53 +2700,14 @@
           <a:ln/>
         </p:spPr>
         <p:txBody>
-          <a:bodyPr wrap="square" rtlCol="0" anchor="ctr"/>
-          <a:lstStyle/>
-          <a:p>
-            <a:pPr algn="r" indent="0" marL="0">
-              <a:buNone/>
-            </a:pPr>
-            <a:r>
-              <a:rPr lang="en-US" sz="900" dirty="0">
-                <a:solidFill>
-                  <a:srgbClr val="6B6660"/>
-                </a:solidFill>
-                <a:latin typeface="Calibri" pitchFamily="34" charset="0"/>
-                <a:ea typeface="Calibri" pitchFamily="34" charset="-122"/>
-                <a:cs typeface="Calibri" pitchFamily="34" charset="-120"/>
-              </a:rPr>
-              <a:t>3 / 6</a:t>
-            </a:r>
-            <a:endParaRPr lang="en-US" sz="900" dirty="0"/>
-          </a:p>
-        </p:txBody>
-      </p:sp>
-      <p:sp>
-        <p:nvSpPr>
-          <p:cNvPr id="4" name="Text 2"/>
-          <p:cNvSpPr/>
-          <p:nvPr/>
-        </p:nvSpPr>
-        <p:spPr>
-          <a:xfrm>
-            <a:off x="457200" y="274320"/>
-            <a:ext cx="8229600" cy="640080"/>
-          </a:xfrm>
-          <a:prstGeom prst="rect">
-            <a:avLst/>
-          </a:prstGeom>
-          <a:noFill/>
-          <a:ln/>
-        </p:spPr>
-        <p:txBody>
-          <a:bodyPr wrap="square" rtlCol="0" anchor="ctr"/>
+          <a:bodyPr wrap="square" lIns="0" tIns="0" rIns="0" bIns="0" rtlCol="0" anchor="ctr"/>
           <a:lstStyle/>
           <a:p>
             <a:pPr indent="0" marL="0">
               <a:buNone/>
             </a:pPr>
             <a:r>
-              <a:rPr lang="en-US" sz="2600" b="1" dirty="0">
+              <a:rPr lang="en-US" sz="2000" b="1" dirty="0">
                 <a:solidFill>
                   <a:srgbClr val="1B2A4A"/>
                 </a:solidFill>
@@ -1827,402 +2715,1962 @@
                 <a:ea typeface="Georgia" pitchFamily="34" charset="-122"/>
                 <a:cs typeface="Georgia" pitchFamily="34" charset="-120"/>
               </a:rPr>
-              <a:t>Key SI Units</a:t>
-            </a:r>
-            <a:endParaRPr lang="en-US" sz="2600" dirty="0"/>
+              <a:t>SI Units You Must Know</a:t>
+            </a:r>
+            <a:endParaRPr lang="en-US" sz="2000" dirty="0"/>
           </a:p>
         </p:txBody>
       </p:sp>
-      <p:sp>
-        <p:nvSpPr>
-          <p:cNvPr id="5" name="Shape 3"/>
-          <p:cNvSpPr/>
-          <p:nvPr/>
-        </p:nvSpPr>
-        <p:spPr>
-          <a:xfrm>
-            <a:off x="457200" y="1188720"/>
-            <a:ext cx="2560320" cy="1828800"/>
-          </a:xfrm>
-          <a:prstGeom prst="rect">
-            <a:avLst/>
-          </a:prstGeom>
-          <a:solidFill>
-            <a:srgbClr val="FFFFFF"/>
-          </a:solidFill>
-          <a:ln w="12700">
-            <a:solidFill>
-              <a:srgbClr val="E5E2DC"/>
-            </a:solidFill>
-            <a:prstDash val="solid"/>
-          </a:ln>
-          <a:effectLst>
-            <a:outerShdw sx="100000" sy="100000" kx="0" ky="0" algn="bl" rotWithShape="0" blurRad="50800" dist="25400" dir="8100000">
-              <a:srgbClr val="000000">
-                <a:alpha val="10000"/>
-              </a:srgbClr>
-            </a:outerShdw>
-          </a:effectLst>
-        </p:spPr>
-      </p:sp>
-      <p:sp>
-        <p:nvSpPr>
-          <p:cNvPr id="6" name="Shape 4"/>
-          <p:cNvSpPr/>
-          <p:nvPr/>
-        </p:nvSpPr>
-        <p:spPr>
-          <a:xfrm>
-            <a:off x="457200" y="1188720"/>
-            <a:ext cx="2560320" cy="54864"/>
-          </a:xfrm>
-          <a:prstGeom prst="rect">
-            <a:avLst/>
-          </a:prstGeom>
-          <a:solidFill>
-            <a:srgbClr val="2A9D8F"/>
-          </a:solidFill>
-          <a:ln/>
-        </p:spPr>
-      </p:sp>
-      <p:sp>
-        <p:nvSpPr>
-          <p:cNvPr id="7" name="Text 5"/>
-          <p:cNvSpPr/>
-          <p:nvPr/>
-        </p:nvSpPr>
-        <p:spPr>
-          <a:xfrm>
-            <a:off x="594360" y="1325880"/>
-            <a:ext cx="2286000" cy="365760"/>
-          </a:xfrm>
-          <a:prstGeom prst="rect">
-            <a:avLst/>
-          </a:prstGeom>
-          <a:noFill/>
-          <a:ln/>
-        </p:spPr>
-        <p:txBody>
-          <a:bodyPr wrap="square" rtlCol="0" anchor="ctr"/>
-          <a:lstStyle/>
-          <a:p>
-            <a:pPr indent="0" marL="0">
-              <a:buNone/>
-            </a:pPr>
-            <a:r>
-              <a:rPr lang="en-US" sz="1400" b="1" dirty="0">
-                <a:solidFill>
-                  <a:srgbClr val="1B2A4A"/>
-                </a:solidFill>
-                <a:latin typeface="Calibri" pitchFamily="34" charset="0"/>
-                <a:ea typeface="Calibri" pitchFamily="34" charset="-122"/>
-                <a:cs typeface="Calibri" pitchFamily="34" charset="-120"/>
-              </a:rPr>
-              <a:t>Length — Metres (m)</a:t>
-            </a:r>
-            <a:endParaRPr lang="en-US" sz="1400" dirty="0"/>
-          </a:p>
-        </p:txBody>
-      </p:sp>
-      <p:sp>
-        <p:nvSpPr>
-          <p:cNvPr id="8" name="Text 6"/>
-          <p:cNvSpPr/>
-          <p:nvPr/>
-        </p:nvSpPr>
-        <p:spPr>
-          <a:xfrm>
-            <a:off x="594360" y="1737360"/>
-            <a:ext cx="2286000" cy="1097280"/>
-          </a:xfrm>
-          <a:prstGeom prst="rect">
-            <a:avLst/>
-          </a:prstGeom>
-          <a:noFill/>
-          <a:ln/>
-        </p:spPr>
-        <p:txBody>
-          <a:bodyPr wrap="square" rtlCol="0" anchor="t"/>
-          <a:lstStyle/>
-          <a:p>
-            <a:pPr indent="0" marL="0">
-              <a:buNone/>
-            </a:pPr>
-            <a:r>
-              <a:rPr lang="en-US" sz="1100" dirty="0">
-                <a:solidFill>
-                  <a:srgbClr val="3D3A36"/>
-                </a:solidFill>
-                <a:latin typeface="Calibri" pitchFamily="34" charset="0"/>
-                <a:ea typeface="Calibri" pitchFamily="34" charset="-122"/>
-                <a:cs typeface="Calibri" pitchFamily="34" charset="-120"/>
-              </a:rPr>
-              <a:t>Measure with a ruler or measuring tape. 1 km = 1000 m. 1 m = 100 cm. 1 cm = 10 mm. Always read at eye level to avoid parallax error.</a:t>
-            </a:r>
-            <a:endParaRPr lang="en-US" sz="1100" dirty="0"/>
-          </a:p>
-        </p:txBody>
-      </p:sp>
-      <p:sp>
-        <p:nvSpPr>
-          <p:cNvPr id="9" name="Shape 7"/>
-          <p:cNvSpPr/>
-          <p:nvPr/>
-        </p:nvSpPr>
-        <p:spPr>
-          <a:xfrm>
-            <a:off x="3291840" y="1188720"/>
-            <a:ext cx="2560320" cy="1828800"/>
-          </a:xfrm>
-          <a:prstGeom prst="rect">
-            <a:avLst/>
-          </a:prstGeom>
-          <a:solidFill>
-            <a:srgbClr val="FFFFFF"/>
-          </a:solidFill>
-          <a:ln w="12700">
-            <a:solidFill>
-              <a:srgbClr val="E5E2DC"/>
-            </a:solidFill>
-            <a:prstDash val="solid"/>
-          </a:ln>
-          <a:effectLst>
-            <a:outerShdw sx="100000" sy="100000" kx="0" ky="0" algn="bl" rotWithShape="0" blurRad="50800" dist="25400" dir="8100000">
-              <a:srgbClr val="000000">
-                <a:alpha val="10000"/>
-              </a:srgbClr>
-            </a:outerShdw>
-          </a:effectLst>
-        </p:spPr>
-      </p:sp>
-      <p:sp>
-        <p:nvSpPr>
-          <p:cNvPr id="10" name="Shape 8"/>
-          <p:cNvSpPr/>
-          <p:nvPr/>
-        </p:nvSpPr>
-        <p:spPr>
-          <a:xfrm>
-            <a:off x="3291840" y="1188720"/>
-            <a:ext cx="2560320" cy="54864"/>
-          </a:xfrm>
-          <a:prstGeom prst="rect">
-            <a:avLst/>
-          </a:prstGeom>
-          <a:solidFill>
-            <a:srgbClr val="2A9D8F"/>
-          </a:solidFill>
-          <a:ln/>
-        </p:spPr>
-      </p:sp>
-      <p:sp>
-        <p:nvSpPr>
-          <p:cNvPr id="11" name="Text 9"/>
-          <p:cNvSpPr/>
-          <p:nvPr/>
-        </p:nvSpPr>
-        <p:spPr>
-          <a:xfrm>
-            <a:off x="3429000" y="1325880"/>
-            <a:ext cx="2286000" cy="365760"/>
-          </a:xfrm>
-          <a:prstGeom prst="rect">
-            <a:avLst/>
-          </a:prstGeom>
-          <a:noFill/>
-          <a:ln/>
-        </p:spPr>
-        <p:txBody>
-          <a:bodyPr wrap="square" rtlCol="0" anchor="ctr"/>
-          <a:lstStyle/>
-          <a:p>
-            <a:pPr indent="0" marL="0">
-              <a:buNone/>
-            </a:pPr>
-            <a:r>
-              <a:rPr lang="en-US" sz="1400" b="1" dirty="0">
-                <a:solidFill>
-                  <a:srgbClr val="1B2A4A"/>
-                </a:solidFill>
-                <a:latin typeface="Calibri" pitchFamily="34" charset="0"/>
-                <a:ea typeface="Calibri" pitchFamily="34" charset="-122"/>
-                <a:cs typeface="Calibri" pitchFamily="34" charset="-120"/>
-              </a:rPr>
-              <a:t>Mass — Grams (g)</a:t>
-            </a:r>
-            <a:endParaRPr lang="en-US" sz="1400" dirty="0"/>
-          </a:p>
-        </p:txBody>
-      </p:sp>
-      <p:sp>
-        <p:nvSpPr>
-          <p:cNvPr id="12" name="Text 10"/>
-          <p:cNvSpPr/>
-          <p:nvPr/>
-        </p:nvSpPr>
-        <p:spPr>
-          <a:xfrm>
-            <a:off x="3429000" y="1737360"/>
-            <a:ext cx="2286000" cy="1097280"/>
-          </a:xfrm>
-          <a:prstGeom prst="rect">
-            <a:avLst/>
-          </a:prstGeom>
-          <a:noFill/>
-          <a:ln/>
-        </p:spPr>
-        <p:txBody>
-          <a:bodyPr wrap="square" rtlCol="0" anchor="t"/>
-          <a:lstStyle/>
-          <a:p>
-            <a:pPr indent="0" marL="0">
-              <a:buNone/>
-            </a:pPr>
-            <a:r>
-              <a:rPr lang="en-US" sz="1100" dirty="0">
-                <a:solidFill>
-                  <a:srgbClr val="3D3A36"/>
-                </a:solidFill>
-                <a:latin typeface="Calibri" pitchFamily="34" charset="0"/>
-                <a:ea typeface="Calibri" pitchFamily="34" charset="-122"/>
-                <a:cs typeface="Calibri" pitchFamily="34" charset="-120"/>
-              </a:rPr>
-              <a:t>Measure with a balance or scale. 1 kg = 1000 g. Mass is the amount of matter in an object. It does NOT change with location (unlike weight).</a:t>
-            </a:r>
-            <a:endParaRPr lang="en-US" sz="1100" dirty="0"/>
-          </a:p>
-        </p:txBody>
-      </p:sp>
-      <p:sp>
-        <p:nvSpPr>
-          <p:cNvPr id="13" name="Shape 11"/>
-          <p:cNvSpPr/>
-          <p:nvPr/>
-        </p:nvSpPr>
-        <p:spPr>
-          <a:xfrm>
-            <a:off x="6126480" y="1188720"/>
-            <a:ext cx="2560320" cy="1828800"/>
-          </a:xfrm>
-          <a:prstGeom prst="rect">
-            <a:avLst/>
-          </a:prstGeom>
-          <a:solidFill>
-            <a:srgbClr val="FFFFFF"/>
-          </a:solidFill>
-          <a:ln w="12700">
-            <a:solidFill>
-              <a:srgbClr val="E5E2DC"/>
-            </a:solidFill>
-            <a:prstDash val="solid"/>
-          </a:ln>
-          <a:effectLst>
-            <a:outerShdw sx="100000" sy="100000" kx="0" ky="0" algn="bl" rotWithShape="0" blurRad="50800" dist="25400" dir="8100000">
-              <a:srgbClr val="000000">
-                <a:alpha val="10000"/>
-              </a:srgbClr>
-            </a:outerShdw>
-          </a:effectLst>
-        </p:spPr>
-      </p:sp>
-      <p:sp>
-        <p:nvSpPr>
-          <p:cNvPr id="14" name="Shape 12"/>
-          <p:cNvSpPr/>
-          <p:nvPr/>
-        </p:nvSpPr>
-        <p:spPr>
-          <a:xfrm>
-            <a:off x="6126480" y="1188720"/>
-            <a:ext cx="2560320" cy="54864"/>
-          </a:xfrm>
-          <a:prstGeom prst="rect">
-            <a:avLst/>
-          </a:prstGeom>
-          <a:solidFill>
-            <a:srgbClr val="2A9D8F"/>
-          </a:solidFill>
-          <a:ln/>
-        </p:spPr>
-      </p:sp>
-      <p:sp>
-        <p:nvSpPr>
-          <p:cNvPr id="15" name="Text 13"/>
-          <p:cNvSpPr/>
-          <p:nvPr/>
-        </p:nvSpPr>
-        <p:spPr>
-          <a:xfrm>
-            <a:off x="6263640" y="1325880"/>
-            <a:ext cx="2286000" cy="365760"/>
-          </a:xfrm>
-          <a:prstGeom prst="rect">
-            <a:avLst/>
-          </a:prstGeom>
-          <a:noFill/>
-          <a:ln/>
-        </p:spPr>
-        <p:txBody>
-          <a:bodyPr wrap="square" rtlCol="0" anchor="ctr"/>
-          <a:lstStyle/>
-          <a:p>
-            <a:pPr indent="0" marL="0">
-              <a:buNone/>
-            </a:pPr>
-            <a:r>
-              <a:rPr lang="en-US" sz="1400" b="1" dirty="0">
-                <a:solidFill>
-                  <a:srgbClr val="1B2A4A"/>
-                </a:solidFill>
-                <a:latin typeface="Calibri" pitchFamily="34" charset="0"/>
-                <a:ea typeface="Calibri" pitchFamily="34" charset="-122"/>
-                <a:cs typeface="Calibri" pitchFamily="34" charset="-120"/>
-              </a:rPr>
-              <a:t>Volume — Litres (L)</a:t>
-            </a:r>
-            <a:endParaRPr lang="en-US" sz="1400" dirty="0"/>
-          </a:p>
-        </p:txBody>
-      </p:sp>
-      <p:sp>
-        <p:nvSpPr>
-          <p:cNvPr id="16" name="Text 14"/>
-          <p:cNvSpPr/>
-          <p:nvPr/>
-        </p:nvSpPr>
-        <p:spPr>
-          <a:xfrm>
-            <a:off x="6263640" y="1737360"/>
-            <a:ext cx="2286000" cy="1097280"/>
-          </a:xfrm>
-          <a:prstGeom prst="rect">
-            <a:avLst/>
-          </a:prstGeom>
-          <a:noFill/>
-          <a:ln/>
-        </p:spPr>
-        <p:txBody>
-          <a:bodyPr wrap="square" rtlCol="0" anchor="t"/>
-          <a:lstStyle/>
-          <a:p>
-            <a:pPr indent="0" marL="0">
-              <a:buNone/>
-            </a:pPr>
-            <a:r>
-              <a:rPr lang="en-US" sz="1100" dirty="0">
-                <a:solidFill>
-                  <a:srgbClr val="3D3A36"/>
-                </a:solidFill>
-                <a:latin typeface="Calibri" pitchFamily="34" charset="0"/>
-                <a:ea typeface="Calibri" pitchFamily="34" charset="-122"/>
-                <a:cs typeface="Calibri" pitchFamily="34" charset="-120"/>
-              </a:rPr>
-              <a:t>Measure liquids with a measuring cylinder. 1 L = 1000 mL. Read the bottom of the meniscus at eye level. For solids, use length × width × height.</a:t>
-            </a:r>
-            <a:endParaRPr lang="en-US" sz="1100" dirty="0"/>
-          </a:p>
-        </p:txBody>
-      </p:sp>
+      <p:graphicFrame>
+        <p:nvGraphicFramePr>
+          <p:cNvPr id="4" name="Table 0"/>
+          <p:cNvGraphicFramePr>
+            <a:graphicFrameLocks noGrp="1"/>
+          </p:cNvGraphicFramePr>
+          <p:nvPr>
+            <p:extLst>
+              <p:ext uri="{D42A27DB-BD31-4B8C-83A1-F6EECF244321}">
+                <p14:modId xmlns:p14="http://schemas.microsoft.com/office/powerpoint/2010/main" val="1579011935"/>
+              </p:ext>
+            </p:extLst>
+          </p:nvPr>
+        </p:nvGraphicFramePr>
+        <p:xfrm>
+          <a:off x="640080" y="1051560"/>
+          <a:ext cx="7863840" cy="914400"/>
+        </p:xfrm>
+        <a:graphic>
+          <a:graphicData uri="http://schemas.openxmlformats.org/drawingml/2006/table">
+            <a:tbl>
+              <a:tblPr/>
+              <a:tblGrid>
+                <a:gridCol w="1965960"/>
+                <a:gridCol w="1965960"/>
+                <a:gridCol w="1965960"/>
+                <a:gridCol w="1965960"/>
+              </a:tblGrid>
+              <a:tr h="502920">
+                <a:tc>
+                  <a:txBody>
+                    <a:bodyPr/>
+                    <a:lstStyle/>
+                    <a:p>
+                      <a:pPr indent="0" marL="0">
+                        <a:buNone/>
+                      </a:pPr>
+                      <a:r>
+                        <a:rPr lang="en-US" sz="1200" b="1" dirty="0">
+                          <a:solidFill>
+                            <a:srgbClr val="FFFFFF"/>
+                          </a:solidFill>
+                          <a:latin typeface="Calibri" pitchFamily="34" charset="0"/>
+                          <a:ea typeface="Calibri" pitchFamily="34" charset="-122"/>
+                          <a:cs typeface="Calibri" pitchFamily="34" charset="-120"/>
+                        </a:rPr>
+                        <a:t>Quantity</a:t>
+                      </a:r>
+                      <a:endParaRPr lang="en-US" sz="1200" dirty="0">
+                        <a:latin typeface="Calibri" charset="0"/>
+                        <a:ea typeface="Calibri" charset="0"/>
+                        <a:cs typeface="Calibri" charset="0"/>
+                      </a:endParaRPr>
+                    </a:p>
+                  </a:txBody>
+                  <a:tcPr marL="91440" marR="91440" marT="45720" marB="45720">
+                    <a:lnL w="6350" cap="flat" cmpd="sng" algn="ctr">
+                      <a:solidFill>
+                        <a:srgbClr val="E5E2DC"/>
+                      </a:solidFill>
+                      <a:prstDash val="solid"/>
+                      <a:round/>
+                      <a:headEnd type="none" w="med" len="med"/>
+                      <a:tailEnd type="none" w="med" len="med"/>
+                    </a:lnL>
+                    <a:lnR w="6350" cap="flat" cmpd="sng" algn="ctr">
+                      <a:solidFill>
+                        <a:srgbClr val="E5E2DC"/>
+                      </a:solidFill>
+                      <a:prstDash val="solid"/>
+                      <a:round/>
+                      <a:headEnd type="none" w="med" len="med"/>
+                      <a:tailEnd type="none" w="med" len="med"/>
+                    </a:lnR>
+                    <a:lnT w="6350" cap="flat" cmpd="sng" algn="ctr">
+                      <a:solidFill>
+                        <a:srgbClr val="E5E2DC"/>
+                      </a:solidFill>
+                      <a:prstDash val="solid"/>
+                      <a:round/>
+                      <a:headEnd type="none" w="med" len="med"/>
+                      <a:tailEnd type="none" w="med" len="med"/>
+                    </a:lnT>
+                    <a:lnB w="6350" cap="flat" cmpd="sng" algn="ctr">
+                      <a:solidFill>
+                        <a:srgbClr val="E5E2DC"/>
+                      </a:solidFill>
+                      <a:prstDash val="solid"/>
+                      <a:round/>
+                      <a:headEnd type="none" w="med" len="med"/>
+                      <a:tailEnd type="none" w="med" len="med"/>
+                    </a:lnB>
+                    <a:solidFill>
+                      <a:srgbClr val="2A9D8F"/>
+                    </a:solidFill>
+                  </a:tcPr>
+                </a:tc>
+                <a:tc>
+                  <a:txBody>
+                    <a:bodyPr/>
+                    <a:lstStyle/>
+                    <a:p>
+                      <a:pPr indent="0" marL="0">
+                        <a:buNone/>
+                      </a:pPr>
+                      <a:r>
+                        <a:rPr lang="en-US" sz="1200" b="1" dirty="0">
+                          <a:solidFill>
+                            <a:srgbClr val="FFFFFF"/>
+                          </a:solidFill>
+                          <a:latin typeface="Calibri" pitchFamily="34" charset="0"/>
+                          <a:ea typeface="Calibri" pitchFamily="34" charset="-122"/>
+                          <a:cs typeface="Calibri" pitchFamily="34" charset="-120"/>
+                        </a:rPr>
+                        <a:t>Unit</a:t>
+                      </a:r>
+                      <a:endParaRPr lang="en-US" sz="1200" dirty="0">
+                        <a:latin typeface="Calibri" charset="0"/>
+                        <a:ea typeface="Calibri" charset="0"/>
+                        <a:cs typeface="Calibri" charset="0"/>
+                      </a:endParaRPr>
+                    </a:p>
+                  </a:txBody>
+                  <a:tcPr marL="91440" marR="91440" marT="45720" marB="45720">
+                    <a:lnL w="6350" cap="flat" cmpd="sng" algn="ctr">
+                      <a:solidFill>
+                        <a:srgbClr val="E5E2DC"/>
+                      </a:solidFill>
+                      <a:prstDash val="solid"/>
+                      <a:round/>
+                      <a:headEnd type="none" w="med" len="med"/>
+                      <a:tailEnd type="none" w="med" len="med"/>
+                    </a:lnL>
+                    <a:lnR w="6350" cap="flat" cmpd="sng" algn="ctr">
+                      <a:solidFill>
+                        <a:srgbClr val="E5E2DC"/>
+                      </a:solidFill>
+                      <a:prstDash val="solid"/>
+                      <a:round/>
+                      <a:headEnd type="none" w="med" len="med"/>
+                      <a:tailEnd type="none" w="med" len="med"/>
+                    </a:lnR>
+                    <a:lnT w="6350" cap="flat" cmpd="sng" algn="ctr">
+                      <a:solidFill>
+                        <a:srgbClr val="E5E2DC"/>
+                      </a:solidFill>
+                      <a:prstDash val="solid"/>
+                      <a:round/>
+                      <a:headEnd type="none" w="med" len="med"/>
+                      <a:tailEnd type="none" w="med" len="med"/>
+                    </a:lnT>
+                    <a:lnB w="6350" cap="flat" cmpd="sng" algn="ctr">
+                      <a:solidFill>
+                        <a:srgbClr val="E5E2DC"/>
+                      </a:solidFill>
+                      <a:prstDash val="solid"/>
+                      <a:round/>
+                      <a:headEnd type="none" w="med" len="med"/>
+                      <a:tailEnd type="none" w="med" len="med"/>
+                    </a:lnB>
+                    <a:solidFill>
+                      <a:srgbClr val="2A9D8F"/>
+                    </a:solidFill>
+                  </a:tcPr>
+                </a:tc>
+                <a:tc>
+                  <a:txBody>
+                    <a:bodyPr/>
+                    <a:lstStyle/>
+                    <a:p>
+                      <a:pPr indent="0" marL="0">
+                        <a:buNone/>
+                      </a:pPr>
+                      <a:r>
+                        <a:rPr lang="en-US" sz="1200" b="1" dirty="0">
+                          <a:solidFill>
+                            <a:srgbClr val="FFFFFF"/>
+                          </a:solidFill>
+                          <a:latin typeface="Calibri" pitchFamily="34" charset="0"/>
+                          <a:ea typeface="Calibri" pitchFamily="34" charset="-122"/>
+                          <a:cs typeface="Calibri" pitchFamily="34" charset="-120"/>
+                        </a:rPr>
+                        <a:t>Symbol</a:t>
+                      </a:r>
+                      <a:endParaRPr lang="en-US" sz="1200" dirty="0">
+                        <a:latin typeface="Calibri" charset="0"/>
+                        <a:ea typeface="Calibri" charset="0"/>
+                        <a:cs typeface="Calibri" charset="0"/>
+                      </a:endParaRPr>
+                    </a:p>
+                  </a:txBody>
+                  <a:tcPr marL="91440" marR="91440" marT="45720" marB="45720">
+                    <a:lnL w="6350" cap="flat" cmpd="sng" algn="ctr">
+                      <a:solidFill>
+                        <a:srgbClr val="E5E2DC"/>
+                      </a:solidFill>
+                      <a:prstDash val="solid"/>
+                      <a:round/>
+                      <a:headEnd type="none" w="med" len="med"/>
+                      <a:tailEnd type="none" w="med" len="med"/>
+                    </a:lnL>
+                    <a:lnR w="6350" cap="flat" cmpd="sng" algn="ctr">
+                      <a:solidFill>
+                        <a:srgbClr val="E5E2DC"/>
+                      </a:solidFill>
+                      <a:prstDash val="solid"/>
+                      <a:round/>
+                      <a:headEnd type="none" w="med" len="med"/>
+                      <a:tailEnd type="none" w="med" len="med"/>
+                    </a:lnR>
+                    <a:lnT w="6350" cap="flat" cmpd="sng" algn="ctr">
+                      <a:solidFill>
+                        <a:srgbClr val="E5E2DC"/>
+                      </a:solidFill>
+                      <a:prstDash val="solid"/>
+                      <a:round/>
+                      <a:headEnd type="none" w="med" len="med"/>
+                      <a:tailEnd type="none" w="med" len="med"/>
+                    </a:lnT>
+                    <a:lnB w="6350" cap="flat" cmpd="sng" algn="ctr">
+                      <a:solidFill>
+                        <a:srgbClr val="E5E2DC"/>
+                      </a:solidFill>
+                      <a:prstDash val="solid"/>
+                      <a:round/>
+                      <a:headEnd type="none" w="med" len="med"/>
+                      <a:tailEnd type="none" w="med" len="med"/>
+                    </a:lnB>
+                    <a:solidFill>
+                      <a:srgbClr val="2A9D8F"/>
+                    </a:solidFill>
+                  </a:tcPr>
+                </a:tc>
+                <a:tc>
+                  <a:txBody>
+                    <a:bodyPr/>
+                    <a:lstStyle/>
+                    <a:p>
+                      <a:pPr indent="0" marL="0">
+                        <a:buNone/>
+                      </a:pPr>
+                      <a:r>
+                        <a:rPr lang="en-US" sz="1200" b="1" dirty="0">
+                          <a:solidFill>
+                            <a:srgbClr val="FFFFFF"/>
+                          </a:solidFill>
+                          <a:latin typeface="Calibri" pitchFamily="34" charset="0"/>
+                          <a:ea typeface="Calibri" pitchFamily="34" charset="-122"/>
+                          <a:cs typeface="Calibri" pitchFamily="34" charset="-120"/>
+                        </a:rPr>
+                        <a:t>Instrument</a:t>
+                      </a:r>
+                      <a:endParaRPr lang="en-US" sz="1200" dirty="0">
+                        <a:latin typeface="Calibri" charset="0"/>
+                        <a:ea typeface="Calibri" charset="0"/>
+                        <a:cs typeface="Calibri" charset="0"/>
+                      </a:endParaRPr>
+                    </a:p>
+                  </a:txBody>
+                  <a:tcPr marL="91440" marR="91440" marT="45720" marB="45720">
+                    <a:lnL w="6350" cap="flat" cmpd="sng" algn="ctr">
+                      <a:solidFill>
+                        <a:srgbClr val="E5E2DC"/>
+                      </a:solidFill>
+                      <a:prstDash val="solid"/>
+                      <a:round/>
+                      <a:headEnd type="none" w="med" len="med"/>
+                      <a:tailEnd type="none" w="med" len="med"/>
+                    </a:lnL>
+                    <a:lnR w="6350" cap="flat" cmpd="sng" algn="ctr">
+                      <a:solidFill>
+                        <a:srgbClr val="E5E2DC"/>
+                      </a:solidFill>
+                      <a:prstDash val="solid"/>
+                      <a:round/>
+                      <a:headEnd type="none" w="med" len="med"/>
+                      <a:tailEnd type="none" w="med" len="med"/>
+                    </a:lnR>
+                    <a:lnT w="6350" cap="flat" cmpd="sng" algn="ctr">
+                      <a:solidFill>
+                        <a:srgbClr val="E5E2DC"/>
+                      </a:solidFill>
+                      <a:prstDash val="solid"/>
+                      <a:round/>
+                      <a:headEnd type="none" w="med" len="med"/>
+                      <a:tailEnd type="none" w="med" len="med"/>
+                    </a:lnT>
+                    <a:lnB w="6350" cap="flat" cmpd="sng" algn="ctr">
+                      <a:solidFill>
+                        <a:srgbClr val="E5E2DC"/>
+                      </a:solidFill>
+                      <a:prstDash val="solid"/>
+                      <a:round/>
+                      <a:headEnd type="none" w="med" len="med"/>
+                      <a:tailEnd type="none" w="med" len="med"/>
+                    </a:lnB>
+                    <a:solidFill>
+                      <a:srgbClr val="2A9D8F"/>
+                    </a:solidFill>
+                  </a:tcPr>
+                </a:tc>
+              </a:tr>
+              <a:tr h="502920">
+                <a:tc>
+                  <a:txBody>
+                    <a:bodyPr/>
+                    <a:lstStyle/>
+                    <a:p>
+                      <a:pPr indent="0" marL="0">
+                        <a:buNone/>
+                      </a:pPr>
+                      <a:r>
+                        <a:rPr lang="en-US" sz="1200" dirty="0">
+                          <a:solidFill>
+                            <a:srgbClr val="3D3A36"/>
+                          </a:solidFill>
+                          <a:latin typeface="Calibri" pitchFamily="34" charset="0"/>
+                          <a:ea typeface="Calibri" pitchFamily="34" charset="-122"/>
+                          <a:cs typeface="Calibri" pitchFamily="34" charset="-120"/>
+                        </a:rPr>
+                        <a:t>Length</a:t>
+                      </a:r>
+                      <a:endParaRPr lang="en-US" sz="1200" dirty="0">
+                        <a:latin typeface="Calibri" charset="0"/>
+                        <a:ea typeface="Calibri" charset="0"/>
+                        <a:cs typeface="Calibri" charset="0"/>
+                      </a:endParaRPr>
+                    </a:p>
+                  </a:txBody>
+                  <a:tcPr marL="91440" marR="91440" marT="45720" marB="45720">
+                    <a:lnL w="6350" cap="flat" cmpd="sng" algn="ctr">
+                      <a:solidFill>
+                        <a:srgbClr val="E5E2DC"/>
+                      </a:solidFill>
+                      <a:prstDash val="solid"/>
+                      <a:round/>
+                      <a:headEnd type="none" w="med" len="med"/>
+                      <a:tailEnd type="none" w="med" len="med"/>
+                    </a:lnL>
+                    <a:lnR w="6350" cap="flat" cmpd="sng" algn="ctr">
+                      <a:solidFill>
+                        <a:srgbClr val="E5E2DC"/>
+                      </a:solidFill>
+                      <a:prstDash val="solid"/>
+                      <a:round/>
+                      <a:headEnd type="none" w="med" len="med"/>
+                      <a:tailEnd type="none" w="med" len="med"/>
+                    </a:lnR>
+                    <a:lnT w="6350" cap="flat" cmpd="sng" algn="ctr">
+                      <a:solidFill>
+                        <a:srgbClr val="E5E2DC"/>
+                      </a:solidFill>
+                      <a:prstDash val="solid"/>
+                      <a:round/>
+                      <a:headEnd type="none" w="med" len="med"/>
+                      <a:tailEnd type="none" w="med" len="med"/>
+                    </a:lnT>
+                    <a:lnB w="6350" cap="flat" cmpd="sng" algn="ctr">
+                      <a:solidFill>
+                        <a:srgbClr val="E5E2DC"/>
+                      </a:solidFill>
+                      <a:prstDash val="solid"/>
+                      <a:round/>
+                      <a:headEnd type="none" w="med" len="med"/>
+                      <a:tailEnd type="none" w="med" len="med"/>
+                    </a:lnB>
+                    <a:solidFill>
+                      <a:srgbClr val="FFFFFF"/>
+                    </a:solidFill>
+                  </a:tcPr>
+                </a:tc>
+                <a:tc>
+                  <a:txBody>
+                    <a:bodyPr/>
+                    <a:lstStyle/>
+                    <a:p>
+                      <a:pPr indent="0" marL="0">
+                        <a:buNone/>
+                      </a:pPr>
+                      <a:r>
+                        <a:rPr lang="en-US" sz="1200" dirty="0">
+                          <a:solidFill>
+                            <a:srgbClr val="3D3A36"/>
+                          </a:solidFill>
+                          <a:latin typeface="Calibri" pitchFamily="34" charset="0"/>
+                          <a:ea typeface="Calibri" pitchFamily="34" charset="-122"/>
+                          <a:cs typeface="Calibri" pitchFamily="34" charset="-120"/>
+                        </a:rPr>
+                        <a:t>metre</a:t>
+                      </a:r>
+                      <a:endParaRPr lang="en-US" sz="1200" dirty="0">
+                        <a:latin typeface="Calibri" charset="0"/>
+                        <a:ea typeface="Calibri" charset="0"/>
+                        <a:cs typeface="Calibri" charset="0"/>
+                      </a:endParaRPr>
+                    </a:p>
+                  </a:txBody>
+                  <a:tcPr marL="91440" marR="91440" marT="45720" marB="45720">
+                    <a:lnL w="6350" cap="flat" cmpd="sng" algn="ctr">
+                      <a:solidFill>
+                        <a:srgbClr val="E5E2DC"/>
+                      </a:solidFill>
+                      <a:prstDash val="solid"/>
+                      <a:round/>
+                      <a:headEnd type="none" w="med" len="med"/>
+                      <a:tailEnd type="none" w="med" len="med"/>
+                    </a:lnL>
+                    <a:lnR w="6350" cap="flat" cmpd="sng" algn="ctr">
+                      <a:solidFill>
+                        <a:srgbClr val="E5E2DC"/>
+                      </a:solidFill>
+                      <a:prstDash val="solid"/>
+                      <a:round/>
+                      <a:headEnd type="none" w="med" len="med"/>
+                      <a:tailEnd type="none" w="med" len="med"/>
+                    </a:lnR>
+                    <a:lnT w="6350" cap="flat" cmpd="sng" algn="ctr">
+                      <a:solidFill>
+                        <a:srgbClr val="E5E2DC"/>
+                      </a:solidFill>
+                      <a:prstDash val="solid"/>
+                      <a:round/>
+                      <a:headEnd type="none" w="med" len="med"/>
+                      <a:tailEnd type="none" w="med" len="med"/>
+                    </a:lnT>
+                    <a:lnB w="6350" cap="flat" cmpd="sng" algn="ctr">
+                      <a:solidFill>
+                        <a:srgbClr val="E5E2DC"/>
+                      </a:solidFill>
+                      <a:prstDash val="solid"/>
+                      <a:round/>
+                      <a:headEnd type="none" w="med" len="med"/>
+                      <a:tailEnd type="none" w="med" len="med"/>
+                    </a:lnB>
+                    <a:solidFill>
+                      <a:srgbClr val="FFFFFF"/>
+                    </a:solidFill>
+                  </a:tcPr>
+                </a:tc>
+                <a:tc>
+                  <a:txBody>
+                    <a:bodyPr/>
+                    <a:lstStyle/>
+                    <a:p>
+                      <a:pPr indent="0" marL="0">
+                        <a:buNone/>
+                      </a:pPr>
+                      <a:r>
+                        <a:rPr lang="en-US" sz="1200" dirty="0">
+                          <a:solidFill>
+                            <a:srgbClr val="3D3A36"/>
+                          </a:solidFill>
+                          <a:latin typeface="Calibri" pitchFamily="34" charset="0"/>
+                          <a:ea typeface="Calibri" pitchFamily="34" charset="-122"/>
+                          <a:cs typeface="Calibri" pitchFamily="34" charset="-120"/>
+                        </a:rPr>
+                        <a:t>m</a:t>
+                      </a:r>
+                      <a:endParaRPr lang="en-US" sz="1200" dirty="0">
+                        <a:latin typeface="Calibri" charset="0"/>
+                        <a:ea typeface="Calibri" charset="0"/>
+                        <a:cs typeface="Calibri" charset="0"/>
+                      </a:endParaRPr>
+                    </a:p>
+                  </a:txBody>
+                  <a:tcPr marL="91440" marR="91440" marT="45720" marB="45720">
+                    <a:lnL w="6350" cap="flat" cmpd="sng" algn="ctr">
+                      <a:solidFill>
+                        <a:srgbClr val="E5E2DC"/>
+                      </a:solidFill>
+                      <a:prstDash val="solid"/>
+                      <a:round/>
+                      <a:headEnd type="none" w="med" len="med"/>
+                      <a:tailEnd type="none" w="med" len="med"/>
+                    </a:lnL>
+                    <a:lnR w="6350" cap="flat" cmpd="sng" algn="ctr">
+                      <a:solidFill>
+                        <a:srgbClr val="E5E2DC"/>
+                      </a:solidFill>
+                      <a:prstDash val="solid"/>
+                      <a:round/>
+                      <a:headEnd type="none" w="med" len="med"/>
+                      <a:tailEnd type="none" w="med" len="med"/>
+                    </a:lnR>
+                    <a:lnT w="6350" cap="flat" cmpd="sng" algn="ctr">
+                      <a:solidFill>
+                        <a:srgbClr val="E5E2DC"/>
+                      </a:solidFill>
+                      <a:prstDash val="solid"/>
+                      <a:round/>
+                      <a:headEnd type="none" w="med" len="med"/>
+                      <a:tailEnd type="none" w="med" len="med"/>
+                    </a:lnT>
+                    <a:lnB w="6350" cap="flat" cmpd="sng" algn="ctr">
+                      <a:solidFill>
+                        <a:srgbClr val="E5E2DC"/>
+                      </a:solidFill>
+                      <a:prstDash val="solid"/>
+                      <a:round/>
+                      <a:headEnd type="none" w="med" len="med"/>
+                      <a:tailEnd type="none" w="med" len="med"/>
+                    </a:lnB>
+                    <a:solidFill>
+                      <a:srgbClr val="FFFFFF"/>
+                    </a:solidFill>
+                  </a:tcPr>
+                </a:tc>
+                <a:tc>
+                  <a:txBody>
+                    <a:bodyPr/>
+                    <a:lstStyle/>
+                    <a:p>
+                      <a:pPr indent="0" marL="0">
+                        <a:buNone/>
+                      </a:pPr>
+                      <a:r>
+                        <a:rPr lang="en-US" sz="1200" dirty="0">
+                          <a:solidFill>
+                            <a:srgbClr val="3D3A36"/>
+                          </a:solidFill>
+                          <a:latin typeface="Calibri" pitchFamily="34" charset="0"/>
+                          <a:ea typeface="Calibri" pitchFamily="34" charset="-122"/>
+                          <a:cs typeface="Calibri" pitchFamily="34" charset="-120"/>
+                        </a:rPr>
+                        <a:t>Ruler / tape measure</a:t>
+                      </a:r>
+                      <a:endParaRPr lang="en-US" sz="1200" dirty="0">
+                        <a:latin typeface="Calibri" charset="0"/>
+                        <a:ea typeface="Calibri" charset="0"/>
+                        <a:cs typeface="Calibri" charset="0"/>
+                      </a:endParaRPr>
+                    </a:p>
+                  </a:txBody>
+                  <a:tcPr marL="91440" marR="91440" marT="45720" marB="45720">
+                    <a:lnL w="6350" cap="flat" cmpd="sng" algn="ctr">
+                      <a:solidFill>
+                        <a:srgbClr val="E5E2DC"/>
+                      </a:solidFill>
+                      <a:prstDash val="solid"/>
+                      <a:round/>
+                      <a:headEnd type="none" w="med" len="med"/>
+                      <a:tailEnd type="none" w="med" len="med"/>
+                    </a:lnL>
+                    <a:lnR w="6350" cap="flat" cmpd="sng" algn="ctr">
+                      <a:solidFill>
+                        <a:srgbClr val="E5E2DC"/>
+                      </a:solidFill>
+                      <a:prstDash val="solid"/>
+                      <a:round/>
+                      <a:headEnd type="none" w="med" len="med"/>
+                      <a:tailEnd type="none" w="med" len="med"/>
+                    </a:lnR>
+                    <a:lnT w="6350" cap="flat" cmpd="sng" algn="ctr">
+                      <a:solidFill>
+                        <a:srgbClr val="E5E2DC"/>
+                      </a:solidFill>
+                      <a:prstDash val="solid"/>
+                      <a:round/>
+                      <a:headEnd type="none" w="med" len="med"/>
+                      <a:tailEnd type="none" w="med" len="med"/>
+                    </a:lnT>
+                    <a:lnB w="6350" cap="flat" cmpd="sng" algn="ctr">
+                      <a:solidFill>
+                        <a:srgbClr val="E5E2DC"/>
+                      </a:solidFill>
+                      <a:prstDash val="solid"/>
+                      <a:round/>
+                      <a:headEnd type="none" w="med" len="med"/>
+                      <a:tailEnd type="none" w="med" len="med"/>
+                    </a:lnB>
+                    <a:solidFill>
+                      <a:srgbClr val="FFFFFF"/>
+                    </a:solidFill>
+                  </a:tcPr>
+                </a:tc>
+              </a:tr>
+              <a:tr h="502920">
+                <a:tc>
+                  <a:txBody>
+                    <a:bodyPr/>
+                    <a:lstStyle/>
+                    <a:p>
+                      <a:pPr indent="0" marL="0">
+                        <a:buNone/>
+                      </a:pPr>
+                      <a:r>
+                        <a:rPr lang="en-US" sz="1200" dirty="0">
+                          <a:solidFill>
+                            <a:srgbClr val="3D3A36"/>
+                          </a:solidFill>
+                          <a:latin typeface="Calibri" pitchFamily="34" charset="0"/>
+                          <a:ea typeface="Calibri" pitchFamily="34" charset="-122"/>
+                          <a:cs typeface="Calibri" pitchFamily="34" charset="-120"/>
+                        </a:rPr>
+                        <a:t>Mass</a:t>
+                      </a:r>
+                      <a:endParaRPr lang="en-US" sz="1200" dirty="0">
+                        <a:latin typeface="Calibri" charset="0"/>
+                        <a:ea typeface="Calibri" charset="0"/>
+                        <a:cs typeface="Calibri" charset="0"/>
+                      </a:endParaRPr>
+                    </a:p>
+                  </a:txBody>
+                  <a:tcPr marL="91440" marR="91440" marT="45720" marB="45720">
+                    <a:lnL w="6350" cap="flat" cmpd="sng" algn="ctr">
+                      <a:solidFill>
+                        <a:srgbClr val="E5E2DC"/>
+                      </a:solidFill>
+                      <a:prstDash val="solid"/>
+                      <a:round/>
+                      <a:headEnd type="none" w="med" len="med"/>
+                      <a:tailEnd type="none" w="med" len="med"/>
+                    </a:lnL>
+                    <a:lnR w="6350" cap="flat" cmpd="sng" algn="ctr">
+                      <a:solidFill>
+                        <a:srgbClr val="E5E2DC"/>
+                      </a:solidFill>
+                      <a:prstDash val="solid"/>
+                      <a:round/>
+                      <a:headEnd type="none" w="med" len="med"/>
+                      <a:tailEnd type="none" w="med" len="med"/>
+                    </a:lnR>
+                    <a:lnT w="6350" cap="flat" cmpd="sng" algn="ctr">
+                      <a:solidFill>
+                        <a:srgbClr val="E5E2DC"/>
+                      </a:solidFill>
+                      <a:prstDash val="solid"/>
+                      <a:round/>
+                      <a:headEnd type="none" w="med" len="med"/>
+                      <a:tailEnd type="none" w="med" len="med"/>
+                    </a:lnT>
+                    <a:lnB w="6350" cap="flat" cmpd="sng" algn="ctr">
+                      <a:solidFill>
+                        <a:srgbClr val="E5E2DC"/>
+                      </a:solidFill>
+                      <a:prstDash val="solid"/>
+                      <a:round/>
+                      <a:headEnd type="none" w="med" len="med"/>
+                      <a:tailEnd type="none" w="med" len="med"/>
+                    </a:lnB>
+                    <a:solidFill>
+                      <a:srgbClr val="F8F6F3"/>
+                    </a:solidFill>
+                  </a:tcPr>
+                </a:tc>
+                <a:tc>
+                  <a:txBody>
+                    <a:bodyPr/>
+                    <a:lstStyle/>
+                    <a:p>
+                      <a:pPr indent="0" marL="0">
+                        <a:buNone/>
+                      </a:pPr>
+                      <a:r>
+                        <a:rPr lang="en-US" sz="1200" dirty="0">
+                          <a:solidFill>
+                            <a:srgbClr val="3D3A36"/>
+                          </a:solidFill>
+                          <a:latin typeface="Calibri" pitchFamily="34" charset="0"/>
+                          <a:ea typeface="Calibri" pitchFamily="34" charset="-122"/>
+                          <a:cs typeface="Calibri" pitchFamily="34" charset="-120"/>
+                        </a:rPr>
+                        <a:t>kilogram</a:t>
+                      </a:r>
+                      <a:endParaRPr lang="en-US" sz="1200" dirty="0">
+                        <a:latin typeface="Calibri" charset="0"/>
+                        <a:ea typeface="Calibri" charset="0"/>
+                        <a:cs typeface="Calibri" charset="0"/>
+                      </a:endParaRPr>
+                    </a:p>
+                  </a:txBody>
+                  <a:tcPr marL="91440" marR="91440" marT="45720" marB="45720">
+                    <a:lnL w="6350" cap="flat" cmpd="sng" algn="ctr">
+                      <a:solidFill>
+                        <a:srgbClr val="E5E2DC"/>
+                      </a:solidFill>
+                      <a:prstDash val="solid"/>
+                      <a:round/>
+                      <a:headEnd type="none" w="med" len="med"/>
+                      <a:tailEnd type="none" w="med" len="med"/>
+                    </a:lnL>
+                    <a:lnR w="6350" cap="flat" cmpd="sng" algn="ctr">
+                      <a:solidFill>
+                        <a:srgbClr val="E5E2DC"/>
+                      </a:solidFill>
+                      <a:prstDash val="solid"/>
+                      <a:round/>
+                      <a:headEnd type="none" w="med" len="med"/>
+                      <a:tailEnd type="none" w="med" len="med"/>
+                    </a:lnR>
+                    <a:lnT w="6350" cap="flat" cmpd="sng" algn="ctr">
+                      <a:solidFill>
+                        <a:srgbClr val="E5E2DC"/>
+                      </a:solidFill>
+                      <a:prstDash val="solid"/>
+                      <a:round/>
+                      <a:headEnd type="none" w="med" len="med"/>
+                      <a:tailEnd type="none" w="med" len="med"/>
+                    </a:lnT>
+                    <a:lnB w="6350" cap="flat" cmpd="sng" algn="ctr">
+                      <a:solidFill>
+                        <a:srgbClr val="E5E2DC"/>
+                      </a:solidFill>
+                      <a:prstDash val="solid"/>
+                      <a:round/>
+                      <a:headEnd type="none" w="med" len="med"/>
+                      <a:tailEnd type="none" w="med" len="med"/>
+                    </a:lnB>
+                    <a:solidFill>
+                      <a:srgbClr val="F8F6F3"/>
+                    </a:solidFill>
+                  </a:tcPr>
+                </a:tc>
+                <a:tc>
+                  <a:txBody>
+                    <a:bodyPr/>
+                    <a:lstStyle/>
+                    <a:p>
+                      <a:pPr indent="0" marL="0">
+                        <a:buNone/>
+                      </a:pPr>
+                      <a:r>
+                        <a:rPr lang="en-US" sz="1200" dirty="0">
+                          <a:solidFill>
+                            <a:srgbClr val="3D3A36"/>
+                          </a:solidFill>
+                          <a:latin typeface="Calibri" pitchFamily="34" charset="0"/>
+                          <a:ea typeface="Calibri" pitchFamily="34" charset="-122"/>
+                          <a:cs typeface="Calibri" pitchFamily="34" charset="-120"/>
+                        </a:rPr>
+                        <a:t>kg</a:t>
+                      </a:r>
+                      <a:endParaRPr lang="en-US" sz="1200" dirty="0">
+                        <a:latin typeface="Calibri" charset="0"/>
+                        <a:ea typeface="Calibri" charset="0"/>
+                        <a:cs typeface="Calibri" charset="0"/>
+                      </a:endParaRPr>
+                    </a:p>
+                  </a:txBody>
+                  <a:tcPr marL="91440" marR="91440" marT="45720" marB="45720">
+                    <a:lnL w="6350" cap="flat" cmpd="sng" algn="ctr">
+                      <a:solidFill>
+                        <a:srgbClr val="E5E2DC"/>
+                      </a:solidFill>
+                      <a:prstDash val="solid"/>
+                      <a:round/>
+                      <a:headEnd type="none" w="med" len="med"/>
+                      <a:tailEnd type="none" w="med" len="med"/>
+                    </a:lnL>
+                    <a:lnR w="6350" cap="flat" cmpd="sng" algn="ctr">
+                      <a:solidFill>
+                        <a:srgbClr val="E5E2DC"/>
+                      </a:solidFill>
+                      <a:prstDash val="solid"/>
+                      <a:round/>
+                      <a:headEnd type="none" w="med" len="med"/>
+                      <a:tailEnd type="none" w="med" len="med"/>
+                    </a:lnR>
+                    <a:lnT w="6350" cap="flat" cmpd="sng" algn="ctr">
+                      <a:solidFill>
+                        <a:srgbClr val="E5E2DC"/>
+                      </a:solidFill>
+                      <a:prstDash val="solid"/>
+                      <a:round/>
+                      <a:headEnd type="none" w="med" len="med"/>
+                      <a:tailEnd type="none" w="med" len="med"/>
+                    </a:lnT>
+                    <a:lnB w="6350" cap="flat" cmpd="sng" algn="ctr">
+                      <a:solidFill>
+                        <a:srgbClr val="E5E2DC"/>
+                      </a:solidFill>
+                      <a:prstDash val="solid"/>
+                      <a:round/>
+                      <a:headEnd type="none" w="med" len="med"/>
+                      <a:tailEnd type="none" w="med" len="med"/>
+                    </a:lnB>
+                    <a:solidFill>
+                      <a:srgbClr val="F8F6F3"/>
+                    </a:solidFill>
+                  </a:tcPr>
+                </a:tc>
+                <a:tc>
+                  <a:txBody>
+                    <a:bodyPr/>
+                    <a:lstStyle/>
+                    <a:p>
+                      <a:pPr indent="0" marL="0">
+                        <a:buNone/>
+                      </a:pPr>
+                      <a:r>
+                        <a:rPr lang="en-US" sz="1200" dirty="0">
+                          <a:solidFill>
+                            <a:srgbClr val="3D3A36"/>
+                          </a:solidFill>
+                          <a:latin typeface="Calibri" pitchFamily="34" charset="0"/>
+                          <a:ea typeface="Calibri" pitchFamily="34" charset="-122"/>
+                          <a:cs typeface="Calibri" pitchFamily="34" charset="-120"/>
+                        </a:rPr>
+                        <a:t>Balance / scales</a:t>
+                      </a:r>
+                      <a:endParaRPr lang="en-US" sz="1200" dirty="0">
+                        <a:latin typeface="Calibri" charset="0"/>
+                        <a:ea typeface="Calibri" charset="0"/>
+                        <a:cs typeface="Calibri" charset="0"/>
+                      </a:endParaRPr>
+                    </a:p>
+                  </a:txBody>
+                  <a:tcPr marL="91440" marR="91440" marT="45720" marB="45720">
+                    <a:lnL w="6350" cap="flat" cmpd="sng" algn="ctr">
+                      <a:solidFill>
+                        <a:srgbClr val="E5E2DC"/>
+                      </a:solidFill>
+                      <a:prstDash val="solid"/>
+                      <a:round/>
+                      <a:headEnd type="none" w="med" len="med"/>
+                      <a:tailEnd type="none" w="med" len="med"/>
+                    </a:lnL>
+                    <a:lnR w="6350" cap="flat" cmpd="sng" algn="ctr">
+                      <a:solidFill>
+                        <a:srgbClr val="E5E2DC"/>
+                      </a:solidFill>
+                      <a:prstDash val="solid"/>
+                      <a:round/>
+                      <a:headEnd type="none" w="med" len="med"/>
+                      <a:tailEnd type="none" w="med" len="med"/>
+                    </a:lnR>
+                    <a:lnT w="6350" cap="flat" cmpd="sng" algn="ctr">
+                      <a:solidFill>
+                        <a:srgbClr val="E5E2DC"/>
+                      </a:solidFill>
+                      <a:prstDash val="solid"/>
+                      <a:round/>
+                      <a:headEnd type="none" w="med" len="med"/>
+                      <a:tailEnd type="none" w="med" len="med"/>
+                    </a:lnT>
+                    <a:lnB w="6350" cap="flat" cmpd="sng" algn="ctr">
+                      <a:solidFill>
+                        <a:srgbClr val="E5E2DC"/>
+                      </a:solidFill>
+                      <a:prstDash val="solid"/>
+                      <a:round/>
+                      <a:headEnd type="none" w="med" len="med"/>
+                      <a:tailEnd type="none" w="med" len="med"/>
+                    </a:lnB>
+                    <a:solidFill>
+                      <a:srgbClr val="F8F6F3"/>
+                    </a:solidFill>
+                  </a:tcPr>
+                </a:tc>
+              </a:tr>
+              <a:tr h="502920">
+                <a:tc>
+                  <a:txBody>
+                    <a:bodyPr/>
+                    <a:lstStyle/>
+                    <a:p>
+                      <a:pPr indent="0" marL="0">
+                        <a:buNone/>
+                      </a:pPr>
+                      <a:r>
+                        <a:rPr lang="en-US" sz="1200" dirty="0">
+                          <a:solidFill>
+                            <a:srgbClr val="3D3A36"/>
+                          </a:solidFill>
+                          <a:latin typeface="Calibri" pitchFamily="34" charset="0"/>
+                          <a:ea typeface="Calibri" pitchFamily="34" charset="-122"/>
+                          <a:cs typeface="Calibri" pitchFamily="34" charset="-120"/>
+                        </a:rPr>
+                        <a:t>Time</a:t>
+                      </a:r>
+                      <a:endParaRPr lang="en-US" sz="1200" dirty="0">
+                        <a:latin typeface="Calibri" charset="0"/>
+                        <a:ea typeface="Calibri" charset="0"/>
+                        <a:cs typeface="Calibri" charset="0"/>
+                      </a:endParaRPr>
+                    </a:p>
+                  </a:txBody>
+                  <a:tcPr marL="91440" marR="91440" marT="45720" marB="45720">
+                    <a:lnL w="6350" cap="flat" cmpd="sng" algn="ctr">
+                      <a:solidFill>
+                        <a:srgbClr val="E5E2DC"/>
+                      </a:solidFill>
+                      <a:prstDash val="solid"/>
+                      <a:round/>
+                      <a:headEnd type="none" w="med" len="med"/>
+                      <a:tailEnd type="none" w="med" len="med"/>
+                    </a:lnL>
+                    <a:lnR w="6350" cap="flat" cmpd="sng" algn="ctr">
+                      <a:solidFill>
+                        <a:srgbClr val="E5E2DC"/>
+                      </a:solidFill>
+                      <a:prstDash val="solid"/>
+                      <a:round/>
+                      <a:headEnd type="none" w="med" len="med"/>
+                      <a:tailEnd type="none" w="med" len="med"/>
+                    </a:lnR>
+                    <a:lnT w="6350" cap="flat" cmpd="sng" algn="ctr">
+                      <a:solidFill>
+                        <a:srgbClr val="E5E2DC"/>
+                      </a:solidFill>
+                      <a:prstDash val="solid"/>
+                      <a:round/>
+                      <a:headEnd type="none" w="med" len="med"/>
+                      <a:tailEnd type="none" w="med" len="med"/>
+                    </a:lnT>
+                    <a:lnB w="6350" cap="flat" cmpd="sng" algn="ctr">
+                      <a:solidFill>
+                        <a:srgbClr val="E5E2DC"/>
+                      </a:solidFill>
+                      <a:prstDash val="solid"/>
+                      <a:round/>
+                      <a:headEnd type="none" w="med" len="med"/>
+                      <a:tailEnd type="none" w="med" len="med"/>
+                    </a:lnB>
+                    <a:solidFill>
+                      <a:srgbClr val="FFFFFF"/>
+                    </a:solidFill>
+                  </a:tcPr>
+                </a:tc>
+                <a:tc>
+                  <a:txBody>
+                    <a:bodyPr/>
+                    <a:lstStyle/>
+                    <a:p>
+                      <a:pPr indent="0" marL="0">
+                        <a:buNone/>
+                      </a:pPr>
+                      <a:r>
+                        <a:rPr lang="en-US" sz="1200" dirty="0">
+                          <a:solidFill>
+                            <a:srgbClr val="3D3A36"/>
+                          </a:solidFill>
+                          <a:latin typeface="Calibri" pitchFamily="34" charset="0"/>
+                          <a:ea typeface="Calibri" pitchFamily="34" charset="-122"/>
+                          <a:cs typeface="Calibri" pitchFamily="34" charset="-120"/>
+                        </a:rPr>
+                        <a:t>second</a:t>
+                      </a:r>
+                      <a:endParaRPr lang="en-US" sz="1200" dirty="0">
+                        <a:latin typeface="Calibri" charset="0"/>
+                        <a:ea typeface="Calibri" charset="0"/>
+                        <a:cs typeface="Calibri" charset="0"/>
+                      </a:endParaRPr>
+                    </a:p>
+                  </a:txBody>
+                  <a:tcPr marL="91440" marR="91440" marT="45720" marB="45720">
+                    <a:lnL w="6350" cap="flat" cmpd="sng" algn="ctr">
+                      <a:solidFill>
+                        <a:srgbClr val="E5E2DC"/>
+                      </a:solidFill>
+                      <a:prstDash val="solid"/>
+                      <a:round/>
+                      <a:headEnd type="none" w="med" len="med"/>
+                      <a:tailEnd type="none" w="med" len="med"/>
+                    </a:lnL>
+                    <a:lnR w="6350" cap="flat" cmpd="sng" algn="ctr">
+                      <a:solidFill>
+                        <a:srgbClr val="E5E2DC"/>
+                      </a:solidFill>
+                      <a:prstDash val="solid"/>
+                      <a:round/>
+                      <a:headEnd type="none" w="med" len="med"/>
+                      <a:tailEnd type="none" w="med" len="med"/>
+                    </a:lnR>
+                    <a:lnT w="6350" cap="flat" cmpd="sng" algn="ctr">
+                      <a:solidFill>
+                        <a:srgbClr val="E5E2DC"/>
+                      </a:solidFill>
+                      <a:prstDash val="solid"/>
+                      <a:round/>
+                      <a:headEnd type="none" w="med" len="med"/>
+                      <a:tailEnd type="none" w="med" len="med"/>
+                    </a:lnT>
+                    <a:lnB w="6350" cap="flat" cmpd="sng" algn="ctr">
+                      <a:solidFill>
+                        <a:srgbClr val="E5E2DC"/>
+                      </a:solidFill>
+                      <a:prstDash val="solid"/>
+                      <a:round/>
+                      <a:headEnd type="none" w="med" len="med"/>
+                      <a:tailEnd type="none" w="med" len="med"/>
+                    </a:lnB>
+                    <a:solidFill>
+                      <a:srgbClr val="FFFFFF"/>
+                    </a:solidFill>
+                  </a:tcPr>
+                </a:tc>
+                <a:tc>
+                  <a:txBody>
+                    <a:bodyPr/>
+                    <a:lstStyle/>
+                    <a:p>
+                      <a:pPr indent="0" marL="0">
+                        <a:buNone/>
+                      </a:pPr>
+                      <a:r>
+                        <a:rPr lang="en-US" sz="1200" dirty="0">
+                          <a:solidFill>
+                            <a:srgbClr val="3D3A36"/>
+                          </a:solidFill>
+                          <a:latin typeface="Calibri" pitchFamily="34" charset="0"/>
+                          <a:ea typeface="Calibri" pitchFamily="34" charset="-122"/>
+                          <a:cs typeface="Calibri" pitchFamily="34" charset="-120"/>
+                        </a:rPr>
+                        <a:t>s</a:t>
+                      </a:r>
+                      <a:endParaRPr lang="en-US" sz="1200" dirty="0">
+                        <a:latin typeface="Calibri" charset="0"/>
+                        <a:ea typeface="Calibri" charset="0"/>
+                        <a:cs typeface="Calibri" charset="0"/>
+                      </a:endParaRPr>
+                    </a:p>
+                  </a:txBody>
+                  <a:tcPr marL="91440" marR="91440" marT="45720" marB="45720">
+                    <a:lnL w="6350" cap="flat" cmpd="sng" algn="ctr">
+                      <a:solidFill>
+                        <a:srgbClr val="E5E2DC"/>
+                      </a:solidFill>
+                      <a:prstDash val="solid"/>
+                      <a:round/>
+                      <a:headEnd type="none" w="med" len="med"/>
+                      <a:tailEnd type="none" w="med" len="med"/>
+                    </a:lnL>
+                    <a:lnR w="6350" cap="flat" cmpd="sng" algn="ctr">
+                      <a:solidFill>
+                        <a:srgbClr val="E5E2DC"/>
+                      </a:solidFill>
+                      <a:prstDash val="solid"/>
+                      <a:round/>
+                      <a:headEnd type="none" w="med" len="med"/>
+                      <a:tailEnd type="none" w="med" len="med"/>
+                    </a:lnR>
+                    <a:lnT w="6350" cap="flat" cmpd="sng" algn="ctr">
+                      <a:solidFill>
+                        <a:srgbClr val="E5E2DC"/>
+                      </a:solidFill>
+                      <a:prstDash val="solid"/>
+                      <a:round/>
+                      <a:headEnd type="none" w="med" len="med"/>
+                      <a:tailEnd type="none" w="med" len="med"/>
+                    </a:lnT>
+                    <a:lnB w="6350" cap="flat" cmpd="sng" algn="ctr">
+                      <a:solidFill>
+                        <a:srgbClr val="E5E2DC"/>
+                      </a:solidFill>
+                      <a:prstDash val="solid"/>
+                      <a:round/>
+                      <a:headEnd type="none" w="med" len="med"/>
+                      <a:tailEnd type="none" w="med" len="med"/>
+                    </a:lnB>
+                    <a:solidFill>
+                      <a:srgbClr val="FFFFFF"/>
+                    </a:solidFill>
+                  </a:tcPr>
+                </a:tc>
+                <a:tc>
+                  <a:txBody>
+                    <a:bodyPr/>
+                    <a:lstStyle/>
+                    <a:p>
+                      <a:pPr indent="0" marL="0">
+                        <a:buNone/>
+                      </a:pPr>
+                      <a:r>
+                        <a:rPr lang="en-US" sz="1200" dirty="0">
+                          <a:solidFill>
+                            <a:srgbClr val="3D3A36"/>
+                          </a:solidFill>
+                          <a:latin typeface="Calibri" pitchFamily="34" charset="0"/>
+                          <a:ea typeface="Calibri" pitchFamily="34" charset="-122"/>
+                          <a:cs typeface="Calibri" pitchFamily="34" charset="-120"/>
+                        </a:rPr>
+                        <a:t>Stopwatch</a:t>
+                      </a:r>
+                      <a:endParaRPr lang="en-US" sz="1200" dirty="0">
+                        <a:latin typeface="Calibri" charset="0"/>
+                        <a:ea typeface="Calibri" charset="0"/>
+                        <a:cs typeface="Calibri" charset="0"/>
+                      </a:endParaRPr>
+                    </a:p>
+                  </a:txBody>
+                  <a:tcPr marL="91440" marR="91440" marT="45720" marB="45720">
+                    <a:lnL w="6350" cap="flat" cmpd="sng" algn="ctr">
+                      <a:solidFill>
+                        <a:srgbClr val="E5E2DC"/>
+                      </a:solidFill>
+                      <a:prstDash val="solid"/>
+                      <a:round/>
+                      <a:headEnd type="none" w="med" len="med"/>
+                      <a:tailEnd type="none" w="med" len="med"/>
+                    </a:lnL>
+                    <a:lnR w="6350" cap="flat" cmpd="sng" algn="ctr">
+                      <a:solidFill>
+                        <a:srgbClr val="E5E2DC"/>
+                      </a:solidFill>
+                      <a:prstDash val="solid"/>
+                      <a:round/>
+                      <a:headEnd type="none" w="med" len="med"/>
+                      <a:tailEnd type="none" w="med" len="med"/>
+                    </a:lnR>
+                    <a:lnT w="6350" cap="flat" cmpd="sng" algn="ctr">
+                      <a:solidFill>
+                        <a:srgbClr val="E5E2DC"/>
+                      </a:solidFill>
+                      <a:prstDash val="solid"/>
+                      <a:round/>
+                      <a:headEnd type="none" w="med" len="med"/>
+                      <a:tailEnd type="none" w="med" len="med"/>
+                    </a:lnT>
+                    <a:lnB w="6350" cap="flat" cmpd="sng" algn="ctr">
+                      <a:solidFill>
+                        <a:srgbClr val="E5E2DC"/>
+                      </a:solidFill>
+                      <a:prstDash val="solid"/>
+                      <a:round/>
+                      <a:headEnd type="none" w="med" len="med"/>
+                      <a:tailEnd type="none" w="med" len="med"/>
+                    </a:lnB>
+                    <a:solidFill>
+                      <a:srgbClr val="FFFFFF"/>
+                    </a:solidFill>
+                  </a:tcPr>
+                </a:tc>
+              </a:tr>
+              <a:tr h="502920">
+                <a:tc>
+                  <a:txBody>
+                    <a:bodyPr/>
+                    <a:lstStyle/>
+                    <a:p>
+                      <a:pPr indent="0" marL="0">
+                        <a:buNone/>
+                      </a:pPr>
+                      <a:r>
+                        <a:rPr lang="en-US" sz="1200" dirty="0">
+                          <a:solidFill>
+                            <a:srgbClr val="3D3A36"/>
+                          </a:solidFill>
+                          <a:latin typeface="Calibri" pitchFamily="34" charset="0"/>
+                          <a:ea typeface="Calibri" pitchFamily="34" charset="-122"/>
+                          <a:cs typeface="Calibri" pitchFamily="34" charset="-120"/>
+                        </a:rPr>
+                        <a:t>Temperature</a:t>
+                      </a:r>
+                      <a:endParaRPr lang="en-US" sz="1200" dirty="0">
+                        <a:latin typeface="Calibri" charset="0"/>
+                        <a:ea typeface="Calibri" charset="0"/>
+                        <a:cs typeface="Calibri" charset="0"/>
+                      </a:endParaRPr>
+                    </a:p>
+                  </a:txBody>
+                  <a:tcPr marL="91440" marR="91440" marT="45720" marB="45720">
+                    <a:lnL w="6350" cap="flat" cmpd="sng" algn="ctr">
+                      <a:solidFill>
+                        <a:srgbClr val="E5E2DC"/>
+                      </a:solidFill>
+                      <a:prstDash val="solid"/>
+                      <a:round/>
+                      <a:headEnd type="none" w="med" len="med"/>
+                      <a:tailEnd type="none" w="med" len="med"/>
+                    </a:lnL>
+                    <a:lnR w="6350" cap="flat" cmpd="sng" algn="ctr">
+                      <a:solidFill>
+                        <a:srgbClr val="E5E2DC"/>
+                      </a:solidFill>
+                      <a:prstDash val="solid"/>
+                      <a:round/>
+                      <a:headEnd type="none" w="med" len="med"/>
+                      <a:tailEnd type="none" w="med" len="med"/>
+                    </a:lnR>
+                    <a:lnT w="6350" cap="flat" cmpd="sng" algn="ctr">
+                      <a:solidFill>
+                        <a:srgbClr val="E5E2DC"/>
+                      </a:solidFill>
+                      <a:prstDash val="solid"/>
+                      <a:round/>
+                      <a:headEnd type="none" w="med" len="med"/>
+                      <a:tailEnd type="none" w="med" len="med"/>
+                    </a:lnT>
+                    <a:lnB w="6350" cap="flat" cmpd="sng" algn="ctr">
+                      <a:solidFill>
+                        <a:srgbClr val="E5E2DC"/>
+                      </a:solidFill>
+                      <a:prstDash val="solid"/>
+                      <a:round/>
+                      <a:headEnd type="none" w="med" len="med"/>
+                      <a:tailEnd type="none" w="med" len="med"/>
+                    </a:lnB>
+                    <a:solidFill>
+                      <a:srgbClr val="F8F6F3"/>
+                    </a:solidFill>
+                  </a:tcPr>
+                </a:tc>
+                <a:tc>
+                  <a:txBody>
+                    <a:bodyPr/>
+                    <a:lstStyle/>
+                    <a:p>
+                      <a:pPr indent="0" marL="0">
+                        <a:buNone/>
+                      </a:pPr>
+                      <a:r>
+                        <a:rPr lang="en-US" sz="1200" dirty="0">
+                          <a:solidFill>
+                            <a:srgbClr val="3D3A36"/>
+                          </a:solidFill>
+                          <a:latin typeface="Calibri" pitchFamily="34" charset="0"/>
+                          <a:ea typeface="Calibri" pitchFamily="34" charset="-122"/>
+                          <a:cs typeface="Calibri" pitchFamily="34" charset="-120"/>
+                        </a:rPr>
+                        <a:t>degrees Celsius</a:t>
+                      </a:r>
+                      <a:endParaRPr lang="en-US" sz="1200" dirty="0">
+                        <a:latin typeface="Calibri" charset="0"/>
+                        <a:ea typeface="Calibri" charset="0"/>
+                        <a:cs typeface="Calibri" charset="0"/>
+                      </a:endParaRPr>
+                    </a:p>
+                  </a:txBody>
+                  <a:tcPr marL="91440" marR="91440" marT="45720" marB="45720">
+                    <a:lnL w="6350" cap="flat" cmpd="sng" algn="ctr">
+                      <a:solidFill>
+                        <a:srgbClr val="E5E2DC"/>
+                      </a:solidFill>
+                      <a:prstDash val="solid"/>
+                      <a:round/>
+                      <a:headEnd type="none" w="med" len="med"/>
+                      <a:tailEnd type="none" w="med" len="med"/>
+                    </a:lnL>
+                    <a:lnR w="6350" cap="flat" cmpd="sng" algn="ctr">
+                      <a:solidFill>
+                        <a:srgbClr val="E5E2DC"/>
+                      </a:solidFill>
+                      <a:prstDash val="solid"/>
+                      <a:round/>
+                      <a:headEnd type="none" w="med" len="med"/>
+                      <a:tailEnd type="none" w="med" len="med"/>
+                    </a:lnR>
+                    <a:lnT w="6350" cap="flat" cmpd="sng" algn="ctr">
+                      <a:solidFill>
+                        <a:srgbClr val="E5E2DC"/>
+                      </a:solidFill>
+                      <a:prstDash val="solid"/>
+                      <a:round/>
+                      <a:headEnd type="none" w="med" len="med"/>
+                      <a:tailEnd type="none" w="med" len="med"/>
+                    </a:lnT>
+                    <a:lnB w="6350" cap="flat" cmpd="sng" algn="ctr">
+                      <a:solidFill>
+                        <a:srgbClr val="E5E2DC"/>
+                      </a:solidFill>
+                      <a:prstDash val="solid"/>
+                      <a:round/>
+                      <a:headEnd type="none" w="med" len="med"/>
+                      <a:tailEnd type="none" w="med" len="med"/>
+                    </a:lnB>
+                    <a:solidFill>
+                      <a:srgbClr val="F8F6F3"/>
+                    </a:solidFill>
+                  </a:tcPr>
+                </a:tc>
+                <a:tc>
+                  <a:txBody>
+                    <a:bodyPr/>
+                    <a:lstStyle/>
+                    <a:p>
+                      <a:pPr indent="0" marL="0">
+                        <a:buNone/>
+                      </a:pPr>
+                      <a:r>
+                        <a:rPr lang="en-US" sz="1200" dirty="0">
+                          <a:solidFill>
+                            <a:srgbClr val="3D3A36"/>
+                          </a:solidFill>
+                          <a:latin typeface="Calibri" pitchFamily="34" charset="0"/>
+                          <a:ea typeface="Calibri" pitchFamily="34" charset="-122"/>
+                          <a:cs typeface="Calibri" pitchFamily="34" charset="-120"/>
+                        </a:rPr>
+                        <a:t>°C</a:t>
+                      </a:r>
+                      <a:endParaRPr lang="en-US" sz="1200" dirty="0">
+                        <a:latin typeface="Calibri" charset="0"/>
+                        <a:ea typeface="Calibri" charset="0"/>
+                        <a:cs typeface="Calibri" charset="0"/>
+                      </a:endParaRPr>
+                    </a:p>
+                  </a:txBody>
+                  <a:tcPr marL="91440" marR="91440" marT="45720" marB="45720">
+                    <a:lnL w="6350" cap="flat" cmpd="sng" algn="ctr">
+                      <a:solidFill>
+                        <a:srgbClr val="E5E2DC"/>
+                      </a:solidFill>
+                      <a:prstDash val="solid"/>
+                      <a:round/>
+                      <a:headEnd type="none" w="med" len="med"/>
+                      <a:tailEnd type="none" w="med" len="med"/>
+                    </a:lnL>
+                    <a:lnR w="6350" cap="flat" cmpd="sng" algn="ctr">
+                      <a:solidFill>
+                        <a:srgbClr val="E5E2DC"/>
+                      </a:solidFill>
+                      <a:prstDash val="solid"/>
+                      <a:round/>
+                      <a:headEnd type="none" w="med" len="med"/>
+                      <a:tailEnd type="none" w="med" len="med"/>
+                    </a:lnR>
+                    <a:lnT w="6350" cap="flat" cmpd="sng" algn="ctr">
+                      <a:solidFill>
+                        <a:srgbClr val="E5E2DC"/>
+                      </a:solidFill>
+                      <a:prstDash val="solid"/>
+                      <a:round/>
+                      <a:headEnd type="none" w="med" len="med"/>
+                      <a:tailEnd type="none" w="med" len="med"/>
+                    </a:lnT>
+                    <a:lnB w="6350" cap="flat" cmpd="sng" algn="ctr">
+                      <a:solidFill>
+                        <a:srgbClr val="E5E2DC"/>
+                      </a:solidFill>
+                      <a:prstDash val="solid"/>
+                      <a:round/>
+                      <a:headEnd type="none" w="med" len="med"/>
+                      <a:tailEnd type="none" w="med" len="med"/>
+                    </a:lnB>
+                    <a:solidFill>
+                      <a:srgbClr val="F8F6F3"/>
+                    </a:solidFill>
+                  </a:tcPr>
+                </a:tc>
+                <a:tc>
+                  <a:txBody>
+                    <a:bodyPr/>
+                    <a:lstStyle/>
+                    <a:p>
+                      <a:pPr indent="0" marL="0">
+                        <a:buNone/>
+                      </a:pPr>
+                      <a:r>
+                        <a:rPr lang="en-US" sz="1200" dirty="0">
+                          <a:solidFill>
+                            <a:srgbClr val="3D3A36"/>
+                          </a:solidFill>
+                          <a:latin typeface="Calibri" pitchFamily="34" charset="0"/>
+                          <a:ea typeface="Calibri" pitchFamily="34" charset="-122"/>
+                          <a:cs typeface="Calibri" pitchFamily="34" charset="-120"/>
+                        </a:rPr>
+                        <a:t>Thermometer</a:t>
+                      </a:r>
+                      <a:endParaRPr lang="en-US" sz="1200" dirty="0">
+                        <a:latin typeface="Calibri" charset="0"/>
+                        <a:ea typeface="Calibri" charset="0"/>
+                        <a:cs typeface="Calibri" charset="0"/>
+                      </a:endParaRPr>
+                    </a:p>
+                  </a:txBody>
+                  <a:tcPr marL="91440" marR="91440" marT="45720" marB="45720">
+                    <a:lnL w="6350" cap="flat" cmpd="sng" algn="ctr">
+                      <a:solidFill>
+                        <a:srgbClr val="E5E2DC"/>
+                      </a:solidFill>
+                      <a:prstDash val="solid"/>
+                      <a:round/>
+                      <a:headEnd type="none" w="med" len="med"/>
+                      <a:tailEnd type="none" w="med" len="med"/>
+                    </a:lnL>
+                    <a:lnR w="6350" cap="flat" cmpd="sng" algn="ctr">
+                      <a:solidFill>
+                        <a:srgbClr val="E5E2DC"/>
+                      </a:solidFill>
+                      <a:prstDash val="solid"/>
+                      <a:round/>
+                      <a:headEnd type="none" w="med" len="med"/>
+                      <a:tailEnd type="none" w="med" len="med"/>
+                    </a:lnR>
+                    <a:lnT w="6350" cap="flat" cmpd="sng" algn="ctr">
+                      <a:solidFill>
+                        <a:srgbClr val="E5E2DC"/>
+                      </a:solidFill>
+                      <a:prstDash val="solid"/>
+                      <a:round/>
+                      <a:headEnd type="none" w="med" len="med"/>
+                      <a:tailEnd type="none" w="med" len="med"/>
+                    </a:lnT>
+                    <a:lnB w="6350" cap="flat" cmpd="sng" algn="ctr">
+                      <a:solidFill>
+                        <a:srgbClr val="E5E2DC"/>
+                      </a:solidFill>
+                      <a:prstDash val="solid"/>
+                      <a:round/>
+                      <a:headEnd type="none" w="med" len="med"/>
+                      <a:tailEnd type="none" w="med" len="med"/>
+                    </a:lnB>
+                    <a:solidFill>
+                      <a:srgbClr val="F8F6F3"/>
+                    </a:solidFill>
+                  </a:tcPr>
+                </a:tc>
+              </a:tr>
+              <a:tr h="502920">
+                <a:tc>
+                  <a:txBody>
+                    <a:bodyPr/>
+                    <a:lstStyle/>
+                    <a:p>
+                      <a:pPr indent="0" marL="0">
+                        <a:buNone/>
+                      </a:pPr>
+                      <a:r>
+                        <a:rPr lang="en-US" sz="1200" dirty="0">
+                          <a:solidFill>
+                            <a:srgbClr val="3D3A36"/>
+                          </a:solidFill>
+                          <a:latin typeface="Calibri" pitchFamily="34" charset="0"/>
+                          <a:ea typeface="Calibri" pitchFamily="34" charset="-122"/>
+                          <a:cs typeface="Calibri" pitchFamily="34" charset="-120"/>
+                        </a:rPr>
+                        <a:t>Volume</a:t>
+                      </a:r>
+                      <a:endParaRPr lang="en-US" sz="1200" dirty="0">
+                        <a:latin typeface="Calibri" charset="0"/>
+                        <a:ea typeface="Calibri" charset="0"/>
+                        <a:cs typeface="Calibri" charset="0"/>
+                      </a:endParaRPr>
+                    </a:p>
+                  </a:txBody>
+                  <a:tcPr marL="91440" marR="91440" marT="45720" marB="45720">
+                    <a:lnL w="6350" cap="flat" cmpd="sng" algn="ctr">
+                      <a:solidFill>
+                        <a:srgbClr val="E5E2DC"/>
+                      </a:solidFill>
+                      <a:prstDash val="solid"/>
+                      <a:round/>
+                      <a:headEnd type="none" w="med" len="med"/>
+                      <a:tailEnd type="none" w="med" len="med"/>
+                    </a:lnL>
+                    <a:lnR w="6350" cap="flat" cmpd="sng" algn="ctr">
+                      <a:solidFill>
+                        <a:srgbClr val="E5E2DC"/>
+                      </a:solidFill>
+                      <a:prstDash val="solid"/>
+                      <a:round/>
+                      <a:headEnd type="none" w="med" len="med"/>
+                      <a:tailEnd type="none" w="med" len="med"/>
+                    </a:lnR>
+                    <a:lnT w="6350" cap="flat" cmpd="sng" algn="ctr">
+                      <a:solidFill>
+                        <a:srgbClr val="E5E2DC"/>
+                      </a:solidFill>
+                      <a:prstDash val="solid"/>
+                      <a:round/>
+                      <a:headEnd type="none" w="med" len="med"/>
+                      <a:tailEnd type="none" w="med" len="med"/>
+                    </a:lnT>
+                    <a:lnB w="6350" cap="flat" cmpd="sng" algn="ctr">
+                      <a:solidFill>
+                        <a:srgbClr val="E5E2DC"/>
+                      </a:solidFill>
+                      <a:prstDash val="solid"/>
+                      <a:round/>
+                      <a:headEnd type="none" w="med" len="med"/>
+                      <a:tailEnd type="none" w="med" len="med"/>
+                    </a:lnB>
+                    <a:solidFill>
+                      <a:srgbClr val="FFFFFF"/>
+                    </a:solidFill>
+                  </a:tcPr>
+                </a:tc>
+                <a:tc>
+                  <a:txBody>
+                    <a:bodyPr/>
+                    <a:lstStyle/>
+                    <a:p>
+                      <a:pPr indent="0" marL="0">
+                        <a:buNone/>
+                      </a:pPr>
+                      <a:r>
+                        <a:rPr lang="en-US" sz="1200" dirty="0">
+                          <a:solidFill>
+                            <a:srgbClr val="3D3A36"/>
+                          </a:solidFill>
+                          <a:latin typeface="Calibri" pitchFamily="34" charset="0"/>
+                          <a:ea typeface="Calibri" pitchFamily="34" charset="-122"/>
+                          <a:cs typeface="Calibri" pitchFamily="34" charset="-120"/>
+                        </a:rPr>
+                        <a:t>cubic centimetre</a:t>
+                      </a:r>
+                      <a:endParaRPr lang="en-US" sz="1200" dirty="0">
+                        <a:latin typeface="Calibri" charset="0"/>
+                        <a:ea typeface="Calibri" charset="0"/>
+                        <a:cs typeface="Calibri" charset="0"/>
+                      </a:endParaRPr>
+                    </a:p>
+                  </a:txBody>
+                  <a:tcPr marL="91440" marR="91440" marT="45720" marB="45720">
+                    <a:lnL w="6350" cap="flat" cmpd="sng" algn="ctr">
+                      <a:solidFill>
+                        <a:srgbClr val="E5E2DC"/>
+                      </a:solidFill>
+                      <a:prstDash val="solid"/>
+                      <a:round/>
+                      <a:headEnd type="none" w="med" len="med"/>
+                      <a:tailEnd type="none" w="med" len="med"/>
+                    </a:lnL>
+                    <a:lnR w="6350" cap="flat" cmpd="sng" algn="ctr">
+                      <a:solidFill>
+                        <a:srgbClr val="E5E2DC"/>
+                      </a:solidFill>
+                      <a:prstDash val="solid"/>
+                      <a:round/>
+                      <a:headEnd type="none" w="med" len="med"/>
+                      <a:tailEnd type="none" w="med" len="med"/>
+                    </a:lnR>
+                    <a:lnT w="6350" cap="flat" cmpd="sng" algn="ctr">
+                      <a:solidFill>
+                        <a:srgbClr val="E5E2DC"/>
+                      </a:solidFill>
+                      <a:prstDash val="solid"/>
+                      <a:round/>
+                      <a:headEnd type="none" w="med" len="med"/>
+                      <a:tailEnd type="none" w="med" len="med"/>
+                    </a:lnT>
+                    <a:lnB w="6350" cap="flat" cmpd="sng" algn="ctr">
+                      <a:solidFill>
+                        <a:srgbClr val="E5E2DC"/>
+                      </a:solidFill>
+                      <a:prstDash val="solid"/>
+                      <a:round/>
+                      <a:headEnd type="none" w="med" len="med"/>
+                      <a:tailEnd type="none" w="med" len="med"/>
+                    </a:lnB>
+                    <a:solidFill>
+                      <a:srgbClr val="FFFFFF"/>
+                    </a:solidFill>
+                  </a:tcPr>
+                </a:tc>
+                <a:tc>
+                  <a:txBody>
+                    <a:bodyPr/>
+                    <a:lstStyle/>
+                    <a:p>
+                      <a:pPr indent="0" marL="0">
+                        <a:buNone/>
+                      </a:pPr>
+                      <a:r>
+                        <a:rPr lang="en-US" sz="1200" dirty="0">
+                          <a:solidFill>
+                            <a:srgbClr val="3D3A36"/>
+                          </a:solidFill>
+                          <a:latin typeface="Calibri" pitchFamily="34" charset="0"/>
+                          <a:ea typeface="Calibri" pitchFamily="34" charset="-122"/>
+                          <a:cs typeface="Calibri" pitchFamily="34" charset="-120"/>
+                        </a:rPr>
+                        <a:t>cm³</a:t>
+                      </a:r>
+                      <a:endParaRPr lang="en-US" sz="1200" dirty="0">
+                        <a:latin typeface="Calibri" charset="0"/>
+                        <a:ea typeface="Calibri" charset="0"/>
+                        <a:cs typeface="Calibri" charset="0"/>
+                      </a:endParaRPr>
+                    </a:p>
+                  </a:txBody>
+                  <a:tcPr marL="91440" marR="91440" marT="45720" marB="45720">
+                    <a:lnL w="6350" cap="flat" cmpd="sng" algn="ctr">
+                      <a:solidFill>
+                        <a:srgbClr val="E5E2DC"/>
+                      </a:solidFill>
+                      <a:prstDash val="solid"/>
+                      <a:round/>
+                      <a:headEnd type="none" w="med" len="med"/>
+                      <a:tailEnd type="none" w="med" len="med"/>
+                    </a:lnL>
+                    <a:lnR w="6350" cap="flat" cmpd="sng" algn="ctr">
+                      <a:solidFill>
+                        <a:srgbClr val="E5E2DC"/>
+                      </a:solidFill>
+                      <a:prstDash val="solid"/>
+                      <a:round/>
+                      <a:headEnd type="none" w="med" len="med"/>
+                      <a:tailEnd type="none" w="med" len="med"/>
+                    </a:lnR>
+                    <a:lnT w="6350" cap="flat" cmpd="sng" algn="ctr">
+                      <a:solidFill>
+                        <a:srgbClr val="E5E2DC"/>
+                      </a:solidFill>
+                      <a:prstDash val="solid"/>
+                      <a:round/>
+                      <a:headEnd type="none" w="med" len="med"/>
+                      <a:tailEnd type="none" w="med" len="med"/>
+                    </a:lnT>
+                    <a:lnB w="6350" cap="flat" cmpd="sng" algn="ctr">
+                      <a:solidFill>
+                        <a:srgbClr val="E5E2DC"/>
+                      </a:solidFill>
+                      <a:prstDash val="solid"/>
+                      <a:round/>
+                      <a:headEnd type="none" w="med" len="med"/>
+                      <a:tailEnd type="none" w="med" len="med"/>
+                    </a:lnB>
+                    <a:solidFill>
+                      <a:srgbClr val="FFFFFF"/>
+                    </a:solidFill>
+                  </a:tcPr>
+                </a:tc>
+                <a:tc>
+                  <a:txBody>
+                    <a:bodyPr/>
+                    <a:lstStyle/>
+                    <a:p>
+                      <a:pPr indent="0" marL="0">
+                        <a:buNone/>
+                      </a:pPr>
+                      <a:r>
+                        <a:rPr lang="en-US" sz="1200" dirty="0">
+                          <a:solidFill>
+                            <a:srgbClr val="3D3A36"/>
+                          </a:solidFill>
+                          <a:latin typeface="Calibri" pitchFamily="34" charset="0"/>
+                          <a:ea typeface="Calibri" pitchFamily="34" charset="-122"/>
+                          <a:cs typeface="Calibri" pitchFamily="34" charset="-120"/>
+                        </a:rPr>
+                        <a:t>Measuring cylinder</a:t>
+                      </a:r>
+                      <a:endParaRPr lang="en-US" sz="1200" dirty="0">
+                        <a:latin typeface="Calibri" charset="0"/>
+                        <a:ea typeface="Calibri" charset="0"/>
+                        <a:cs typeface="Calibri" charset="0"/>
+                      </a:endParaRPr>
+                    </a:p>
+                  </a:txBody>
+                  <a:tcPr marL="91440" marR="91440" marT="45720" marB="45720">
+                    <a:lnL w="6350" cap="flat" cmpd="sng" algn="ctr">
+                      <a:solidFill>
+                        <a:srgbClr val="E5E2DC"/>
+                      </a:solidFill>
+                      <a:prstDash val="solid"/>
+                      <a:round/>
+                      <a:headEnd type="none" w="med" len="med"/>
+                      <a:tailEnd type="none" w="med" len="med"/>
+                    </a:lnL>
+                    <a:lnR w="6350" cap="flat" cmpd="sng" algn="ctr">
+                      <a:solidFill>
+                        <a:srgbClr val="E5E2DC"/>
+                      </a:solidFill>
+                      <a:prstDash val="solid"/>
+                      <a:round/>
+                      <a:headEnd type="none" w="med" len="med"/>
+                      <a:tailEnd type="none" w="med" len="med"/>
+                    </a:lnR>
+                    <a:lnT w="6350" cap="flat" cmpd="sng" algn="ctr">
+                      <a:solidFill>
+                        <a:srgbClr val="E5E2DC"/>
+                      </a:solidFill>
+                      <a:prstDash val="solid"/>
+                      <a:round/>
+                      <a:headEnd type="none" w="med" len="med"/>
+                      <a:tailEnd type="none" w="med" len="med"/>
+                    </a:lnT>
+                    <a:lnB w="6350" cap="flat" cmpd="sng" algn="ctr">
+                      <a:solidFill>
+                        <a:srgbClr val="E5E2DC"/>
+                      </a:solidFill>
+                      <a:prstDash val="solid"/>
+                      <a:round/>
+                      <a:headEnd type="none" w="med" len="med"/>
+                      <a:tailEnd type="none" w="med" len="med"/>
+                    </a:lnB>
+                    <a:solidFill>
+                      <a:srgbClr val="FFFFFF"/>
+                    </a:solidFill>
+                  </a:tcPr>
+                </a:tc>
+              </a:tr>
+              <a:tr h="502920">
+                <a:tc>
+                  <a:txBody>
+                    <a:bodyPr/>
+                    <a:lstStyle/>
+                    <a:p>
+                      <a:pPr indent="0" marL="0">
+                        <a:buNone/>
+                      </a:pPr>
+                      <a:r>
+                        <a:rPr lang="en-US" sz="1200" dirty="0">
+                          <a:solidFill>
+                            <a:srgbClr val="3D3A36"/>
+                          </a:solidFill>
+                          <a:latin typeface="Calibri" pitchFamily="34" charset="0"/>
+                          <a:ea typeface="Calibri" pitchFamily="34" charset="-122"/>
+                          <a:cs typeface="Calibri" pitchFamily="34" charset="-120"/>
+                        </a:rPr>
+                        <a:t>Force</a:t>
+                      </a:r>
+                      <a:endParaRPr lang="en-US" sz="1200" dirty="0">
+                        <a:latin typeface="Calibri" charset="0"/>
+                        <a:ea typeface="Calibri" charset="0"/>
+                        <a:cs typeface="Calibri" charset="0"/>
+                      </a:endParaRPr>
+                    </a:p>
+                  </a:txBody>
+                  <a:tcPr marL="91440" marR="91440" marT="45720" marB="45720">
+                    <a:lnL w="6350" cap="flat" cmpd="sng" algn="ctr">
+                      <a:solidFill>
+                        <a:srgbClr val="E5E2DC"/>
+                      </a:solidFill>
+                      <a:prstDash val="solid"/>
+                      <a:round/>
+                      <a:headEnd type="none" w="med" len="med"/>
+                      <a:tailEnd type="none" w="med" len="med"/>
+                    </a:lnL>
+                    <a:lnR w="6350" cap="flat" cmpd="sng" algn="ctr">
+                      <a:solidFill>
+                        <a:srgbClr val="E5E2DC"/>
+                      </a:solidFill>
+                      <a:prstDash val="solid"/>
+                      <a:round/>
+                      <a:headEnd type="none" w="med" len="med"/>
+                      <a:tailEnd type="none" w="med" len="med"/>
+                    </a:lnR>
+                    <a:lnT w="6350" cap="flat" cmpd="sng" algn="ctr">
+                      <a:solidFill>
+                        <a:srgbClr val="E5E2DC"/>
+                      </a:solidFill>
+                      <a:prstDash val="solid"/>
+                      <a:round/>
+                      <a:headEnd type="none" w="med" len="med"/>
+                      <a:tailEnd type="none" w="med" len="med"/>
+                    </a:lnT>
+                    <a:lnB w="6350" cap="flat" cmpd="sng" algn="ctr">
+                      <a:solidFill>
+                        <a:srgbClr val="E5E2DC"/>
+                      </a:solidFill>
+                      <a:prstDash val="solid"/>
+                      <a:round/>
+                      <a:headEnd type="none" w="med" len="med"/>
+                      <a:tailEnd type="none" w="med" len="med"/>
+                    </a:lnB>
+                    <a:solidFill>
+                      <a:srgbClr val="F8F6F3"/>
+                    </a:solidFill>
+                  </a:tcPr>
+                </a:tc>
+                <a:tc>
+                  <a:txBody>
+                    <a:bodyPr/>
+                    <a:lstStyle/>
+                    <a:p>
+                      <a:pPr indent="0" marL="0">
+                        <a:buNone/>
+                      </a:pPr>
+                      <a:r>
+                        <a:rPr lang="en-US" sz="1200" dirty="0">
+                          <a:solidFill>
+                            <a:srgbClr val="3D3A36"/>
+                          </a:solidFill>
+                          <a:latin typeface="Calibri" pitchFamily="34" charset="0"/>
+                          <a:ea typeface="Calibri" pitchFamily="34" charset="-122"/>
+                          <a:cs typeface="Calibri" pitchFamily="34" charset="-120"/>
+                        </a:rPr>
+                        <a:t>newton</a:t>
+                      </a:r>
+                      <a:endParaRPr lang="en-US" sz="1200" dirty="0">
+                        <a:latin typeface="Calibri" charset="0"/>
+                        <a:ea typeface="Calibri" charset="0"/>
+                        <a:cs typeface="Calibri" charset="0"/>
+                      </a:endParaRPr>
+                    </a:p>
+                  </a:txBody>
+                  <a:tcPr marL="91440" marR="91440" marT="45720" marB="45720">
+                    <a:lnL w="6350" cap="flat" cmpd="sng" algn="ctr">
+                      <a:solidFill>
+                        <a:srgbClr val="E5E2DC"/>
+                      </a:solidFill>
+                      <a:prstDash val="solid"/>
+                      <a:round/>
+                      <a:headEnd type="none" w="med" len="med"/>
+                      <a:tailEnd type="none" w="med" len="med"/>
+                    </a:lnL>
+                    <a:lnR w="6350" cap="flat" cmpd="sng" algn="ctr">
+                      <a:solidFill>
+                        <a:srgbClr val="E5E2DC"/>
+                      </a:solidFill>
+                      <a:prstDash val="solid"/>
+                      <a:round/>
+                      <a:headEnd type="none" w="med" len="med"/>
+                      <a:tailEnd type="none" w="med" len="med"/>
+                    </a:lnR>
+                    <a:lnT w="6350" cap="flat" cmpd="sng" algn="ctr">
+                      <a:solidFill>
+                        <a:srgbClr val="E5E2DC"/>
+                      </a:solidFill>
+                      <a:prstDash val="solid"/>
+                      <a:round/>
+                      <a:headEnd type="none" w="med" len="med"/>
+                      <a:tailEnd type="none" w="med" len="med"/>
+                    </a:lnT>
+                    <a:lnB w="6350" cap="flat" cmpd="sng" algn="ctr">
+                      <a:solidFill>
+                        <a:srgbClr val="E5E2DC"/>
+                      </a:solidFill>
+                      <a:prstDash val="solid"/>
+                      <a:round/>
+                      <a:headEnd type="none" w="med" len="med"/>
+                      <a:tailEnd type="none" w="med" len="med"/>
+                    </a:lnB>
+                    <a:solidFill>
+                      <a:srgbClr val="F8F6F3"/>
+                    </a:solidFill>
+                  </a:tcPr>
+                </a:tc>
+                <a:tc>
+                  <a:txBody>
+                    <a:bodyPr/>
+                    <a:lstStyle/>
+                    <a:p>
+                      <a:pPr indent="0" marL="0">
+                        <a:buNone/>
+                      </a:pPr>
+                      <a:r>
+                        <a:rPr lang="en-US" sz="1200" dirty="0">
+                          <a:solidFill>
+                            <a:srgbClr val="3D3A36"/>
+                          </a:solidFill>
+                          <a:latin typeface="Calibri" pitchFamily="34" charset="0"/>
+                          <a:ea typeface="Calibri" pitchFamily="34" charset="-122"/>
+                          <a:cs typeface="Calibri" pitchFamily="34" charset="-120"/>
+                        </a:rPr>
+                        <a:t>N</a:t>
+                      </a:r>
+                      <a:endParaRPr lang="en-US" sz="1200" dirty="0">
+                        <a:latin typeface="Calibri" charset="0"/>
+                        <a:ea typeface="Calibri" charset="0"/>
+                        <a:cs typeface="Calibri" charset="0"/>
+                      </a:endParaRPr>
+                    </a:p>
+                  </a:txBody>
+                  <a:tcPr marL="91440" marR="91440" marT="45720" marB="45720">
+                    <a:lnL w="6350" cap="flat" cmpd="sng" algn="ctr">
+                      <a:solidFill>
+                        <a:srgbClr val="E5E2DC"/>
+                      </a:solidFill>
+                      <a:prstDash val="solid"/>
+                      <a:round/>
+                      <a:headEnd type="none" w="med" len="med"/>
+                      <a:tailEnd type="none" w="med" len="med"/>
+                    </a:lnL>
+                    <a:lnR w="6350" cap="flat" cmpd="sng" algn="ctr">
+                      <a:solidFill>
+                        <a:srgbClr val="E5E2DC"/>
+                      </a:solidFill>
+                      <a:prstDash val="solid"/>
+                      <a:round/>
+                      <a:headEnd type="none" w="med" len="med"/>
+                      <a:tailEnd type="none" w="med" len="med"/>
+                    </a:lnR>
+                    <a:lnT w="6350" cap="flat" cmpd="sng" algn="ctr">
+                      <a:solidFill>
+                        <a:srgbClr val="E5E2DC"/>
+                      </a:solidFill>
+                      <a:prstDash val="solid"/>
+                      <a:round/>
+                      <a:headEnd type="none" w="med" len="med"/>
+                      <a:tailEnd type="none" w="med" len="med"/>
+                    </a:lnT>
+                    <a:lnB w="6350" cap="flat" cmpd="sng" algn="ctr">
+                      <a:solidFill>
+                        <a:srgbClr val="E5E2DC"/>
+                      </a:solidFill>
+                      <a:prstDash val="solid"/>
+                      <a:round/>
+                      <a:headEnd type="none" w="med" len="med"/>
+                      <a:tailEnd type="none" w="med" len="med"/>
+                    </a:lnB>
+                    <a:solidFill>
+                      <a:srgbClr val="F8F6F3"/>
+                    </a:solidFill>
+                  </a:tcPr>
+                </a:tc>
+                <a:tc>
+                  <a:txBody>
+                    <a:bodyPr/>
+                    <a:lstStyle/>
+                    <a:p>
+                      <a:pPr indent="0" marL="0">
+                        <a:buNone/>
+                      </a:pPr>
+                      <a:r>
+                        <a:rPr lang="en-US" sz="1200" dirty="0">
+                          <a:solidFill>
+                            <a:srgbClr val="3D3A36"/>
+                          </a:solidFill>
+                          <a:latin typeface="Calibri" pitchFamily="34" charset="0"/>
+                          <a:ea typeface="Calibri" pitchFamily="34" charset="-122"/>
+                          <a:cs typeface="Calibri" pitchFamily="34" charset="-120"/>
+                        </a:rPr>
+                        <a:t>Newton meter</a:t>
+                      </a:r>
+                      <a:endParaRPr lang="en-US" sz="1200" dirty="0">
+                        <a:latin typeface="Calibri" charset="0"/>
+                        <a:ea typeface="Calibri" charset="0"/>
+                        <a:cs typeface="Calibri" charset="0"/>
+                      </a:endParaRPr>
+                    </a:p>
+                  </a:txBody>
+                  <a:tcPr marL="91440" marR="91440" marT="45720" marB="45720">
+                    <a:lnL w="6350" cap="flat" cmpd="sng" algn="ctr">
+                      <a:solidFill>
+                        <a:srgbClr val="E5E2DC"/>
+                      </a:solidFill>
+                      <a:prstDash val="solid"/>
+                      <a:round/>
+                      <a:headEnd type="none" w="med" len="med"/>
+                      <a:tailEnd type="none" w="med" len="med"/>
+                    </a:lnL>
+                    <a:lnR w="6350" cap="flat" cmpd="sng" algn="ctr">
+                      <a:solidFill>
+                        <a:srgbClr val="E5E2DC"/>
+                      </a:solidFill>
+                      <a:prstDash val="solid"/>
+                      <a:round/>
+                      <a:headEnd type="none" w="med" len="med"/>
+                      <a:tailEnd type="none" w="med" len="med"/>
+                    </a:lnR>
+                    <a:lnT w="6350" cap="flat" cmpd="sng" algn="ctr">
+                      <a:solidFill>
+                        <a:srgbClr val="E5E2DC"/>
+                      </a:solidFill>
+                      <a:prstDash val="solid"/>
+                      <a:round/>
+                      <a:headEnd type="none" w="med" len="med"/>
+                      <a:tailEnd type="none" w="med" len="med"/>
+                    </a:lnT>
+                    <a:lnB w="6350" cap="flat" cmpd="sng" algn="ctr">
+                      <a:solidFill>
+                        <a:srgbClr val="E5E2DC"/>
+                      </a:solidFill>
+                      <a:prstDash val="solid"/>
+                      <a:round/>
+                      <a:headEnd type="none" w="med" len="med"/>
+                      <a:tailEnd type="none" w="med" len="med"/>
+                    </a:lnB>
+                    <a:solidFill>
+                      <a:srgbClr val="F8F6F3"/>
+                    </a:solidFill>
+                  </a:tcPr>
+                </a:tc>
+              </a:tr>
+            </a:tbl>
+          </a:graphicData>
+        </a:graphic>
+      </p:graphicFrame>
     </p:spTree>
   </p:cSld>
   <p:clrMapOvr>
@@ -2264,7 +4712,47 @@
         <p:spPr>
           <a:xfrm>
             <a:off x="0" y="0"/>
-            <a:ext cx="9144000" cy="54864"/>
+            <a:ext cx="9144000" cy="822960"/>
+          </a:xfrm>
+          <a:prstGeom prst="rect">
+            <a:avLst/>
+          </a:prstGeom>
+          <a:solidFill>
+            <a:srgbClr val="FFFFFF"/>
+          </a:solidFill>
+          <a:ln/>
+        </p:spPr>
+      </p:sp>
+      <p:sp>
+        <p:nvSpPr>
+          <p:cNvPr id="3" name="Shape 1"/>
+          <p:cNvSpPr/>
+          <p:nvPr/>
+        </p:nvSpPr>
+        <p:spPr>
+          <a:xfrm>
+            <a:off x="0" y="804672"/>
+            <a:ext cx="9144000" cy="27432"/>
+          </a:xfrm>
+          <a:prstGeom prst="rect">
+            <a:avLst/>
+          </a:prstGeom>
+          <a:solidFill>
+            <a:srgbClr val="E5E2DC"/>
+          </a:solidFill>
+          <a:ln/>
+        </p:spPr>
+      </p:sp>
+      <p:sp>
+        <p:nvSpPr>
+          <p:cNvPr id="4" name="Shape 2"/>
+          <p:cNvSpPr/>
+          <p:nvPr/>
+        </p:nvSpPr>
+        <p:spPr>
+          <a:xfrm>
+            <a:off x="548640" y="201168"/>
+            <a:ext cx="54864" cy="420624"/>
           </a:xfrm>
           <a:prstGeom prst="rect">
             <a:avLst/>
@@ -2277,14 +4765,14 @@
       </p:sp>
       <p:sp>
         <p:nvSpPr>
-          <p:cNvPr id="3" name="Text 1"/>
-          <p:cNvSpPr/>
-          <p:nvPr/>
-        </p:nvSpPr>
-        <p:spPr>
-          <a:xfrm>
-            <a:off x="7772400" y="4709160"/>
-            <a:ext cx="1097280" cy="320040"/>
+          <p:cNvPr id="5" name="Text 3"/>
+          <p:cNvSpPr/>
+          <p:nvPr/>
+        </p:nvSpPr>
+        <p:spPr>
+          <a:xfrm>
+            <a:off x="777240" y="137160"/>
+            <a:ext cx="7772400" cy="548640"/>
           </a:xfrm>
           <a:prstGeom prst="rect">
             <a:avLst/>
@@ -2293,53 +4781,14 @@
           <a:ln/>
         </p:spPr>
         <p:txBody>
-          <a:bodyPr wrap="square" rtlCol="0" anchor="ctr"/>
-          <a:lstStyle/>
-          <a:p>
-            <a:pPr algn="r" indent="0" marL="0">
-              <a:buNone/>
-            </a:pPr>
-            <a:r>
-              <a:rPr lang="en-US" sz="900" dirty="0">
-                <a:solidFill>
-                  <a:srgbClr val="6B6660"/>
-                </a:solidFill>
-                <a:latin typeface="Calibri" pitchFamily="34" charset="0"/>
-                <a:ea typeface="Calibri" pitchFamily="34" charset="-122"/>
-                <a:cs typeface="Calibri" pitchFamily="34" charset="-120"/>
-              </a:rPr>
-              <a:t>4 / 6</a:t>
-            </a:r>
-            <a:endParaRPr lang="en-US" sz="900" dirty="0"/>
-          </a:p>
-        </p:txBody>
-      </p:sp>
-      <p:sp>
-        <p:nvSpPr>
-          <p:cNvPr id="4" name="Text 2"/>
-          <p:cNvSpPr/>
-          <p:nvPr/>
-        </p:nvSpPr>
-        <p:spPr>
-          <a:xfrm>
-            <a:off x="457200" y="274320"/>
-            <a:ext cx="8229600" cy="640080"/>
-          </a:xfrm>
-          <a:prstGeom prst="rect">
-            <a:avLst/>
-          </a:prstGeom>
-          <a:noFill/>
-          <a:ln/>
-        </p:spPr>
-        <p:txBody>
-          <a:bodyPr wrap="square" rtlCol="0" anchor="ctr"/>
+          <a:bodyPr wrap="square" lIns="0" tIns="0" rIns="0" bIns="0" rtlCol="0" anchor="ctr"/>
           <a:lstStyle/>
           <a:p>
             <a:pPr indent="0" marL="0">
               <a:buNone/>
             </a:pPr>
             <a:r>
-              <a:rPr lang="en-US" sz="2600" b="1" dirty="0">
+              <a:rPr lang="en-US" sz="2000" b="1" dirty="0">
                 <a:solidFill>
                   <a:srgbClr val="1B2A4A"/>
                 </a:solidFill>
@@ -2347,22 +4796,22 @@
                 <a:ea typeface="Georgia" pitchFamily="34" charset="-122"/>
                 <a:cs typeface="Georgia" pitchFamily="34" charset="-120"/>
               </a:rPr>
-              <a:t>Reading Instruments Accurately</a:t>
-            </a:r>
-            <a:endParaRPr lang="en-US" sz="2600" dirty="0"/>
+              <a:t>How to Measure Accurately</a:t>
+            </a:r>
+            <a:endParaRPr lang="en-US" sz="2000" dirty="0"/>
           </a:p>
         </p:txBody>
       </p:sp>
       <p:sp>
         <p:nvSpPr>
-          <p:cNvPr id="5" name="Text 3"/>
-          <p:cNvSpPr/>
-          <p:nvPr/>
-        </p:nvSpPr>
-        <p:spPr>
-          <a:xfrm>
-            <a:off x="457200" y="1188720"/>
-            <a:ext cx="3840480" cy="3474720"/>
+          <p:cNvPr id="6" name="Text 4"/>
+          <p:cNvSpPr/>
+          <p:nvPr/>
+        </p:nvSpPr>
+        <p:spPr>
+          <a:xfrm>
+            <a:off x="731520" y="1051560"/>
+            <a:ext cx="7680960" cy="3108960"/>
           </a:xfrm>
           <a:prstGeom prst="rect">
             <a:avLst/>
@@ -2376,13 +4825,13 @@
           <a:p>
             <a:pPr marL="342900" indent="-342900">
               <a:spcAft>
-                <a:spcPts val="600"/>
+                <a:spcPts val="800"/>
               </a:spcAft>
               <a:buSzPct val="100000"/>
               <a:buChar char="•"/>
             </a:pPr>
             <a:r>
-              <a:rPr lang="en-US" sz="1400" dirty="0">
+              <a:rPr lang="en-US" sz="1500" dirty="0">
                 <a:solidFill>
                   <a:srgbClr val="3D3A36"/>
                 </a:solidFill>
@@ -2390,20 +4839,20 @@
                 <a:ea typeface="Calibri" pitchFamily="34" charset="-122"/>
                 <a:cs typeface="Calibri" pitchFamily="34" charset="-120"/>
               </a:rPr>
-              <a:t>Always read at eye level (not from above or below)</a:t>
-            </a:r>
-            <a:endParaRPr lang="en-US" sz="1400" dirty="0"/>
+              <a:t>Place the ruler at the 0 mark — not the edge of the ruler.</a:t>
+            </a:r>
+            <a:endParaRPr lang="en-US" sz="1500" dirty="0"/>
           </a:p>
           <a:p>
             <a:pPr marL="342900" indent="-342900">
               <a:spcAft>
-                <a:spcPts val="600"/>
+                <a:spcPts val="800"/>
               </a:spcAft>
               <a:buSzPct val="100000"/>
               <a:buChar char="•"/>
             </a:pPr>
             <a:r>
-              <a:rPr lang="en-US" sz="1400" dirty="0">
+              <a:rPr lang="en-US" sz="1500" dirty="0">
                 <a:solidFill>
                   <a:srgbClr val="3D3A36"/>
                 </a:solidFill>
@@ -2411,20 +4860,20 @@
                 <a:ea typeface="Calibri" pitchFamily="34" charset="-122"/>
                 <a:cs typeface="Calibri" pitchFamily="34" charset="-120"/>
               </a:rPr>
-              <a:t>For liquids, read the bottom of the meniscus (curved surface)</a:t>
-            </a:r>
-            <a:endParaRPr lang="en-US" sz="1400" dirty="0"/>
+              <a:t>Read a measuring cylinder at EYE LEVEL at the MENISCUS.</a:t>
+            </a:r>
+            <a:endParaRPr lang="en-US" sz="1500" dirty="0"/>
           </a:p>
           <a:p>
             <a:pPr marL="342900" indent="-342900">
               <a:spcAft>
-                <a:spcPts val="600"/>
+                <a:spcPts val="800"/>
               </a:spcAft>
               <a:buSzPct val="100000"/>
               <a:buChar char="•"/>
             </a:pPr>
             <a:r>
-              <a:rPr lang="en-US" sz="1400" dirty="0">
+              <a:rPr lang="en-US" sz="1500" dirty="0">
                 <a:solidFill>
                   <a:srgbClr val="3D3A36"/>
                 </a:solidFill>
@@ -2432,20 +4881,20 @@
                 <a:ea typeface="Calibri" pitchFamily="34" charset="-122"/>
                 <a:cs typeface="Calibri" pitchFamily="34" charset="-120"/>
               </a:rPr>
-              <a:t>Estimate between the smallest divisions on the scale</a:t>
-            </a:r>
-            <a:endParaRPr lang="en-US" sz="1400" dirty="0"/>
+              <a:t>Wait for a thermometer to settle before reading.</a:t>
+            </a:r>
+            <a:endParaRPr lang="en-US" sz="1500" dirty="0"/>
           </a:p>
           <a:p>
             <a:pPr marL="342900" indent="-342900">
               <a:spcAft>
-                <a:spcPts val="600"/>
+                <a:spcPts val="800"/>
               </a:spcAft>
               <a:buSzPct val="100000"/>
               <a:buChar char="•"/>
             </a:pPr>
             <a:r>
-              <a:rPr lang="en-US" sz="1400" dirty="0">
+              <a:rPr lang="en-US" sz="1500" dirty="0">
                 <a:solidFill>
                   <a:srgbClr val="3D3A36"/>
                 </a:solidFill>
@@ -2453,20 +4902,20 @@
                 <a:ea typeface="Calibri" pitchFamily="34" charset="-122"/>
                 <a:cs typeface="Calibri" pitchFamily="34" charset="-120"/>
               </a:rPr>
-              <a:t>Record the correct unit with every measurement</a:t>
-            </a:r>
-            <a:endParaRPr lang="en-US" sz="1400" dirty="0"/>
+              <a:t>Use the most appropriate instrument for the measurement.</a:t>
+            </a:r>
+            <a:endParaRPr lang="en-US" sz="1500" dirty="0"/>
           </a:p>
           <a:p>
             <a:pPr marL="342900" indent="-342900">
               <a:spcAft>
-                <a:spcPts val="600"/>
+                <a:spcPts val="800"/>
               </a:spcAft>
               <a:buSzPct val="100000"/>
               <a:buChar char="•"/>
             </a:pPr>
             <a:r>
-              <a:rPr lang="en-US" sz="1400" dirty="0">
+              <a:rPr lang="en-US" sz="1500" dirty="0">
                 <a:solidFill>
                   <a:srgbClr val="3D3A36"/>
                 </a:solidFill>
@@ -2474,35 +4923,51 @@
                 <a:ea typeface="Calibri" pitchFamily="34" charset="-122"/>
                 <a:cs typeface="Calibri" pitchFamily="34" charset="-120"/>
               </a:rPr>
-              <a:t>Zero the balance before measuring mass</a:t>
-            </a:r>
-            <a:endParaRPr lang="en-US" sz="1400" dirty="0"/>
+              <a:t>Record all measurements with the correct UNIT.</a:t>
+            </a:r>
+            <a:endParaRPr lang="en-US" sz="1500" dirty="0"/>
+          </a:p>
+          <a:p>
+            <a:pPr marL="342900" indent="-342900">
+              <a:spcAft>
+                <a:spcPts val="800"/>
+              </a:spcAft>
+              <a:buSzPct val="100000"/>
+              <a:buChar char="•"/>
+            </a:pPr>
+            <a:r>
+              <a:rPr lang="en-US" sz="1500" dirty="0">
+                <a:solidFill>
+                  <a:srgbClr val="3D3A36"/>
+                </a:solidFill>
+                <a:latin typeface="Calibri" pitchFamily="34" charset="0"/>
+                <a:ea typeface="Calibri" pitchFamily="34" charset="-122"/>
+                <a:cs typeface="Calibri" pitchFamily="34" charset="-120"/>
+              </a:rPr>
+              <a:t>Take at least 3 readings and calculate the mean.</a:t>
+            </a:r>
+            <a:endParaRPr lang="en-US" sz="1500" dirty="0"/>
           </a:p>
         </p:txBody>
       </p:sp>
       <p:sp>
         <p:nvSpPr>
-          <p:cNvPr id="6" name="Shape 4"/>
-          <p:cNvSpPr/>
-          <p:nvPr/>
-        </p:nvSpPr>
-        <p:spPr>
-          <a:xfrm>
-            <a:off x="4846320" y="1188720"/>
-            <a:ext cx="3840480" cy="3474720"/>
+          <p:cNvPr id="7" name="Shape 5"/>
+          <p:cNvSpPr/>
+          <p:nvPr/>
+        </p:nvSpPr>
+        <p:spPr>
+          <a:xfrm>
+            <a:off x="731520" y="4206240"/>
+            <a:ext cx="7680960" cy="640080"/>
           </a:xfrm>
           <a:prstGeom prst="rect">
             <a:avLst/>
           </a:prstGeom>
           <a:solidFill>
-            <a:srgbClr val="FFFFFF"/>
+            <a:srgbClr val="E8F5F3"/>
           </a:solidFill>
-          <a:ln w="12700">
-            <a:solidFill>
-              <a:srgbClr val="E5E2DC"/>
-            </a:solidFill>
-            <a:prstDash val="solid"/>
-          </a:ln>
+          <a:ln/>
           <a:effectLst>
             <a:outerShdw sx="100000" sy="100000" kx="0" ky="0" algn="bl" rotWithShape="0" blurRad="50800" dist="25400" dir="8100000">
               <a:srgbClr val="000000">
@@ -2514,34 +4979,14 @@
       </p:sp>
       <p:sp>
         <p:nvSpPr>
-          <p:cNvPr id="7" name="Shape 5"/>
-          <p:cNvSpPr/>
-          <p:nvPr/>
-        </p:nvSpPr>
-        <p:spPr>
-          <a:xfrm>
-            <a:off x="4846320" y="1188720"/>
-            <a:ext cx="3840480" cy="54864"/>
-          </a:xfrm>
-          <a:prstGeom prst="rect">
-            <a:avLst/>
-          </a:prstGeom>
-          <a:solidFill>
-            <a:srgbClr val="2A9D8F"/>
-          </a:solidFill>
-          <a:ln/>
-        </p:spPr>
-      </p:sp>
-      <p:sp>
-        <p:nvSpPr>
           <p:cNvPr id="8" name="Text 6"/>
           <p:cNvSpPr/>
           <p:nvPr/>
         </p:nvSpPr>
         <p:spPr>
           <a:xfrm>
-            <a:off x="5120640" y="1371600"/>
-            <a:ext cx="3291840" cy="3108960"/>
+            <a:off x="914400" y="4251960"/>
+            <a:ext cx="7315200" cy="548640"/>
           </a:xfrm>
           <a:prstGeom prst="rect">
             <a:avLst/>
@@ -2550,46 +4995,28 @@
           <a:ln/>
         </p:spPr>
         <p:txBody>
-          <a:bodyPr wrap="square" rtlCol="0" anchor="t"/>
+          <a:bodyPr wrap="square" rtlCol="0" anchor="ctr"/>
           <a:lstStyle/>
           <a:p>
             <a:pPr indent="0" marL="0">
-              <a:spcAft>
-                <a:spcPts val="400"/>
-              </a:spcAft>
               <a:buNone/>
             </a:pPr>
             <a:r>
-              <a:rPr lang="en-US" sz="1600" b="1" dirty="0">
+              <a:rPr lang="en-US" sz="1200" b="1" dirty="0">
                 <a:solidFill>
-                  <a:srgbClr val="1B2A4A"/>
+                  <a:srgbClr val="2A9D8F"/>
                 </a:solidFill>
                 <a:latin typeface="Calibri" pitchFamily="34" charset="0"/>
                 <a:ea typeface="Calibri" pitchFamily="34" charset="-122"/>
                 <a:cs typeface="Calibri" pitchFamily="34" charset="-120"/>
               </a:rPr>
-              <a:t>Temperature &amp; Time</a:t>
-            </a:r>
-            <a:endParaRPr lang="en-US" sz="1600" dirty="0"/>
-          </a:p>
-          <a:p>
+              <a:t>Key Idea: </a:t>
+            </a:r>
             <a:pPr indent="0" marL="0">
-              <a:spcAft>
-                <a:spcPts val="400"/>
-              </a:spcAft>
               <a:buNone/>
             </a:pPr>
-            <a:endParaRPr lang="en-US" sz="1600" dirty="0"/>
-          </a:p>
-          <a:p>
-            <a:pPr indent="0" marL="0">
-              <a:spcAft>
-                <a:spcPts val="400"/>
-              </a:spcAft>
-              <a:buNone/>
-            </a:pPr>
-            <a:r>
-              <a:rPr lang="en-US" sz="1300" dirty="0">
+            <a:r>
+              <a:rPr lang="en-US" sz="1200" i="1" dirty="0">
                 <a:solidFill>
                   <a:srgbClr val="3D3A36"/>
                 </a:solidFill>
@@ -2597,109 +5024,9 @@
                 <a:ea typeface="Calibri" pitchFamily="34" charset="-122"/>
                 <a:cs typeface="Calibri" pitchFamily="34" charset="-120"/>
               </a:rPr>
-              <a:t>Temperature measured in degrees Celsius (°C)</a:t>
-            </a:r>
-            <a:endParaRPr lang="en-US" sz="1600" dirty="0"/>
-          </a:p>
-          <a:p>
-            <a:pPr indent="0" marL="0">
-              <a:spcAft>
-                <a:spcPts val="400"/>
-              </a:spcAft>
-              <a:buNone/>
-            </a:pPr>
-            <a:r>
-              <a:rPr lang="en-US" sz="1300" dirty="0">
-                <a:solidFill>
-                  <a:srgbClr val="3D3A36"/>
-                </a:solidFill>
-                <a:latin typeface="Calibri" pitchFamily="34" charset="0"/>
-                <a:ea typeface="Calibri" pitchFamily="34" charset="-122"/>
-                <a:cs typeface="Calibri" pitchFamily="34" charset="-120"/>
-              </a:rPr>
-              <a:t>Use a thermometer — read at eye level</a:t>
-            </a:r>
-            <a:endParaRPr lang="en-US" sz="1600" dirty="0"/>
-          </a:p>
-          <a:p>
-            <a:pPr indent="0" marL="0">
-              <a:spcAft>
-                <a:spcPts val="400"/>
-              </a:spcAft>
-              <a:buNone/>
-            </a:pPr>
-            <a:r>
-              <a:rPr lang="en-US" sz="1300" dirty="0">
-                <a:solidFill>
-                  <a:srgbClr val="3D3A36"/>
-                </a:solidFill>
-                <a:latin typeface="Calibri" pitchFamily="34" charset="0"/>
-                <a:ea typeface="Calibri" pitchFamily="34" charset="-122"/>
-                <a:cs typeface="Calibri" pitchFamily="34" charset="-120"/>
-              </a:rPr>
-              <a:t>Water freezes at 0°C, boils at 100°C</a:t>
-            </a:r>
-            <a:endParaRPr lang="en-US" sz="1600" dirty="0"/>
-          </a:p>
-          <a:p>
-            <a:pPr indent="0" marL="0">
-              <a:spcAft>
-                <a:spcPts val="400"/>
-              </a:spcAft>
-              <a:buNone/>
-            </a:pPr>
-            <a:r>
-              <a:rPr lang="en-US" sz="1300" dirty="0">
-                <a:solidFill>
-                  <a:srgbClr val="3D3A36"/>
-                </a:solidFill>
-                <a:latin typeface="Calibri" pitchFamily="34" charset="0"/>
-                <a:ea typeface="Calibri" pitchFamily="34" charset="-122"/>
-                <a:cs typeface="Calibri" pitchFamily="34" charset="-120"/>
-              </a:rPr>
-              <a:t>Time measured in seconds (s)</a:t>
-            </a:r>
-            <a:endParaRPr lang="en-US" sz="1600" dirty="0"/>
-          </a:p>
-          <a:p>
-            <a:pPr indent="0" marL="0">
-              <a:spcAft>
-                <a:spcPts val="400"/>
-              </a:spcAft>
-              <a:buNone/>
-            </a:pPr>
-            <a:r>
-              <a:rPr lang="en-US" sz="1300" dirty="0">
-                <a:solidFill>
-                  <a:srgbClr val="3D3A36"/>
-                </a:solidFill>
-                <a:latin typeface="Calibri" pitchFamily="34" charset="0"/>
-                <a:ea typeface="Calibri" pitchFamily="34" charset="-122"/>
-                <a:cs typeface="Calibri" pitchFamily="34" charset="-120"/>
-              </a:rPr>
-              <a:t>Use a stopwatch — practise reaction time</a:t>
-            </a:r>
-            <a:endParaRPr lang="en-US" sz="1600" dirty="0"/>
-          </a:p>
-          <a:p>
-            <a:pPr indent="0" marL="0">
-              <a:spcAft>
-                <a:spcPts val="400"/>
-              </a:spcAft>
-              <a:buNone/>
-            </a:pPr>
-            <a:r>
-              <a:rPr lang="en-US" sz="1300" dirty="0">
-                <a:solidFill>
-                  <a:srgbClr val="3D3A36"/>
-                </a:solidFill>
-                <a:latin typeface="Calibri" pitchFamily="34" charset="0"/>
-                <a:ea typeface="Calibri" pitchFamily="34" charset="-122"/>
-                <a:cs typeface="Calibri" pitchFamily="34" charset="-120"/>
-              </a:rPr>
-              <a:t>1 minute = 60 seconds</a:t>
-            </a:r>
-            <a:endParaRPr lang="en-US" sz="1600" dirty="0"/>
+              <a:t>The meniscus is the curved surface of water — read from the bottom of the curve.</a:t>
+            </a:r>
+            <a:endParaRPr lang="en-US" sz="1200" dirty="0"/>
           </a:p>
         </p:txBody>
       </p:sp>
@@ -2744,7 +5071,47 @@
         <p:spPr>
           <a:xfrm>
             <a:off x="0" y="0"/>
-            <a:ext cx="9144000" cy="54864"/>
+            <a:ext cx="9144000" cy="822960"/>
+          </a:xfrm>
+          <a:prstGeom prst="rect">
+            <a:avLst/>
+          </a:prstGeom>
+          <a:solidFill>
+            <a:srgbClr val="FFFFFF"/>
+          </a:solidFill>
+          <a:ln/>
+        </p:spPr>
+      </p:sp>
+      <p:sp>
+        <p:nvSpPr>
+          <p:cNvPr id="3" name="Shape 1"/>
+          <p:cNvSpPr/>
+          <p:nvPr/>
+        </p:nvSpPr>
+        <p:spPr>
+          <a:xfrm>
+            <a:off x="0" y="804672"/>
+            <a:ext cx="9144000" cy="27432"/>
+          </a:xfrm>
+          <a:prstGeom prst="rect">
+            <a:avLst/>
+          </a:prstGeom>
+          <a:solidFill>
+            <a:srgbClr val="E5E2DC"/>
+          </a:solidFill>
+          <a:ln/>
+        </p:spPr>
+      </p:sp>
+      <p:sp>
+        <p:nvSpPr>
+          <p:cNvPr id="4" name="Shape 2"/>
+          <p:cNvSpPr/>
+          <p:nvPr/>
+        </p:nvSpPr>
+        <p:spPr>
+          <a:xfrm>
+            <a:off x="548640" y="201168"/>
+            <a:ext cx="54864" cy="420624"/>
           </a:xfrm>
           <a:prstGeom prst="rect">
             <a:avLst/>
@@ -2757,14 +5124,14 @@
       </p:sp>
       <p:sp>
         <p:nvSpPr>
-          <p:cNvPr id="3" name="Text 1"/>
-          <p:cNvSpPr/>
-          <p:nvPr/>
-        </p:nvSpPr>
-        <p:spPr>
-          <a:xfrm>
-            <a:off x="7772400" y="4709160"/>
-            <a:ext cx="1097280" cy="320040"/>
+          <p:cNvPr id="5" name="Text 3"/>
+          <p:cNvSpPr/>
+          <p:nvPr/>
+        </p:nvSpPr>
+        <p:spPr>
+          <a:xfrm>
+            <a:off x="777240" y="137160"/>
+            <a:ext cx="7772400" cy="548640"/>
           </a:xfrm>
           <a:prstGeom prst="rect">
             <a:avLst/>
@@ -2773,53 +5140,14 @@
           <a:ln/>
         </p:spPr>
         <p:txBody>
-          <a:bodyPr wrap="square" rtlCol="0" anchor="ctr"/>
-          <a:lstStyle/>
-          <a:p>
-            <a:pPr algn="r" indent="0" marL="0">
-              <a:buNone/>
-            </a:pPr>
-            <a:r>
-              <a:rPr lang="en-US" sz="900" dirty="0">
-                <a:solidFill>
-                  <a:srgbClr val="6B6660"/>
-                </a:solidFill>
-                <a:latin typeface="Calibri" pitchFamily="34" charset="0"/>
-                <a:ea typeface="Calibri" pitchFamily="34" charset="-122"/>
-                <a:cs typeface="Calibri" pitchFamily="34" charset="-120"/>
-              </a:rPr>
-              <a:t>5 / 6</a:t>
-            </a:r>
-            <a:endParaRPr lang="en-US" sz="900" dirty="0"/>
-          </a:p>
-        </p:txBody>
-      </p:sp>
-      <p:sp>
-        <p:nvSpPr>
-          <p:cNvPr id="4" name="Text 2"/>
-          <p:cNvSpPr/>
-          <p:nvPr/>
-        </p:nvSpPr>
-        <p:spPr>
-          <a:xfrm>
-            <a:off x="457200" y="274320"/>
-            <a:ext cx="8229600" cy="640080"/>
-          </a:xfrm>
-          <a:prstGeom prst="rect">
-            <a:avLst/>
-          </a:prstGeom>
-          <a:noFill/>
-          <a:ln/>
-        </p:spPr>
-        <p:txBody>
-          <a:bodyPr wrap="square" rtlCol="0" anchor="ctr"/>
+          <a:bodyPr wrap="square" lIns="0" tIns="0" rIns="0" bIns="0" rtlCol="0" anchor="ctr"/>
           <a:lstStyle/>
           <a:p>
             <a:pPr indent="0" marL="0">
               <a:buNone/>
             </a:pPr>
             <a:r>
-              <a:rPr lang="en-US" sz="2600" b="1" dirty="0">
+              <a:rPr lang="en-US" sz="2000" b="1" dirty="0">
                 <a:solidFill>
                   <a:srgbClr val="1B2A4A"/>
                 </a:solidFill>
@@ -2827,22 +5155,108 @@
                 <a:ea typeface="Georgia" pitchFamily="34" charset="-122"/>
                 <a:cs typeface="Georgia" pitchFamily="34" charset="-120"/>
               </a:rPr>
-              <a:t>Metric Prefixes &amp; Conversions</a:t>
-            </a:r>
-            <a:endParaRPr lang="en-US" sz="2600" dirty="0"/>
+              <a:t>Accuracy vs Precision</a:t>
+            </a:r>
+            <a:endParaRPr lang="en-US" sz="2000" dirty="0"/>
           </a:p>
         </p:txBody>
       </p:sp>
       <p:sp>
         <p:nvSpPr>
-          <p:cNvPr id="5" name="Text 3"/>
-          <p:cNvSpPr/>
-          <p:nvPr/>
-        </p:nvSpPr>
-        <p:spPr>
-          <a:xfrm>
-            <a:off x="457200" y="1097280"/>
-            <a:ext cx="8229600" cy="3657600"/>
+          <p:cNvPr id="6" name="Shape 4"/>
+          <p:cNvSpPr/>
+          <p:nvPr/>
+        </p:nvSpPr>
+        <p:spPr>
+          <a:xfrm>
+            <a:off x="548640" y="1051560"/>
+            <a:ext cx="3840480" cy="3474720"/>
+          </a:xfrm>
+          <a:prstGeom prst="rect">
+            <a:avLst/>
+          </a:prstGeom>
+          <a:solidFill>
+            <a:srgbClr val="FFFFFF"/>
+          </a:solidFill>
+          <a:ln/>
+          <a:effectLst>
+            <a:outerShdw sx="100000" sy="100000" kx="0" ky="0" algn="bl" rotWithShape="0" blurRad="50800" dist="25400" dir="8100000">
+              <a:srgbClr val="000000">
+                <a:alpha val="10000"/>
+              </a:srgbClr>
+            </a:outerShdw>
+          </a:effectLst>
+        </p:spPr>
+      </p:sp>
+      <p:sp>
+        <p:nvSpPr>
+          <p:cNvPr id="7" name="Shape 5"/>
+          <p:cNvSpPr/>
+          <p:nvPr/>
+        </p:nvSpPr>
+        <p:spPr>
+          <a:xfrm>
+            <a:off x="548640" y="1051560"/>
+            <a:ext cx="3840480" cy="54864"/>
+          </a:xfrm>
+          <a:prstGeom prst="rect">
+            <a:avLst/>
+          </a:prstGeom>
+          <a:solidFill>
+            <a:srgbClr val="2A9D8F"/>
+          </a:solidFill>
+          <a:ln/>
+        </p:spPr>
+      </p:sp>
+      <p:sp>
+        <p:nvSpPr>
+          <p:cNvPr id="8" name="Text 6"/>
+          <p:cNvSpPr/>
+          <p:nvPr/>
+        </p:nvSpPr>
+        <p:spPr>
+          <a:xfrm>
+            <a:off x="777240" y="1188720"/>
+            <a:ext cx="3383280" cy="457200"/>
+          </a:xfrm>
+          <a:prstGeom prst="rect">
+            <a:avLst/>
+          </a:prstGeom>
+          <a:noFill/>
+          <a:ln/>
+        </p:spPr>
+        <p:txBody>
+          <a:bodyPr wrap="square" lIns="0" tIns="0" rIns="0" bIns="0" rtlCol="0" anchor="ctr"/>
+          <a:lstStyle/>
+          <a:p>
+            <a:pPr indent="0" marL="0">
+              <a:buNone/>
+            </a:pPr>
+            <a:r>
+              <a:rPr lang="en-US" sz="1500" b="1" dirty="0">
+                <a:solidFill>
+                  <a:srgbClr val="1B2A4A"/>
+                </a:solidFill>
+                <a:latin typeface="Georgia" pitchFamily="34" charset="0"/>
+                <a:ea typeface="Georgia" pitchFamily="34" charset="-122"/>
+                <a:cs typeface="Georgia" pitchFamily="34" charset="-120"/>
+              </a:rPr>
+              <a:t>Accuracy</a:t>
+            </a:r>
+            <a:endParaRPr lang="en-US" sz="1500" dirty="0"/>
+          </a:p>
+        </p:txBody>
+      </p:sp>
+      <p:sp>
+        <p:nvSpPr>
+          <p:cNvPr id="9" name="Text 7"/>
+          <p:cNvSpPr/>
+          <p:nvPr/>
+        </p:nvSpPr>
+        <p:spPr>
+          <a:xfrm>
+            <a:off x="777240" y="1691640"/>
+            <a:ext cx="3383280" cy="2651760"/>
           </a:xfrm>
           <a:prstGeom prst="rect">
             <a:avLst/>
@@ -2856,13 +5270,13 @@
           <a:p>
             <a:pPr marL="342900" indent="-342900">
               <a:spcAft>
-                <a:spcPts val="800"/>
+                <a:spcPts val="600"/>
               </a:spcAft>
               <a:buSzPct val="100000"/>
               <a:buChar char="•"/>
             </a:pPr>
             <a:r>
-              <a:rPr lang="en-US" sz="1400" dirty="0">
+              <a:rPr lang="en-US" sz="1300" dirty="0">
                 <a:solidFill>
                   <a:srgbClr val="3D3A36"/>
                 </a:solidFill>
@@ -2870,20 +5284,20 @@
                 <a:ea typeface="Calibri" pitchFamily="34" charset="-122"/>
                 <a:cs typeface="Calibri" pitchFamily="34" charset="-120"/>
               </a:rPr>
-              <a:t>kilo (k) = × 1000 — 1 km = 1000 m</a:t>
-            </a:r>
-            <a:endParaRPr lang="en-US" sz="1400" dirty="0"/>
+              <a:t>How close your result is to the TRUE value</a:t>
+            </a:r>
+            <a:endParaRPr lang="en-US" sz="1300" dirty="0"/>
           </a:p>
           <a:p>
             <a:pPr marL="342900" indent="-342900">
               <a:spcAft>
-                <a:spcPts val="800"/>
+                <a:spcPts val="600"/>
               </a:spcAft>
               <a:buSzPct val="100000"/>
               <a:buChar char="•"/>
             </a:pPr>
             <a:r>
-              <a:rPr lang="en-US" sz="1400" dirty="0">
+              <a:rPr lang="en-US" sz="1300" dirty="0">
                 <a:solidFill>
                   <a:srgbClr val="3D3A36"/>
                 </a:solidFill>
@@ -2891,20 +5305,20 @@
                 <a:ea typeface="Calibri" pitchFamily="34" charset="-122"/>
                 <a:cs typeface="Calibri" pitchFamily="34" charset="-120"/>
               </a:rPr>
-              <a:t>base unit: metre, gram, litre, second</a:t>
-            </a:r>
-            <a:endParaRPr lang="en-US" sz="1400" dirty="0"/>
+              <a:t>Like hitting the bullseye on a target</a:t>
+            </a:r>
+            <a:endParaRPr lang="en-US" sz="1300" dirty="0"/>
           </a:p>
           <a:p>
             <a:pPr marL="342900" indent="-342900">
               <a:spcAft>
-                <a:spcPts val="800"/>
+                <a:spcPts val="600"/>
               </a:spcAft>
               <a:buSzPct val="100000"/>
               <a:buChar char="•"/>
             </a:pPr>
             <a:r>
-              <a:rPr lang="en-US" sz="1400" dirty="0">
+              <a:rPr lang="en-US" sz="1300" dirty="0">
                 <a:solidFill>
                   <a:srgbClr val="3D3A36"/>
                 </a:solidFill>
@@ -2912,20 +5326,20 @@
                 <a:ea typeface="Calibri" pitchFamily="34" charset="-122"/>
                 <a:cs typeface="Calibri" pitchFamily="34" charset="-120"/>
               </a:rPr>
-              <a:t>milli (m) = ÷ 1000 — 1 m = 1000 mm</a:t>
-            </a:r>
-            <a:endParaRPr lang="en-US" sz="1400" dirty="0"/>
+              <a:t>Depends on correct technique</a:t>
+            </a:r>
+            <a:endParaRPr lang="en-US" sz="1300" dirty="0"/>
           </a:p>
           <a:p>
             <a:pPr marL="342900" indent="-342900">
               <a:spcAft>
-                <a:spcPts val="800"/>
+                <a:spcPts val="600"/>
               </a:spcAft>
               <a:buSzPct val="100000"/>
               <a:buChar char="•"/>
             </a:pPr>
             <a:r>
-              <a:rPr lang="en-US" sz="1400" dirty="0">
+              <a:rPr lang="en-US" sz="1300" dirty="0">
                 <a:solidFill>
                   <a:srgbClr val="3D3A36"/>
                 </a:solidFill>
@@ -2933,20 +5347,128 @@
                 <a:ea typeface="Calibri" pitchFamily="34" charset="-122"/>
                 <a:cs typeface="Calibri" pitchFamily="34" charset="-120"/>
               </a:rPr>
-              <a:t>To convert larger → smaller: MULTIPLY</a:t>
-            </a:r>
-            <a:endParaRPr lang="en-US" sz="1400" dirty="0"/>
-          </a:p>
+              <a:t>Can be improved with better equipment</a:t>
+            </a:r>
+            <a:endParaRPr lang="en-US" sz="1300" dirty="0"/>
+          </a:p>
+        </p:txBody>
+      </p:sp>
+      <p:sp>
+        <p:nvSpPr>
+          <p:cNvPr id="10" name="Shape 8"/>
+          <p:cNvSpPr/>
+          <p:nvPr/>
+        </p:nvSpPr>
+        <p:spPr>
+          <a:xfrm>
+            <a:off x="4754880" y="1051560"/>
+            <a:ext cx="3840480" cy="3474720"/>
+          </a:xfrm>
+          <a:prstGeom prst="rect">
+            <a:avLst/>
+          </a:prstGeom>
+          <a:solidFill>
+            <a:srgbClr val="FFFFFF"/>
+          </a:solidFill>
+          <a:ln/>
+          <a:effectLst>
+            <a:outerShdw sx="100000" sy="100000" kx="0" ky="0" algn="bl" rotWithShape="0" blurRad="50800" dist="25400" dir="8100000">
+              <a:srgbClr val="000000">
+                <a:alpha val="10000"/>
+              </a:srgbClr>
+            </a:outerShdw>
+          </a:effectLst>
+        </p:spPr>
+      </p:sp>
+      <p:sp>
+        <p:nvSpPr>
+          <p:cNvPr id="11" name="Shape 9"/>
+          <p:cNvSpPr/>
+          <p:nvPr/>
+        </p:nvSpPr>
+        <p:spPr>
+          <a:xfrm>
+            <a:off x="4754880" y="1051560"/>
+            <a:ext cx="3840480" cy="54864"/>
+          </a:xfrm>
+          <a:prstGeom prst="rect">
+            <a:avLst/>
+          </a:prstGeom>
+          <a:solidFill>
+            <a:srgbClr val="E9C46A"/>
+          </a:solidFill>
+          <a:ln/>
+        </p:spPr>
+      </p:sp>
+      <p:sp>
+        <p:nvSpPr>
+          <p:cNvPr id="12" name="Text 10"/>
+          <p:cNvSpPr/>
+          <p:nvPr/>
+        </p:nvSpPr>
+        <p:spPr>
+          <a:xfrm>
+            <a:off x="4983480" y="1188720"/>
+            <a:ext cx="3383280" cy="457200"/>
+          </a:xfrm>
+          <a:prstGeom prst="rect">
+            <a:avLst/>
+          </a:prstGeom>
+          <a:noFill/>
+          <a:ln/>
+        </p:spPr>
+        <p:txBody>
+          <a:bodyPr wrap="square" lIns="0" tIns="0" rIns="0" bIns="0" rtlCol="0" anchor="ctr"/>
+          <a:lstStyle/>
+          <a:p>
+            <a:pPr indent="0" marL="0">
+              <a:buNone/>
+            </a:pPr>
+            <a:r>
+              <a:rPr lang="en-US" sz="1500" b="1" dirty="0">
+                <a:solidFill>
+                  <a:srgbClr val="1B2A4A"/>
+                </a:solidFill>
+                <a:latin typeface="Georgia" pitchFamily="34" charset="0"/>
+                <a:ea typeface="Georgia" pitchFamily="34" charset="-122"/>
+                <a:cs typeface="Georgia" pitchFamily="34" charset="-120"/>
+              </a:rPr>
+              <a:t>Precision</a:t>
+            </a:r>
+            <a:endParaRPr lang="en-US" sz="1500" dirty="0"/>
+          </a:p>
+        </p:txBody>
+      </p:sp>
+      <p:sp>
+        <p:nvSpPr>
+          <p:cNvPr id="13" name="Text 11"/>
+          <p:cNvSpPr/>
+          <p:nvPr/>
+        </p:nvSpPr>
+        <p:spPr>
+          <a:xfrm>
+            <a:off x="4983480" y="1691640"/>
+            <a:ext cx="3383280" cy="2651760"/>
+          </a:xfrm>
+          <a:prstGeom prst="rect">
+            <a:avLst/>
+          </a:prstGeom>
+          <a:noFill/>
+          <a:ln/>
+        </p:spPr>
+        <p:txBody>
+          <a:bodyPr wrap="square" rtlCol="0" anchor="t"/>
+          <a:lstStyle/>
           <a:p>
             <a:pPr marL="342900" indent="-342900">
               <a:spcAft>
-                <a:spcPts val="800"/>
+                <a:spcPts val="600"/>
               </a:spcAft>
               <a:buSzPct val="100000"/>
               <a:buChar char="•"/>
             </a:pPr>
             <a:r>
-              <a:rPr lang="en-US" sz="1400" dirty="0">
+              <a:rPr lang="en-US" sz="1300" dirty="0">
                 <a:solidFill>
                   <a:srgbClr val="3D3A36"/>
                 </a:solidFill>
@@ -2954,20 +5476,20 @@
                 <a:ea typeface="Calibri" pitchFamily="34" charset="-122"/>
                 <a:cs typeface="Calibri" pitchFamily="34" charset="-120"/>
               </a:rPr>
-              <a:t>To convert smaller → larger: DIVIDE</a:t>
-            </a:r>
-            <a:endParaRPr lang="en-US" sz="1400" dirty="0"/>
+              <a:t>How close your REPEATED results are to each other</a:t>
+            </a:r>
+            <a:endParaRPr lang="en-US" sz="1300" dirty="0"/>
           </a:p>
           <a:p>
             <a:pPr marL="342900" indent="-342900">
               <a:spcAft>
-                <a:spcPts val="800"/>
+                <a:spcPts val="600"/>
               </a:spcAft>
               <a:buSzPct val="100000"/>
               <a:buChar char="•"/>
             </a:pPr>
             <a:r>
-              <a:rPr lang="en-US" sz="1400" dirty="0">
+              <a:rPr lang="en-US" sz="1300" dirty="0">
                 <a:solidFill>
                   <a:srgbClr val="3D3A36"/>
                 </a:solidFill>
@@ -2975,20 +5497,20 @@
                 <a:ea typeface="Calibri" pitchFamily="34" charset="-122"/>
                 <a:cs typeface="Calibri" pitchFamily="34" charset="-120"/>
               </a:rPr>
-              <a:t>Example: 2.5 km = 2.5 × 1000 = 2500 m</a:t>
-            </a:r>
-            <a:endParaRPr lang="en-US" sz="1400" dirty="0"/>
+              <a:t>Like hitting the same spot every time</a:t>
+            </a:r>
+            <a:endParaRPr lang="en-US" sz="1300" dirty="0"/>
           </a:p>
           <a:p>
             <a:pPr marL="342900" indent="-342900">
               <a:spcAft>
-                <a:spcPts val="800"/>
+                <a:spcPts val="600"/>
               </a:spcAft>
               <a:buSzPct val="100000"/>
               <a:buChar char="•"/>
             </a:pPr>
             <a:r>
-              <a:rPr lang="en-US" sz="1400" dirty="0">
+              <a:rPr lang="en-US" sz="1300" dirty="0">
                 <a:solidFill>
                   <a:srgbClr val="3D3A36"/>
                 </a:solidFill>
@@ -2996,9 +5518,30 @@
                 <a:ea typeface="Calibri" pitchFamily="34" charset="-122"/>
                 <a:cs typeface="Calibri" pitchFamily="34" charset="-120"/>
               </a:rPr>
-              <a:t>Example: 450 mL = 450 ÷ 1000 = 0.45 L</a:t>
-            </a:r>
-            <a:endParaRPr lang="en-US" sz="1400" dirty="0"/>
+              <a:t>Depends on the equipment resolution</a:t>
+            </a:r>
+            <a:endParaRPr lang="en-US" sz="1300" dirty="0"/>
+          </a:p>
+          <a:p>
+            <a:pPr marL="342900" indent="-342900">
+              <a:spcAft>
+                <a:spcPts val="600"/>
+              </a:spcAft>
+              <a:buSzPct val="100000"/>
+              <a:buChar char="•"/>
+            </a:pPr>
+            <a:r>
+              <a:rPr lang="en-US" sz="1300" dirty="0">
+                <a:solidFill>
+                  <a:srgbClr val="3D3A36"/>
+                </a:solidFill>
+                <a:latin typeface="Calibri" pitchFamily="34" charset="0"/>
+                <a:ea typeface="Calibri" pitchFamily="34" charset="-122"/>
+                <a:cs typeface="Calibri" pitchFamily="34" charset="-120"/>
+              </a:rPr>
+              <a:t>Can be improved by repeating the experiment</a:t>
+            </a:r>
+            <a:endParaRPr lang="en-US" sz="1300" dirty="0"/>
           </a:p>
         </p:txBody>
       </p:sp>
@@ -3016,7 +5559,7 @@
     <p:bg>
       <p:bgPr>
         <a:solidFill>
-          <a:srgbClr val="1B2A4A"/>
+          <a:srgbClr val="FAF8F5"/>
         </a:solidFill>
       </p:bgPr>
     </p:bg>
@@ -3043,27 +5586,133 @@
         <p:spPr>
           <a:xfrm>
             <a:off x="0" y="0"/>
-            <a:ext cx="109728" cy="5143500"/>
+            <a:ext cx="9144000" cy="822960"/>
           </a:xfrm>
           <a:prstGeom prst="rect">
             <a:avLst/>
           </a:prstGeom>
           <a:solidFill>
-            <a:srgbClr val="E9C46A"/>
+            <a:srgbClr val="FFFFFF"/>
           </a:solidFill>
           <a:ln/>
         </p:spPr>
       </p:sp>
       <p:sp>
         <p:nvSpPr>
-          <p:cNvPr id="3" name="Text 1"/>
-          <p:cNvSpPr/>
-          <p:nvPr/>
-        </p:nvSpPr>
-        <p:spPr>
-          <a:xfrm>
-            <a:off x="731520" y="457200"/>
-            <a:ext cx="7772400" cy="731520"/>
+          <p:cNvPr id="3" name="Shape 1"/>
+          <p:cNvSpPr/>
+          <p:nvPr/>
+        </p:nvSpPr>
+        <p:spPr>
+          <a:xfrm>
+            <a:off x="0" y="804672"/>
+            <a:ext cx="9144000" cy="27432"/>
+          </a:xfrm>
+          <a:prstGeom prst="rect">
+            <a:avLst/>
+          </a:prstGeom>
+          <a:solidFill>
+            <a:srgbClr val="E5E2DC"/>
+          </a:solidFill>
+          <a:ln/>
+        </p:spPr>
+      </p:sp>
+      <p:sp>
+        <p:nvSpPr>
+          <p:cNvPr id="4" name="Shape 2"/>
+          <p:cNvSpPr/>
+          <p:nvPr/>
+        </p:nvSpPr>
+        <p:spPr>
+          <a:xfrm>
+            <a:off x="548640" y="201168"/>
+            <a:ext cx="54864" cy="420624"/>
+          </a:xfrm>
+          <a:prstGeom prst="rect">
+            <a:avLst/>
+          </a:prstGeom>
+          <a:solidFill>
+            <a:srgbClr val="2A9D8F"/>
+          </a:solidFill>
+          <a:ln/>
+        </p:spPr>
+      </p:sp>
+      <p:sp>
+        <p:nvSpPr>
+          <p:cNvPr id="5" name="Text 3"/>
+          <p:cNvSpPr/>
+          <p:nvPr/>
+        </p:nvSpPr>
+        <p:spPr>
+          <a:xfrm>
+            <a:off x="777240" y="137160"/>
+            <a:ext cx="7772400" cy="548640"/>
+          </a:xfrm>
+          <a:prstGeom prst="rect">
+            <a:avLst/>
+          </a:prstGeom>
+          <a:noFill/>
+          <a:ln/>
+        </p:spPr>
+        <p:txBody>
+          <a:bodyPr wrap="square" lIns="0" tIns="0" rIns="0" bIns="0" rtlCol="0" anchor="ctr"/>
+          <a:lstStyle/>
+          <a:p>
+            <a:pPr indent="0" marL="0">
+              <a:buNone/>
+            </a:pPr>
+            <a:r>
+              <a:rPr lang="en-US" sz="2000" b="1" dirty="0">
+                <a:solidFill>
+                  <a:srgbClr val="1B2A4A"/>
+                </a:solidFill>
+                <a:latin typeface="Georgia" pitchFamily="34" charset="0"/>
+                <a:ea typeface="Georgia" pitchFamily="34" charset="-122"/>
+                <a:cs typeface="Georgia" pitchFamily="34" charset="-120"/>
+              </a:rPr>
+              <a:t>Common Metric Conversions</a:t>
+            </a:r>
+            <a:endParaRPr lang="en-US" sz="2000" dirty="0"/>
+          </a:p>
+        </p:txBody>
+      </p:sp>
+      <p:sp>
+        <p:nvSpPr>
+          <p:cNvPr id="6" name="Shape 4"/>
+          <p:cNvSpPr/>
+          <p:nvPr/>
+        </p:nvSpPr>
+        <p:spPr>
+          <a:xfrm>
+            <a:off x="731520" y="1280160"/>
+            <a:ext cx="2377440" cy="2377440"/>
+          </a:xfrm>
+          <a:prstGeom prst="rect">
+            <a:avLst/>
+          </a:prstGeom>
+          <a:solidFill>
+            <a:srgbClr val="FFFFFF"/>
+          </a:solidFill>
+          <a:ln/>
+          <a:effectLst>
+            <a:outerShdw sx="100000" sy="100000" kx="0" ky="0" algn="bl" rotWithShape="0" blurRad="50800" dist="25400" dir="8100000">
+              <a:srgbClr val="000000">
+                <a:alpha val="10000"/>
+              </a:srgbClr>
+            </a:outerShdw>
+          </a:effectLst>
+        </p:spPr>
+      </p:sp>
+      <p:sp>
+        <p:nvSpPr>
+          <p:cNvPr id="7" name="Text 5"/>
+          <p:cNvSpPr/>
+          <p:nvPr/>
+        </p:nvSpPr>
+        <p:spPr>
+          <a:xfrm>
+            <a:off x="731520" y="1463040"/>
+            <a:ext cx="2377440" cy="914400"/>
           </a:xfrm>
           <a:prstGeom prst="rect">
             <a:avLst/>
@@ -3075,11 +5724,1262 @@
           <a:bodyPr wrap="square" rtlCol="0" anchor="ctr"/>
           <a:lstStyle/>
           <a:p>
+            <a:pPr algn="ctr" indent="0" marL="0">
+              <a:buNone/>
+            </a:pPr>
+            <a:r>
+              <a:rPr lang="en-US" sz="3600" b="1" dirty="0">
+                <a:solidFill>
+                  <a:srgbClr val="2A9D8F"/>
+                </a:solidFill>
+                <a:latin typeface="Georgia" pitchFamily="34" charset="0"/>
+                <a:ea typeface="Georgia" pitchFamily="34" charset="-122"/>
+                <a:cs typeface="Georgia" pitchFamily="34" charset="-120"/>
+              </a:rPr>
+              <a:t>×1000</a:t>
+            </a:r>
+            <a:endParaRPr lang="en-US" sz="3600" dirty="0"/>
+          </a:p>
+        </p:txBody>
+      </p:sp>
+      <p:sp>
+        <p:nvSpPr>
+          <p:cNvPr id="8" name="Text 6"/>
+          <p:cNvSpPr/>
+          <p:nvPr/>
+        </p:nvSpPr>
+        <p:spPr>
+          <a:xfrm>
+            <a:off x="731520" y="2423160"/>
+            <a:ext cx="2377440" cy="365760"/>
+          </a:xfrm>
+          <a:prstGeom prst="rect">
+            <a:avLst/>
+          </a:prstGeom>
+          <a:noFill/>
+          <a:ln/>
+        </p:spPr>
+        <p:txBody>
+          <a:bodyPr wrap="square" rtlCol="0" anchor="ctr"/>
+          <a:lstStyle/>
+          <a:p>
+            <a:pPr algn="ctr" indent="0" marL="0">
+              <a:buNone/>
+            </a:pPr>
+            <a:r>
+              <a:rPr lang="en-US" sz="1200" b="1" dirty="0">
+                <a:solidFill>
+                  <a:srgbClr val="6B6660"/>
+                </a:solidFill>
+                <a:latin typeface="Calibri" pitchFamily="34" charset="0"/>
+                <a:ea typeface="Calibri" pitchFamily="34" charset="-122"/>
+                <a:cs typeface="Calibri" pitchFamily="34" charset="-120"/>
+              </a:rPr>
+              <a:t>KM → M</a:t>
+            </a:r>
+            <a:endParaRPr lang="en-US" sz="1200" dirty="0"/>
+          </a:p>
+        </p:txBody>
+      </p:sp>
+      <p:sp>
+        <p:nvSpPr>
+          <p:cNvPr id="9" name="Text 7"/>
+          <p:cNvSpPr/>
+          <p:nvPr/>
+        </p:nvSpPr>
+        <p:spPr>
+          <a:xfrm>
+            <a:off x="822960" y="2834640"/>
+            <a:ext cx="2194560" cy="640080"/>
+          </a:xfrm>
+          <a:prstGeom prst="rect">
+            <a:avLst/>
+          </a:prstGeom>
+          <a:noFill/>
+          <a:ln/>
+        </p:spPr>
+        <p:txBody>
+          <a:bodyPr wrap="square" rtlCol="0" anchor="ctr"/>
+          <a:lstStyle/>
+          <a:p>
+            <a:pPr algn="ctr" indent="0" marL="0">
+              <a:buNone/>
+            </a:pPr>
+            <a:r>
+              <a:rPr lang="en-US" sz="1000" dirty="0">
+                <a:solidFill>
+                  <a:srgbClr val="9B9690"/>
+                </a:solidFill>
+                <a:latin typeface="Calibri" pitchFamily="34" charset="0"/>
+                <a:ea typeface="Calibri" pitchFamily="34" charset="-122"/>
+                <a:cs typeface="Calibri" pitchFamily="34" charset="-120"/>
+              </a:rPr>
+              <a:t>1 km = 1000 m</a:t>
+            </a:r>
+            <a:endParaRPr lang="en-US" sz="1000" dirty="0"/>
+          </a:p>
+          <a:p>
+            <a:pPr algn="ctr" indent="0" marL="0">
+              <a:buNone/>
+            </a:pPr>
+            <a:r>
+              <a:rPr lang="en-US" sz="1000" dirty="0">
+                <a:solidFill>
+                  <a:srgbClr val="9B9690"/>
+                </a:solidFill>
+                <a:latin typeface="Calibri" pitchFamily="34" charset="0"/>
+                <a:ea typeface="Calibri" pitchFamily="34" charset="-122"/>
+                <a:cs typeface="Calibri" pitchFamily="34" charset="-120"/>
+              </a:rPr>
+              <a:t>1 kg = 1000 g</a:t>
+            </a:r>
+            <a:endParaRPr lang="en-US" sz="1000" dirty="0"/>
+          </a:p>
+          <a:p>
+            <a:pPr algn="ctr" indent="0" marL="0">
+              <a:buNone/>
+            </a:pPr>
+            <a:r>
+              <a:rPr lang="en-US" sz="1000" dirty="0">
+                <a:solidFill>
+                  <a:srgbClr val="9B9690"/>
+                </a:solidFill>
+                <a:latin typeface="Calibri" pitchFamily="34" charset="0"/>
+                <a:ea typeface="Calibri" pitchFamily="34" charset="-122"/>
+                <a:cs typeface="Calibri" pitchFamily="34" charset="-120"/>
+              </a:rPr>
+              <a:t>1 L = 1000 mL</a:t>
+            </a:r>
+            <a:endParaRPr lang="en-US" sz="1000" dirty="0"/>
+          </a:p>
+        </p:txBody>
+      </p:sp>
+      <p:sp>
+        <p:nvSpPr>
+          <p:cNvPr id="10" name="Shape 8"/>
+          <p:cNvSpPr/>
+          <p:nvPr/>
+        </p:nvSpPr>
+        <p:spPr>
+          <a:xfrm>
+            <a:off x="3383280" y="1280160"/>
+            <a:ext cx="2377440" cy="2377440"/>
+          </a:xfrm>
+          <a:prstGeom prst="rect">
+            <a:avLst/>
+          </a:prstGeom>
+          <a:solidFill>
+            <a:srgbClr val="FFFFFF"/>
+          </a:solidFill>
+          <a:ln/>
+          <a:effectLst>
+            <a:outerShdw sx="100000" sy="100000" kx="0" ky="0" algn="bl" rotWithShape="0" blurRad="50800" dist="25400" dir="8100000">
+              <a:srgbClr val="000000">
+                <a:alpha val="10000"/>
+              </a:srgbClr>
+            </a:outerShdw>
+          </a:effectLst>
+        </p:spPr>
+      </p:sp>
+      <p:sp>
+        <p:nvSpPr>
+          <p:cNvPr id="11" name="Text 9"/>
+          <p:cNvSpPr/>
+          <p:nvPr/>
+        </p:nvSpPr>
+        <p:spPr>
+          <a:xfrm>
+            <a:off x="3383280" y="1463040"/>
+            <a:ext cx="2377440" cy="914400"/>
+          </a:xfrm>
+          <a:prstGeom prst="rect">
+            <a:avLst/>
+          </a:prstGeom>
+          <a:noFill/>
+          <a:ln/>
+        </p:spPr>
+        <p:txBody>
+          <a:bodyPr wrap="square" rtlCol="0" anchor="ctr"/>
+          <a:lstStyle/>
+          <a:p>
+            <a:pPr algn="ctr" indent="0" marL="0">
+              <a:buNone/>
+            </a:pPr>
+            <a:r>
+              <a:rPr lang="en-US" sz="3600" b="1" dirty="0">
+                <a:solidFill>
+                  <a:srgbClr val="2A9D8F"/>
+                </a:solidFill>
+                <a:latin typeface="Georgia" pitchFamily="34" charset="0"/>
+                <a:ea typeface="Georgia" pitchFamily="34" charset="-122"/>
+                <a:cs typeface="Georgia" pitchFamily="34" charset="-120"/>
+              </a:rPr>
+              <a:t>×100</a:t>
+            </a:r>
+            <a:endParaRPr lang="en-US" sz="3600" dirty="0"/>
+          </a:p>
+        </p:txBody>
+      </p:sp>
+      <p:sp>
+        <p:nvSpPr>
+          <p:cNvPr id="12" name="Text 10"/>
+          <p:cNvSpPr/>
+          <p:nvPr/>
+        </p:nvSpPr>
+        <p:spPr>
+          <a:xfrm>
+            <a:off x="3383280" y="2423160"/>
+            <a:ext cx="2377440" cy="365760"/>
+          </a:xfrm>
+          <a:prstGeom prst="rect">
+            <a:avLst/>
+          </a:prstGeom>
+          <a:noFill/>
+          <a:ln/>
+        </p:spPr>
+        <p:txBody>
+          <a:bodyPr wrap="square" rtlCol="0" anchor="ctr"/>
+          <a:lstStyle/>
+          <a:p>
+            <a:pPr algn="ctr" indent="0" marL="0">
+              <a:buNone/>
+            </a:pPr>
+            <a:r>
+              <a:rPr lang="en-US" sz="1200" b="1" dirty="0">
+                <a:solidFill>
+                  <a:srgbClr val="6B6660"/>
+                </a:solidFill>
+                <a:latin typeface="Calibri" pitchFamily="34" charset="0"/>
+                <a:ea typeface="Calibri" pitchFamily="34" charset="-122"/>
+                <a:cs typeface="Calibri" pitchFamily="34" charset="-120"/>
+              </a:rPr>
+              <a:t>M → CM</a:t>
+            </a:r>
+            <a:endParaRPr lang="en-US" sz="1200" dirty="0"/>
+          </a:p>
+        </p:txBody>
+      </p:sp>
+      <p:sp>
+        <p:nvSpPr>
+          <p:cNvPr id="13" name="Text 11"/>
+          <p:cNvSpPr/>
+          <p:nvPr/>
+        </p:nvSpPr>
+        <p:spPr>
+          <a:xfrm>
+            <a:off x="3474720" y="2834640"/>
+            <a:ext cx="2194560" cy="640080"/>
+          </a:xfrm>
+          <a:prstGeom prst="rect">
+            <a:avLst/>
+          </a:prstGeom>
+          <a:noFill/>
+          <a:ln/>
+        </p:spPr>
+        <p:txBody>
+          <a:bodyPr wrap="square" rtlCol="0" anchor="ctr"/>
+          <a:lstStyle/>
+          <a:p>
+            <a:pPr algn="ctr" indent="0" marL="0">
+              <a:buNone/>
+            </a:pPr>
+            <a:r>
+              <a:rPr lang="en-US" sz="1000" dirty="0">
+                <a:solidFill>
+                  <a:srgbClr val="9B9690"/>
+                </a:solidFill>
+                <a:latin typeface="Calibri" pitchFamily="34" charset="0"/>
+                <a:ea typeface="Calibri" pitchFamily="34" charset="-122"/>
+                <a:cs typeface="Calibri" pitchFamily="34" charset="-120"/>
+              </a:rPr>
+              <a:t>1 m = 100 cm</a:t>
+            </a:r>
+            <a:endParaRPr lang="en-US" sz="1000" dirty="0"/>
+          </a:p>
+        </p:txBody>
+      </p:sp>
+      <p:sp>
+        <p:nvSpPr>
+          <p:cNvPr id="14" name="Shape 12"/>
+          <p:cNvSpPr/>
+          <p:nvPr/>
+        </p:nvSpPr>
+        <p:spPr>
+          <a:xfrm>
+            <a:off x="6035040" y="1280160"/>
+            <a:ext cx="2377440" cy="2377440"/>
+          </a:xfrm>
+          <a:prstGeom prst="rect">
+            <a:avLst/>
+          </a:prstGeom>
+          <a:solidFill>
+            <a:srgbClr val="FFFFFF"/>
+          </a:solidFill>
+          <a:ln/>
+          <a:effectLst>
+            <a:outerShdw sx="100000" sy="100000" kx="0" ky="0" algn="bl" rotWithShape="0" blurRad="50800" dist="25400" dir="8100000">
+              <a:srgbClr val="000000">
+                <a:alpha val="10000"/>
+              </a:srgbClr>
+            </a:outerShdw>
+          </a:effectLst>
+        </p:spPr>
+      </p:sp>
+      <p:sp>
+        <p:nvSpPr>
+          <p:cNvPr id="15" name="Text 13"/>
+          <p:cNvSpPr/>
+          <p:nvPr/>
+        </p:nvSpPr>
+        <p:spPr>
+          <a:xfrm>
+            <a:off x="6035040" y="1463040"/>
+            <a:ext cx="2377440" cy="914400"/>
+          </a:xfrm>
+          <a:prstGeom prst="rect">
+            <a:avLst/>
+          </a:prstGeom>
+          <a:noFill/>
+          <a:ln/>
+        </p:spPr>
+        <p:txBody>
+          <a:bodyPr wrap="square" rtlCol="0" anchor="ctr"/>
+          <a:lstStyle/>
+          <a:p>
+            <a:pPr algn="ctr" indent="0" marL="0">
+              <a:buNone/>
+            </a:pPr>
+            <a:r>
+              <a:rPr lang="en-US" sz="3600" b="1" dirty="0">
+                <a:solidFill>
+                  <a:srgbClr val="2A9D8F"/>
+                </a:solidFill>
+                <a:latin typeface="Georgia" pitchFamily="34" charset="0"/>
+                <a:ea typeface="Georgia" pitchFamily="34" charset="-122"/>
+                <a:cs typeface="Georgia" pitchFamily="34" charset="-120"/>
+              </a:rPr>
+              <a:t>×10</a:t>
+            </a:r>
+            <a:endParaRPr lang="en-US" sz="3600" dirty="0"/>
+          </a:p>
+        </p:txBody>
+      </p:sp>
+      <p:sp>
+        <p:nvSpPr>
+          <p:cNvPr id="16" name="Text 14"/>
+          <p:cNvSpPr/>
+          <p:nvPr/>
+        </p:nvSpPr>
+        <p:spPr>
+          <a:xfrm>
+            <a:off x="6035040" y="2423160"/>
+            <a:ext cx="2377440" cy="365760"/>
+          </a:xfrm>
+          <a:prstGeom prst="rect">
+            <a:avLst/>
+          </a:prstGeom>
+          <a:noFill/>
+          <a:ln/>
+        </p:spPr>
+        <p:txBody>
+          <a:bodyPr wrap="square" rtlCol="0" anchor="ctr"/>
+          <a:lstStyle/>
+          <a:p>
+            <a:pPr algn="ctr" indent="0" marL="0">
+              <a:buNone/>
+            </a:pPr>
+            <a:r>
+              <a:rPr lang="en-US" sz="1200" b="1" dirty="0">
+                <a:solidFill>
+                  <a:srgbClr val="6B6660"/>
+                </a:solidFill>
+                <a:latin typeface="Calibri" pitchFamily="34" charset="0"/>
+                <a:ea typeface="Calibri" pitchFamily="34" charset="-122"/>
+                <a:cs typeface="Calibri" pitchFamily="34" charset="-120"/>
+              </a:rPr>
+              <a:t>CM → MM</a:t>
+            </a:r>
+            <a:endParaRPr lang="en-US" sz="1200" dirty="0"/>
+          </a:p>
+        </p:txBody>
+      </p:sp>
+      <p:sp>
+        <p:nvSpPr>
+          <p:cNvPr id="17" name="Text 15"/>
+          <p:cNvSpPr/>
+          <p:nvPr/>
+        </p:nvSpPr>
+        <p:spPr>
+          <a:xfrm>
+            <a:off x="6126480" y="2834640"/>
+            <a:ext cx="2194560" cy="640080"/>
+          </a:xfrm>
+          <a:prstGeom prst="rect">
+            <a:avLst/>
+          </a:prstGeom>
+          <a:noFill/>
+          <a:ln/>
+        </p:spPr>
+        <p:txBody>
+          <a:bodyPr wrap="square" rtlCol="0" anchor="ctr"/>
+          <a:lstStyle/>
+          <a:p>
+            <a:pPr algn="ctr" indent="0" marL="0">
+              <a:buNone/>
+            </a:pPr>
+            <a:r>
+              <a:rPr lang="en-US" sz="1000" dirty="0">
+                <a:solidFill>
+                  <a:srgbClr val="9B9690"/>
+                </a:solidFill>
+                <a:latin typeface="Calibri" pitchFamily="34" charset="0"/>
+                <a:ea typeface="Calibri" pitchFamily="34" charset="-122"/>
+                <a:cs typeface="Calibri" pitchFamily="34" charset="-120"/>
+              </a:rPr>
+              <a:t>1 cm = 10 mm</a:t>
+            </a:r>
+            <a:endParaRPr lang="en-US" sz="1000" dirty="0"/>
+          </a:p>
+        </p:txBody>
+      </p:sp>
+      <p:sp>
+        <p:nvSpPr>
+          <p:cNvPr id="18" name="Text 16"/>
+          <p:cNvSpPr/>
+          <p:nvPr/>
+        </p:nvSpPr>
+        <p:spPr>
+          <a:xfrm>
+            <a:off x="731520" y="4114800"/>
+            <a:ext cx="7680960" cy="457200"/>
+          </a:xfrm>
+          <a:prstGeom prst="rect">
+            <a:avLst/>
+          </a:prstGeom>
+          <a:noFill/>
+          <a:ln/>
+        </p:spPr>
+        <p:txBody>
+          <a:bodyPr wrap="square" rtlCol="0" anchor="ctr"/>
+          <a:lstStyle/>
+          <a:p>
+            <a:pPr algn="ctr" indent="0" marL="0">
+              <a:buNone/>
+            </a:pPr>
+            <a:r>
+              <a:rPr lang="en-US" sz="1200" i="1" dirty="0">
+                <a:solidFill>
+                  <a:srgbClr val="6B6660"/>
+                </a:solidFill>
+                <a:latin typeface="Calibri" pitchFamily="34" charset="0"/>
+                <a:ea typeface="Calibri" pitchFamily="34" charset="-122"/>
+                <a:cs typeface="Calibri" pitchFamily="34" charset="-120"/>
+              </a:rPr>
+              <a:t>Always convert to the same unit before comparing measurements.</a:t>
+            </a:r>
+            <a:endParaRPr lang="en-US" sz="1200" dirty="0"/>
+          </a:p>
+        </p:txBody>
+      </p:sp>
+    </p:spTree>
+  </p:cSld>
+  <p:clrMapOvr>
+    <a:masterClrMapping/>
+  </p:clrMapOvr>
+</p:sld>
+</file>
+
+<file path=ppt/slides/slide7.xml><?xml version="1.0" encoding="utf-8"?>
+<p:sld xmlns:a="http://schemas.openxmlformats.org/drawingml/2006/main" xmlns:r="http://schemas.openxmlformats.org/officeDocument/2006/relationships" xmlns:p="http://schemas.openxmlformats.org/presentationml/2006/main">
+  <p:cSld name="Slide 7">
+    <p:bg>
+      <p:bgPr>
+        <a:solidFill>
+          <a:srgbClr val="FAF8F5"/>
+        </a:solidFill>
+      </p:bgPr>
+    </p:bg>
+    <p:spTree>
+      <p:nvGrpSpPr>
+        <p:cNvPr id="1" name=""/>
+        <p:cNvGrpSpPr/>
+        <p:nvPr/>
+      </p:nvGrpSpPr>
+      <p:grpSpPr>
+        <a:xfrm>
+          <a:off x="0" y="0"/>
+          <a:ext cx="0" cy="0"/>
+          <a:chOff x="0" y="0"/>
+          <a:chExt cx="0" cy="0"/>
+        </a:xfrm>
+      </p:grpSpPr>
+      <p:sp>
+        <p:nvSpPr>
+          <p:cNvPr id="2" name="Shape 0"/>
+          <p:cNvSpPr/>
+          <p:nvPr/>
+        </p:nvSpPr>
+        <p:spPr>
+          <a:xfrm>
+            <a:off x="0" y="0"/>
+            <a:ext cx="9144000" cy="822960"/>
+          </a:xfrm>
+          <a:prstGeom prst="rect">
+            <a:avLst/>
+          </a:prstGeom>
+          <a:solidFill>
+            <a:srgbClr val="FFFFFF"/>
+          </a:solidFill>
+          <a:ln/>
+        </p:spPr>
+      </p:sp>
+      <p:sp>
+        <p:nvSpPr>
+          <p:cNvPr id="3" name="Shape 1"/>
+          <p:cNvSpPr/>
+          <p:nvPr/>
+        </p:nvSpPr>
+        <p:spPr>
+          <a:xfrm>
+            <a:off x="0" y="804672"/>
+            <a:ext cx="9144000" cy="27432"/>
+          </a:xfrm>
+          <a:prstGeom prst="rect">
+            <a:avLst/>
+          </a:prstGeom>
+          <a:solidFill>
+            <a:srgbClr val="E5E2DC"/>
+          </a:solidFill>
+          <a:ln/>
+        </p:spPr>
+      </p:sp>
+      <p:sp>
+        <p:nvSpPr>
+          <p:cNvPr id="4" name="Shape 2"/>
+          <p:cNvSpPr/>
+          <p:nvPr/>
+        </p:nvSpPr>
+        <p:spPr>
+          <a:xfrm>
+            <a:off x="548640" y="201168"/>
+            <a:ext cx="54864" cy="420624"/>
+          </a:xfrm>
+          <a:prstGeom prst="rect">
+            <a:avLst/>
+          </a:prstGeom>
+          <a:solidFill>
+            <a:srgbClr val="2A9D8F"/>
+          </a:solidFill>
+          <a:ln/>
+        </p:spPr>
+      </p:sp>
+      <p:sp>
+        <p:nvSpPr>
+          <p:cNvPr id="5" name="Text 3"/>
+          <p:cNvSpPr/>
+          <p:nvPr/>
+        </p:nvSpPr>
+        <p:spPr>
+          <a:xfrm>
+            <a:off x="777240" y="137160"/>
+            <a:ext cx="7772400" cy="548640"/>
+          </a:xfrm>
+          <a:prstGeom prst="rect">
+            <a:avLst/>
+          </a:prstGeom>
+          <a:noFill/>
+          <a:ln/>
+        </p:spPr>
+        <p:txBody>
+          <a:bodyPr wrap="square" lIns="0" tIns="0" rIns="0" bIns="0" rtlCol="0" anchor="ctr"/>
+          <a:lstStyle/>
+          <a:p>
             <a:pPr indent="0" marL="0">
               <a:buNone/>
             </a:pPr>
             <a:r>
-              <a:rPr lang="en-US" sz="3200" b="1" dirty="0">
+              <a:rPr lang="en-US" sz="2000" b="1" dirty="0">
+                <a:solidFill>
+                  <a:srgbClr val="1B2A4A"/>
+                </a:solidFill>
+                <a:latin typeface="Georgia" pitchFamily="34" charset="0"/>
+                <a:ea typeface="Georgia" pitchFamily="34" charset="-122"/>
+                <a:cs typeface="Georgia" pitchFamily="34" charset="-120"/>
+              </a:rPr>
+              <a:t>Check Your Understanding</a:t>
+            </a:r>
+            <a:endParaRPr lang="en-US" sz="2000" dirty="0"/>
+          </a:p>
+        </p:txBody>
+      </p:sp>
+      <p:sp>
+        <p:nvSpPr>
+          <p:cNvPr id="6" name="Shape 4"/>
+          <p:cNvSpPr/>
+          <p:nvPr/>
+        </p:nvSpPr>
+        <p:spPr>
+          <a:xfrm>
+            <a:off x="731520" y="1051560"/>
+            <a:ext cx="7680960" cy="438912"/>
+          </a:xfrm>
+          <a:prstGeom prst="rect">
+            <a:avLst/>
+          </a:prstGeom>
+          <a:solidFill>
+            <a:srgbClr val="FFFFFF"/>
+          </a:solidFill>
+          <a:ln/>
+        </p:spPr>
+      </p:sp>
+      <p:sp>
+        <p:nvSpPr>
+          <p:cNvPr id="7" name="Text 5"/>
+          <p:cNvSpPr/>
+          <p:nvPr/>
+        </p:nvSpPr>
+        <p:spPr>
+          <a:xfrm>
+            <a:off x="868680" y="1051560"/>
+            <a:ext cx="320040" cy="438912"/>
+          </a:xfrm>
+          <a:prstGeom prst="rect">
+            <a:avLst/>
+          </a:prstGeom>
+          <a:noFill/>
+          <a:ln/>
+        </p:spPr>
+        <p:txBody>
+          <a:bodyPr wrap="square" rtlCol="0" anchor="ctr"/>
+          <a:lstStyle/>
+          <a:p>
+            <a:pPr indent="0" marL="0">
+              <a:buNone/>
+            </a:pPr>
+            <a:r>
+              <a:rPr lang="en-US" sz="1400" dirty="0">
+                <a:solidFill>
+                  <a:srgbClr val="2A9D8F"/>
+                </a:solidFill>
+              </a:rPr>
+              <a:t>☐</a:t>
+            </a:r>
+            <a:endParaRPr lang="en-US" sz="1400" dirty="0"/>
+          </a:p>
+        </p:txBody>
+      </p:sp>
+      <p:sp>
+        <p:nvSpPr>
+          <p:cNvPr id="8" name="Text 6"/>
+          <p:cNvSpPr/>
+          <p:nvPr/>
+        </p:nvSpPr>
+        <p:spPr>
+          <a:xfrm>
+            <a:off x="1234440" y="1051560"/>
+            <a:ext cx="6949440" cy="438912"/>
+          </a:xfrm>
+          <a:prstGeom prst="rect">
+            <a:avLst/>
+          </a:prstGeom>
+          <a:noFill/>
+          <a:ln/>
+        </p:spPr>
+        <p:txBody>
+          <a:bodyPr wrap="square" rtlCol="0" anchor="ctr"/>
+          <a:lstStyle/>
+          <a:p>
+            <a:pPr indent="0" marL="0">
+              <a:buNone/>
+            </a:pPr>
+            <a:r>
+              <a:rPr lang="en-US" sz="1300" dirty="0">
+                <a:solidFill>
+                  <a:srgbClr val="3D3A36"/>
+                </a:solidFill>
+                <a:latin typeface="Calibri" pitchFamily="34" charset="0"/>
+                <a:ea typeface="Calibri" pitchFamily="34" charset="-122"/>
+                <a:cs typeface="Calibri" pitchFamily="34" charset="-120"/>
+              </a:rPr>
+              <a:t>I know the SI units for length, mass, time, and temperature</a:t>
+            </a:r>
+            <a:endParaRPr lang="en-US" sz="1300" dirty="0"/>
+          </a:p>
+        </p:txBody>
+      </p:sp>
+      <p:sp>
+        <p:nvSpPr>
+          <p:cNvPr id="9" name="Shape 7"/>
+          <p:cNvSpPr/>
+          <p:nvPr/>
+        </p:nvSpPr>
+        <p:spPr>
+          <a:xfrm>
+            <a:off x="731520" y="1554480"/>
+            <a:ext cx="7680960" cy="438912"/>
+          </a:xfrm>
+          <a:prstGeom prst="rect">
+            <a:avLst/>
+          </a:prstGeom>
+          <a:solidFill>
+            <a:srgbClr val="F8F6F3"/>
+          </a:solidFill>
+          <a:ln/>
+        </p:spPr>
+      </p:sp>
+      <p:sp>
+        <p:nvSpPr>
+          <p:cNvPr id="10" name="Text 8"/>
+          <p:cNvSpPr/>
+          <p:nvPr/>
+        </p:nvSpPr>
+        <p:spPr>
+          <a:xfrm>
+            <a:off x="868680" y="1554480"/>
+            <a:ext cx="320040" cy="438912"/>
+          </a:xfrm>
+          <a:prstGeom prst="rect">
+            <a:avLst/>
+          </a:prstGeom>
+          <a:noFill/>
+          <a:ln/>
+        </p:spPr>
+        <p:txBody>
+          <a:bodyPr wrap="square" rtlCol="0" anchor="ctr"/>
+          <a:lstStyle/>
+          <a:p>
+            <a:pPr indent="0" marL="0">
+              <a:buNone/>
+            </a:pPr>
+            <a:r>
+              <a:rPr lang="en-US" sz="1400" dirty="0">
+                <a:solidFill>
+                  <a:srgbClr val="2A9D8F"/>
+                </a:solidFill>
+              </a:rPr>
+              <a:t>☐</a:t>
+            </a:r>
+            <a:endParaRPr lang="en-US" sz="1400" dirty="0"/>
+          </a:p>
+        </p:txBody>
+      </p:sp>
+      <p:sp>
+        <p:nvSpPr>
+          <p:cNvPr id="11" name="Text 9"/>
+          <p:cNvSpPr/>
+          <p:nvPr/>
+        </p:nvSpPr>
+        <p:spPr>
+          <a:xfrm>
+            <a:off x="1234440" y="1554480"/>
+            <a:ext cx="6949440" cy="438912"/>
+          </a:xfrm>
+          <a:prstGeom prst="rect">
+            <a:avLst/>
+          </a:prstGeom>
+          <a:noFill/>
+          <a:ln/>
+        </p:spPr>
+        <p:txBody>
+          <a:bodyPr wrap="square" rtlCol="0" anchor="ctr"/>
+          <a:lstStyle/>
+          <a:p>
+            <a:pPr indent="0" marL="0">
+              <a:buNone/>
+            </a:pPr>
+            <a:r>
+              <a:rPr lang="en-US" sz="1300" dirty="0">
+                <a:solidFill>
+                  <a:srgbClr val="3D3A36"/>
+                </a:solidFill>
+                <a:latin typeface="Calibri" pitchFamily="34" charset="0"/>
+                <a:ea typeface="Calibri" pitchFamily="34" charset="-122"/>
+                <a:cs typeface="Calibri" pitchFamily="34" charset="-120"/>
+              </a:rPr>
+              <a:t>I can read a measuring cylinder at the meniscus</a:t>
+            </a:r>
+            <a:endParaRPr lang="en-US" sz="1300" dirty="0"/>
+          </a:p>
+        </p:txBody>
+      </p:sp>
+      <p:sp>
+        <p:nvSpPr>
+          <p:cNvPr id="12" name="Shape 10"/>
+          <p:cNvSpPr/>
+          <p:nvPr/>
+        </p:nvSpPr>
+        <p:spPr>
+          <a:xfrm>
+            <a:off x="731520" y="2057400"/>
+            <a:ext cx="7680960" cy="438912"/>
+          </a:xfrm>
+          <a:prstGeom prst="rect">
+            <a:avLst/>
+          </a:prstGeom>
+          <a:solidFill>
+            <a:srgbClr val="FFFFFF"/>
+          </a:solidFill>
+          <a:ln/>
+        </p:spPr>
+      </p:sp>
+      <p:sp>
+        <p:nvSpPr>
+          <p:cNvPr id="13" name="Text 11"/>
+          <p:cNvSpPr/>
+          <p:nvPr/>
+        </p:nvSpPr>
+        <p:spPr>
+          <a:xfrm>
+            <a:off x="868680" y="2057400"/>
+            <a:ext cx="320040" cy="438912"/>
+          </a:xfrm>
+          <a:prstGeom prst="rect">
+            <a:avLst/>
+          </a:prstGeom>
+          <a:noFill/>
+          <a:ln/>
+        </p:spPr>
+        <p:txBody>
+          <a:bodyPr wrap="square" rtlCol="0" anchor="ctr"/>
+          <a:lstStyle/>
+          <a:p>
+            <a:pPr indent="0" marL="0">
+              <a:buNone/>
+            </a:pPr>
+            <a:r>
+              <a:rPr lang="en-US" sz="1400" dirty="0">
+                <a:solidFill>
+                  <a:srgbClr val="2A9D8F"/>
+                </a:solidFill>
+              </a:rPr>
+              <a:t>☐</a:t>
+            </a:r>
+            <a:endParaRPr lang="en-US" sz="1400" dirty="0"/>
+          </a:p>
+        </p:txBody>
+      </p:sp>
+      <p:sp>
+        <p:nvSpPr>
+          <p:cNvPr id="14" name="Text 12"/>
+          <p:cNvSpPr/>
+          <p:nvPr/>
+        </p:nvSpPr>
+        <p:spPr>
+          <a:xfrm>
+            <a:off x="1234440" y="2057400"/>
+            <a:ext cx="6949440" cy="438912"/>
+          </a:xfrm>
+          <a:prstGeom prst="rect">
+            <a:avLst/>
+          </a:prstGeom>
+          <a:noFill/>
+          <a:ln/>
+        </p:spPr>
+        <p:txBody>
+          <a:bodyPr wrap="square" rtlCol="0" anchor="ctr"/>
+          <a:lstStyle/>
+          <a:p>
+            <a:pPr indent="0" marL="0">
+              <a:buNone/>
+            </a:pPr>
+            <a:r>
+              <a:rPr lang="en-US" sz="1300" dirty="0">
+                <a:solidFill>
+                  <a:srgbClr val="3D3A36"/>
+                </a:solidFill>
+                <a:latin typeface="Calibri" pitchFamily="34" charset="0"/>
+                <a:ea typeface="Calibri" pitchFamily="34" charset="-122"/>
+                <a:cs typeface="Calibri" pitchFamily="34" charset="-120"/>
+              </a:rPr>
+              <a:t>I understand the difference between accuracy and precision</a:t>
+            </a:r>
+            <a:endParaRPr lang="en-US" sz="1300" dirty="0"/>
+          </a:p>
+        </p:txBody>
+      </p:sp>
+      <p:sp>
+        <p:nvSpPr>
+          <p:cNvPr id="15" name="Shape 13"/>
+          <p:cNvSpPr/>
+          <p:nvPr/>
+        </p:nvSpPr>
+        <p:spPr>
+          <a:xfrm>
+            <a:off x="731520" y="2560320"/>
+            <a:ext cx="7680960" cy="438912"/>
+          </a:xfrm>
+          <a:prstGeom prst="rect">
+            <a:avLst/>
+          </a:prstGeom>
+          <a:solidFill>
+            <a:srgbClr val="F8F6F3"/>
+          </a:solidFill>
+          <a:ln/>
+        </p:spPr>
+      </p:sp>
+      <p:sp>
+        <p:nvSpPr>
+          <p:cNvPr id="16" name="Text 14"/>
+          <p:cNvSpPr/>
+          <p:nvPr/>
+        </p:nvSpPr>
+        <p:spPr>
+          <a:xfrm>
+            <a:off x="868680" y="2560320"/>
+            <a:ext cx="320040" cy="438912"/>
+          </a:xfrm>
+          <a:prstGeom prst="rect">
+            <a:avLst/>
+          </a:prstGeom>
+          <a:noFill/>
+          <a:ln/>
+        </p:spPr>
+        <p:txBody>
+          <a:bodyPr wrap="square" rtlCol="0" anchor="ctr"/>
+          <a:lstStyle/>
+          <a:p>
+            <a:pPr indent="0" marL="0">
+              <a:buNone/>
+            </a:pPr>
+            <a:r>
+              <a:rPr lang="en-US" sz="1400" dirty="0">
+                <a:solidFill>
+                  <a:srgbClr val="2A9D8F"/>
+                </a:solidFill>
+              </a:rPr>
+              <a:t>☐</a:t>
+            </a:r>
+            <a:endParaRPr lang="en-US" sz="1400" dirty="0"/>
+          </a:p>
+        </p:txBody>
+      </p:sp>
+      <p:sp>
+        <p:nvSpPr>
+          <p:cNvPr id="17" name="Text 15"/>
+          <p:cNvSpPr/>
+          <p:nvPr/>
+        </p:nvSpPr>
+        <p:spPr>
+          <a:xfrm>
+            <a:off x="1234440" y="2560320"/>
+            <a:ext cx="6949440" cy="438912"/>
+          </a:xfrm>
+          <a:prstGeom prst="rect">
+            <a:avLst/>
+          </a:prstGeom>
+          <a:noFill/>
+          <a:ln/>
+        </p:spPr>
+        <p:txBody>
+          <a:bodyPr wrap="square" rtlCol="0" anchor="ctr"/>
+          <a:lstStyle/>
+          <a:p>
+            <a:pPr indent="0" marL="0">
+              <a:buNone/>
+            </a:pPr>
+            <a:r>
+              <a:rPr lang="en-US" sz="1300" dirty="0">
+                <a:solidFill>
+                  <a:srgbClr val="3D3A36"/>
+                </a:solidFill>
+                <a:latin typeface="Calibri" pitchFamily="34" charset="0"/>
+                <a:ea typeface="Calibri" pitchFamily="34" charset="-122"/>
+                <a:cs typeface="Calibri" pitchFamily="34" charset="-120"/>
+              </a:rPr>
+              <a:t>I can convert between common metric units</a:t>
+            </a:r>
+            <a:endParaRPr lang="en-US" sz="1300" dirty="0"/>
+          </a:p>
+        </p:txBody>
+      </p:sp>
+      <p:sp>
+        <p:nvSpPr>
+          <p:cNvPr id="18" name="Shape 16"/>
+          <p:cNvSpPr/>
+          <p:nvPr/>
+        </p:nvSpPr>
+        <p:spPr>
+          <a:xfrm>
+            <a:off x="731520" y="3063240"/>
+            <a:ext cx="7680960" cy="438912"/>
+          </a:xfrm>
+          <a:prstGeom prst="rect">
+            <a:avLst/>
+          </a:prstGeom>
+          <a:solidFill>
+            <a:srgbClr val="FFFFFF"/>
+          </a:solidFill>
+          <a:ln/>
+        </p:spPr>
+      </p:sp>
+      <p:sp>
+        <p:nvSpPr>
+          <p:cNvPr id="19" name="Text 17"/>
+          <p:cNvSpPr/>
+          <p:nvPr/>
+        </p:nvSpPr>
+        <p:spPr>
+          <a:xfrm>
+            <a:off x="868680" y="3063240"/>
+            <a:ext cx="320040" cy="438912"/>
+          </a:xfrm>
+          <a:prstGeom prst="rect">
+            <a:avLst/>
+          </a:prstGeom>
+          <a:noFill/>
+          <a:ln/>
+        </p:spPr>
+        <p:txBody>
+          <a:bodyPr wrap="square" rtlCol="0" anchor="ctr"/>
+          <a:lstStyle/>
+          <a:p>
+            <a:pPr indent="0" marL="0">
+              <a:buNone/>
+            </a:pPr>
+            <a:r>
+              <a:rPr lang="en-US" sz="1400" dirty="0">
+                <a:solidFill>
+                  <a:srgbClr val="2A9D8F"/>
+                </a:solidFill>
+              </a:rPr>
+              <a:t>☐</a:t>
+            </a:r>
+            <a:endParaRPr lang="en-US" sz="1400" dirty="0"/>
+          </a:p>
+        </p:txBody>
+      </p:sp>
+      <p:sp>
+        <p:nvSpPr>
+          <p:cNvPr id="20" name="Text 18"/>
+          <p:cNvSpPr/>
+          <p:nvPr/>
+        </p:nvSpPr>
+        <p:spPr>
+          <a:xfrm>
+            <a:off x="1234440" y="3063240"/>
+            <a:ext cx="6949440" cy="438912"/>
+          </a:xfrm>
+          <a:prstGeom prst="rect">
+            <a:avLst/>
+          </a:prstGeom>
+          <a:noFill/>
+          <a:ln/>
+        </p:spPr>
+        <p:txBody>
+          <a:bodyPr wrap="square" rtlCol="0" anchor="ctr"/>
+          <a:lstStyle/>
+          <a:p>
+            <a:pPr indent="0" marL="0">
+              <a:buNone/>
+            </a:pPr>
+            <a:r>
+              <a:rPr lang="en-US" sz="1300" dirty="0">
+                <a:solidFill>
+                  <a:srgbClr val="3D3A36"/>
+                </a:solidFill>
+                <a:latin typeface="Calibri" pitchFamily="34" charset="0"/>
+                <a:ea typeface="Calibri" pitchFamily="34" charset="-122"/>
+                <a:cs typeface="Calibri" pitchFamily="34" charset="-120"/>
+              </a:rPr>
+              <a:t>I always include units with my measurements</a:t>
+            </a:r>
+            <a:endParaRPr lang="en-US" sz="1300" dirty="0"/>
+          </a:p>
+        </p:txBody>
+      </p:sp>
+      <p:sp>
+        <p:nvSpPr>
+          <p:cNvPr id="21" name="Shape 19"/>
+          <p:cNvSpPr/>
+          <p:nvPr/>
+        </p:nvSpPr>
+        <p:spPr>
+          <a:xfrm>
+            <a:off x="731520" y="3749040"/>
+            <a:ext cx="7680960" cy="594360"/>
+          </a:xfrm>
+          <a:prstGeom prst="rect">
+            <a:avLst/>
+          </a:prstGeom>
+          <a:solidFill>
+            <a:srgbClr val="E8F5F3"/>
+          </a:solidFill>
+          <a:ln/>
+          <a:effectLst>
+            <a:outerShdw sx="100000" sy="100000" kx="0" ky="0" algn="bl" rotWithShape="0" blurRad="50800" dist="25400" dir="8100000">
+              <a:srgbClr val="000000">
+                <a:alpha val="10000"/>
+              </a:srgbClr>
+            </a:outerShdw>
+          </a:effectLst>
+        </p:spPr>
+      </p:sp>
+      <p:sp>
+        <p:nvSpPr>
+          <p:cNvPr id="22" name="Text 20"/>
+          <p:cNvSpPr/>
+          <p:nvPr/>
+        </p:nvSpPr>
+        <p:spPr>
+          <a:xfrm>
+            <a:off x="914400" y="3749040"/>
+            <a:ext cx="7315200" cy="594360"/>
+          </a:xfrm>
+          <a:prstGeom prst="rect">
+            <a:avLst/>
+          </a:prstGeom>
+          <a:noFill/>
+          <a:ln/>
+        </p:spPr>
+        <p:txBody>
+          <a:bodyPr wrap="square" rtlCol="0" anchor="ctr"/>
+          <a:lstStyle/>
+          <a:p>
+            <a:pPr indent="0" marL="0">
+              <a:buNone/>
+            </a:pPr>
+            <a:r>
+              <a:rPr lang="en-US" sz="1200" b="1" dirty="0">
+                <a:solidFill>
+                  <a:srgbClr val="2A9D8F"/>
+                </a:solidFill>
+                <a:latin typeface="Calibri" pitchFamily="34" charset="0"/>
+                <a:ea typeface="Calibri" pitchFamily="34" charset="-122"/>
+                <a:cs typeface="Calibri" pitchFamily="34" charset="-120"/>
+              </a:rPr>
+              <a:t>Key Idea: </a:t>
+            </a:r>
+            <a:pPr indent="0" marL="0">
+              <a:buNone/>
+            </a:pPr>
+            <a:r>
+              <a:rPr lang="en-US" sz="1200" i="1" dirty="0">
+                <a:solidFill>
+                  <a:srgbClr val="3D3A36"/>
+                </a:solidFill>
+                <a:latin typeface="Calibri" pitchFamily="34" charset="0"/>
+                <a:ea typeface="Calibri" pitchFamily="34" charset="-122"/>
+                <a:cs typeface="Calibri" pitchFamily="34" charset="-120"/>
+              </a:rPr>
+              <a:t>Without accurate measurement, our data is meaningless.</a:t>
+            </a:r>
+            <a:endParaRPr lang="en-US" sz="1200" dirty="0"/>
+          </a:p>
+        </p:txBody>
+      </p:sp>
+    </p:spTree>
+  </p:cSld>
+  <p:clrMapOvr>
+    <a:masterClrMapping/>
+  </p:clrMapOvr>
+</p:sld>
+</file>
+
+<file path=ppt/slides/slide8.xml><?xml version="1.0" encoding="utf-8"?>
+<p:sld xmlns:a="http://schemas.openxmlformats.org/drawingml/2006/main" xmlns:r="http://schemas.openxmlformats.org/officeDocument/2006/relationships" xmlns:p="http://schemas.openxmlformats.org/presentationml/2006/main">
+  <p:cSld name="Slide 8">
+    <p:spTree>
+      <p:nvGrpSpPr>
+        <p:cNvPr id="1" name=""/>
+        <p:cNvGrpSpPr/>
+        <p:nvPr/>
+      </p:nvGrpSpPr>
+      <p:grpSpPr>
+        <a:xfrm>
+          <a:off x="0" y="0"/>
+          <a:ext cx="0" cy="0"/>
+          <a:chOff x="0" y="0"/>
+          <a:chExt cx="0" cy="0"/>
+        </a:xfrm>
+      </p:grpSpPr>
+      <p:sp>
+        <p:nvSpPr>
+          <p:cNvPr id="2" name="Shape 0"/>
+          <p:cNvSpPr/>
+          <p:nvPr/>
+        </p:nvSpPr>
+        <p:spPr>
+          <a:xfrm>
+            <a:off x="0" y="0"/>
+            <a:ext cx="9144000" cy="5143500"/>
+          </a:xfrm>
+          <a:prstGeom prst="rect">
+            <a:avLst/>
+          </a:prstGeom>
+          <a:solidFill>
+            <a:srgbClr val="1B2A4A"/>
+          </a:solidFill>
+          <a:ln/>
+        </p:spPr>
+      </p:sp>
+      <p:sp>
+        <p:nvSpPr>
+          <p:cNvPr id="3" name="Shape 1"/>
+          <p:cNvSpPr/>
+          <p:nvPr/>
+        </p:nvSpPr>
+        <p:spPr>
+          <a:xfrm>
+            <a:off x="0" y="4777740"/>
+            <a:ext cx="9144000" cy="365760"/>
+          </a:xfrm>
+          <a:prstGeom prst="rect">
+            <a:avLst/>
+          </a:prstGeom>
+          <a:solidFill>
+            <a:srgbClr val="2A9D8F"/>
+          </a:solidFill>
+          <a:ln/>
+        </p:spPr>
+      </p:sp>
+      <p:sp>
+        <p:nvSpPr>
+          <p:cNvPr id="4" name="Shape 2"/>
+          <p:cNvSpPr/>
+          <p:nvPr/>
+        </p:nvSpPr>
+        <p:spPr>
+          <a:xfrm>
+            <a:off x="-914400" y="-914400"/>
+            <a:ext cx="3657600" cy="3657600"/>
+          </a:xfrm>
+          <a:prstGeom prst="ellipse">
+            <a:avLst/>
+          </a:prstGeom>
+          <a:solidFill>
+            <a:srgbClr val="2A9D8F">
+              <a:alpha val="10000"/>
+            </a:srgbClr>
+          </a:solidFill>
+          <a:ln/>
+        </p:spPr>
+      </p:sp>
+      <p:sp>
+        <p:nvSpPr>
+          <p:cNvPr id="5" name="Text 3"/>
+          <p:cNvSpPr/>
+          <p:nvPr/>
+        </p:nvSpPr>
+        <p:spPr>
+          <a:xfrm>
+            <a:off x="731520" y="1463040"/>
+            <a:ext cx="7680960" cy="822960"/>
+          </a:xfrm>
+          <a:prstGeom prst="rect">
+            <a:avLst/>
+          </a:prstGeom>
+          <a:noFill/>
+          <a:ln/>
+        </p:spPr>
+        <p:txBody>
+          <a:bodyPr wrap="square" rtlCol="0" anchor="ctr"/>
+          <a:lstStyle/>
+          <a:p>
+            <a:pPr algn="ctr" indent="0" marL="0">
+              <a:buNone/>
+            </a:pPr>
+            <a:r>
+              <a:rPr lang="en-US" sz="3400" b="1" dirty="0">
                 <a:solidFill>
                   <a:srgbClr val="FFFFFF"/>
                 </a:solidFill>
@@ -3087,149 +6987,22 @@
                 <a:ea typeface="Georgia" pitchFamily="34" charset="-122"/>
                 <a:cs typeface="Georgia" pitchFamily="34" charset="-120"/>
               </a:rPr>
-              <a:t>Key Takeaways</a:t>
-            </a:r>
-            <a:endParaRPr lang="en-US" sz="3200" dirty="0"/>
+              <a:t>Review &amp; Practise</a:t>
+            </a:r>
+            <a:endParaRPr lang="en-US" sz="3400" dirty="0"/>
           </a:p>
         </p:txBody>
       </p:sp>
       <p:sp>
         <p:nvSpPr>
-          <p:cNvPr id="4" name="Text 2"/>
-          <p:cNvSpPr/>
-          <p:nvPr/>
-        </p:nvSpPr>
-        <p:spPr>
-          <a:xfrm>
-            <a:off x="731520" y="1463040"/>
-            <a:ext cx="7772400" cy="3200400"/>
-          </a:xfrm>
-          <a:prstGeom prst="rect">
-            <a:avLst/>
-          </a:prstGeom>
-          <a:noFill/>
-          <a:ln/>
-        </p:spPr>
-        <p:txBody>
-          <a:bodyPr wrap="square" rtlCol="0" anchor="t"/>
-          <a:lstStyle/>
-          <a:p>
-            <a:pPr marL="342900" indent="-342900">
-              <a:spcAft>
-                <a:spcPts val="1000"/>
-              </a:spcAft>
-              <a:buSzPct val="100000"/>
-              <a:buChar char="•"/>
-            </a:pPr>
-            <a:r>
-              <a:rPr lang="en-US" sz="1500" dirty="0">
-                <a:solidFill>
-                  <a:srgbClr val="CADCFC"/>
-                </a:solidFill>
-                <a:latin typeface="Calibri" pitchFamily="34" charset="0"/>
-                <a:ea typeface="Calibri" pitchFamily="34" charset="-122"/>
-                <a:cs typeface="Calibri" pitchFamily="34" charset="-120"/>
-              </a:rPr>
-              <a:t>SI units: metres (length), grams (mass), litres (volume), °C (temperature), seconds (time)</a:t>
-            </a:r>
-            <a:endParaRPr lang="en-US" sz="1500" dirty="0"/>
-          </a:p>
-          <a:p>
-            <a:pPr marL="342900" indent="-342900">
-              <a:spcAft>
-                <a:spcPts val="1000"/>
-              </a:spcAft>
-              <a:buSzPct val="100000"/>
-              <a:buChar char="•"/>
-            </a:pPr>
-            <a:r>
-              <a:rPr lang="en-US" sz="1500" dirty="0">
-                <a:solidFill>
-                  <a:srgbClr val="CADCFC"/>
-                </a:solidFill>
-                <a:latin typeface="Calibri" pitchFamily="34" charset="0"/>
-                <a:ea typeface="Calibri" pitchFamily="34" charset="-122"/>
-                <a:cs typeface="Calibri" pitchFamily="34" charset="-120"/>
-              </a:rPr>
-              <a:t>Always read instruments at eye level</a:t>
-            </a:r>
-            <a:endParaRPr lang="en-US" sz="1500" dirty="0"/>
-          </a:p>
-          <a:p>
-            <a:pPr marL="342900" indent="-342900">
-              <a:spcAft>
-                <a:spcPts val="1000"/>
-              </a:spcAft>
-              <a:buSzPct val="100000"/>
-              <a:buChar char="•"/>
-            </a:pPr>
-            <a:r>
-              <a:rPr lang="en-US" sz="1500" dirty="0">
-                <a:solidFill>
-                  <a:srgbClr val="CADCFC"/>
-                </a:solidFill>
-                <a:latin typeface="Calibri" pitchFamily="34" charset="0"/>
-                <a:ea typeface="Calibri" pitchFamily="34" charset="-122"/>
-                <a:cs typeface="Calibri" pitchFamily="34" charset="-120"/>
-              </a:rPr>
-              <a:t>Record units with every measurement</a:t>
-            </a:r>
-            <a:endParaRPr lang="en-US" sz="1500" dirty="0"/>
-          </a:p>
-          <a:p>
-            <a:pPr marL="342900" indent="-342900">
-              <a:spcAft>
-                <a:spcPts val="1000"/>
-              </a:spcAft>
-              <a:buSzPct val="100000"/>
-              <a:buChar char="•"/>
-            </a:pPr>
-            <a:r>
-              <a:rPr lang="en-US" sz="1500" dirty="0">
-                <a:solidFill>
-                  <a:srgbClr val="CADCFC"/>
-                </a:solidFill>
-                <a:latin typeface="Calibri" pitchFamily="34" charset="0"/>
-                <a:ea typeface="Calibri" pitchFamily="34" charset="-122"/>
-                <a:cs typeface="Calibri" pitchFamily="34" charset="-120"/>
-              </a:rPr>
-              <a:t>kilo = ×1000, milli = ÷1000</a:t>
-            </a:r>
-            <a:endParaRPr lang="en-US" sz="1500" dirty="0"/>
-          </a:p>
-          <a:p>
-            <a:pPr marL="342900" indent="-342900">
-              <a:spcAft>
-                <a:spcPts val="1000"/>
-              </a:spcAft>
-              <a:buSzPct val="100000"/>
-              <a:buChar char="•"/>
-            </a:pPr>
-            <a:r>
-              <a:rPr lang="en-US" sz="1500" dirty="0">
-                <a:solidFill>
-                  <a:srgbClr val="CADCFC"/>
-                </a:solidFill>
-                <a:latin typeface="Calibri" pitchFamily="34" charset="0"/>
-                <a:ea typeface="Calibri" pitchFamily="34" charset="-122"/>
-                <a:cs typeface="Calibri" pitchFamily="34" charset="-120"/>
-              </a:rPr>
-              <a:t>A fair test requires accurate, consistent measurement</a:t>
-            </a:r>
-            <a:endParaRPr lang="en-US" sz="1500" dirty="0"/>
-          </a:p>
-        </p:txBody>
-      </p:sp>
-      <p:sp>
-        <p:nvSpPr>
-          <p:cNvPr id="5" name="Text 3"/>
-          <p:cNvSpPr/>
-          <p:nvPr/>
-        </p:nvSpPr>
-        <p:spPr>
-          <a:xfrm>
-            <a:off x="731520" y="4572000"/>
-            <a:ext cx="7772400" cy="365760"/>
+          <p:cNvPr id="6" name="Text 4"/>
+          <p:cNvSpPr/>
+          <p:nvPr/>
+        </p:nvSpPr>
+        <p:spPr>
+          <a:xfrm>
+            <a:off x="731520" y="2468880"/>
+            <a:ext cx="7680960" cy="457200"/>
           </a:xfrm>
           <a:prstGeom prst="rect">
             <a:avLst/>
@@ -3241,13 +7014,13 @@
           <a:bodyPr wrap="square" rtlCol="0" anchor="ctr"/>
           <a:lstStyle/>
           <a:p>
-            <a:pPr indent="0" marL="0">
+            <a:pPr algn="ctr" indent="0" marL="0">
               <a:buNone/>
             </a:pPr>
             <a:r>
-              <a:rPr lang="en-US" sz="1100" dirty="0">
+              <a:rPr lang="en-US" sz="1800" dirty="0">
                 <a:solidFill>
-                  <a:srgbClr val="E9C46A"/>
+                  <a:srgbClr val="2A9D8F"/>
                 </a:solidFill>
                 <a:latin typeface="Calibri" pitchFamily="34" charset="0"/>
                 <a:ea typeface="Calibri" pitchFamily="34" charset="-122"/>
@@ -3255,7 +7028,46 @@
               </a:rPr>
               <a:t>mrzocchi.com</a:t>
             </a:r>
-            <a:endParaRPr lang="en-US" sz="1100" dirty="0"/>
+            <a:endParaRPr lang="en-US" sz="1800" dirty="0"/>
+          </a:p>
+        </p:txBody>
+      </p:sp>
+      <p:sp>
+        <p:nvSpPr>
+          <p:cNvPr id="7" name="Text 5"/>
+          <p:cNvSpPr/>
+          <p:nvPr/>
+        </p:nvSpPr>
+        <p:spPr>
+          <a:xfrm>
+            <a:off x="731520" y="3108960"/>
+            <a:ext cx="7680960" cy="457200"/>
+          </a:xfrm>
+          <a:prstGeom prst="rect">
+            <a:avLst/>
+          </a:prstGeom>
+          <a:noFill/>
+          <a:ln/>
+        </p:spPr>
+        <p:txBody>
+          <a:bodyPr wrap="square" rtlCol="0" anchor="ctr"/>
+          <a:lstStyle/>
+          <a:p>
+            <a:pPr algn="ctr" indent="0" marL="0">
+              <a:buNone/>
+            </a:pPr>
+            <a:r>
+              <a:rPr lang="en-US" sz="1300" dirty="0">
+                <a:solidFill>
+                  <a:srgbClr val="9B9690"/>
+                </a:solidFill>
+                <a:latin typeface="Calibri" pitchFamily="34" charset="0"/>
+                <a:ea typeface="Calibri" pitchFamily="34" charset="-122"/>
+                <a:cs typeface="Calibri" pitchFamily="34" charset="-120"/>
+              </a:rPr>
+              <a:t>Use the Self-Quiz, Review Games, and Practice Builder to test yourself.</a:t>
+            </a:r>
+            <a:endParaRPr lang="en-US" sz="1300" dirty="0"/>
           </a:p>
         </p:txBody>
       </p:sp>

--- a/static/ppts/G6_Sci_T1_Measurement.pptx
+++ b/static/ppts/G6_Sci_T1_Measurement.pptx
@@ -17,8 +17,8 @@
   <p:notesMasterIdLst>
     <p:notesMasterId r:id="rId10"/>
   </p:notesMasterIdLst>
-  <p:sldSz cx="9144000" cy="5143500"/>
-  <p:notesSz cx="5143500" cy="9144000"/>
+  <p:sldSz cx="12192000" cy="6858000"/>
+  <p:notesSz cx="6858000" cy="12192000"/>
   <p:defaultTextStyle>
     <a:lvl1pPr marL="0" algn="l" defTabSz="914400" rtl="0" eaLnBrk="1" latinLnBrk="0" hangingPunct="1">
       <a:defRPr sz="1800" kern="1200">
@@ -1477,6 +1477,13 @@
 <file path=ppt/slides/slide1.xml><?xml version="1.0" encoding="utf-8"?>
 <p:sld xmlns:a="http://schemas.openxmlformats.org/drawingml/2006/main" xmlns:r="http://schemas.openxmlformats.org/officeDocument/2006/relationships" xmlns:p="http://schemas.openxmlformats.org/presentationml/2006/main">
   <p:cSld name="Slide 1">
+    <p:bg>
+      <p:bgPr>
+        <a:solidFill>
+          <a:srgbClr val="2A9D8F"/>
+        </a:solidFill>
+      </p:bgPr>
+    </p:bg>
     <p:spTree>
       <p:nvGrpSpPr>
         <p:cNvPr id="1" name=""/>
@@ -1499,55 +1506,15 @@
         </p:nvSpPr>
         <p:spPr>
           <a:xfrm>
-            <a:off x="0" y="0"/>
-            <a:ext cx="9144000" cy="5143500"/>
-          </a:xfrm>
-          <a:prstGeom prst="rect">
-            <a:avLst/>
-          </a:prstGeom>
-          <a:solidFill>
-            <a:srgbClr val="1B2A4A"/>
-          </a:solidFill>
-          <a:ln/>
-        </p:spPr>
-      </p:sp>
-      <p:sp>
-        <p:nvSpPr>
-          <p:cNvPr id="3" name="Shape 1"/>
-          <p:cNvSpPr/>
-          <p:nvPr/>
-        </p:nvSpPr>
-        <p:spPr>
-          <a:xfrm>
-            <a:off x="0" y="4777740"/>
-            <a:ext cx="9144000" cy="365760"/>
-          </a:xfrm>
-          <a:prstGeom prst="rect">
-            <a:avLst/>
-          </a:prstGeom>
-          <a:solidFill>
-            <a:srgbClr val="2A9D8F"/>
-          </a:solidFill>
-          <a:ln/>
-        </p:spPr>
-      </p:sp>
-      <p:sp>
-        <p:nvSpPr>
-          <p:cNvPr id="4" name="Shape 2"/>
-          <p:cNvSpPr/>
-          <p:nvPr/>
-        </p:nvSpPr>
-        <p:spPr>
-          <a:xfrm>
-            <a:off x="6858000" y="-1371600"/>
-            <a:ext cx="4572000" cy="4572000"/>
+            <a:off x="7772400" y="-914400"/>
+            <a:ext cx="3657600" cy="3657600"/>
           </a:xfrm>
           <a:prstGeom prst="ellipse">
             <a:avLst/>
           </a:prstGeom>
           <a:solidFill>
-            <a:srgbClr val="2A9D8F">
-              <a:alpha val="12000"/>
+            <a:srgbClr val="FFFFFF">
+              <a:alpha val="8000"/>
             </a:srgbClr>
           </a:solidFill>
           <a:ln/>
@@ -1555,14 +1522,14 @@
       </p:sp>
       <p:sp>
         <p:nvSpPr>
-          <p:cNvPr id="5" name="Text 3"/>
+          <p:cNvPr id="3" name="Text 1"/>
           <p:cNvSpPr/>
           <p:nvPr/>
         </p:nvSpPr>
         <p:spPr>
           <a:xfrm>
-            <a:off x="731520" y="914400"/>
-            <a:ext cx="7680960" cy="457200"/>
+            <a:off x="731520" y="548640"/>
+            <a:ext cx="7315200" cy="365760"/>
           </a:xfrm>
           <a:prstGeom prst="rect">
             <a:avLst/>
@@ -1578,69 +1545,30 @@
               <a:buNone/>
             </a:pPr>
             <a:r>
-              <a:rPr lang="en-US" sz="1300" b="1" spc="500" kern="0" dirty="0">
+              <a:rPr lang="en-US" sz="1100" b="1" dirty="0">
                 <a:solidFill>
-                  <a:srgbClr val="2A9D8F"/>
+                  <a:srgbClr val="F2D68A"/>
                 </a:solidFill>
-                <a:latin typeface="Calibri" pitchFamily="34" charset="0"/>
-                <a:ea typeface="Calibri" pitchFamily="34" charset="-122"/>
-                <a:cs typeface="Calibri" pitchFamily="34" charset="-120"/>
+                <a:latin typeface="Arial" pitchFamily="34" charset="0"/>
+                <a:ea typeface="Arial" pitchFamily="34" charset="-122"/>
+                <a:cs typeface="Arial" pitchFamily="34" charset="-120"/>
               </a:rPr>
               <a:t>GRADE 6 SCIENCE</a:t>
             </a:r>
-            <a:endParaRPr lang="en-US" sz="1300" dirty="0"/>
+            <a:endParaRPr lang="en-US" sz="1100" dirty="0"/>
           </a:p>
         </p:txBody>
       </p:sp>
       <p:sp>
         <p:nvSpPr>
-          <p:cNvPr id="6" name="Text 4"/>
+          <p:cNvPr id="4" name="Text 2"/>
           <p:cNvSpPr/>
           <p:nvPr/>
         </p:nvSpPr>
         <p:spPr>
           <a:xfrm>
-            <a:off x="731520" y="1463040"/>
-            <a:ext cx="6858000" cy="1645920"/>
-          </a:xfrm>
-          <a:prstGeom prst="rect">
-            <a:avLst/>
-          </a:prstGeom>
-          <a:noFill/>
-          <a:ln/>
-        </p:spPr>
-        <p:txBody>
-          <a:bodyPr wrap="square" rtlCol="0" anchor="t"/>
-          <a:lstStyle/>
-          <a:p>
-            <a:pPr indent="0" marL="0">
-              <a:buNone/>
-            </a:pPr>
-            <a:r>
-              <a:rPr lang="en-US" sz="3800" b="1" dirty="0">
-                <a:solidFill>
-                  <a:srgbClr val="FFFFFF"/>
-                </a:solidFill>
-                <a:latin typeface="Georgia" pitchFamily="34" charset="0"/>
-                <a:ea typeface="Georgia" pitchFamily="34" charset="-122"/>
-                <a:cs typeface="Georgia" pitchFamily="34" charset="-120"/>
-              </a:rPr>
-              <a:t>Measurement &amp; Units</a:t>
-            </a:r>
-            <a:endParaRPr lang="en-US" sz="3800" dirty="0"/>
-          </a:p>
-        </p:txBody>
-      </p:sp>
-      <p:sp>
-        <p:nvSpPr>
-          <p:cNvPr id="7" name="Text 5"/>
-          <p:cNvSpPr/>
-          <p:nvPr/>
-        </p:nvSpPr>
-        <p:spPr>
-          <a:xfrm>
-            <a:off x="731520" y="3200400"/>
-            <a:ext cx="6400800" cy="548640"/>
+            <a:off x="731520" y="1371600"/>
+            <a:ext cx="9144000" cy="1645920"/>
           </a:xfrm>
           <a:prstGeom prst="rect">
             <a:avLst/>
@@ -1653,33 +1581,36 @@
           <a:lstStyle/>
           <a:p>
             <a:pPr indent="0" marL="0">
+              <a:lnSpc>
+                <a:spcPct val="110000"/>
+              </a:lnSpc>
               <a:buNone/>
             </a:pPr>
             <a:r>
-              <a:rPr lang="en-US" sz="1600" i="1" dirty="0">
+              <a:rPr lang="en-US" sz="3600" b="1" dirty="0">
                 <a:solidFill>
-                  <a:srgbClr val="9B9690"/>
+                  <a:srgbClr val="FFFFFF"/>
                 </a:solidFill>
-                <a:latin typeface="Calibri" pitchFamily="34" charset="0"/>
-                <a:ea typeface="Calibri" pitchFamily="34" charset="-122"/>
-                <a:cs typeface="Calibri" pitchFamily="34" charset="-120"/>
+                <a:latin typeface="Georgia" pitchFamily="34" charset="0"/>
+                <a:ea typeface="Georgia" pitchFamily="34" charset="-122"/>
+                <a:cs typeface="Georgia" pitchFamily="34" charset="-120"/>
               </a:rPr>
-              <a:t>Accurate measurement is the foundation of science</a:t>
-            </a:r>
-            <a:endParaRPr lang="en-US" sz="1600" dirty="0"/>
+              <a:t>Measurement &amp; Units</a:t>
+            </a:r>
+            <a:endParaRPr lang="en-US" sz="3600" dirty="0"/>
           </a:p>
         </p:txBody>
       </p:sp>
       <p:sp>
         <p:nvSpPr>
-          <p:cNvPr id="8" name="Text 6"/>
+          <p:cNvPr id="5" name="Text 3"/>
           <p:cNvSpPr/>
           <p:nvPr/>
         </p:nvSpPr>
         <p:spPr>
           <a:xfrm>
-            <a:off x="731520" y="4297680"/>
-            <a:ext cx="2743200" cy="365760"/>
+            <a:off x="731520" y="3200400"/>
+            <a:ext cx="7315200" cy="548640"/>
           </a:xfrm>
           <a:prstGeom prst="rect">
             <a:avLst/>
@@ -1695,17 +1626,60 @@
               <a:buNone/>
             </a:pPr>
             <a:r>
-              <a:rPr lang="en-US" sz="1100" dirty="0">
+              <a:rPr lang="en-US" sz="1600" dirty="0">
                 <a:solidFill>
-                  <a:srgbClr val="9B9690"/>
+                  <a:srgbClr val="FFFFFF">
+                    <a:alpha val="65000"/>
+                  </a:srgbClr>
                 </a:solidFill>
-                <a:latin typeface="Calibri" pitchFamily="34" charset="0"/>
-                <a:ea typeface="Calibri" pitchFamily="34" charset="-122"/>
-                <a:cs typeface="Calibri" pitchFamily="34" charset="-120"/>
+                <a:latin typeface="Arial" pitchFamily="34" charset="0"/>
+                <a:ea typeface="Arial" pitchFamily="34" charset="-122"/>
+                <a:cs typeface="Arial" pitchFamily="34" charset="-120"/>
+              </a:rPr>
+              <a:t>Measuring accurately in science</a:t>
+            </a:r>
+            <a:endParaRPr lang="en-US" sz="1600" dirty="0"/>
+          </a:p>
+        </p:txBody>
+      </p:sp>
+      <p:sp>
+        <p:nvSpPr>
+          <p:cNvPr id="6" name="Text 4"/>
+          <p:cNvSpPr/>
+          <p:nvPr/>
+        </p:nvSpPr>
+        <p:spPr>
+          <a:xfrm>
+            <a:off x="731520" y="4389120"/>
+            <a:ext cx="2743200" cy="320040"/>
+          </a:xfrm>
+          <a:prstGeom prst="rect">
+            <a:avLst/>
+          </a:prstGeom>
+          <a:noFill/>
+          <a:ln/>
+        </p:spPr>
+        <p:txBody>
+          <a:bodyPr wrap="square" rtlCol="0" anchor="ctr"/>
+          <a:lstStyle/>
+          <a:p>
+            <a:pPr indent="0" marL="0">
+              <a:buNone/>
+            </a:pPr>
+            <a:r>
+              <a:rPr lang="en-US" sz="1000" dirty="0">
+                <a:solidFill>
+                  <a:srgbClr val="FFFFFF">
+                    <a:alpha val="40000"/>
+                  </a:srgbClr>
+                </a:solidFill>
+                <a:latin typeface="Arial" pitchFamily="34" charset="0"/>
+                <a:ea typeface="Arial" pitchFamily="34" charset="-122"/>
+                <a:cs typeface="Arial" pitchFamily="34" charset="-120"/>
               </a:rPr>
               <a:t>mrzocchi.com</a:t>
             </a:r>
-            <a:endParaRPr lang="en-US" sz="1100" dirty="0"/>
+            <a:endParaRPr lang="en-US" sz="1000" dirty="0"/>
           </a:p>
         </p:txBody>
       </p:sp>
@@ -1750,47 +1724,7 @@
         <p:spPr>
           <a:xfrm>
             <a:off x="0" y="0"/>
-            <a:ext cx="9144000" cy="822960"/>
-          </a:xfrm>
-          <a:prstGeom prst="rect">
-            <a:avLst/>
-          </a:prstGeom>
-          <a:solidFill>
-            <a:srgbClr val="FFFFFF"/>
-          </a:solidFill>
-          <a:ln/>
-        </p:spPr>
-      </p:sp>
-      <p:sp>
-        <p:nvSpPr>
-          <p:cNvPr id="3" name="Shape 1"/>
-          <p:cNvSpPr/>
-          <p:nvPr/>
-        </p:nvSpPr>
-        <p:spPr>
-          <a:xfrm>
-            <a:off x="0" y="804672"/>
-            <a:ext cx="9144000" cy="27432"/>
-          </a:xfrm>
-          <a:prstGeom prst="rect">
-            <a:avLst/>
-          </a:prstGeom>
-          <a:solidFill>
-            <a:srgbClr val="E5E2DC"/>
-          </a:solidFill>
-          <a:ln/>
-        </p:spPr>
-      </p:sp>
-      <p:sp>
-        <p:nvSpPr>
-          <p:cNvPr id="4" name="Shape 2"/>
-          <p:cNvSpPr/>
-          <p:nvPr/>
-        </p:nvSpPr>
-        <p:spPr>
-          <a:xfrm>
-            <a:off x="548640" y="201168"/>
-            <a:ext cx="54864" cy="420624"/>
+            <a:ext cx="73152" cy="5148072"/>
           </a:xfrm>
           <a:prstGeom prst="rect">
             <a:avLst/>
@@ -1803,14 +1737,14 @@
       </p:sp>
       <p:sp>
         <p:nvSpPr>
-          <p:cNvPr id="5" name="Text 3"/>
+          <p:cNvPr id="3" name="Text 1"/>
           <p:cNvSpPr/>
           <p:nvPr/>
         </p:nvSpPr>
         <p:spPr>
           <a:xfrm>
-            <a:off x="777240" y="137160"/>
-            <a:ext cx="7772400" cy="548640"/>
+            <a:off x="548640" y="274320"/>
+            <a:ext cx="9144000" cy="640080"/>
           </a:xfrm>
           <a:prstGeom prst="rect">
             <a:avLst/>
@@ -1819,14 +1753,14 @@
           <a:ln/>
         </p:spPr>
         <p:txBody>
-          <a:bodyPr wrap="square" lIns="0" tIns="0" rIns="0" bIns="0" rtlCol="0" anchor="ctr"/>
+          <a:bodyPr wrap="square" rtlCol="0" anchor="ctr"/>
           <a:lstStyle/>
           <a:p>
             <a:pPr indent="0" marL="0">
               <a:buNone/>
             </a:pPr>
             <a:r>
-              <a:rPr lang="en-US" sz="2000" b="1" dirty="0">
+              <a:rPr lang="en-US" sz="2400" b="1" dirty="0">
                 <a:solidFill>
                   <a:srgbClr val="1B2A4A"/>
                 </a:solidFill>
@@ -1836,47 +1770,20 @@
               </a:rPr>
               <a:t>Key Vocabulary</a:t>
             </a:r>
-            <a:endParaRPr lang="en-US" sz="2000" dirty="0"/>
+            <a:endParaRPr lang="en-US" sz="2400" dirty="0"/>
           </a:p>
         </p:txBody>
       </p:sp>
       <p:sp>
         <p:nvSpPr>
-          <p:cNvPr id="6" name="Shape 4"/>
+          <p:cNvPr id="4" name="Shape 2"/>
           <p:cNvSpPr/>
           <p:nvPr/>
         </p:nvSpPr>
         <p:spPr>
           <a:xfrm>
-            <a:off x="731520" y="1051560"/>
-            <a:ext cx="3657600" cy="658368"/>
-          </a:xfrm>
-          <a:prstGeom prst="rect">
-            <a:avLst/>
-          </a:prstGeom>
-          <a:solidFill>
-            <a:srgbClr val="FFFFFF"/>
-          </a:solidFill>
-          <a:ln/>
-          <a:effectLst>
-            <a:outerShdw sx="100000" sy="100000" kx="0" ky="0" algn="bl" rotWithShape="0" blurRad="50800" dist="25400" dir="8100000">
-              <a:srgbClr val="000000">
-                <a:alpha val="10000"/>
-              </a:srgbClr>
-            </a:outerShdw>
-          </a:effectLst>
-        </p:spPr>
-      </p:sp>
-      <p:sp>
-        <p:nvSpPr>
-          <p:cNvPr id="7" name="Shape 5"/>
-          <p:cNvSpPr/>
-          <p:nvPr/>
-        </p:nvSpPr>
-        <p:spPr>
-          <a:xfrm>
-            <a:off x="731520" y="1051560"/>
-            <a:ext cx="54864" cy="658368"/>
+            <a:off x="548640" y="960120"/>
+            <a:ext cx="2286000" cy="36576"/>
           </a:xfrm>
           <a:prstGeom prst="rect">
             <a:avLst/>
@@ -1889,14 +1796,41 @@
       </p:sp>
       <p:sp>
         <p:nvSpPr>
-          <p:cNvPr id="8" name="Text 6"/>
+          <p:cNvPr id="5" name="Shape 3"/>
           <p:cNvSpPr/>
           <p:nvPr/>
         </p:nvSpPr>
         <p:spPr>
           <a:xfrm>
-            <a:off x="914400" y="1051560"/>
-            <a:ext cx="1463040" cy="658368"/>
+            <a:off x="548640" y="1234440"/>
+            <a:ext cx="3200400" cy="914400"/>
+          </a:xfrm>
+          <a:prstGeom prst="roundRect">
+            <a:avLst>
+              <a:gd name="adj" fmla="val 10000"/>
+            </a:avLst>
+          </a:prstGeom>
+          <a:solidFill>
+            <a:srgbClr val="FFFFFF"/>
+          </a:solidFill>
+          <a:ln w="9525">
+            <a:solidFill>
+              <a:srgbClr val="E5E2DC"/>
+            </a:solidFill>
+            <a:prstDash val="solid"/>
+          </a:ln>
+        </p:spPr>
+      </p:sp>
+      <p:sp>
+        <p:nvSpPr>
+          <p:cNvPr id="6" name="Text 4"/>
+          <p:cNvSpPr/>
+          <p:nvPr/>
+        </p:nvSpPr>
+        <p:spPr>
+          <a:xfrm>
+            <a:off x="685800" y="1307592"/>
+            <a:ext cx="2926080" cy="320040"/>
           </a:xfrm>
           <a:prstGeom prst="rect">
             <a:avLst/>
@@ -1905,37 +1839,37 @@
           <a:ln/>
         </p:spPr>
         <p:txBody>
-          <a:bodyPr wrap="square" lIns="0" tIns="0" rIns="0" bIns="0" rtlCol="0" anchor="ctr"/>
+          <a:bodyPr wrap="square" rtlCol="0" anchor="ctr"/>
           <a:lstStyle/>
           <a:p>
             <a:pPr indent="0" marL="0">
               <a:buNone/>
             </a:pPr>
             <a:r>
-              <a:rPr lang="en-US" sz="1300" b="1" dirty="0">
+              <a:rPr lang="en-US" sz="1400" b="1" dirty="0">
                 <a:solidFill>
-                  <a:srgbClr val="1B2A4A"/>
+                  <a:srgbClr val="2A9D8F"/>
                 </a:solidFill>
                 <a:latin typeface="Georgia" pitchFamily="34" charset="0"/>
                 <a:ea typeface="Georgia" pitchFamily="34" charset="-122"/>
                 <a:cs typeface="Georgia" pitchFamily="34" charset="-120"/>
               </a:rPr>
-              <a:t>SI units</a:t>
-            </a:r>
-            <a:endParaRPr lang="en-US" sz="1300" dirty="0"/>
+              <a:t>SI Units</a:t>
+            </a:r>
+            <a:endParaRPr lang="en-US" sz="1400" dirty="0"/>
           </a:p>
         </p:txBody>
       </p:sp>
       <p:sp>
         <p:nvSpPr>
-          <p:cNvPr id="9" name="Text 7"/>
+          <p:cNvPr id="7" name="Text 5"/>
           <p:cNvSpPr/>
           <p:nvPr/>
         </p:nvSpPr>
         <p:spPr>
           <a:xfrm>
-            <a:off x="2377440" y="1051560"/>
-            <a:ext cx="1920240" cy="658368"/>
+            <a:off x="685800" y="1645920"/>
+            <a:ext cx="2926080" cy="457200"/>
           </a:xfrm>
           <a:prstGeom prst="rect">
             <a:avLst/>
@@ -1944,10 +1878,13 @@
           <a:ln/>
         </p:spPr>
         <p:txBody>
-          <a:bodyPr wrap="square" lIns="0" tIns="0" rIns="0" bIns="0" rtlCol="0" anchor="ctr"/>
+          <a:bodyPr wrap="square" rtlCol="0" anchor="ctr"/>
           <a:lstStyle/>
           <a:p>
             <a:pPr indent="0" marL="0">
+              <a:lnSpc>
+                <a:spcPct val="130000"/>
+              </a:lnSpc>
               <a:buNone/>
             </a:pPr>
             <a:r>
@@ -1955,11 +1892,11 @@
                 <a:solidFill>
                   <a:srgbClr val="6B6660"/>
                 </a:solidFill>
-                <a:latin typeface="Calibri" pitchFamily="34" charset="0"/>
-                <a:ea typeface="Calibri" pitchFamily="34" charset="-122"/>
-                <a:cs typeface="Calibri" pitchFamily="34" charset="-120"/>
+                <a:latin typeface="Arial" pitchFamily="34" charset="0"/>
+                <a:ea typeface="Arial" pitchFamily="34" charset="-122"/>
+                <a:cs typeface="Arial" pitchFamily="34" charset="-120"/>
               </a:rPr>
-              <a:t>Standard units used worldwide</a:t>
+              <a:t>Standard International units used worldwide — metres, grams, seconds.</a:t>
             </a:r>
             <a:endParaRPr lang="en-US" sz="1100" dirty="0"/>
           </a:p>
@@ -1967,61 +1904,41 @@
       </p:sp>
       <p:sp>
         <p:nvSpPr>
-          <p:cNvPr id="10" name="Shape 8"/>
+          <p:cNvPr id="8" name="Shape 6"/>
           <p:cNvSpPr/>
           <p:nvPr/>
         </p:nvSpPr>
         <p:spPr>
           <a:xfrm>
-            <a:off x="4754880" y="1051560"/>
-            <a:ext cx="3657600" cy="658368"/>
+            <a:off x="4023360" y="1234440"/>
+            <a:ext cx="3200400" cy="914400"/>
           </a:xfrm>
-          <a:prstGeom prst="rect">
-            <a:avLst/>
+          <a:prstGeom prst="roundRect">
+            <a:avLst>
+              <a:gd name="adj" fmla="val 10000"/>
+            </a:avLst>
           </a:prstGeom>
           <a:solidFill>
             <a:srgbClr val="FFFFFF"/>
           </a:solidFill>
-          <a:ln/>
-          <a:effectLst>
-            <a:outerShdw sx="100000" sy="100000" kx="0" ky="0" algn="bl" rotWithShape="0" blurRad="50800" dist="25400" dir="8100000">
-              <a:srgbClr val="000000">
-                <a:alpha val="10000"/>
-              </a:srgbClr>
-            </a:outerShdw>
-          </a:effectLst>
+          <a:ln w="9525">
+            <a:solidFill>
+              <a:srgbClr val="E5E2DC"/>
+            </a:solidFill>
+            <a:prstDash val="solid"/>
+          </a:ln>
         </p:spPr>
       </p:sp>
       <p:sp>
         <p:nvSpPr>
-          <p:cNvPr id="11" name="Shape 9"/>
+          <p:cNvPr id="9" name="Text 7"/>
           <p:cNvSpPr/>
           <p:nvPr/>
         </p:nvSpPr>
         <p:spPr>
           <a:xfrm>
-            <a:off x="4754880" y="1051560"/>
-            <a:ext cx="54864" cy="658368"/>
-          </a:xfrm>
-          <a:prstGeom prst="rect">
-            <a:avLst/>
-          </a:prstGeom>
-          <a:solidFill>
-            <a:srgbClr val="2A9D8F"/>
-          </a:solidFill>
-          <a:ln/>
-        </p:spPr>
-      </p:sp>
-      <p:sp>
-        <p:nvSpPr>
-          <p:cNvPr id="12" name="Text 10"/>
-          <p:cNvSpPr/>
-          <p:nvPr/>
-        </p:nvSpPr>
-        <p:spPr>
-          <a:xfrm>
-            <a:off x="4937760" y="1051560"/>
-            <a:ext cx="1463040" cy="658368"/>
+            <a:off x="4160520" y="1307592"/>
+            <a:ext cx="2926080" cy="320040"/>
           </a:xfrm>
           <a:prstGeom prst="rect">
             <a:avLst/>
@@ -2030,16 +1947,16 @@
           <a:ln/>
         </p:spPr>
         <p:txBody>
-          <a:bodyPr wrap="square" lIns="0" tIns="0" rIns="0" bIns="0" rtlCol="0" anchor="ctr"/>
+          <a:bodyPr wrap="square" rtlCol="0" anchor="ctr"/>
           <a:lstStyle/>
           <a:p>
             <a:pPr indent="0" marL="0">
               <a:buNone/>
             </a:pPr>
             <a:r>
-              <a:rPr lang="en-US" sz="1300" b="1" dirty="0">
+              <a:rPr lang="en-US" sz="1400" b="1" dirty="0">
                 <a:solidFill>
-                  <a:srgbClr val="1B2A4A"/>
+                  <a:srgbClr val="2A9D8F"/>
                 </a:solidFill>
                 <a:latin typeface="Georgia" pitchFamily="34" charset="0"/>
                 <a:ea typeface="Georgia" pitchFamily="34" charset="-122"/>
@@ -2047,20 +1964,20 @@
               </a:rPr>
               <a:t>Accuracy</a:t>
             </a:r>
-            <a:endParaRPr lang="en-US" sz="1300" dirty="0"/>
+            <a:endParaRPr lang="en-US" sz="1400" dirty="0"/>
           </a:p>
         </p:txBody>
       </p:sp>
       <p:sp>
         <p:nvSpPr>
-          <p:cNvPr id="13" name="Text 11"/>
+          <p:cNvPr id="10" name="Text 8"/>
           <p:cNvSpPr/>
           <p:nvPr/>
         </p:nvSpPr>
         <p:spPr>
           <a:xfrm>
-            <a:off x="6400800" y="1051560"/>
-            <a:ext cx="1920240" cy="658368"/>
+            <a:off x="4160520" y="1645920"/>
+            <a:ext cx="2926080" cy="457200"/>
           </a:xfrm>
           <a:prstGeom prst="rect">
             <a:avLst/>
@@ -2069,10 +1986,13 @@
           <a:ln/>
         </p:spPr>
         <p:txBody>
-          <a:bodyPr wrap="square" lIns="0" tIns="0" rIns="0" bIns="0" rtlCol="0" anchor="ctr"/>
+          <a:bodyPr wrap="square" rtlCol="0" anchor="ctr"/>
           <a:lstStyle/>
           <a:p>
             <a:pPr indent="0" marL="0">
+              <a:lnSpc>
+                <a:spcPct val="130000"/>
+              </a:lnSpc>
               <a:buNone/>
             </a:pPr>
             <a:r>
@@ -2080,11 +2000,11 @@
                 <a:solidFill>
                   <a:srgbClr val="6B6660"/>
                 </a:solidFill>
-                <a:latin typeface="Calibri" pitchFamily="34" charset="0"/>
-                <a:ea typeface="Calibri" pitchFamily="34" charset="-122"/>
-                <a:cs typeface="Calibri" pitchFamily="34" charset="-120"/>
+                <a:latin typeface="Arial" pitchFamily="34" charset="0"/>
+                <a:ea typeface="Arial" pitchFamily="34" charset="-122"/>
+                <a:cs typeface="Arial" pitchFamily="34" charset="-120"/>
               </a:rPr>
-              <a:t>How close to the true value</a:t>
+              <a:t>How close your measurement is to the true value.</a:t>
             </a:r>
             <a:endParaRPr lang="en-US" sz="1100" dirty="0"/>
           </a:p>
@@ -2092,61 +2012,41 @@
       </p:sp>
       <p:sp>
         <p:nvSpPr>
-          <p:cNvPr id="14" name="Shape 12"/>
+          <p:cNvPr id="11" name="Shape 9"/>
           <p:cNvSpPr/>
           <p:nvPr/>
         </p:nvSpPr>
         <p:spPr>
           <a:xfrm>
-            <a:off x="731520" y="1819656"/>
-            <a:ext cx="3657600" cy="658368"/>
+            <a:off x="7498080" y="1234440"/>
+            <a:ext cx="3200400" cy="914400"/>
           </a:xfrm>
-          <a:prstGeom prst="rect">
-            <a:avLst/>
+          <a:prstGeom prst="roundRect">
+            <a:avLst>
+              <a:gd name="adj" fmla="val 10000"/>
+            </a:avLst>
           </a:prstGeom>
           <a:solidFill>
             <a:srgbClr val="FFFFFF"/>
           </a:solidFill>
-          <a:ln/>
-          <a:effectLst>
-            <a:outerShdw sx="100000" sy="100000" kx="0" ky="0" algn="bl" rotWithShape="0" blurRad="50800" dist="25400" dir="8100000">
-              <a:srgbClr val="000000">
-                <a:alpha val="10000"/>
-              </a:srgbClr>
-            </a:outerShdw>
-          </a:effectLst>
+          <a:ln w="9525">
+            <a:solidFill>
+              <a:srgbClr val="E5E2DC"/>
+            </a:solidFill>
+            <a:prstDash val="solid"/>
+          </a:ln>
         </p:spPr>
       </p:sp>
       <p:sp>
         <p:nvSpPr>
-          <p:cNvPr id="15" name="Shape 13"/>
+          <p:cNvPr id="12" name="Text 10"/>
           <p:cNvSpPr/>
           <p:nvPr/>
         </p:nvSpPr>
         <p:spPr>
           <a:xfrm>
-            <a:off x="731520" y="1819656"/>
-            <a:ext cx="54864" cy="658368"/>
-          </a:xfrm>
-          <a:prstGeom prst="rect">
-            <a:avLst/>
-          </a:prstGeom>
-          <a:solidFill>
-            <a:srgbClr val="2A9D8F"/>
-          </a:solidFill>
-          <a:ln/>
-        </p:spPr>
-      </p:sp>
-      <p:sp>
-        <p:nvSpPr>
-          <p:cNvPr id="16" name="Text 14"/>
-          <p:cNvSpPr/>
-          <p:nvPr/>
-        </p:nvSpPr>
-        <p:spPr>
-          <a:xfrm>
-            <a:off x="914400" y="1819656"/>
-            <a:ext cx="1463040" cy="658368"/>
+            <a:off x="7635240" y="1307592"/>
+            <a:ext cx="2926080" cy="320040"/>
           </a:xfrm>
           <a:prstGeom prst="rect">
             <a:avLst/>
@@ -2155,16 +2055,16 @@
           <a:ln/>
         </p:spPr>
         <p:txBody>
-          <a:bodyPr wrap="square" lIns="0" tIns="0" rIns="0" bIns="0" rtlCol="0" anchor="ctr"/>
+          <a:bodyPr wrap="square" rtlCol="0" anchor="ctr"/>
           <a:lstStyle/>
           <a:p>
             <a:pPr indent="0" marL="0">
               <a:buNone/>
             </a:pPr>
             <a:r>
-              <a:rPr lang="en-US" sz="1300" b="1" dirty="0">
+              <a:rPr lang="en-US" sz="1400" b="1" dirty="0">
                 <a:solidFill>
-                  <a:srgbClr val="1B2A4A"/>
+                  <a:srgbClr val="2A9D8F"/>
                 </a:solidFill>
                 <a:latin typeface="Georgia" pitchFamily="34" charset="0"/>
                 <a:ea typeface="Georgia" pitchFamily="34" charset="-122"/>
@@ -2172,20 +2072,20 @@
               </a:rPr>
               <a:t>Precision</a:t>
             </a:r>
-            <a:endParaRPr lang="en-US" sz="1300" dirty="0"/>
+            <a:endParaRPr lang="en-US" sz="1400" dirty="0"/>
           </a:p>
         </p:txBody>
       </p:sp>
       <p:sp>
         <p:nvSpPr>
-          <p:cNvPr id="17" name="Text 15"/>
+          <p:cNvPr id="13" name="Text 11"/>
           <p:cNvSpPr/>
           <p:nvPr/>
         </p:nvSpPr>
         <p:spPr>
           <a:xfrm>
-            <a:off x="2377440" y="1819656"/>
-            <a:ext cx="1920240" cy="658368"/>
+            <a:off x="7635240" y="1645920"/>
+            <a:ext cx="2926080" cy="457200"/>
           </a:xfrm>
           <a:prstGeom prst="rect">
             <a:avLst/>
@@ -2194,10 +2094,13 @@
           <a:ln/>
         </p:spPr>
         <p:txBody>
-          <a:bodyPr wrap="square" lIns="0" tIns="0" rIns="0" bIns="0" rtlCol="0" anchor="ctr"/>
+          <a:bodyPr wrap="square" rtlCol="0" anchor="ctr"/>
           <a:lstStyle/>
           <a:p>
             <a:pPr indent="0" marL="0">
+              <a:lnSpc>
+                <a:spcPct val="130000"/>
+              </a:lnSpc>
               <a:buNone/>
             </a:pPr>
             <a:r>
@@ -2205,11 +2108,11 @@
                 <a:solidFill>
                   <a:srgbClr val="6B6660"/>
                 </a:solidFill>
-                <a:latin typeface="Calibri" pitchFamily="34" charset="0"/>
-                <a:ea typeface="Calibri" pitchFamily="34" charset="-122"/>
-                <a:cs typeface="Calibri" pitchFamily="34" charset="-120"/>
+                <a:latin typeface="Arial" pitchFamily="34" charset="0"/>
+                <a:ea typeface="Arial" pitchFamily="34" charset="-122"/>
+                <a:cs typeface="Arial" pitchFamily="34" charset="-120"/>
               </a:rPr>
-              <a:t>How close repeated results are</a:t>
+              <a:t>How close your repeated measurements are to each other.</a:t>
             </a:r>
             <a:endParaRPr lang="en-US" sz="1100" dirty="0"/>
           </a:p>
@@ -2217,61 +2120,41 @@
       </p:sp>
       <p:sp>
         <p:nvSpPr>
-          <p:cNvPr id="18" name="Shape 16"/>
+          <p:cNvPr id="14" name="Shape 12"/>
           <p:cNvSpPr/>
           <p:nvPr/>
         </p:nvSpPr>
         <p:spPr>
           <a:xfrm>
-            <a:off x="4754880" y="1819656"/>
-            <a:ext cx="3657600" cy="658368"/>
+            <a:off x="548640" y="2286000"/>
+            <a:ext cx="3200400" cy="914400"/>
           </a:xfrm>
-          <a:prstGeom prst="rect">
-            <a:avLst/>
+          <a:prstGeom prst="roundRect">
+            <a:avLst>
+              <a:gd name="adj" fmla="val 10000"/>
+            </a:avLst>
           </a:prstGeom>
           <a:solidFill>
             <a:srgbClr val="FFFFFF"/>
           </a:solidFill>
-          <a:ln/>
-          <a:effectLst>
-            <a:outerShdw sx="100000" sy="100000" kx="0" ky="0" algn="bl" rotWithShape="0" blurRad="50800" dist="25400" dir="8100000">
-              <a:srgbClr val="000000">
-                <a:alpha val="10000"/>
-              </a:srgbClr>
-            </a:outerShdw>
-          </a:effectLst>
+          <a:ln w="9525">
+            <a:solidFill>
+              <a:srgbClr val="E5E2DC"/>
+            </a:solidFill>
+            <a:prstDash val="solid"/>
+          </a:ln>
         </p:spPr>
       </p:sp>
       <p:sp>
         <p:nvSpPr>
-          <p:cNvPr id="19" name="Shape 17"/>
+          <p:cNvPr id="15" name="Text 13"/>
           <p:cNvSpPr/>
           <p:nvPr/>
         </p:nvSpPr>
         <p:spPr>
           <a:xfrm>
-            <a:off x="4754880" y="1819656"/>
-            <a:ext cx="54864" cy="658368"/>
-          </a:xfrm>
-          <a:prstGeom prst="rect">
-            <a:avLst/>
-          </a:prstGeom>
-          <a:solidFill>
-            <a:srgbClr val="2A9D8F"/>
-          </a:solidFill>
-          <a:ln/>
-        </p:spPr>
-      </p:sp>
-      <p:sp>
-        <p:nvSpPr>
-          <p:cNvPr id="20" name="Text 18"/>
-          <p:cNvSpPr/>
-          <p:nvPr/>
-        </p:nvSpPr>
-        <p:spPr>
-          <a:xfrm>
-            <a:off x="4937760" y="1819656"/>
-            <a:ext cx="1463040" cy="658368"/>
+            <a:off x="685800" y="2359152"/>
+            <a:ext cx="2926080" cy="320040"/>
           </a:xfrm>
           <a:prstGeom prst="rect">
             <a:avLst/>
@@ -2280,16 +2163,16 @@
           <a:ln/>
         </p:spPr>
         <p:txBody>
-          <a:bodyPr wrap="square" lIns="0" tIns="0" rIns="0" bIns="0" rtlCol="0" anchor="ctr"/>
+          <a:bodyPr wrap="square" rtlCol="0" anchor="ctr"/>
           <a:lstStyle/>
           <a:p>
             <a:pPr indent="0" marL="0">
               <a:buNone/>
             </a:pPr>
             <a:r>
-              <a:rPr lang="en-US" sz="1300" b="1" dirty="0">
+              <a:rPr lang="en-US" sz="1400" b="1" dirty="0">
                 <a:solidFill>
-                  <a:srgbClr val="1B2A4A"/>
+                  <a:srgbClr val="2A9D8F"/>
                 </a:solidFill>
                 <a:latin typeface="Georgia" pitchFamily="34" charset="0"/>
                 <a:ea typeface="Georgia" pitchFamily="34" charset="-122"/>
@@ -2297,20 +2180,20 @@
               </a:rPr>
               <a:t>Meniscus</a:t>
             </a:r>
-            <a:endParaRPr lang="en-US" sz="1300" dirty="0"/>
+            <a:endParaRPr lang="en-US" sz="1400" dirty="0"/>
           </a:p>
         </p:txBody>
       </p:sp>
       <p:sp>
         <p:nvSpPr>
-          <p:cNvPr id="21" name="Text 19"/>
+          <p:cNvPr id="16" name="Text 14"/>
           <p:cNvSpPr/>
           <p:nvPr/>
         </p:nvSpPr>
         <p:spPr>
           <a:xfrm>
-            <a:off x="6400800" y="1819656"/>
-            <a:ext cx="1920240" cy="658368"/>
+            <a:off x="685800" y="2697480"/>
+            <a:ext cx="2926080" cy="457200"/>
           </a:xfrm>
           <a:prstGeom prst="rect">
             <a:avLst/>
@@ -2319,10 +2202,13 @@
           <a:ln/>
         </p:spPr>
         <p:txBody>
-          <a:bodyPr wrap="square" lIns="0" tIns="0" rIns="0" bIns="0" rtlCol="0" anchor="ctr"/>
+          <a:bodyPr wrap="square" rtlCol="0" anchor="ctr"/>
           <a:lstStyle/>
           <a:p>
             <a:pPr indent="0" marL="0">
+              <a:lnSpc>
+                <a:spcPct val="130000"/>
+              </a:lnSpc>
               <a:buNone/>
             </a:pPr>
             <a:r>
@@ -2330,11 +2216,11 @@
                 <a:solidFill>
                   <a:srgbClr val="6B6660"/>
                 </a:solidFill>
-                <a:latin typeface="Calibri" pitchFamily="34" charset="0"/>
-                <a:ea typeface="Calibri" pitchFamily="34" charset="-122"/>
-                <a:cs typeface="Calibri" pitchFamily="34" charset="-120"/>
+                <a:latin typeface="Arial" pitchFamily="34" charset="0"/>
+                <a:ea typeface="Arial" pitchFamily="34" charset="-122"/>
+                <a:cs typeface="Arial" pitchFamily="34" charset="-120"/>
               </a:rPr>
-              <a:t>Curved surface of a liquid</a:t>
+              <a:t>The curved surface of a liquid in a measuring cylinder.</a:t>
             </a:r>
             <a:endParaRPr lang="en-US" sz="1100" dirty="0"/>
           </a:p>
@@ -2342,61 +2228,41 @@
       </p:sp>
       <p:sp>
         <p:nvSpPr>
-          <p:cNvPr id="22" name="Shape 20"/>
+          <p:cNvPr id="17" name="Shape 15"/>
           <p:cNvSpPr/>
           <p:nvPr/>
         </p:nvSpPr>
         <p:spPr>
           <a:xfrm>
-            <a:off x="731520" y="2587752"/>
-            <a:ext cx="3657600" cy="658368"/>
+            <a:off x="4023360" y="2286000"/>
+            <a:ext cx="3200400" cy="914400"/>
           </a:xfrm>
-          <a:prstGeom prst="rect">
-            <a:avLst/>
+          <a:prstGeom prst="roundRect">
+            <a:avLst>
+              <a:gd name="adj" fmla="val 10000"/>
+            </a:avLst>
           </a:prstGeom>
           <a:solidFill>
             <a:srgbClr val="FFFFFF"/>
           </a:solidFill>
-          <a:ln/>
-          <a:effectLst>
-            <a:outerShdw sx="100000" sy="100000" kx="0" ky="0" algn="bl" rotWithShape="0" blurRad="50800" dist="25400" dir="8100000">
-              <a:srgbClr val="000000">
-                <a:alpha val="10000"/>
-              </a:srgbClr>
-            </a:outerShdw>
-          </a:effectLst>
+          <a:ln w="9525">
+            <a:solidFill>
+              <a:srgbClr val="E5E2DC"/>
+            </a:solidFill>
+            <a:prstDash val="solid"/>
+          </a:ln>
         </p:spPr>
       </p:sp>
       <p:sp>
         <p:nvSpPr>
-          <p:cNvPr id="23" name="Shape 21"/>
+          <p:cNvPr id="18" name="Text 16"/>
           <p:cNvSpPr/>
           <p:nvPr/>
         </p:nvSpPr>
         <p:spPr>
           <a:xfrm>
-            <a:off x="731520" y="2587752"/>
-            <a:ext cx="54864" cy="658368"/>
-          </a:xfrm>
-          <a:prstGeom prst="rect">
-            <a:avLst/>
-          </a:prstGeom>
-          <a:solidFill>
-            <a:srgbClr val="2A9D8F"/>
-          </a:solidFill>
-          <a:ln/>
-        </p:spPr>
-      </p:sp>
-      <p:sp>
-        <p:nvSpPr>
-          <p:cNvPr id="24" name="Text 22"/>
-          <p:cNvSpPr/>
-          <p:nvPr/>
-        </p:nvSpPr>
-        <p:spPr>
-          <a:xfrm>
-            <a:off x="914400" y="2587752"/>
-            <a:ext cx="1463040" cy="658368"/>
+            <a:off x="4160520" y="2359152"/>
+            <a:ext cx="2926080" cy="320040"/>
           </a:xfrm>
           <a:prstGeom prst="rect">
             <a:avLst/>
@@ -2405,37 +2271,37 @@
           <a:ln/>
         </p:spPr>
         <p:txBody>
-          <a:bodyPr wrap="square" lIns="0" tIns="0" rIns="0" bIns="0" rtlCol="0" anchor="ctr"/>
+          <a:bodyPr wrap="square" rtlCol="0" anchor="ctr"/>
           <a:lstStyle/>
           <a:p>
             <a:pPr indent="0" marL="0">
               <a:buNone/>
             </a:pPr>
             <a:r>
-              <a:rPr lang="en-US" sz="1300" b="1" dirty="0">
+              <a:rPr lang="en-US" sz="1400" b="1" dirty="0">
                 <a:solidFill>
-                  <a:srgbClr val="1B2A4A"/>
+                  <a:srgbClr val="2A9D8F"/>
                 </a:solidFill>
                 <a:latin typeface="Georgia" pitchFamily="34" charset="0"/>
                 <a:ea typeface="Georgia" pitchFamily="34" charset="-122"/>
                 <a:cs typeface="Georgia" pitchFamily="34" charset="-120"/>
               </a:rPr>
-              <a:t>Resolution</a:t>
-            </a:r>
-            <a:endParaRPr lang="en-US" sz="1300" dirty="0"/>
+              <a:t>Anomaly</a:t>
+            </a:r>
+            <a:endParaRPr lang="en-US" sz="1400" dirty="0"/>
           </a:p>
         </p:txBody>
       </p:sp>
       <p:sp>
         <p:nvSpPr>
-          <p:cNvPr id="25" name="Text 23"/>
+          <p:cNvPr id="19" name="Text 17"/>
           <p:cNvSpPr/>
           <p:nvPr/>
         </p:nvSpPr>
         <p:spPr>
           <a:xfrm>
-            <a:off x="2377440" y="2587752"/>
-            <a:ext cx="1920240" cy="658368"/>
+            <a:off x="4160520" y="2697480"/>
+            <a:ext cx="2926080" cy="457200"/>
           </a:xfrm>
           <a:prstGeom prst="rect">
             <a:avLst/>
@@ -2444,10 +2310,13 @@
           <a:ln/>
         </p:spPr>
         <p:txBody>
-          <a:bodyPr wrap="square" lIns="0" tIns="0" rIns="0" bIns="0" rtlCol="0" anchor="ctr"/>
+          <a:bodyPr wrap="square" rtlCol="0" anchor="ctr"/>
           <a:lstStyle/>
           <a:p>
             <a:pPr indent="0" marL="0">
+              <a:lnSpc>
+                <a:spcPct val="130000"/>
+              </a:lnSpc>
               <a:buNone/>
             </a:pPr>
             <a:r>
@@ -2455,136 +2324,11 @@
                 <a:solidFill>
                   <a:srgbClr val="6B6660"/>
                 </a:solidFill>
-                <a:latin typeface="Calibri" pitchFamily="34" charset="0"/>
-                <a:ea typeface="Calibri" pitchFamily="34" charset="-122"/>
-                <a:cs typeface="Calibri" pitchFamily="34" charset="-120"/>
+                <a:latin typeface="Arial" pitchFamily="34" charset="0"/>
+                <a:ea typeface="Arial" pitchFamily="34" charset="-122"/>
+                <a:cs typeface="Arial" pitchFamily="34" charset="-120"/>
               </a:rPr>
-              <a:t>Smallest change an instrument can detect</a:t>
-            </a:r>
-            <a:endParaRPr lang="en-US" sz="1100" dirty="0"/>
-          </a:p>
-        </p:txBody>
-      </p:sp>
-      <p:sp>
-        <p:nvSpPr>
-          <p:cNvPr id="26" name="Shape 24"/>
-          <p:cNvSpPr/>
-          <p:nvPr/>
-        </p:nvSpPr>
-        <p:spPr>
-          <a:xfrm>
-            <a:off x="4754880" y="2587752"/>
-            <a:ext cx="3657600" cy="658368"/>
-          </a:xfrm>
-          <a:prstGeom prst="rect">
-            <a:avLst/>
-          </a:prstGeom>
-          <a:solidFill>
-            <a:srgbClr val="FFFFFF"/>
-          </a:solidFill>
-          <a:ln/>
-          <a:effectLst>
-            <a:outerShdw sx="100000" sy="100000" kx="0" ky="0" algn="bl" rotWithShape="0" blurRad="50800" dist="25400" dir="8100000">
-              <a:srgbClr val="000000">
-                <a:alpha val="10000"/>
-              </a:srgbClr>
-            </a:outerShdw>
-          </a:effectLst>
-        </p:spPr>
-      </p:sp>
-      <p:sp>
-        <p:nvSpPr>
-          <p:cNvPr id="27" name="Shape 25"/>
-          <p:cNvSpPr/>
-          <p:nvPr/>
-        </p:nvSpPr>
-        <p:spPr>
-          <a:xfrm>
-            <a:off x="4754880" y="2587752"/>
-            <a:ext cx="54864" cy="658368"/>
-          </a:xfrm>
-          <a:prstGeom prst="rect">
-            <a:avLst/>
-          </a:prstGeom>
-          <a:solidFill>
-            <a:srgbClr val="2A9D8F"/>
-          </a:solidFill>
-          <a:ln/>
-        </p:spPr>
-      </p:sp>
-      <p:sp>
-        <p:nvSpPr>
-          <p:cNvPr id="28" name="Text 26"/>
-          <p:cNvSpPr/>
-          <p:nvPr/>
-        </p:nvSpPr>
-        <p:spPr>
-          <a:xfrm>
-            <a:off x="4937760" y="2587752"/>
-            <a:ext cx="1463040" cy="658368"/>
-          </a:xfrm>
-          <a:prstGeom prst="rect">
-            <a:avLst/>
-          </a:prstGeom>
-          <a:noFill/>
-          <a:ln/>
-        </p:spPr>
-        <p:txBody>
-          <a:bodyPr wrap="square" lIns="0" tIns="0" rIns="0" bIns="0" rtlCol="0" anchor="ctr"/>
-          <a:lstStyle/>
-          <a:p>
-            <a:pPr indent="0" marL="0">
-              <a:buNone/>
-            </a:pPr>
-            <a:r>
-              <a:rPr lang="en-US" sz="1300" b="1" dirty="0">
-                <a:solidFill>
-                  <a:srgbClr val="1B2A4A"/>
-                </a:solidFill>
-                <a:latin typeface="Georgia" pitchFamily="34" charset="0"/>
-                <a:ea typeface="Georgia" pitchFamily="34" charset="-122"/>
-                <a:cs typeface="Georgia" pitchFamily="34" charset="-120"/>
-              </a:rPr>
-              <a:t>Uncertainty</a:t>
-            </a:r>
-            <a:endParaRPr lang="en-US" sz="1300" dirty="0"/>
-          </a:p>
-        </p:txBody>
-      </p:sp>
-      <p:sp>
-        <p:nvSpPr>
-          <p:cNvPr id="29" name="Text 27"/>
-          <p:cNvSpPr/>
-          <p:nvPr/>
-        </p:nvSpPr>
-        <p:spPr>
-          <a:xfrm>
-            <a:off x="6400800" y="2587752"/>
-            <a:ext cx="1920240" cy="658368"/>
-          </a:xfrm>
-          <a:prstGeom prst="rect">
-            <a:avLst/>
-          </a:prstGeom>
-          <a:noFill/>
-          <a:ln/>
-        </p:spPr>
-        <p:txBody>
-          <a:bodyPr wrap="square" lIns="0" tIns="0" rIns="0" bIns="0" rtlCol="0" anchor="ctr"/>
-          <a:lstStyle/>
-          <a:p>
-            <a:pPr indent="0" marL="0">
-              <a:buNone/>
-            </a:pPr>
-            <a:r>
-              <a:rPr lang="en-US" sz="1100" dirty="0">
-                <a:solidFill>
-                  <a:srgbClr val="6B6660"/>
-                </a:solidFill>
-                <a:latin typeface="Calibri" pitchFamily="34" charset="0"/>
-                <a:ea typeface="Calibri" pitchFamily="34" charset="-122"/>
-                <a:cs typeface="Calibri" pitchFamily="34" charset="-120"/>
-              </a:rPr>
-              <a:t>Range of possible error</a:t>
+              <a:t>A result that does not fit the pattern — an outlier.</a:t>
             </a:r>
             <a:endParaRPr lang="en-US" sz="1100" dirty="0"/>
           </a:p>
@@ -2631,47 +2375,7 @@
         <p:spPr>
           <a:xfrm>
             <a:off x="0" y="0"/>
-            <a:ext cx="9144000" cy="822960"/>
-          </a:xfrm>
-          <a:prstGeom prst="rect">
-            <a:avLst/>
-          </a:prstGeom>
-          <a:solidFill>
-            <a:srgbClr val="FFFFFF"/>
-          </a:solidFill>
-          <a:ln/>
-        </p:spPr>
-      </p:sp>
-      <p:sp>
-        <p:nvSpPr>
-          <p:cNvPr id="3" name="Shape 1"/>
-          <p:cNvSpPr/>
-          <p:nvPr/>
-        </p:nvSpPr>
-        <p:spPr>
-          <a:xfrm>
-            <a:off x="0" y="804672"/>
-            <a:ext cx="9144000" cy="27432"/>
-          </a:xfrm>
-          <a:prstGeom prst="rect">
-            <a:avLst/>
-          </a:prstGeom>
-          <a:solidFill>
-            <a:srgbClr val="E5E2DC"/>
-          </a:solidFill>
-          <a:ln/>
-        </p:spPr>
-      </p:sp>
-      <p:sp>
-        <p:nvSpPr>
-          <p:cNvPr id="4" name="Shape 2"/>
-          <p:cNvSpPr/>
-          <p:nvPr/>
-        </p:nvSpPr>
-        <p:spPr>
-          <a:xfrm>
-            <a:off x="548640" y="201168"/>
-            <a:ext cx="54864" cy="420624"/>
+            <a:ext cx="73152" cy="5148072"/>
           </a:xfrm>
           <a:prstGeom prst="rect">
             <a:avLst/>
@@ -2684,14 +2388,14 @@
       </p:sp>
       <p:sp>
         <p:nvSpPr>
-          <p:cNvPr id="5" name="Text 3"/>
+          <p:cNvPr id="3" name="Text 1"/>
           <p:cNvSpPr/>
           <p:nvPr/>
         </p:nvSpPr>
         <p:spPr>
           <a:xfrm>
-            <a:off x="777240" y="137160"/>
-            <a:ext cx="7772400" cy="548640"/>
+            <a:off x="548640" y="274320"/>
+            <a:ext cx="9144000" cy="640080"/>
           </a:xfrm>
           <a:prstGeom prst="rect">
             <a:avLst/>
@@ -2700,14 +2404,14 @@
           <a:ln/>
         </p:spPr>
         <p:txBody>
-          <a:bodyPr wrap="square" lIns="0" tIns="0" rIns="0" bIns="0" rtlCol="0" anchor="ctr"/>
+          <a:bodyPr wrap="square" rtlCol="0" anchor="ctr"/>
           <a:lstStyle/>
           <a:p>
             <a:pPr indent="0" marL="0">
               <a:buNone/>
             </a:pPr>
             <a:r>
-              <a:rPr lang="en-US" sz="2000" b="1" dirty="0">
+              <a:rPr lang="en-US" sz="2400" b="1" dirty="0">
                 <a:solidFill>
                   <a:srgbClr val="1B2A4A"/>
                 </a:solidFill>
@@ -2717,7 +2421,7 @@
               </a:rPr>
               <a:t>SI Units You Must Know</a:t>
             </a:r>
-            <a:endParaRPr lang="en-US" sz="2000" dirty="0"/>
+            <a:endParaRPr lang="en-US" sz="2400" dirty="0"/>
           </a:p>
         </p:txBody>
       </p:sp>
@@ -2736,26 +2440,26 @@
           </p:nvPr>
         </p:nvGraphicFramePr>
         <p:xfrm>
-          <a:off x="640080" y="1051560"/>
-          <a:ext cx="7863840" cy="914400"/>
+          <a:off x="548640" y="1097280"/>
+          <a:ext cx="9144000" cy="914400"/>
         </p:xfrm>
         <a:graphic>
           <a:graphicData uri="http://schemas.openxmlformats.org/drawingml/2006/table">
             <a:tbl>
               <a:tblPr/>
               <a:tblGrid>
-                <a:gridCol w="1965960"/>
-                <a:gridCol w="1965960"/>
-                <a:gridCol w="1965960"/>
-                <a:gridCol w="1965960"/>
+                <a:gridCol w="2286000"/>
+                <a:gridCol w="2286000"/>
+                <a:gridCol w="2286000"/>
+                <a:gridCol w="2286000"/>
               </a:tblGrid>
-              <a:tr h="502920">
+              <a:tr h="411480">
                 <a:tc>
                   <a:txBody>
                     <a:bodyPr/>
                     <a:lstStyle/>
                     <a:p>
-                      <a:pPr indent="0" marL="0">
+                      <a:pPr algn="ctr" indent="0" marL="0">
                         <a:buNone/>
                       </a:pPr>
                       <a:r>
@@ -2763,20 +2467,20 @@
                           <a:solidFill>
                             <a:srgbClr val="FFFFFF"/>
                           </a:solidFill>
-                          <a:latin typeface="Calibri" pitchFamily="34" charset="0"/>
-                          <a:ea typeface="Calibri" pitchFamily="34" charset="-122"/>
-                          <a:cs typeface="Calibri" pitchFamily="34" charset="-120"/>
+                          <a:latin typeface="Arial" pitchFamily="34" charset="0"/>
+                          <a:ea typeface="Arial" pitchFamily="34" charset="-122"/>
+                          <a:cs typeface="Arial" pitchFamily="34" charset="-120"/>
                         </a:rPr>
                         <a:t>Quantity</a:t>
                       </a:r>
                       <a:endParaRPr lang="en-US" sz="1200" dirty="0">
-                        <a:latin typeface="Calibri" charset="0"/>
-                        <a:ea typeface="Calibri" charset="0"/>
-                        <a:cs typeface="Calibri" charset="0"/>
+                        <a:latin typeface="Arial" charset="0"/>
+                        <a:ea typeface="Arial" charset="0"/>
+                        <a:cs typeface="Arial" charset="0"/>
                       </a:endParaRPr>
                     </a:p>
                   </a:txBody>
-                  <a:tcPr marL="91440" marR="91440" marT="45720" marB="45720">
+                  <a:tcPr marL="101600" marR="101600" marT="50800" marB="50800" anchor="ctr">
                     <a:lnL w="6350" cap="flat" cmpd="sng" algn="ctr">
                       <a:solidFill>
                         <a:srgbClr val="E5E2DC"/>
@@ -2823,7 +2527,7 @@
                     <a:bodyPr/>
                     <a:lstStyle/>
                     <a:p>
-                      <a:pPr indent="0" marL="0">
+                      <a:pPr algn="ctr" indent="0" marL="0">
                         <a:buNone/>
                       </a:pPr>
                       <a:r>
@@ -2831,20 +2535,20 @@
                           <a:solidFill>
                             <a:srgbClr val="FFFFFF"/>
                           </a:solidFill>
-                          <a:latin typeface="Calibri" pitchFamily="34" charset="0"/>
-                          <a:ea typeface="Calibri" pitchFamily="34" charset="-122"/>
-                          <a:cs typeface="Calibri" pitchFamily="34" charset="-120"/>
+                          <a:latin typeface="Arial" pitchFamily="34" charset="0"/>
+                          <a:ea typeface="Arial" pitchFamily="34" charset="-122"/>
+                          <a:cs typeface="Arial" pitchFamily="34" charset="-120"/>
                         </a:rPr>
                         <a:t>Unit</a:t>
                       </a:r>
                       <a:endParaRPr lang="en-US" sz="1200" dirty="0">
-                        <a:latin typeface="Calibri" charset="0"/>
-                        <a:ea typeface="Calibri" charset="0"/>
-                        <a:cs typeface="Calibri" charset="0"/>
+                        <a:latin typeface="Arial" charset="0"/>
+                        <a:ea typeface="Arial" charset="0"/>
+                        <a:cs typeface="Arial" charset="0"/>
                       </a:endParaRPr>
                     </a:p>
                   </a:txBody>
-                  <a:tcPr marL="91440" marR="91440" marT="45720" marB="45720">
+                  <a:tcPr marL="101600" marR="101600" marT="50800" marB="50800" anchor="ctr">
                     <a:lnL w="6350" cap="flat" cmpd="sng" algn="ctr">
                       <a:solidFill>
                         <a:srgbClr val="E5E2DC"/>
@@ -2891,7 +2595,7 @@
                     <a:bodyPr/>
                     <a:lstStyle/>
                     <a:p>
-                      <a:pPr indent="0" marL="0">
+                      <a:pPr algn="ctr" indent="0" marL="0">
                         <a:buNone/>
                       </a:pPr>
                       <a:r>
@@ -2899,20 +2603,20 @@
                           <a:solidFill>
                             <a:srgbClr val="FFFFFF"/>
                           </a:solidFill>
-                          <a:latin typeface="Calibri" pitchFamily="34" charset="0"/>
-                          <a:ea typeface="Calibri" pitchFamily="34" charset="-122"/>
-                          <a:cs typeface="Calibri" pitchFamily="34" charset="-120"/>
+                          <a:latin typeface="Arial" pitchFamily="34" charset="0"/>
+                          <a:ea typeface="Arial" pitchFamily="34" charset="-122"/>
+                          <a:cs typeface="Arial" pitchFamily="34" charset="-120"/>
                         </a:rPr>
                         <a:t>Symbol</a:t>
                       </a:r>
                       <a:endParaRPr lang="en-US" sz="1200" dirty="0">
-                        <a:latin typeface="Calibri" charset="0"/>
-                        <a:ea typeface="Calibri" charset="0"/>
-                        <a:cs typeface="Calibri" charset="0"/>
+                        <a:latin typeface="Arial" charset="0"/>
+                        <a:ea typeface="Arial" charset="0"/>
+                        <a:cs typeface="Arial" charset="0"/>
                       </a:endParaRPr>
                     </a:p>
                   </a:txBody>
-                  <a:tcPr marL="91440" marR="91440" marT="45720" marB="45720">
+                  <a:tcPr marL="101600" marR="101600" marT="50800" marB="50800" anchor="ctr">
                     <a:lnL w="6350" cap="flat" cmpd="sng" algn="ctr">
                       <a:solidFill>
                         <a:srgbClr val="E5E2DC"/>
@@ -2959,7 +2663,7 @@
                     <a:bodyPr/>
                     <a:lstStyle/>
                     <a:p>
-                      <a:pPr indent="0" marL="0">
+                      <a:pPr algn="ctr" indent="0" marL="0">
                         <a:buNone/>
                       </a:pPr>
                       <a:r>
@@ -2967,20 +2671,20 @@
                           <a:solidFill>
                             <a:srgbClr val="FFFFFF"/>
                           </a:solidFill>
-                          <a:latin typeface="Calibri" pitchFamily="34" charset="0"/>
-                          <a:ea typeface="Calibri" pitchFamily="34" charset="-122"/>
-                          <a:cs typeface="Calibri" pitchFamily="34" charset="-120"/>
+                          <a:latin typeface="Arial" pitchFamily="34" charset="0"/>
+                          <a:ea typeface="Arial" pitchFamily="34" charset="-122"/>
+                          <a:cs typeface="Arial" pitchFamily="34" charset="-120"/>
                         </a:rPr>
-                        <a:t>Instrument</a:t>
+                        <a:t>Equipment</a:t>
                       </a:r>
                       <a:endParaRPr lang="en-US" sz="1200" dirty="0">
-                        <a:latin typeface="Calibri" charset="0"/>
-                        <a:ea typeface="Calibri" charset="0"/>
-                        <a:cs typeface="Calibri" charset="0"/>
+                        <a:latin typeface="Arial" charset="0"/>
+                        <a:ea typeface="Arial" charset="0"/>
+                        <a:cs typeface="Arial" charset="0"/>
                       </a:endParaRPr>
                     </a:p>
                   </a:txBody>
-                  <a:tcPr marL="91440" marR="91440" marT="45720" marB="45720">
+                  <a:tcPr marL="101600" marR="101600" marT="50800" marB="50800" anchor="ctr">
                     <a:lnL w="6350" cap="flat" cmpd="sng" algn="ctr">
                       <a:solidFill>
                         <a:srgbClr val="E5E2DC"/>
@@ -3023,7 +2727,7 @@
                   </a:tcPr>
                 </a:tc>
               </a:tr>
-              <a:tr h="502920">
+              <a:tr h="365760">
                 <a:tc>
                   <a:txBody>
                     <a:bodyPr/>
@@ -3037,20 +2741,20 @@
                           <a:solidFill>
                             <a:srgbClr val="3D3A36"/>
                           </a:solidFill>
-                          <a:latin typeface="Calibri" pitchFamily="34" charset="0"/>
-                          <a:ea typeface="Calibri" pitchFamily="34" charset="-122"/>
-                          <a:cs typeface="Calibri" pitchFamily="34" charset="-120"/>
+                          <a:latin typeface="Arial" pitchFamily="34" charset="0"/>
+                          <a:ea typeface="Arial" pitchFamily="34" charset="-122"/>
+                          <a:cs typeface="Arial" pitchFamily="34" charset="-120"/>
                         </a:rPr>
                         <a:t>Length</a:t>
                       </a:r>
                       <a:endParaRPr lang="en-US" sz="1200" dirty="0">
-                        <a:latin typeface="Calibri" charset="0"/>
-                        <a:ea typeface="Calibri" charset="0"/>
-                        <a:cs typeface="Calibri" charset="0"/>
+                        <a:latin typeface="Arial" charset="0"/>
+                        <a:ea typeface="Arial" charset="0"/>
+                        <a:cs typeface="Arial" charset="0"/>
                       </a:endParaRPr>
                     </a:p>
                   </a:txBody>
-                  <a:tcPr marL="91440" marR="91440" marT="45720" marB="45720">
+                  <a:tcPr marL="101600" marR="101600" marT="50800" marB="50800" anchor="ctr">
                     <a:lnL w="6350" cap="flat" cmpd="sng" algn="ctr">
                       <a:solidFill>
                         <a:srgbClr val="E5E2DC"/>
@@ -3105,20 +2809,20 @@
                           <a:solidFill>
                             <a:srgbClr val="3D3A36"/>
                           </a:solidFill>
-                          <a:latin typeface="Calibri" pitchFamily="34" charset="0"/>
-                          <a:ea typeface="Calibri" pitchFamily="34" charset="-122"/>
-                          <a:cs typeface="Calibri" pitchFamily="34" charset="-120"/>
+                          <a:latin typeface="Arial" pitchFamily="34" charset="0"/>
+                          <a:ea typeface="Arial" pitchFamily="34" charset="-122"/>
+                          <a:cs typeface="Arial" pitchFamily="34" charset="-120"/>
                         </a:rPr>
-                        <a:t>metre</a:t>
+                        <a:t>metre / centimetre</a:t>
                       </a:r>
                       <a:endParaRPr lang="en-US" sz="1200" dirty="0">
-                        <a:latin typeface="Calibri" charset="0"/>
-                        <a:ea typeface="Calibri" charset="0"/>
-                        <a:cs typeface="Calibri" charset="0"/>
+                        <a:latin typeface="Arial" charset="0"/>
+                        <a:ea typeface="Arial" charset="0"/>
+                        <a:cs typeface="Arial" charset="0"/>
                       </a:endParaRPr>
                     </a:p>
                   </a:txBody>
-                  <a:tcPr marL="91440" marR="91440" marT="45720" marB="45720">
+                  <a:tcPr marL="101600" marR="101600" marT="50800" marB="50800" anchor="ctr">
                     <a:lnL w="6350" cap="flat" cmpd="sng" algn="ctr">
                       <a:solidFill>
                         <a:srgbClr val="E5E2DC"/>
@@ -3173,20 +2877,20 @@
                           <a:solidFill>
                             <a:srgbClr val="3D3A36"/>
                           </a:solidFill>
-                          <a:latin typeface="Calibri" pitchFamily="34" charset="0"/>
-                          <a:ea typeface="Calibri" pitchFamily="34" charset="-122"/>
-                          <a:cs typeface="Calibri" pitchFamily="34" charset="-120"/>
+                          <a:latin typeface="Arial" pitchFamily="34" charset="0"/>
+                          <a:ea typeface="Arial" pitchFamily="34" charset="-122"/>
+                          <a:cs typeface="Arial" pitchFamily="34" charset="-120"/>
                         </a:rPr>
-                        <a:t>m</a:t>
+                        <a:t>m / cm</a:t>
                       </a:r>
                       <a:endParaRPr lang="en-US" sz="1200" dirty="0">
-                        <a:latin typeface="Calibri" charset="0"/>
-                        <a:ea typeface="Calibri" charset="0"/>
-                        <a:cs typeface="Calibri" charset="0"/>
+                        <a:latin typeface="Arial" charset="0"/>
+                        <a:ea typeface="Arial" charset="0"/>
+                        <a:cs typeface="Arial" charset="0"/>
                       </a:endParaRPr>
                     </a:p>
                   </a:txBody>
-                  <a:tcPr marL="91440" marR="91440" marT="45720" marB="45720">
+                  <a:tcPr marL="101600" marR="101600" marT="50800" marB="50800" anchor="ctr">
                     <a:lnL w="6350" cap="flat" cmpd="sng" algn="ctr">
                       <a:solidFill>
                         <a:srgbClr val="E5E2DC"/>
@@ -3241,20 +2945,20 @@
                           <a:solidFill>
                             <a:srgbClr val="3D3A36"/>
                           </a:solidFill>
-                          <a:latin typeface="Calibri" pitchFamily="34" charset="0"/>
-                          <a:ea typeface="Calibri" pitchFamily="34" charset="-122"/>
-                          <a:cs typeface="Calibri" pitchFamily="34" charset="-120"/>
+                          <a:latin typeface="Arial" pitchFamily="34" charset="0"/>
+                          <a:ea typeface="Arial" pitchFamily="34" charset="-122"/>
+                          <a:cs typeface="Arial" pitchFamily="34" charset="-120"/>
                         </a:rPr>
                         <a:t>Ruler / tape measure</a:t>
                       </a:r>
                       <a:endParaRPr lang="en-US" sz="1200" dirty="0">
-                        <a:latin typeface="Calibri" charset="0"/>
-                        <a:ea typeface="Calibri" charset="0"/>
-                        <a:cs typeface="Calibri" charset="0"/>
+                        <a:latin typeface="Arial" charset="0"/>
+                        <a:ea typeface="Arial" charset="0"/>
+                        <a:cs typeface="Arial" charset="0"/>
                       </a:endParaRPr>
                     </a:p>
                   </a:txBody>
-                  <a:tcPr marL="91440" marR="91440" marT="45720" marB="45720">
+                  <a:tcPr marL="101600" marR="101600" marT="50800" marB="50800" anchor="ctr">
                     <a:lnL w="6350" cap="flat" cmpd="sng" algn="ctr">
                       <a:solidFill>
                         <a:srgbClr val="E5E2DC"/>
@@ -3297,7 +3001,7 @@
                   </a:tcPr>
                 </a:tc>
               </a:tr>
-              <a:tr h="502920">
+              <a:tr h="365760">
                 <a:tc>
                   <a:txBody>
                     <a:bodyPr/>
@@ -3311,20 +3015,20 @@
                           <a:solidFill>
                             <a:srgbClr val="3D3A36"/>
                           </a:solidFill>
-                          <a:latin typeface="Calibri" pitchFamily="34" charset="0"/>
-                          <a:ea typeface="Calibri" pitchFamily="34" charset="-122"/>
-                          <a:cs typeface="Calibri" pitchFamily="34" charset="-120"/>
+                          <a:latin typeface="Arial" pitchFamily="34" charset="0"/>
+                          <a:ea typeface="Arial" pitchFamily="34" charset="-122"/>
+                          <a:cs typeface="Arial" pitchFamily="34" charset="-120"/>
                         </a:rPr>
                         <a:t>Mass</a:t>
                       </a:r>
                       <a:endParaRPr lang="en-US" sz="1200" dirty="0">
-                        <a:latin typeface="Calibri" charset="0"/>
-                        <a:ea typeface="Calibri" charset="0"/>
-                        <a:cs typeface="Calibri" charset="0"/>
+                        <a:latin typeface="Arial" charset="0"/>
+                        <a:ea typeface="Arial" charset="0"/>
+                        <a:cs typeface="Arial" charset="0"/>
                       </a:endParaRPr>
                     </a:p>
                   </a:txBody>
-                  <a:tcPr marL="91440" marR="91440" marT="45720" marB="45720">
+                  <a:tcPr marL="101600" marR="101600" marT="50800" marB="50800" anchor="ctr">
                     <a:lnL w="6350" cap="flat" cmpd="sng" algn="ctr">
                       <a:solidFill>
                         <a:srgbClr val="E5E2DC"/>
@@ -3379,20 +3083,20 @@
                           <a:solidFill>
                             <a:srgbClr val="3D3A36"/>
                           </a:solidFill>
-                          <a:latin typeface="Calibri" pitchFamily="34" charset="0"/>
-                          <a:ea typeface="Calibri" pitchFamily="34" charset="-122"/>
-                          <a:cs typeface="Calibri" pitchFamily="34" charset="-120"/>
+                          <a:latin typeface="Arial" pitchFamily="34" charset="0"/>
+                          <a:ea typeface="Arial" pitchFamily="34" charset="-122"/>
+                          <a:cs typeface="Arial" pitchFamily="34" charset="-120"/>
                         </a:rPr>
-                        <a:t>kilogram</a:t>
+                        <a:t>gram / kilogram</a:t>
                       </a:r>
                       <a:endParaRPr lang="en-US" sz="1200" dirty="0">
-                        <a:latin typeface="Calibri" charset="0"/>
-                        <a:ea typeface="Calibri" charset="0"/>
-                        <a:cs typeface="Calibri" charset="0"/>
+                        <a:latin typeface="Arial" charset="0"/>
+                        <a:ea typeface="Arial" charset="0"/>
+                        <a:cs typeface="Arial" charset="0"/>
                       </a:endParaRPr>
                     </a:p>
                   </a:txBody>
-                  <a:tcPr marL="91440" marR="91440" marT="45720" marB="45720">
+                  <a:tcPr marL="101600" marR="101600" marT="50800" marB="50800" anchor="ctr">
                     <a:lnL w="6350" cap="flat" cmpd="sng" algn="ctr">
                       <a:solidFill>
                         <a:srgbClr val="E5E2DC"/>
@@ -3447,20 +3151,20 @@
                           <a:solidFill>
                             <a:srgbClr val="3D3A36"/>
                           </a:solidFill>
-                          <a:latin typeface="Calibri" pitchFamily="34" charset="0"/>
-                          <a:ea typeface="Calibri" pitchFamily="34" charset="-122"/>
-                          <a:cs typeface="Calibri" pitchFamily="34" charset="-120"/>
+                          <a:latin typeface="Arial" pitchFamily="34" charset="0"/>
+                          <a:ea typeface="Arial" pitchFamily="34" charset="-122"/>
+                          <a:cs typeface="Arial" pitchFamily="34" charset="-120"/>
                         </a:rPr>
-                        <a:t>kg</a:t>
+                        <a:t>g / kg</a:t>
                       </a:r>
                       <a:endParaRPr lang="en-US" sz="1200" dirty="0">
-                        <a:latin typeface="Calibri" charset="0"/>
-                        <a:ea typeface="Calibri" charset="0"/>
-                        <a:cs typeface="Calibri" charset="0"/>
+                        <a:latin typeface="Arial" charset="0"/>
+                        <a:ea typeface="Arial" charset="0"/>
+                        <a:cs typeface="Arial" charset="0"/>
                       </a:endParaRPr>
                     </a:p>
                   </a:txBody>
-                  <a:tcPr marL="91440" marR="91440" marT="45720" marB="45720">
+                  <a:tcPr marL="101600" marR="101600" marT="50800" marB="50800" anchor="ctr">
                     <a:lnL w="6350" cap="flat" cmpd="sng" algn="ctr">
                       <a:solidFill>
                         <a:srgbClr val="E5E2DC"/>
@@ -3515,20 +3219,20 @@
                           <a:solidFill>
                             <a:srgbClr val="3D3A36"/>
                           </a:solidFill>
-                          <a:latin typeface="Calibri" pitchFamily="34" charset="0"/>
-                          <a:ea typeface="Calibri" pitchFamily="34" charset="-122"/>
-                          <a:cs typeface="Calibri" pitchFamily="34" charset="-120"/>
+                          <a:latin typeface="Arial" pitchFamily="34" charset="0"/>
+                          <a:ea typeface="Arial" pitchFamily="34" charset="-122"/>
+                          <a:cs typeface="Arial" pitchFamily="34" charset="-120"/>
                         </a:rPr>
-                        <a:t>Balance / scales</a:t>
+                        <a:t>Electronic balance</a:t>
                       </a:r>
                       <a:endParaRPr lang="en-US" sz="1200" dirty="0">
-                        <a:latin typeface="Calibri" charset="0"/>
-                        <a:ea typeface="Calibri" charset="0"/>
-                        <a:cs typeface="Calibri" charset="0"/>
+                        <a:latin typeface="Arial" charset="0"/>
+                        <a:ea typeface="Arial" charset="0"/>
+                        <a:cs typeface="Arial" charset="0"/>
                       </a:endParaRPr>
                     </a:p>
                   </a:txBody>
-                  <a:tcPr marL="91440" marR="91440" marT="45720" marB="45720">
+                  <a:tcPr marL="101600" marR="101600" marT="50800" marB="50800" anchor="ctr">
                     <a:lnL w="6350" cap="flat" cmpd="sng" algn="ctr">
                       <a:solidFill>
                         <a:srgbClr val="E5E2DC"/>
@@ -3571,7 +3275,7 @@
                   </a:tcPr>
                 </a:tc>
               </a:tr>
-              <a:tr h="502920">
+              <a:tr h="365760">
                 <a:tc>
                   <a:txBody>
                     <a:bodyPr/>
@@ -3585,20 +3289,20 @@
                           <a:solidFill>
                             <a:srgbClr val="3D3A36"/>
                           </a:solidFill>
-                          <a:latin typeface="Calibri" pitchFamily="34" charset="0"/>
-                          <a:ea typeface="Calibri" pitchFamily="34" charset="-122"/>
-                          <a:cs typeface="Calibri" pitchFamily="34" charset="-120"/>
+                          <a:latin typeface="Arial" pitchFamily="34" charset="0"/>
+                          <a:ea typeface="Arial" pitchFamily="34" charset="-122"/>
+                          <a:cs typeface="Arial" pitchFamily="34" charset="-120"/>
                         </a:rPr>
-                        <a:t>Time</a:t>
+                        <a:t>Volume</a:t>
                       </a:r>
                       <a:endParaRPr lang="en-US" sz="1200" dirty="0">
-                        <a:latin typeface="Calibri" charset="0"/>
-                        <a:ea typeface="Calibri" charset="0"/>
-                        <a:cs typeface="Calibri" charset="0"/>
+                        <a:latin typeface="Arial" charset="0"/>
+                        <a:ea typeface="Arial" charset="0"/>
+                        <a:cs typeface="Arial" charset="0"/>
                       </a:endParaRPr>
                     </a:p>
                   </a:txBody>
-                  <a:tcPr marL="91440" marR="91440" marT="45720" marB="45720">
+                  <a:tcPr marL="101600" marR="101600" marT="50800" marB="50800" anchor="ctr">
                     <a:lnL w="6350" cap="flat" cmpd="sng" algn="ctr">
                       <a:solidFill>
                         <a:srgbClr val="E5E2DC"/>
@@ -3653,20 +3357,20 @@
                           <a:solidFill>
                             <a:srgbClr val="3D3A36"/>
                           </a:solidFill>
-                          <a:latin typeface="Calibri" pitchFamily="34" charset="0"/>
-                          <a:ea typeface="Calibri" pitchFamily="34" charset="-122"/>
-                          <a:cs typeface="Calibri" pitchFamily="34" charset="-120"/>
+                          <a:latin typeface="Arial" pitchFamily="34" charset="0"/>
+                          <a:ea typeface="Arial" pitchFamily="34" charset="-122"/>
+                          <a:cs typeface="Arial" pitchFamily="34" charset="-120"/>
                         </a:rPr>
-                        <a:t>second</a:t>
+                        <a:t>millilitre / litre</a:t>
                       </a:r>
                       <a:endParaRPr lang="en-US" sz="1200" dirty="0">
-                        <a:latin typeface="Calibri" charset="0"/>
-                        <a:ea typeface="Calibri" charset="0"/>
-                        <a:cs typeface="Calibri" charset="0"/>
+                        <a:latin typeface="Arial" charset="0"/>
+                        <a:ea typeface="Arial" charset="0"/>
+                        <a:cs typeface="Arial" charset="0"/>
                       </a:endParaRPr>
                     </a:p>
                   </a:txBody>
-                  <a:tcPr marL="91440" marR="91440" marT="45720" marB="45720">
+                  <a:tcPr marL="101600" marR="101600" marT="50800" marB="50800" anchor="ctr">
                     <a:lnL w="6350" cap="flat" cmpd="sng" algn="ctr">
                       <a:solidFill>
                         <a:srgbClr val="E5E2DC"/>
@@ -3721,20 +3425,20 @@
                           <a:solidFill>
                             <a:srgbClr val="3D3A36"/>
                           </a:solidFill>
-                          <a:latin typeface="Calibri" pitchFamily="34" charset="0"/>
-                          <a:ea typeface="Calibri" pitchFamily="34" charset="-122"/>
-                          <a:cs typeface="Calibri" pitchFamily="34" charset="-120"/>
+                          <a:latin typeface="Arial" pitchFamily="34" charset="0"/>
+                          <a:ea typeface="Arial" pitchFamily="34" charset="-122"/>
+                          <a:cs typeface="Arial" pitchFamily="34" charset="-120"/>
                         </a:rPr>
-                        <a:t>s</a:t>
+                        <a:t>mL / L</a:t>
                       </a:r>
                       <a:endParaRPr lang="en-US" sz="1200" dirty="0">
-                        <a:latin typeface="Calibri" charset="0"/>
-                        <a:ea typeface="Calibri" charset="0"/>
-                        <a:cs typeface="Calibri" charset="0"/>
+                        <a:latin typeface="Arial" charset="0"/>
+                        <a:ea typeface="Arial" charset="0"/>
+                        <a:cs typeface="Arial" charset="0"/>
                       </a:endParaRPr>
                     </a:p>
                   </a:txBody>
-                  <a:tcPr marL="91440" marR="91440" marT="45720" marB="45720">
+                  <a:tcPr marL="101600" marR="101600" marT="50800" marB="50800" anchor="ctr">
                     <a:lnL w="6350" cap="flat" cmpd="sng" algn="ctr">
                       <a:solidFill>
                         <a:srgbClr val="E5E2DC"/>
@@ -3789,20 +3493,20 @@
                           <a:solidFill>
                             <a:srgbClr val="3D3A36"/>
                           </a:solidFill>
-                          <a:latin typeface="Calibri" pitchFamily="34" charset="0"/>
-                          <a:ea typeface="Calibri" pitchFamily="34" charset="-122"/>
-                          <a:cs typeface="Calibri" pitchFamily="34" charset="-120"/>
+                          <a:latin typeface="Arial" pitchFamily="34" charset="0"/>
+                          <a:ea typeface="Arial" pitchFamily="34" charset="-122"/>
+                          <a:cs typeface="Arial" pitchFamily="34" charset="-120"/>
                         </a:rPr>
-                        <a:t>Stopwatch</a:t>
+                        <a:t>Measuring cylinder</a:t>
                       </a:r>
                       <a:endParaRPr lang="en-US" sz="1200" dirty="0">
-                        <a:latin typeface="Calibri" charset="0"/>
-                        <a:ea typeface="Calibri" charset="0"/>
-                        <a:cs typeface="Calibri" charset="0"/>
+                        <a:latin typeface="Arial" charset="0"/>
+                        <a:ea typeface="Arial" charset="0"/>
+                        <a:cs typeface="Arial" charset="0"/>
                       </a:endParaRPr>
                     </a:p>
                   </a:txBody>
-                  <a:tcPr marL="91440" marR="91440" marT="45720" marB="45720">
+                  <a:tcPr marL="101600" marR="101600" marT="50800" marB="50800" anchor="ctr">
                     <a:lnL w="6350" cap="flat" cmpd="sng" algn="ctr">
                       <a:solidFill>
                         <a:srgbClr val="E5E2DC"/>
@@ -3845,7 +3549,7 @@
                   </a:tcPr>
                 </a:tc>
               </a:tr>
-              <a:tr h="502920">
+              <a:tr h="365760">
                 <a:tc>
                   <a:txBody>
                     <a:bodyPr/>
@@ -3859,20 +3563,20 @@
                           <a:solidFill>
                             <a:srgbClr val="3D3A36"/>
                           </a:solidFill>
-                          <a:latin typeface="Calibri" pitchFamily="34" charset="0"/>
-                          <a:ea typeface="Calibri" pitchFamily="34" charset="-122"/>
-                          <a:cs typeface="Calibri" pitchFamily="34" charset="-120"/>
+                          <a:latin typeface="Arial" pitchFamily="34" charset="0"/>
+                          <a:ea typeface="Arial" pitchFamily="34" charset="-122"/>
+                          <a:cs typeface="Arial" pitchFamily="34" charset="-120"/>
                         </a:rPr>
                         <a:t>Temperature</a:t>
                       </a:r>
                       <a:endParaRPr lang="en-US" sz="1200" dirty="0">
-                        <a:latin typeface="Calibri" charset="0"/>
-                        <a:ea typeface="Calibri" charset="0"/>
-                        <a:cs typeface="Calibri" charset="0"/>
+                        <a:latin typeface="Arial" charset="0"/>
+                        <a:ea typeface="Arial" charset="0"/>
+                        <a:cs typeface="Arial" charset="0"/>
                       </a:endParaRPr>
                     </a:p>
                   </a:txBody>
-                  <a:tcPr marL="91440" marR="91440" marT="45720" marB="45720">
+                  <a:tcPr marL="101600" marR="101600" marT="50800" marB="50800" anchor="ctr">
                     <a:lnL w="6350" cap="flat" cmpd="sng" algn="ctr">
                       <a:solidFill>
                         <a:srgbClr val="E5E2DC"/>
@@ -3927,20 +3631,20 @@
                           <a:solidFill>
                             <a:srgbClr val="3D3A36"/>
                           </a:solidFill>
-                          <a:latin typeface="Calibri" pitchFamily="34" charset="0"/>
-                          <a:ea typeface="Calibri" pitchFamily="34" charset="-122"/>
-                          <a:cs typeface="Calibri" pitchFamily="34" charset="-120"/>
+                          <a:latin typeface="Arial" pitchFamily="34" charset="0"/>
+                          <a:ea typeface="Arial" pitchFamily="34" charset="-122"/>
+                          <a:cs typeface="Arial" pitchFamily="34" charset="-120"/>
                         </a:rPr>
                         <a:t>degrees Celsius</a:t>
                       </a:r>
                       <a:endParaRPr lang="en-US" sz="1200" dirty="0">
-                        <a:latin typeface="Calibri" charset="0"/>
-                        <a:ea typeface="Calibri" charset="0"/>
-                        <a:cs typeface="Calibri" charset="0"/>
+                        <a:latin typeface="Arial" charset="0"/>
+                        <a:ea typeface="Arial" charset="0"/>
+                        <a:cs typeface="Arial" charset="0"/>
                       </a:endParaRPr>
                     </a:p>
                   </a:txBody>
-                  <a:tcPr marL="91440" marR="91440" marT="45720" marB="45720">
+                  <a:tcPr marL="101600" marR="101600" marT="50800" marB="50800" anchor="ctr">
                     <a:lnL w="6350" cap="flat" cmpd="sng" algn="ctr">
                       <a:solidFill>
                         <a:srgbClr val="E5E2DC"/>
@@ -3995,20 +3699,20 @@
                           <a:solidFill>
                             <a:srgbClr val="3D3A36"/>
                           </a:solidFill>
-                          <a:latin typeface="Calibri" pitchFamily="34" charset="0"/>
-                          <a:ea typeface="Calibri" pitchFamily="34" charset="-122"/>
-                          <a:cs typeface="Calibri" pitchFamily="34" charset="-120"/>
+                          <a:latin typeface="Arial" pitchFamily="34" charset="0"/>
+                          <a:ea typeface="Arial" pitchFamily="34" charset="-122"/>
+                          <a:cs typeface="Arial" pitchFamily="34" charset="-120"/>
                         </a:rPr>
                         <a:t>°C</a:t>
                       </a:r>
                       <a:endParaRPr lang="en-US" sz="1200" dirty="0">
-                        <a:latin typeface="Calibri" charset="0"/>
-                        <a:ea typeface="Calibri" charset="0"/>
-                        <a:cs typeface="Calibri" charset="0"/>
+                        <a:latin typeface="Arial" charset="0"/>
+                        <a:ea typeface="Arial" charset="0"/>
+                        <a:cs typeface="Arial" charset="0"/>
                       </a:endParaRPr>
                     </a:p>
                   </a:txBody>
-                  <a:tcPr marL="91440" marR="91440" marT="45720" marB="45720">
+                  <a:tcPr marL="101600" marR="101600" marT="50800" marB="50800" anchor="ctr">
                     <a:lnL w="6350" cap="flat" cmpd="sng" algn="ctr">
                       <a:solidFill>
                         <a:srgbClr val="E5E2DC"/>
@@ -4063,20 +3767,20 @@
                           <a:solidFill>
                             <a:srgbClr val="3D3A36"/>
                           </a:solidFill>
-                          <a:latin typeface="Calibri" pitchFamily="34" charset="0"/>
-                          <a:ea typeface="Calibri" pitchFamily="34" charset="-122"/>
-                          <a:cs typeface="Calibri" pitchFamily="34" charset="-120"/>
+                          <a:latin typeface="Arial" pitchFamily="34" charset="0"/>
+                          <a:ea typeface="Arial" pitchFamily="34" charset="-122"/>
+                          <a:cs typeface="Arial" pitchFamily="34" charset="-120"/>
                         </a:rPr>
                         <a:t>Thermometer</a:t>
                       </a:r>
                       <a:endParaRPr lang="en-US" sz="1200" dirty="0">
-                        <a:latin typeface="Calibri" charset="0"/>
-                        <a:ea typeface="Calibri" charset="0"/>
-                        <a:cs typeface="Calibri" charset="0"/>
+                        <a:latin typeface="Arial" charset="0"/>
+                        <a:ea typeface="Arial" charset="0"/>
+                        <a:cs typeface="Arial" charset="0"/>
                       </a:endParaRPr>
                     </a:p>
                   </a:txBody>
-                  <a:tcPr marL="91440" marR="91440" marT="45720" marB="45720">
+                  <a:tcPr marL="101600" marR="101600" marT="50800" marB="50800" anchor="ctr">
                     <a:lnL w="6350" cap="flat" cmpd="sng" algn="ctr">
                       <a:solidFill>
                         <a:srgbClr val="E5E2DC"/>
@@ -4119,7 +3823,7 @@
                   </a:tcPr>
                 </a:tc>
               </a:tr>
-              <a:tr h="502920">
+              <a:tr h="365760">
                 <a:tc>
                   <a:txBody>
                     <a:bodyPr/>
@@ -4133,20 +3837,20 @@
                           <a:solidFill>
                             <a:srgbClr val="3D3A36"/>
                           </a:solidFill>
-                          <a:latin typeface="Calibri" pitchFamily="34" charset="0"/>
-                          <a:ea typeface="Calibri" pitchFamily="34" charset="-122"/>
-                          <a:cs typeface="Calibri" pitchFamily="34" charset="-120"/>
+                          <a:latin typeface="Arial" pitchFamily="34" charset="0"/>
+                          <a:ea typeface="Arial" pitchFamily="34" charset="-122"/>
+                          <a:cs typeface="Arial" pitchFamily="34" charset="-120"/>
                         </a:rPr>
-                        <a:t>Volume</a:t>
+                        <a:t>Time</a:t>
                       </a:r>
                       <a:endParaRPr lang="en-US" sz="1200" dirty="0">
-                        <a:latin typeface="Calibri" charset="0"/>
-                        <a:ea typeface="Calibri" charset="0"/>
-                        <a:cs typeface="Calibri" charset="0"/>
+                        <a:latin typeface="Arial" charset="0"/>
+                        <a:ea typeface="Arial" charset="0"/>
+                        <a:cs typeface="Arial" charset="0"/>
                       </a:endParaRPr>
                     </a:p>
                   </a:txBody>
-                  <a:tcPr marL="91440" marR="91440" marT="45720" marB="45720">
+                  <a:tcPr marL="101600" marR="101600" marT="50800" marB="50800" anchor="ctr">
                     <a:lnL w="6350" cap="flat" cmpd="sng" algn="ctr">
                       <a:solidFill>
                         <a:srgbClr val="E5E2DC"/>
@@ -4201,20 +3905,20 @@
                           <a:solidFill>
                             <a:srgbClr val="3D3A36"/>
                           </a:solidFill>
-                          <a:latin typeface="Calibri" pitchFamily="34" charset="0"/>
-                          <a:ea typeface="Calibri" pitchFamily="34" charset="-122"/>
-                          <a:cs typeface="Calibri" pitchFamily="34" charset="-120"/>
+                          <a:latin typeface="Arial" pitchFamily="34" charset="0"/>
+                          <a:ea typeface="Arial" pitchFamily="34" charset="-122"/>
+                          <a:cs typeface="Arial" pitchFamily="34" charset="-120"/>
                         </a:rPr>
-                        <a:t>cubic centimetre</a:t>
+                        <a:t>seconds / minutes</a:t>
                       </a:r>
                       <a:endParaRPr lang="en-US" sz="1200" dirty="0">
-                        <a:latin typeface="Calibri" charset="0"/>
-                        <a:ea typeface="Calibri" charset="0"/>
-                        <a:cs typeface="Calibri" charset="0"/>
+                        <a:latin typeface="Arial" charset="0"/>
+                        <a:ea typeface="Arial" charset="0"/>
+                        <a:cs typeface="Arial" charset="0"/>
                       </a:endParaRPr>
                     </a:p>
                   </a:txBody>
-                  <a:tcPr marL="91440" marR="91440" marT="45720" marB="45720">
+                  <a:tcPr marL="101600" marR="101600" marT="50800" marB="50800" anchor="ctr">
                     <a:lnL w="6350" cap="flat" cmpd="sng" algn="ctr">
                       <a:solidFill>
                         <a:srgbClr val="E5E2DC"/>
@@ -4269,20 +3973,20 @@
                           <a:solidFill>
                             <a:srgbClr val="3D3A36"/>
                           </a:solidFill>
-                          <a:latin typeface="Calibri" pitchFamily="34" charset="0"/>
-                          <a:ea typeface="Calibri" pitchFamily="34" charset="-122"/>
-                          <a:cs typeface="Calibri" pitchFamily="34" charset="-120"/>
+                          <a:latin typeface="Arial" pitchFamily="34" charset="0"/>
+                          <a:ea typeface="Arial" pitchFamily="34" charset="-122"/>
+                          <a:cs typeface="Arial" pitchFamily="34" charset="-120"/>
                         </a:rPr>
-                        <a:t>cm³</a:t>
+                        <a:t>s / min</a:t>
                       </a:r>
                       <a:endParaRPr lang="en-US" sz="1200" dirty="0">
-                        <a:latin typeface="Calibri" charset="0"/>
-                        <a:ea typeface="Calibri" charset="0"/>
-                        <a:cs typeface="Calibri" charset="0"/>
+                        <a:latin typeface="Arial" charset="0"/>
+                        <a:ea typeface="Arial" charset="0"/>
+                        <a:cs typeface="Arial" charset="0"/>
                       </a:endParaRPr>
                     </a:p>
                   </a:txBody>
-                  <a:tcPr marL="91440" marR="91440" marT="45720" marB="45720">
+                  <a:tcPr marL="101600" marR="101600" marT="50800" marB="50800" anchor="ctr">
                     <a:lnL w="6350" cap="flat" cmpd="sng" algn="ctr">
                       <a:solidFill>
                         <a:srgbClr val="E5E2DC"/>
@@ -4337,20 +4041,20 @@
                           <a:solidFill>
                             <a:srgbClr val="3D3A36"/>
                           </a:solidFill>
-                          <a:latin typeface="Calibri" pitchFamily="34" charset="0"/>
-                          <a:ea typeface="Calibri" pitchFamily="34" charset="-122"/>
-                          <a:cs typeface="Calibri" pitchFamily="34" charset="-120"/>
+                          <a:latin typeface="Arial" pitchFamily="34" charset="0"/>
+                          <a:ea typeface="Arial" pitchFamily="34" charset="-122"/>
+                          <a:cs typeface="Arial" pitchFamily="34" charset="-120"/>
                         </a:rPr>
-                        <a:t>Measuring cylinder</a:t>
+                        <a:t>Stopwatch</a:t>
                       </a:r>
                       <a:endParaRPr lang="en-US" sz="1200" dirty="0">
-                        <a:latin typeface="Calibri" charset="0"/>
-                        <a:ea typeface="Calibri" charset="0"/>
-                        <a:cs typeface="Calibri" charset="0"/>
+                        <a:latin typeface="Arial" charset="0"/>
+                        <a:ea typeface="Arial" charset="0"/>
+                        <a:cs typeface="Arial" charset="0"/>
                       </a:endParaRPr>
                     </a:p>
                   </a:txBody>
-                  <a:tcPr marL="91440" marR="91440" marT="45720" marB="45720">
+                  <a:tcPr marL="101600" marR="101600" marT="50800" marB="50800" anchor="ctr">
                     <a:lnL w="6350" cap="flat" cmpd="sng" algn="ctr">
                       <a:solidFill>
                         <a:srgbClr val="E5E2DC"/>
@@ -4393,7 +4097,7 @@
                   </a:tcPr>
                 </a:tc>
               </a:tr>
-              <a:tr h="502920">
+              <a:tr h="365760">
                 <a:tc>
                   <a:txBody>
                     <a:bodyPr/>
@@ -4407,20 +4111,20 @@
                           <a:solidFill>
                             <a:srgbClr val="3D3A36"/>
                           </a:solidFill>
-                          <a:latin typeface="Calibri" pitchFamily="34" charset="0"/>
-                          <a:ea typeface="Calibri" pitchFamily="34" charset="-122"/>
-                          <a:cs typeface="Calibri" pitchFamily="34" charset="-120"/>
+                          <a:latin typeface="Arial" pitchFamily="34" charset="0"/>
+                          <a:ea typeface="Arial" pitchFamily="34" charset="-122"/>
+                          <a:cs typeface="Arial" pitchFamily="34" charset="-120"/>
                         </a:rPr>
                         <a:t>Force</a:t>
                       </a:r>
                       <a:endParaRPr lang="en-US" sz="1200" dirty="0">
-                        <a:latin typeface="Calibri" charset="0"/>
-                        <a:ea typeface="Calibri" charset="0"/>
-                        <a:cs typeface="Calibri" charset="0"/>
+                        <a:latin typeface="Arial" charset="0"/>
+                        <a:ea typeface="Arial" charset="0"/>
+                        <a:cs typeface="Arial" charset="0"/>
                       </a:endParaRPr>
                     </a:p>
                   </a:txBody>
-                  <a:tcPr marL="91440" marR="91440" marT="45720" marB="45720">
+                  <a:tcPr marL="101600" marR="101600" marT="50800" marB="50800" anchor="ctr">
                     <a:lnL w="6350" cap="flat" cmpd="sng" algn="ctr">
                       <a:solidFill>
                         <a:srgbClr val="E5E2DC"/>
@@ -4475,20 +4179,20 @@
                           <a:solidFill>
                             <a:srgbClr val="3D3A36"/>
                           </a:solidFill>
-                          <a:latin typeface="Calibri" pitchFamily="34" charset="0"/>
-                          <a:ea typeface="Calibri" pitchFamily="34" charset="-122"/>
-                          <a:cs typeface="Calibri" pitchFamily="34" charset="-120"/>
+                          <a:latin typeface="Arial" pitchFamily="34" charset="0"/>
+                          <a:ea typeface="Arial" pitchFamily="34" charset="-122"/>
+                          <a:cs typeface="Arial" pitchFamily="34" charset="-120"/>
                         </a:rPr>
-                        <a:t>newton</a:t>
+                        <a:t>Newton</a:t>
                       </a:r>
                       <a:endParaRPr lang="en-US" sz="1200" dirty="0">
-                        <a:latin typeface="Calibri" charset="0"/>
-                        <a:ea typeface="Calibri" charset="0"/>
-                        <a:cs typeface="Calibri" charset="0"/>
+                        <a:latin typeface="Arial" charset="0"/>
+                        <a:ea typeface="Arial" charset="0"/>
+                        <a:cs typeface="Arial" charset="0"/>
                       </a:endParaRPr>
                     </a:p>
                   </a:txBody>
-                  <a:tcPr marL="91440" marR="91440" marT="45720" marB="45720">
+                  <a:tcPr marL="101600" marR="101600" marT="50800" marB="50800" anchor="ctr">
                     <a:lnL w="6350" cap="flat" cmpd="sng" algn="ctr">
                       <a:solidFill>
                         <a:srgbClr val="E5E2DC"/>
@@ -4543,20 +4247,20 @@
                           <a:solidFill>
                             <a:srgbClr val="3D3A36"/>
                           </a:solidFill>
-                          <a:latin typeface="Calibri" pitchFamily="34" charset="0"/>
-                          <a:ea typeface="Calibri" pitchFamily="34" charset="-122"/>
-                          <a:cs typeface="Calibri" pitchFamily="34" charset="-120"/>
+                          <a:latin typeface="Arial" pitchFamily="34" charset="0"/>
+                          <a:ea typeface="Arial" pitchFamily="34" charset="-122"/>
+                          <a:cs typeface="Arial" pitchFamily="34" charset="-120"/>
                         </a:rPr>
                         <a:t>N</a:t>
                       </a:r>
                       <a:endParaRPr lang="en-US" sz="1200" dirty="0">
-                        <a:latin typeface="Calibri" charset="0"/>
-                        <a:ea typeface="Calibri" charset="0"/>
-                        <a:cs typeface="Calibri" charset="0"/>
+                        <a:latin typeface="Arial" charset="0"/>
+                        <a:ea typeface="Arial" charset="0"/>
+                        <a:cs typeface="Arial" charset="0"/>
                       </a:endParaRPr>
                     </a:p>
                   </a:txBody>
-                  <a:tcPr marL="91440" marR="91440" marT="45720" marB="45720">
+                  <a:tcPr marL="101600" marR="101600" marT="50800" marB="50800" anchor="ctr">
                     <a:lnL w="6350" cap="flat" cmpd="sng" algn="ctr">
                       <a:solidFill>
                         <a:srgbClr val="E5E2DC"/>
@@ -4611,20 +4315,20 @@
                           <a:solidFill>
                             <a:srgbClr val="3D3A36"/>
                           </a:solidFill>
-                          <a:latin typeface="Calibri" pitchFamily="34" charset="0"/>
-                          <a:ea typeface="Calibri" pitchFamily="34" charset="-122"/>
-                          <a:cs typeface="Calibri" pitchFamily="34" charset="-120"/>
+                          <a:latin typeface="Arial" pitchFamily="34" charset="0"/>
+                          <a:ea typeface="Arial" pitchFamily="34" charset="-122"/>
+                          <a:cs typeface="Arial" pitchFamily="34" charset="-120"/>
                         </a:rPr>
                         <a:t>Newton meter</a:t>
                       </a:r>
                       <a:endParaRPr lang="en-US" sz="1200" dirty="0">
-                        <a:latin typeface="Calibri" charset="0"/>
-                        <a:ea typeface="Calibri" charset="0"/>
-                        <a:cs typeface="Calibri" charset="0"/>
+                        <a:latin typeface="Arial" charset="0"/>
+                        <a:ea typeface="Arial" charset="0"/>
+                        <a:cs typeface="Arial" charset="0"/>
                       </a:endParaRPr>
                     </a:p>
                   </a:txBody>
-                  <a:tcPr marL="91440" marR="91440" marT="45720" marB="45720">
+                  <a:tcPr marL="101600" marR="101600" marT="50800" marB="50800" anchor="ctr">
                     <a:lnL w="6350" cap="flat" cmpd="sng" algn="ctr">
                       <a:solidFill>
                         <a:srgbClr val="E5E2DC"/>
@@ -4712,47 +4416,7 @@
         <p:spPr>
           <a:xfrm>
             <a:off x="0" y="0"/>
-            <a:ext cx="9144000" cy="822960"/>
-          </a:xfrm>
-          <a:prstGeom prst="rect">
-            <a:avLst/>
-          </a:prstGeom>
-          <a:solidFill>
-            <a:srgbClr val="FFFFFF"/>
-          </a:solidFill>
-          <a:ln/>
-        </p:spPr>
-      </p:sp>
-      <p:sp>
-        <p:nvSpPr>
-          <p:cNvPr id="3" name="Shape 1"/>
-          <p:cNvSpPr/>
-          <p:nvPr/>
-        </p:nvSpPr>
-        <p:spPr>
-          <a:xfrm>
-            <a:off x="0" y="804672"/>
-            <a:ext cx="9144000" cy="27432"/>
-          </a:xfrm>
-          <a:prstGeom prst="rect">
-            <a:avLst/>
-          </a:prstGeom>
-          <a:solidFill>
-            <a:srgbClr val="E5E2DC"/>
-          </a:solidFill>
-          <a:ln/>
-        </p:spPr>
-      </p:sp>
-      <p:sp>
-        <p:nvSpPr>
-          <p:cNvPr id="4" name="Shape 2"/>
-          <p:cNvSpPr/>
-          <p:nvPr/>
-        </p:nvSpPr>
-        <p:spPr>
-          <a:xfrm>
-            <a:off x="548640" y="201168"/>
-            <a:ext cx="54864" cy="420624"/>
+            <a:ext cx="73152" cy="5148072"/>
           </a:xfrm>
           <a:prstGeom prst="rect">
             <a:avLst/>
@@ -4765,14 +4429,14 @@
       </p:sp>
       <p:sp>
         <p:nvSpPr>
-          <p:cNvPr id="5" name="Text 3"/>
+          <p:cNvPr id="3" name="Text 1"/>
           <p:cNvSpPr/>
           <p:nvPr/>
         </p:nvSpPr>
         <p:spPr>
           <a:xfrm>
-            <a:off x="777240" y="137160"/>
-            <a:ext cx="7772400" cy="548640"/>
+            <a:off x="548640" y="274320"/>
+            <a:ext cx="9144000" cy="640080"/>
           </a:xfrm>
           <a:prstGeom prst="rect">
             <a:avLst/>
@@ -4781,14 +4445,14 @@
           <a:ln/>
         </p:spPr>
         <p:txBody>
-          <a:bodyPr wrap="square" lIns="0" tIns="0" rIns="0" bIns="0" rtlCol="0" anchor="ctr"/>
+          <a:bodyPr wrap="square" rtlCol="0" anchor="ctr"/>
           <a:lstStyle/>
           <a:p>
             <a:pPr indent="0" marL="0">
               <a:buNone/>
             </a:pPr>
             <a:r>
-              <a:rPr lang="en-US" sz="2000" b="1" dirty="0">
+              <a:rPr lang="en-US" sz="2400" b="1" dirty="0">
                 <a:solidFill>
                   <a:srgbClr val="1B2A4A"/>
                 </a:solidFill>
@@ -4796,22 +4460,42 @@
                 <a:ea typeface="Georgia" pitchFamily="34" charset="-122"/>
                 <a:cs typeface="Georgia" pitchFamily="34" charset="-120"/>
               </a:rPr>
-              <a:t>How to Measure Accurately</a:t>
-            </a:r>
-            <a:endParaRPr lang="en-US" sz="2000" dirty="0"/>
+              <a:t>How to Measure Volume Correctly</a:t>
+            </a:r>
+            <a:endParaRPr lang="en-US" sz="2400" dirty="0"/>
           </a:p>
         </p:txBody>
       </p:sp>
       <p:sp>
         <p:nvSpPr>
-          <p:cNvPr id="6" name="Text 4"/>
+          <p:cNvPr id="4" name="Shape 2"/>
           <p:cNvSpPr/>
           <p:nvPr/>
         </p:nvSpPr>
         <p:spPr>
           <a:xfrm>
-            <a:off x="731520" y="1051560"/>
-            <a:ext cx="7680960" cy="3108960"/>
+            <a:off x="548640" y="960120"/>
+            <a:ext cx="2286000" cy="36576"/>
+          </a:xfrm>
+          <a:prstGeom prst="rect">
+            <a:avLst/>
+          </a:prstGeom>
+          <a:solidFill>
+            <a:srgbClr val="2A9D8F"/>
+          </a:solidFill>
+          <a:ln/>
+        </p:spPr>
+      </p:sp>
+      <p:sp>
+        <p:nvSpPr>
+          <p:cNvPr id="5" name="Text 3"/>
+          <p:cNvSpPr/>
+          <p:nvPr/>
+        </p:nvSpPr>
+        <p:spPr>
+          <a:xfrm>
+            <a:off x="548640" y="1188720"/>
+            <a:ext cx="10058400" cy="3474720"/>
           </a:xfrm>
           <a:prstGeom prst="rect">
             <a:avLst/>
@@ -4823,210 +4507,136 @@
           <a:bodyPr wrap="square" rtlCol="0" anchor="t"/>
           <a:lstStyle/>
           <a:p>
-            <a:pPr marL="342900" indent="-342900">
+            <a:pPr>
+              <a:lnSpc>
+                <a:spcPct val="150000"/>
+              </a:lnSpc>
               <a:spcAft>
-                <a:spcPts val="800"/>
+                <a:spcPts val="600"/>
               </a:spcAft>
-              <a:buSzPct val="100000"/>
-              <a:buChar char="•"/>
             </a:pPr>
             <a:r>
               <a:rPr lang="en-US" sz="1500" dirty="0">
                 <a:solidFill>
                   <a:srgbClr val="3D3A36"/>
                 </a:solidFill>
-                <a:latin typeface="Calibri" pitchFamily="34" charset="0"/>
-                <a:ea typeface="Calibri" pitchFamily="34" charset="-122"/>
-                <a:cs typeface="Calibri" pitchFamily="34" charset="-120"/>
+                <a:latin typeface="Arial" pitchFamily="34" charset="0"/>
+                <a:ea typeface="Arial" pitchFamily="34" charset="-122"/>
+                <a:cs typeface="Arial" pitchFamily="34" charset="-120"/>
               </a:rPr>
-              <a:t>Place the ruler at the 0 mark — not the edge of the ruler.</a:t>
+              <a:t>Place the measuring cylinder on a flat, level surface.</a:t>
             </a:r>
             <a:endParaRPr lang="en-US" sz="1500" dirty="0"/>
           </a:p>
           <a:p>
-            <a:pPr marL="342900" indent="-342900">
+            <a:pPr>
+              <a:lnSpc>
+                <a:spcPct val="150000"/>
+              </a:lnSpc>
               <a:spcAft>
-                <a:spcPts val="800"/>
+                <a:spcPts val="600"/>
               </a:spcAft>
-              <a:buSzPct val="100000"/>
-              <a:buChar char="•"/>
             </a:pPr>
             <a:r>
               <a:rPr lang="en-US" sz="1500" dirty="0">
                 <a:solidFill>
                   <a:srgbClr val="3D3A36"/>
                 </a:solidFill>
-                <a:latin typeface="Calibri" pitchFamily="34" charset="0"/>
-                <a:ea typeface="Calibri" pitchFamily="34" charset="-122"/>
-                <a:cs typeface="Calibri" pitchFamily="34" charset="-120"/>
+                <a:latin typeface="Arial" pitchFamily="34" charset="0"/>
+                <a:ea typeface="Arial" pitchFamily="34" charset="-122"/>
+                <a:cs typeface="Arial" pitchFamily="34" charset="-120"/>
               </a:rPr>
-              <a:t>Read a measuring cylinder at EYE LEVEL at the MENISCUS.</a:t>
+              <a:t>Pour the liquid slowly until near the desired amount.</a:t>
             </a:r>
             <a:endParaRPr lang="en-US" sz="1500" dirty="0"/>
           </a:p>
           <a:p>
-            <a:pPr marL="342900" indent="-342900">
+            <a:pPr>
+              <a:lnSpc>
+                <a:spcPct val="150000"/>
+              </a:lnSpc>
               <a:spcAft>
-                <a:spcPts val="800"/>
+                <a:spcPts val="600"/>
               </a:spcAft>
-              <a:buSzPct val="100000"/>
-              <a:buChar char="•"/>
             </a:pPr>
             <a:r>
               <a:rPr lang="en-US" sz="1500" dirty="0">
                 <a:solidFill>
                   <a:srgbClr val="3D3A36"/>
                 </a:solidFill>
-                <a:latin typeface="Calibri" pitchFamily="34" charset="0"/>
-                <a:ea typeface="Calibri" pitchFamily="34" charset="-122"/>
-                <a:cs typeface="Calibri" pitchFamily="34" charset="-120"/>
+                <a:latin typeface="Arial" pitchFamily="34" charset="0"/>
+                <a:ea typeface="Arial" pitchFamily="34" charset="-122"/>
+                <a:cs typeface="Arial" pitchFamily="34" charset="-120"/>
               </a:rPr>
-              <a:t>Wait for a thermometer to settle before reading.</a:t>
+              <a:t>Your eyes must be LEVEL with the liquid surface.</a:t>
             </a:r>
             <a:endParaRPr lang="en-US" sz="1500" dirty="0"/>
           </a:p>
           <a:p>
-            <a:pPr marL="342900" indent="-342900">
+            <a:pPr>
+              <a:lnSpc>
+                <a:spcPct val="150000"/>
+              </a:lnSpc>
               <a:spcAft>
-                <a:spcPts val="800"/>
+                <a:spcPts val="600"/>
               </a:spcAft>
-              <a:buSzPct val="100000"/>
-              <a:buChar char="•"/>
             </a:pPr>
             <a:r>
               <a:rPr lang="en-US" sz="1500" dirty="0">
                 <a:solidFill>
                   <a:srgbClr val="3D3A36"/>
                 </a:solidFill>
-                <a:latin typeface="Calibri" pitchFamily="34" charset="0"/>
-                <a:ea typeface="Calibri" pitchFamily="34" charset="-122"/>
-                <a:cs typeface="Calibri" pitchFamily="34" charset="-120"/>
+                <a:latin typeface="Arial" pitchFamily="34" charset="0"/>
+                <a:ea typeface="Arial" pitchFamily="34" charset="-122"/>
+                <a:cs typeface="Arial" pitchFamily="34" charset="-120"/>
               </a:rPr>
-              <a:t>Use the most appropriate instrument for the measurement.</a:t>
+              <a:t>Read from the bottom of the meniscus (curved surface).</a:t>
             </a:r>
             <a:endParaRPr lang="en-US" sz="1500" dirty="0"/>
           </a:p>
           <a:p>
-            <a:pPr marL="342900" indent="-342900">
+            <a:pPr>
+              <a:lnSpc>
+                <a:spcPct val="150000"/>
+              </a:lnSpc>
               <a:spcAft>
-                <a:spcPts val="800"/>
+                <a:spcPts val="600"/>
               </a:spcAft>
-              <a:buSzPct val="100000"/>
-              <a:buChar char="•"/>
             </a:pPr>
             <a:r>
               <a:rPr lang="en-US" sz="1500" dirty="0">
                 <a:solidFill>
                   <a:srgbClr val="3D3A36"/>
                 </a:solidFill>
-                <a:latin typeface="Calibri" pitchFamily="34" charset="0"/>
-                <a:ea typeface="Calibri" pitchFamily="34" charset="-122"/>
-                <a:cs typeface="Calibri" pitchFamily="34" charset="-120"/>
+                <a:latin typeface="Arial" pitchFamily="34" charset="0"/>
+                <a:ea typeface="Arial" pitchFamily="34" charset="-122"/>
+                <a:cs typeface="Arial" pitchFamily="34" charset="-120"/>
               </a:rPr>
-              <a:t>Record all measurements with the correct UNIT.</a:t>
+              <a:t>The meniscus curves down for water — read the lowest point.</a:t>
             </a:r>
             <a:endParaRPr lang="en-US" sz="1500" dirty="0"/>
           </a:p>
           <a:p>
-            <a:pPr marL="342900" indent="-342900">
+            <a:pPr>
+              <a:lnSpc>
+                <a:spcPct val="150000"/>
+              </a:lnSpc>
               <a:spcAft>
-                <a:spcPts val="800"/>
+                <a:spcPts val="600"/>
               </a:spcAft>
-              <a:buSzPct val="100000"/>
-              <a:buChar char="•"/>
             </a:pPr>
             <a:r>
               <a:rPr lang="en-US" sz="1500" dirty="0">
                 <a:solidFill>
                   <a:srgbClr val="3D3A36"/>
                 </a:solidFill>
-                <a:latin typeface="Calibri" pitchFamily="34" charset="0"/>
-                <a:ea typeface="Calibri" pitchFamily="34" charset="-122"/>
-                <a:cs typeface="Calibri" pitchFamily="34" charset="-120"/>
+                <a:latin typeface="Arial" pitchFamily="34" charset="0"/>
+                <a:ea typeface="Arial" pitchFamily="34" charset="-122"/>
+                <a:cs typeface="Arial" pitchFamily="34" charset="-120"/>
               </a:rPr>
-              <a:t>Take at least 3 readings and calculate the mean.</a:t>
+              <a:t>Record the value with the correct unit (mL).</a:t>
             </a:r>
             <a:endParaRPr lang="en-US" sz="1500" dirty="0"/>
-          </a:p>
-        </p:txBody>
-      </p:sp>
-      <p:sp>
-        <p:nvSpPr>
-          <p:cNvPr id="7" name="Shape 5"/>
-          <p:cNvSpPr/>
-          <p:nvPr/>
-        </p:nvSpPr>
-        <p:spPr>
-          <a:xfrm>
-            <a:off x="731520" y="4206240"/>
-            <a:ext cx="7680960" cy="640080"/>
-          </a:xfrm>
-          <a:prstGeom prst="rect">
-            <a:avLst/>
-          </a:prstGeom>
-          <a:solidFill>
-            <a:srgbClr val="E8F5F3"/>
-          </a:solidFill>
-          <a:ln/>
-          <a:effectLst>
-            <a:outerShdw sx="100000" sy="100000" kx="0" ky="0" algn="bl" rotWithShape="0" blurRad="50800" dist="25400" dir="8100000">
-              <a:srgbClr val="000000">
-                <a:alpha val="10000"/>
-              </a:srgbClr>
-            </a:outerShdw>
-          </a:effectLst>
-        </p:spPr>
-      </p:sp>
-      <p:sp>
-        <p:nvSpPr>
-          <p:cNvPr id="8" name="Text 6"/>
-          <p:cNvSpPr/>
-          <p:nvPr/>
-        </p:nvSpPr>
-        <p:spPr>
-          <a:xfrm>
-            <a:off x="914400" y="4251960"/>
-            <a:ext cx="7315200" cy="548640"/>
-          </a:xfrm>
-          <a:prstGeom prst="rect">
-            <a:avLst/>
-          </a:prstGeom>
-          <a:noFill/>
-          <a:ln/>
-        </p:spPr>
-        <p:txBody>
-          <a:bodyPr wrap="square" rtlCol="0" anchor="ctr"/>
-          <a:lstStyle/>
-          <a:p>
-            <a:pPr indent="0" marL="0">
-              <a:buNone/>
-            </a:pPr>
-            <a:r>
-              <a:rPr lang="en-US" sz="1200" b="1" dirty="0">
-                <a:solidFill>
-                  <a:srgbClr val="2A9D8F"/>
-                </a:solidFill>
-                <a:latin typeface="Calibri" pitchFamily="34" charset="0"/>
-                <a:ea typeface="Calibri" pitchFamily="34" charset="-122"/>
-                <a:cs typeface="Calibri" pitchFamily="34" charset="-120"/>
-              </a:rPr>
-              <a:t>Key Idea: </a:t>
-            </a:r>
-            <a:pPr indent="0" marL="0">
-              <a:buNone/>
-            </a:pPr>
-            <a:r>
-              <a:rPr lang="en-US" sz="1200" i="1" dirty="0">
-                <a:solidFill>
-                  <a:srgbClr val="3D3A36"/>
-                </a:solidFill>
-                <a:latin typeface="Calibri" pitchFamily="34" charset="0"/>
-                <a:ea typeface="Calibri" pitchFamily="34" charset="-122"/>
-                <a:cs typeface="Calibri" pitchFamily="34" charset="-120"/>
-              </a:rPr>
-              <a:t>The meniscus is the curved surface of water — read from the bottom of the curve.</a:t>
-            </a:r>
-            <a:endParaRPr lang="en-US" sz="1200" dirty="0"/>
           </a:p>
         </p:txBody>
       </p:sp>
@@ -5071,47 +4681,7 @@
         <p:spPr>
           <a:xfrm>
             <a:off x="0" y="0"/>
-            <a:ext cx="9144000" cy="822960"/>
-          </a:xfrm>
-          <a:prstGeom prst="rect">
-            <a:avLst/>
-          </a:prstGeom>
-          <a:solidFill>
-            <a:srgbClr val="FFFFFF"/>
-          </a:solidFill>
-          <a:ln/>
-        </p:spPr>
-      </p:sp>
-      <p:sp>
-        <p:nvSpPr>
-          <p:cNvPr id="3" name="Shape 1"/>
-          <p:cNvSpPr/>
-          <p:nvPr/>
-        </p:nvSpPr>
-        <p:spPr>
-          <a:xfrm>
-            <a:off x="0" y="804672"/>
-            <a:ext cx="9144000" cy="27432"/>
-          </a:xfrm>
-          <a:prstGeom prst="rect">
-            <a:avLst/>
-          </a:prstGeom>
-          <a:solidFill>
-            <a:srgbClr val="E5E2DC"/>
-          </a:solidFill>
-          <a:ln/>
-        </p:spPr>
-      </p:sp>
-      <p:sp>
-        <p:nvSpPr>
-          <p:cNvPr id="4" name="Shape 2"/>
-          <p:cNvSpPr/>
-          <p:nvPr/>
-        </p:nvSpPr>
-        <p:spPr>
-          <a:xfrm>
-            <a:off x="548640" y="201168"/>
-            <a:ext cx="54864" cy="420624"/>
+            <a:ext cx="73152" cy="5148072"/>
           </a:xfrm>
           <a:prstGeom prst="rect">
             <a:avLst/>
@@ -5124,14 +4694,14 @@
       </p:sp>
       <p:sp>
         <p:nvSpPr>
-          <p:cNvPr id="5" name="Text 3"/>
+          <p:cNvPr id="3" name="Text 1"/>
           <p:cNvSpPr/>
           <p:nvPr/>
         </p:nvSpPr>
         <p:spPr>
           <a:xfrm>
-            <a:off x="777240" y="137160"/>
-            <a:ext cx="7772400" cy="548640"/>
+            <a:off x="548640" y="274320"/>
+            <a:ext cx="9144000" cy="640080"/>
           </a:xfrm>
           <a:prstGeom prst="rect">
             <a:avLst/>
@@ -5140,14 +4710,14 @@
           <a:ln/>
         </p:spPr>
         <p:txBody>
-          <a:bodyPr wrap="square" lIns="0" tIns="0" rIns="0" bIns="0" rtlCol="0" anchor="ctr"/>
+          <a:bodyPr wrap="square" rtlCol="0" anchor="ctr"/>
           <a:lstStyle/>
           <a:p>
             <a:pPr indent="0" marL="0">
               <a:buNone/>
             </a:pPr>
             <a:r>
-              <a:rPr lang="en-US" sz="2000" b="1" dirty="0">
+              <a:rPr lang="en-US" sz="2400" b="1" dirty="0">
                 <a:solidFill>
                   <a:srgbClr val="1B2A4A"/>
                 </a:solidFill>
@@ -5157,47 +4727,20 @@
               </a:rPr>
               <a:t>Accuracy vs Precision</a:t>
             </a:r>
-            <a:endParaRPr lang="en-US" sz="2000" dirty="0"/>
+            <a:endParaRPr lang="en-US" sz="2400" dirty="0"/>
           </a:p>
         </p:txBody>
       </p:sp>
       <p:sp>
         <p:nvSpPr>
-          <p:cNvPr id="6" name="Shape 4"/>
+          <p:cNvPr id="4" name="Shape 2"/>
           <p:cNvSpPr/>
           <p:nvPr/>
         </p:nvSpPr>
         <p:spPr>
           <a:xfrm>
-            <a:off x="548640" y="1051560"/>
-            <a:ext cx="3840480" cy="3474720"/>
-          </a:xfrm>
-          <a:prstGeom prst="rect">
-            <a:avLst/>
-          </a:prstGeom>
-          <a:solidFill>
-            <a:srgbClr val="FFFFFF"/>
-          </a:solidFill>
-          <a:ln/>
-          <a:effectLst>
-            <a:outerShdw sx="100000" sy="100000" kx="0" ky="0" algn="bl" rotWithShape="0" blurRad="50800" dist="25400" dir="8100000">
-              <a:srgbClr val="000000">
-                <a:alpha val="10000"/>
-              </a:srgbClr>
-            </a:outerShdw>
-          </a:effectLst>
-        </p:spPr>
-      </p:sp>
-      <p:sp>
-        <p:nvSpPr>
-          <p:cNvPr id="7" name="Shape 5"/>
-          <p:cNvSpPr/>
-          <p:nvPr/>
-        </p:nvSpPr>
-        <p:spPr>
-          <a:xfrm>
-            <a:off x="548640" y="1051560"/>
-            <a:ext cx="3840480" cy="54864"/>
+            <a:off x="548640" y="960120"/>
+            <a:ext cx="2286000" cy="36576"/>
           </a:xfrm>
           <a:prstGeom prst="rect">
             <a:avLst/>
@@ -5210,14 +4753,41 @@
       </p:sp>
       <p:sp>
         <p:nvSpPr>
-          <p:cNvPr id="8" name="Text 6"/>
+          <p:cNvPr id="5" name="Shape 3"/>
           <p:cNvSpPr/>
           <p:nvPr/>
         </p:nvSpPr>
         <p:spPr>
           <a:xfrm>
-            <a:off x="777240" y="1188720"/>
-            <a:ext cx="3383280" cy="457200"/>
+            <a:off x="548640" y="1188720"/>
+            <a:ext cx="5029200" cy="3474720"/>
+          </a:xfrm>
+          <a:prstGeom prst="roundRect">
+            <a:avLst>
+              <a:gd name="adj" fmla="val 3158"/>
+            </a:avLst>
+          </a:prstGeom>
+          <a:solidFill>
+            <a:srgbClr val="FFFFFF"/>
+          </a:solidFill>
+          <a:ln w="9525">
+            <a:solidFill>
+              <a:srgbClr val="E5E2DC"/>
+            </a:solidFill>
+            <a:prstDash val="solid"/>
+          </a:ln>
+        </p:spPr>
+      </p:sp>
+      <p:sp>
+        <p:nvSpPr>
+          <p:cNvPr id="6" name="Text 4"/>
+          <p:cNvSpPr/>
+          <p:nvPr/>
+        </p:nvSpPr>
+        <p:spPr>
+          <a:xfrm>
+            <a:off x="777240" y="1325880"/>
+            <a:ext cx="4572000" cy="365760"/>
           </a:xfrm>
           <a:prstGeom prst="rect">
             <a:avLst/>
@@ -5226,7 +4796,7 @@
           <a:ln/>
         </p:spPr>
         <p:txBody>
-          <a:bodyPr wrap="square" lIns="0" tIns="0" rIns="0" bIns="0" rtlCol="0" anchor="ctr"/>
+          <a:bodyPr wrap="square" rtlCol="0" anchor="ctr"/>
           <a:lstStyle/>
           <a:p>
             <a:pPr indent="0" marL="0">
@@ -5235,13 +4805,13 @@
             <a:r>
               <a:rPr lang="en-US" sz="1500" b="1" dirty="0">
                 <a:solidFill>
-                  <a:srgbClr val="1B2A4A"/>
+                  <a:srgbClr val="2A9D8F"/>
                 </a:solidFill>
                 <a:latin typeface="Georgia" pitchFamily="34" charset="0"/>
                 <a:ea typeface="Georgia" pitchFamily="34" charset="-122"/>
                 <a:cs typeface="Georgia" pitchFamily="34" charset="-120"/>
               </a:rPr>
-              <a:t>Accuracy</a:t>
+              <a:t>Accurate</a:t>
             </a:r>
             <a:endParaRPr lang="en-US" sz="1500" dirty="0"/>
           </a:p>
@@ -5249,14 +4819,14 @@
       </p:sp>
       <p:sp>
         <p:nvSpPr>
-          <p:cNvPr id="9" name="Text 7"/>
+          <p:cNvPr id="7" name="Text 5"/>
           <p:cNvSpPr/>
           <p:nvPr/>
         </p:nvSpPr>
         <p:spPr>
           <a:xfrm>
-            <a:off x="777240" y="1691640"/>
-            <a:ext cx="3383280" cy="2651760"/>
+            <a:off x="777240" y="1783080"/>
+            <a:ext cx="4572000" cy="2651760"/>
           </a:xfrm>
           <a:prstGeom prst="rect">
             <a:avLst/>
@@ -5268,86 +4838,90 @@
           <a:bodyPr wrap="square" rtlCol="0" anchor="t"/>
           <a:lstStyle/>
           <a:p>
-            <a:pPr marL="342900" indent="-342900">
+            <a:pPr>
+              <a:lnSpc>
+                <a:spcPct val="140000"/>
+              </a:lnSpc>
               <a:spcAft>
-                <a:spcPts val="600"/>
+                <a:spcPts val="400"/>
               </a:spcAft>
-              <a:buSzPct val="100000"/>
-              <a:buChar char="•"/>
             </a:pPr>
             <a:r>
               <a:rPr lang="en-US" sz="1300" dirty="0">
                 <a:solidFill>
                   <a:srgbClr val="3D3A36"/>
                 </a:solidFill>
-                <a:latin typeface="Calibri" pitchFamily="34" charset="0"/>
-                <a:ea typeface="Calibri" pitchFamily="34" charset="-122"/>
-                <a:cs typeface="Calibri" pitchFamily="34" charset="-120"/>
+                <a:latin typeface="Arial" pitchFamily="34" charset="0"/>
+                <a:ea typeface="Arial" pitchFamily="34" charset="-122"/>
+                <a:cs typeface="Arial" pitchFamily="34" charset="-120"/>
               </a:rPr>
-              <a:t>How close your result is to the TRUE value</a:t>
+              <a:t>Close to the TRUE value.</a:t>
             </a:r>
             <a:endParaRPr lang="en-US" sz="1300" dirty="0"/>
           </a:p>
           <a:p>
-            <a:pPr marL="342900" indent="-342900">
+            <a:pPr>
+              <a:lnSpc>
+                <a:spcPct val="140000"/>
+              </a:lnSpc>
               <a:spcAft>
-                <a:spcPts val="600"/>
+                <a:spcPts val="400"/>
               </a:spcAft>
-              <a:buSzPct val="100000"/>
-              <a:buChar char="•"/>
             </a:pPr>
             <a:r>
               <a:rPr lang="en-US" sz="1300" dirty="0">
                 <a:solidFill>
                   <a:srgbClr val="3D3A36"/>
                 </a:solidFill>
-                <a:latin typeface="Calibri" pitchFamily="34" charset="0"/>
-                <a:ea typeface="Calibri" pitchFamily="34" charset="-122"/>
-                <a:cs typeface="Calibri" pitchFamily="34" charset="-120"/>
+                <a:latin typeface="Arial" pitchFamily="34" charset="0"/>
+                <a:ea typeface="Arial" pitchFamily="34" charset="-122"/>
+                <a:cs typeface="Arial" pitchFamily="34" charset="-120"/>
               </a:rPr>
-              <a:t>Like hitting the bullseye on a target</a:t>
+              <a:t>Like hitting the bullseye.</a:t>
             </a:r>
             <a:endParaRPr lang="en-US" sz="1300" dirty="0"/>
           </a:p>
           <a:p>
-            <a:pPr marL="342900" indent="-342900">
+            <a:pPr>
+              <a:lnSpc>
+                <a:spcPct val="140000"/>
+              </a:lnSpc>
               <a:spcAft>
-                <a:spcPts val="600"/>
+                <a:spcPts val="400"/>
               </a:spcAft>
-              <a:buSzPct val="100000"/>
-              <a:buChar char="•"/>
             </a:pPr>
             <a:r>
               <a:rPr lang="en-US" sz="1300" dirty="0">
                 <a:solidFill>
                   <a:srgbClr val="3D3A36"/>
                 </a:solidFill>
-                <a:latin typeface="Calibri" pitchFamily="34" charset="0"/>
-                <a:ea typeface="Calibri" pitchFamily="34" charset="-122"/>
-                <a:cs typeface="Calibri" pitchFamily="34" charset="-120"/>
+                <a:latin typeface="Arial" pitchFamily="34" charset="0"/>
+                <a:ea typeface="Arial" pitchFamily="34" charset="-122"/>
+                <a:cs typeface="Arial" pitchFamily="34" charset="-120"/>
               </a:rPr>
-              <a:t>Depends on correct technique</a:t>
+              <a:t>Need to know the real answer to check.</a:t>
             </a:r>
             <a:endParaRPr lang="en-US" sz="1300" dirty="0"/>
           </a:p>
           <a:p>
-            <a:pPr marL="342900" indent="-342900">
+            <a:pPr>
+              <a:lnSpc>
+                <a:spcPct val="140000"/>
+              </a:lnSpc>
               <a:spcAft>
-                <a:spcPts val="600"/>
+                <a:spcPts val="400"/>
               </a:spcAft>
-              <a:buSzPct val="100000"/>
-              <a:buChar char="•"/>
             </a:pPr>
             <a:r>
               <a:rPr lang="en-US" sz="1300" dirty="0">
                 <a:solidFill>
                   <a:srgbClr val="3D3A36"/>
                 </a:solidFill>
-                <a:latin typeface="Calibri" pitchFamily="34" charset="0"/>
-                <a:ea typeface="Calibri" pitchFamily="34" charset="-122"/>
-                <a:cs typeface="Calibri" pitchFamily="34" charset="-120"/>
+                <a:latin typeface="Arial" pitchFamily="34" charset="0"/>
+                <a:ea typeface="Arial" pitchFamily="34" charset="-122"/>
+                <a:cs typeface="Arial" pitchFamily="34" charset="-120"/>
               </a:rPr>
-              <a:t>Can be improved with better equipment</a:t>
+              <a:t>Improved by using better equipment.</a:t>
             </a:r>
             <a:endParaRPr lang="en-US" sz="1300" dirty="0"/>
           </a:p>
@@ -5355,61 +4929,41 @@
       </p:sp>
       <p:sp>
         <p:nvSpPr>
-          <p:cNvPr id="10" name="Shape 8"/>
+          <p:cNvPr id="8" name="Shape 6"/>
           <p:cNvSpPr/>
           <p:nvPr/>
         </p:nvSpPr>
         <p:spPr>
           <a:xfrm>
-            <a:off x="4754880" y="1051560"/>
-            <a:ext cx="3840480" cy="3474720"/>
+            <a:off x="5852160" y="1188720"/>
+            <a:ext cx="5029200" cy="3474720"/>
           </a:xfrm>
-          <a:prstGeom prst="rect">
-            <a:avLst/>
+          <a:prstGeom prst="roundRect">
+            <a:avLst>
+              <a:gd name="adj" fmla="val 3158"/>
+            </a:avLst>
           </a:prstGeom>
           <a:solidFill>
             <a:srgbClr val="FFFFFF"/>
           </a:solidFill>
-          <a:ln/>
-          <a:effectLst>
-            <a:outerShdw sx="100000" sy="100000" kx="0" ky="0" algn="bl" rotWithShape="0" blurRad="50800" dist="25400" dir="8100000">
-              <a:srgbClr val="000000">
-                <a:alpha val="10000"/>
-              </a:srgbClr>
-            </a:outerShdw>
-          </a:effectLst>
+          <a:ln w="9525">
+            <a:solidFill>
+              <a:srgbClr val="E5E2DC"/>
+            </a:solidFill>
+            <a:prstDash val="solid"/>
+          </a:ln>
         </p:spPr>
       </p:sp>
       <p:sp>
         <p:nvSpPr>
-          <p:cNvPr id="11" name="Shape 9"/>
+          <p:cNvPr id="9" name="Text 7"/>
           <p:cNvSpPr/>
           <p:nvPr/>
         </p:nvSpPr>
         <p:spPr>
           <a:xfrm>
-            <a:off x="4754880" y="1051560"/>
-            <a:ext cx="3840480" cy="54864"/>
-          </a:xfrm>
-          <a:prstGeom prst="rect">
-            <a:avLst/>
-          </a:prstGeom>
-          <a:solidFill>
-            <a:srgbClr val="E9C46A"/>
-          </a:solidFill>
-          <a:ln/>
-        </p:spPr>
-      </p:sp>
-      <p:sp>
-        <p:nvSpPr>
-          <p:cNvPr id="12" name="Text 10"/>
-          <p:cNvSpPr/>
-          <p:nvPr/>
-        </p:nvSpPr>
-        <p:spPr>
-          <a:xfrm>
-            <a:off x="4983480" y="1188720"/>
-            <a:ext cx="3383280" cy="457200"/>
+            <a:off x="6080760" y="1325880"/>
+            <a:ext cx="4572000" cy="365760"/>
           </a:xfrm>
           <a:prstGeom prst="rect">
             <a:avLst/>
@@ -5418,7 +4972,7 @@
           <a:ln/>
         </p:spPr>
         <p:txBody>
-          <a:bodyPr wrap="square" lIns="0" tIns="0" rIns="0" bIns="0" rtlCol="0" anchor="ctr"/>
+          <a:bodyPr wrap="square" rtlCol="0" anchor="ctr"/>
           <a:lstStyle/>
           <a:p>
             <a:pPr indent="0" marL="0">
@@ -5427,13 +4981,13 @@
             <a:r>
               <a:rPr lang="en-US" sz="1500" b="1" dirty="0">
                 <a:solidFill>
-                  <a:srgbClr val="1B2A4A"/>
+                  <a:srgbClr val="E9C46A"/>
                 </a:solidFill>
                 <a:latin typeface="Georgia" pitchFamily="34" charset="0"/>
                 <a:ea typeface="Georgia" pitchFamily="34" charset="-122"/>
                 <a:cs typeface="Georgia" pitchFamily="34" charset="-120"/>
               </a:rPr>
-              <a:t>Precision</a:t>
+              <a:t>Precise</a:t>
             </a:r>
             <a:endParaRPr lang="en-US" sz="1500" dirty="0"/>
           </a:p>
@@ -5441,14 +4995,14 @@
       </p:sp>
       <p:sp>
         <p:nvSpPr>
-          <p:cNvPr id="13" name="Text 11"/>
+          <p:cNvPr id="10" name="Text 8"/>
           <p:cNvSpPr/>
           <p:nvPr/>
         </p:nvSpPr>
         <p:spPr>
           <a:xfrm>
-            <a:off x="4983480" y="1691640"/>
-            <a:ext cx="3383280" cy="2651760"/>
+            <a:off x="6080760" y="1783080"/>
+            <a:ext cx="4572000" cy="2651760"/>
           </a:xfrm>
           <a:prstGeom prst="rect">
             <a:avLst/>
@@ -5460,86 +5014,90 @@
           <a:bodyPr wrap="square" rtlCol="0" anchor="t"/>
           <a:lstStyle/>
           <a:p>
-            <a:pPr marL="342900" indent="-342900">
+            <a:pPr>
+              <a:lnSpc>
+                <a:spcPct val="140000"/>
+              </a:lnSpc>
               <a:spcAft>
-                <a:spcPts val="600"/>
+                <a:spcPts val="400"/>
               </a:spcAft>
-              <a:buSzPct val="100000"/>
-              <a:buChar char="•"/>
             </a:pPr>
             <a:r>
               <a:rPr lang="en-US" sz="1300" dirty="0">
                 <a:solidFill>
                   <a:srgbClr val="3D3A36"/>
                 </a:solidFill>
-                <a:latin typeface="Calibri" pitchFamily="34" charset="0"/>
-                <a:ea typeface="Calibri" pitchFamily="34" charset="-122"/>
-                <a:cs typeface="Calibri" pitchFamily="34" charset="-120"/>
+                <a:latin typeface="Arial" pitchFamily="34" charset="0"/>
+                <a:ea typeface="Arial" pitchFamily="34" charset="-122"/>
+                <a:cs typeface="Arial" pitchFamily="34" charset="-120"/>
               </a:rPr>
-              <a:t>How close your REPEATED results are to each other</a:t>
+              <a:t>Measurements are close TOGETHER.</a:t>
             </a:r>
             <a:endParaRPr lang="en-US" sz="1300" dirty="0"/>
           </a:p>
           <a:p>
-            <a:pPr marL="342900" indent="-342900">
+            <a:pPr>
+              <a:lnSpc>
+                <a:spcPct val="140000"/>
+              </a:lnSpc>
               <a:spcAft>
-                <a:spcPts val="600"/>
+                <a:spcPts val="400"/>
               </a:spcAft>
-              <a:buSzPct val="100000"/>
-              <a:buChar char="•"/>
             </a:pPr>
             <a:r>
               <a:rPr lang="en-US" sz="1300" dirty="0">
                 <a:solidFill>
                   <a:srgbClr val="3D3A36"/>
                 </a:solidFill>
-                <a:latin typeface="Calibri" pitchFamily="34" charset="0"/>
-                <a:ea typeface="Calibri" pitchFamily="34" charset="-122"/>
-                <a:cs typeface="Calibri" pitchFamily="34" charset="-120"/>
+                <a:latin typeface="Arial" pitchFamily="34" charset="0"/>
+                <a:ea typeface="Arial" pitchFamily="34" charset="-122"/>
+                <a:cs typeface="Arial" pitchFamily="34" charset="-120"/>
               </a:rPr>
-              <a:t>Like hitting the same spot every time</a:t>
+              <a:t>Like all darts in the same spot.</a:t>
             </a:r>
             <a:endParaRPr lang="en-US" sz="1300" dirty="0"/>
           </a:p>
           <a:p>
-            <a:pPr marL="342900" indent="-342900">
+            <a:pPr>
+              <a:lnSpc>
+                <a:spcPct val="140000"/>
+              </a:lnSpc>
               <a:spcAft>
-                <a:spcPts val="600"/>
+                <a:spcPts val="400"/>
               </a:spcAft>
-              <a:buSzPct val="100000"/>
-              <a:buChar char="•"/>
             </a:pPr>
             <a:r>
               <a:rPr lang="en-US" sz="1300" dirty="0">
                 <a:solidFill>
                   <a:srgbClr val="3D3A36"/>
                 </a:solidFill>
-                <a:latin typeface="Calibri" pitchFamily="34" charset="0"/>
-                <a:ea typeface="Calibri" pitchFamily="34" charset="-122"/>
-                <a:cs typeface="Calibri" pitchFamily="34" charset="-120"/>
+                <a:latin typeface="Arial" pitchFamily="34" charset="0"/>
+                <a:ea typeface="Arial" pitchFamily="34" charset="-122"/>
+                <a:cs typeface="Arial" pitchFamily="34" charset="-120"/>
               </a:rPr>
-              <a:t>Depends on the equipment resolution</a:t>
+              <a:t>Does NOT mean correct — can be precisely wrong.</a:t>
             </a:r>
             <a:endParaRPr lang="en-US" sz="1300" dirty="0"/>
           </a:p>
           <a:p>
-            <a:pPr marL="342900" indent="-342900">
+            <a:pPr>
+              <a:lnSpc>
+                <a:spcPct val="140000"/>
+              </a:lnSpc>
               <a:spcAft>
-                <a:spcPts val="600"/>
+                <a:spcPts val="400"/>
               </a:spcAft>
-              <a:buSzPct val="100000"/>
-              <a:buChar char="•"/>
             </a:pPr>
             <a:r>
               <a:rPr lang="en-US" sz="1300" dirty="0">
                 <a:solidFill>
                   <a:srgbClr val="3D3A36"/>
                 </a:solidFill>
-                <a:latin typeface="Calibri" pitchFamily="34" charset="0"/>
-                <a:ea typeface="Calibri" pitchFamily="34" charset="-122"/>
-                <a:cs typeface="Calibri" pitchFamily="34" charset="-120"/>
+                <a:latin typeface="Arial" pitchFamily="34" charset="0"/>
+                <a:ea typeface="Arial" pitchFamily="34" charset="-122"/>
+                <a:cs typeface="Arial" pitchFamily="34" charset="-120"/>
               </a:rPr>
-              <a:t>Can be improved by repeating the experiment</a:t>
+              <a:t>Improved by careful technique.</a:t>
             </a:r>
             <a:endParaRPr lang="en-US" sz="1300" dirty="0"/>
           </a:p>
@@ -5586,47 +5144,7 @@
         <p:spPr>
           <a:xfrm>
             <a:off x="0" y="0"/>
-            <a:ext cx="9144000" cy="822960"/>
-          </a:xfrm>
-          <a:prstGeom prst="rect">
-            <a:avLst/>
-          </a:prstGeom>
-          <a:solidFill>
-            <a:srgbClr val="FFFFFF"/>
-          </a:solidFill>
-          <a:ln/>
-        </p:spPr>
-      </p:sp>
-      <p:sp>
-        <p:nvSpPr>
-          <p:cNvPr id="3" name="Shape 1"/>
-          <p:cNvSpPr/>
-          <p:nvPr/>
-        </p:nvSpPr>
-        <p:spPr>
-          <a:xfrm>
-            <a:off x="0" y="804672"/>
-            <a:ext cx="9144000" cy="27432"/>
-          </a:xfrm>
-          <a:prstGeom prst="rect">
-            <a:avLst/>
-          </a:prstGeom>
-          <a:solidFill>
-            <a:srgbClr val="E5E2DC"/>
-          </a:solidFill>
-          <a:ln/>
-        </p:spPr>
-      </p:sp>
-      <p:sp>
-        <p:nvSpPr>
-          <p:cNvPr id="4" name="Shape 2"/>
-          <p:cNvSpPr/>
-          <p:nvPr/>
-        </p:nvSpPr>
-        <p:spPr>
-          <a:xfrm>
-            <a:off x="548640" y="201168"/>
-            <a:ext cx="54864" cy="420624"/>
+            <a:ext cx="73152" cy="5148072"/>
           </a:xfrm>
           <a:prstGeom prst="rect">
             <a:avLst/>
@@ -5639,80 +5157,14 @@
       </p:sp>
       <p:sp>
         <p:nvSpPr>
-          <p:cNvPr id="5" name="Text 3"/>
+          <p:cNvPr id="3" name="Text 1"/>
           <p:cNvSpPr/>
           <p:nvPr/>
         </p:nvSpPr>
         <p:spPr>
           <a:xfrm>
-            <a:off x="777240" y="137160"/>
-            <a:ext cx="7772400" cy="548640"/>
-          </a:xfrm>
-          <a:prstGeom prst="rect">
-            <a:avLst/>
-          </a:prstGeom>
-          <a:noFill/>
-          <a:ln/>
-        </p:spPr>
-        <p:txBody>
-          <a:bodyPr wrap="square" lIns="0" tIns="0" rIns="0" bIns="0" rtlCol="0" anchor="ctr"/>
-          <a:lstStyle/>
-          <a:p>
-            <a:pPr indent="0" marL="0">
-              <a:buNone/>
-            </a:pPr>
-            <a:r>
-              <a:rPr lang="en-US" sz="2000" b="1" dirty="0">
-                <a:solidFill>
-                  <a:srgbClr val="1B2A4A"/>
-                </a:solidFill>
-                <a:latin typeface="Georgia" pitchFamily="34" charset="0"/>
-                <a:ea typeface="Georgia" pitchFamily="34" charset="-122"/>
-                <a:cs typeface="Georgia" pitchFamily="34" charset="-120"/>
-              </a:rPr>
-              <a:t>Common Metric Conversions</a:t>
-            </a:r>
-            <a:endParaRPr lang="en-US" sz="2000" dirty="0"/>
-          </a:p>
-        </p:txBody>
-      </p:sp>
-      <p:sp>
-        <p:nvSpPr>
-          <p:cNvPr id="6" name="Shape 4"/>
-          <p:cNvSpPr/>
-          <p:nvPr/>
-        </p:nvSpPr>
-        <p:spPr>
-          <a:xfrm>
-            <a:off x="731520" y="1280160"/>
-            <a:ext cx="2377440" cy="2377440"/>
-          </a:xfrm>
-          <a:prstGeom prst="rect">
-            <a:avLst/>
-          </a:prstGeom>
-          <a:solidFill>
-            <a:srgbClr val="FFFFFF"/>
-          </a:solidFill>
-          <a:ln/>
-          <a:effectLst>
-            <a:outerShdw sx="100000" sy="100000" kx="0" ky="0" algn="bl" rotWithShape="0" blurRad="50800" dist="25400" dir="8100000">
-              <a:srgbClr val="000000">
-                <a:alpha val="10000"/>
-              </a:srgbClr>
-            </a:outerShdw>
-          </a:effectLst>
-        </p:spPr>
-      </p:sp>
-      <p:sp>
-        <p:nvSpPr>
-          <p:cNvPr id="7" name="Text 5"/>
-          <p:cNvSpPr/>
-          <p:nvPr/>
-        </p:nvSpPr>
-        <p:spPr>
-          <a:xfrm>
-            <a:off x="731520" y="1463040"/>
-            <a:ext cx="2377440" cy="914400"/>
+            <a:off x="548640" y="274320"/>
+            <a:ext cx="9144000" cy="640080"/>
           </a:xfrm>
           <a:prstGeom prst="rect">
             <a:avLst/>
@@ -5724,34 +5176,54 @@
           <a:bodyPr wrap="square" rtlCol="0" anchor="ctr"/>
           <a:lstStyle/>
           <a:p>
-            <a:pPr algn="ctr" indent="0" marL="0">
+            <a:pPr indent="0" marL="0">
               <a:buNone/>
             </a:pPr>
             <a:r>
-              <a:rPr lang="en-US" sz="3600" b="1" dirty="0">
+              <a:rPr lang="en-US" sz="2400" b="1" dirty="0">
                 <a:solidFill>
-                  <a:srgbClr val="2A9D8F"/>
+                  <a:srgbClr val="1B2A4A"/>
                 </a:solidFill>
                 <a:latin typeface="Georgia" pitchFamily="34" charset="0"/>
                 <a:ea typeface="Georgia" pitchFamily="34" charset="-122"/>
                 <a:cs typeface="Georgia" pitchFamily="34" charset="-120"/>
               </a:rPr>
-              <a:t>×1000</a:t>
-            </a:r>
-            <a:endParaRPr lang="en-US" sz="3600" dirty="0"/>
+              <a:t>Common Measurement Mistakes</a:t>
+            </a:r>
+            <a:endParaRPr lang="en-US" sz="2400" dirty="0"/>
           </a:p>
         </p:txBody>
       </p:sp>
       <p:sp>
         <p:nvSpPr>
-          <p:cNvPr id="8" name="Text 6"/>
+          <p:cNvPr id="4" name="Shape 2"/>
           <p:cNvSpPr/>
           <p:nvPr/>
         </p:nvSpPr>
         <p:spPr>
           <a:xfrm>
-            <a:off x="731520" y="2423160"/>
-            <a:ext cx="2377440" cy="365760"/>
+            <a:off x="548640" y="960120"/>
+            <a:ext cx="2286000" cy="36576"/>
+          </a:xfrm>
+          <a:prstGeom prst="rect">
+            <a:avLst/>
+          </a:prstGeom>
+          <a:solidFill>
+            <a:srgbClr val="2A9D8F"/>
+          </a:solidFill>
+          <a:ln/>
+        </p:spPr>
+      </p:sp>
+      <p:sp>
+        <p:nvSpPr>
+          <p:cNvPr id="5" name="Text 3"/>
+          <p:cNvSpPr/>
+          <p:nvPr/>
+        </p:nvSpPr>
+        <p:spPr>
+          <a:xfrm>
+            <a:off x="548640" y="1188720"/>
+            <a:ext cx="10058400" cy="3474720"/>
           </a:xfrm>
           <a:prstGeom prst="rect">
             <a:avLst/>
@@ -5760,424 +5232,117 @@
           <a:ln/>
         </p:spPr>
         <p:txBody>
-          <a:bodyPr wrap="square" rtlCol="0" anchor="ctr"/>
+          <a:bodyPr wrap="square" rtlCol="0" anchor="t"/>
           <a:lstStyle/>
           <a:p>
-            <a:pPr algn="ctr" indent="0" marL="0">
-              <a:buNone/>
+            <a:pPr>
+              <a:lnSpc>
+                <a:spcPct val="150000"/>
+              </a:lnSpc>
+              <a:spcAft>
+                <a:spcPts val="600"/>
+              </a:spcAft>
             </a:pPr>
             <a:r>
-              <a:rPr lang="en-US" sz="1200" b="1" dirty="0">
+              <a:rPr lang="en-US" sz="1500" dirty="0">
                 <a:solidFill>
-                  <a:srgbClr val="6B6660"/>
+                  <a:srgbClr val="3D3A36"/>
                 </a:solidFill>
-                <a:latin typeface="Calibri" pitchFamily="34" charset="0"/>
-                <a:ea typeface="Calibri" pitchFamily="34" charset="-122"/>
-                <a:cs typeface="Calibri" pitchFamily="34" charset="-120"/>
+                <a:latin typeface="Arial" pitchFamily="34" charset="0"/>
+                <a:ea typeface="Arial" pitchFamily="34" charset="-122"/>
+                <a:cs typeface="Arial" pitchFamily="34" charset="-120"/>
               </a:rPr>
-              <a:t>KM → M</a:t>
-            </a:r>
-            <a:endParaRPr lang="en-US" sz="1200" dirty="0"/>
-          </a:p>
-        </p:txBody>
-      </p:sp>
-      <p:sp>
-        <p:nvSpPr>
-          <p:cNvPr id="9" name="Text 7"/>
-          <p:cNvSpPr/>
-          <p:nvPr/>
-        </p:nvSpPr>
-        <p:spPr>
-          <a:xfrm>
-            <a:off x="822960" y="2834640"/>
-            <a:ext cx="2194560" cy="640080"/>
-          </a:xfrm>
-          <a:prstGeom prst="rect">
-            <a:avLst/>
-          </a:prstGeom>
-          <a:noFill/>
-          <a:ln/>
-        </p:spPr>
-        <p:txBody>
-          <a:bodyPr wrap="square" rtlCol="0" anchor="ctr"/>
-          <a:lstStyle/>
-          <a:p>
-            <a:pPr algn="ctr" indent="0" marL="0">
-              <a:buNone/>
+              <a:t>Parallax error: reading at an angle instead of eye level.</a:t>
+            </a:r>
+            <a:endParaRPr lang="en-US" sz="1500" dirty="0"/>
+          </a:p>
+          <a:p>
+            <a:pPr>
+              <a:lnSpc>
+                <a:spcPct val="150000"/>
+              </a:lnSpc>
+              <a:spcAft>
+                <a:spcPts val="600"/>
+              </a:spcAft>
             </a:pPr>
             <a:r>
-              <a:rPr lang="en-US" sz="1000" dirty="0">
+              <a:rPr lang="en-US" sz="1500" dirty="0">
                 <a:solidFill>
-                  <a:srgbClr val="9B9690"/>
+                  <a:srgbClr val="3D3A36"/>
                 </a:solidFill>
-                <a:latin typeface="Calibri" pitchFamily="34" charset="0"/>
-                <a:ea typeface="Calibri" pitchFamily="34" charset="-122"/>
-                <a:cs typeface="Calibri" pitchFamily="34" charset="-120"/>
+                <a:latin typeface="Arial" pitchFamily="34" charset="0"/>
+                <a:ea typeface="Arial" pitchFamily="34" charset="-122"/>
+                <a:cs typeface="Arial" pitchFamily="34" charset="-120"/>
               </a:rPr>
-              <a:t>1 km = 1000 m</a:t>
-            </a:r>
-            <a:endParaRPr lang="en-US" sz="1000" dirty="0"/>
-          </a:p>
-          <a:p>
-            <a:pPr algn="ctr" indent="0" marL="0">
-              <a:buNone/>
+              <a:t>Zero error: not resetting the scale to zero before measuring.</a:t>
+            </a:r>
+            <a:endParaRPr lang="en-US" sz="1500" dirty="0"/>
+          </a:p>
+          <a:p>
+            <a:pPr>
+              <a:lnSpc>
+                <a:spcPct val="150000"/>
+              </a:lnSpc>
+              <a:spcAft>
+                <a:spcPts val="600"/>
+              </a:spcAft>
             </a:pPr>
             <a:r>
-              <a:rPr lang="en-US" sz="1000" dirty="0">
+              <a:rPr lang="en-US" sz="1500" dirty="0">
                 <a:solidFill>
-                  <a:srgbClr val="9B9690"/>
+                  <a:srgbClr val="3D3A36"/>
                 </a:solidFill>
-                <a:latin typeface="Calibri" pitchFamily="34" charset="0"/>
-                <a:ea typeface="Calibri" pitchFamily="34" charset="-122"/>
-                <a:cs typeface="Calibri" pitchFamily="34" charset="-120"/>
+                <a:latin typeface="Arial" pitchFamily="34" charset="0"/>
+                <a:ea typeface="Arial" pitchFamily="34" charset="-122"/>
+                <a:cs typeface="Arial" pitchFamily="34" charset="-120"/>
               </a:rPr>
-              <a:t>1 kg = 1000 g</a:t>
-            </a:r>
-            <a:endParaRPr lang="en-US" sz="1000" dirty="0"/>
-          </a:p>
-          <a:p>
-            <a:pPr algn="ctr" indent="0" marL="0">
-              <a:buNone/>
+              <a:t>Rounding too early: record the full reading, round later.</a:t>
+            </a:r>
+            <a:endParaRPr lang="en-US" sz="1500" dirty="0"/>
+          </a:p>
+          <a:p>
+            <a:pPr>
+              <a:lnSpc>
+                <a:spcPct val="150000"/>
+              </a:lnSpc>
+              <a:spcAft>
+                <a:spcPts val="600"/>
+              </a:spcAft>
             </a:pPr>
             <a:r>
-              <a:rPr lang="en-US" sz="1000" dirty="0">
+              <a:rPr lang="en-US" sz="1500" dirty="0">
                 <a:solidFill>
-                  <a:srgbClr val="9B9690"/>
+                  <a:srgbClr val="3D3A36"/>
                 </a:solidFill>
-                <a:latin typeface="Calibri" pitchFamily="34" charset="0"/>
-                <a:ea typeface="Calibri" pitchFamily="34" charset="-122"/>
-                <a:cs typeface="Calibri" pitchFamily="34" charset="-120"/>
+                <a:latin typeface="Arial" pitchFamily="34" charset="0"/>
+                <a:ea typeface="Arial" pitchFamily="34" charset="-122"/>
+                <a:cs typeface="Arial" pitchFamily="34" charset="-120"/>
               </a:rPr>
-              <a:t>1 L = 1000 mL</a:t>
-            </a:r>
-            <a:endParaRPr lang="en-US" sz="1000" dirty="0"/>
-          </a:p>
-        </p:txBody>
-      </p:sp>
-      <p:sp>
-        <p:nvSpPr>
-          <p:cNvPr id="10" name="Shape 8"/>
-          <p:cNvSpPr/>
-          <p:nvPr/>
-        </p:nvSpPr>
-        <p:spPr>
-          <a:xfrm>
-            <a:off x="3383280" y="1280160"/>
-            <a:ext cx="2377440" cy="2377440"/>
-          </a:xfrm>
-          <a:prstGeom prst="rect">
-            <a:avLst/>
-          </a:prstGeom>
-          <a:solidFill>
-            <a:srgbClr val="FFFFFF"/>
-          </a:solidFill>
-          <a:ln/>
-          <a:effectLst>
-            <a:outerShdw sx="100000" sy="100000" kx="0" ky="0" algn="bl" rotWithShape="0" blurRad="50800" dist="25400" dir="8100000">
-              <a:srgbClr val="000000">
-                <a:alpha val="10000"/>
-              </a:srgbClr>
-            </a:outerShdw>
-          </a:effectLst>
-        </p:spPr>
-      </p:sp>
-      <p:sp>
-        <p:nvSpPr>
-          <p:cNvPr id="11" name="Text 9"/>
-          <p:cNvSpPr/>
-          <p:nvPr/>
-        </p:nvSpPr>
-        <p:spPr>
-          <a:xfrm>
-            <a:off x="3383280" y="1463040"/>
-            <a:ext cx="2377440" cy="914400"/>
-          </a:xfrm>
-          <a:prstGeom prst="rect">
-            <a:avLst/>
-          </a:prstGeom>
-          <a:noFill/>
-          <a:ln/>
-        </p:spPr>
-        <p:txBody>
-          <a:bodyPr wrap="square" rtlCol="0" anchor="ctr"/>
-          <a:lstStyle/>
-          <a:p>
-            <a:pPr algn="ctr" indent="0" marL="0">
-              <a:buNone/>
+              <a:t>Wrong units: always include the unit with every measurement.</a:t>
+            </a:r>
+            <a:endParaRPr lang="en-US" sz="1500" dirty="0"/>
+          </a:p>
+          <a:p>
+            <a:pPr>
+              <a:lnSpc>
+                <a:spcPct val="150000"/>
+              </a:lnSpc>
+              <a:spcAft>
+                <a:spcPts val="600"/>
+              </a:spcAft>
             </a:pPr>
             <a:r>
-              <a:rPr lang="en-US" sz="3600" b="1" dirty="0">
+              <a:rPr lang="en-US" sz="1500" dirty="0">
                 <a:solidFill>
-                  <a:srgbClr val="2A9D8F"/>
+                  <a:srgbClr val="3D3A36"/>
                 </a:solidFill>
-                <a:latin typeface="Georgia" pitchFamily="34" charset="0"/>
-                <a:ea typeface="Georgia" pitchFamily="34" charset="-122"/>
-                <a:cs typeface="Georgia" pitchFamily="34" charset="-120"/>
+                <a:latin typeface="Arial" pitchFamily="34" charset="0"/>
+                <a:ea typeface="Arial" pitchFamily="34" charset="-122"/>
+                <a:cs typeface="Arial" pitchFamily="34" charset="-120"/>
               </a:rPr>
-              <a:t>×100</a:t>
-            </a:r>
-            <a:endParaRPr lang="en-US" sz="3600" dirty="0"/>
-          </a:p>
-        </p:txBody>
-      </p:sp>
-      <p:sp>
-        <p:nvSpPr>
-          <p:cNvPr id="12" name="Text 10"/>
-          <p:cNvSpPr/>
-          <p:nvPr/>
-        </p:nvSpPr>
-        <p:spPr>
-          <a:xfrm>
-            <a:off x="3383280" y="2423160"/>
-            <a:ext cx="2377440" cy="365760"/>
-          </a:xfrm>
-          <a:prstGeom prst="rect">
-            <a:avLst/>
-          </a:prstGeom>
-          <a:noFill/>
-          <a:ln/>
-        </p:spPr>
-        <p:txBody>
-          <a:bodyPr wrap="square" rtlCol="0" anchor="ctr"/>
-          <a:lstStyle/>
-          <a:p>
-            <a:pPr algn="ctr" indent="0" marL="0">
-              <a:buNone/>
-            </a:pPr>
-            <a:r>
-              <a:rPr lang="en-US" sz="1200" b="1" dirty="0">
-                <a:solidFill>
-                  <a:srgbClr val="6B6660"/>
-                </a:solidFill>
-                <a:latin typeface="Calibri" pitchFamily="34" charset="0"/>
-                <a:ea typeface="Calibri" pitchFamily="34" charset="-122"/>
-                <a:cs typeface="Calibri" pitchFamily="34" charset="-120"/>
-              </a:rPr>
-              <a:t>M → CM</a:t>
-            </a:r>
-            <a:endParaRPr lang="en-US" sz="1200" dirty="0"/>
-          </a:p>
-        </p:txBody>
-      </p:sp>
-      <p:sp>
-        <p:nvSpPr>
-          <p:cNvPr id="13" name="Text 11"/>
-          <p:cNvSpPr/>
-          <p:nvPr/>
-        </p:nvSpPr>
-        <p:spPr>
-          <a:xfrm>
-            <a:off x="3474720" y="2834640"/>
-            <a:ext cx="2194560" cy="640080"/>
-          </a:xfrm>
-          <a:prstGeom prst="rect">
-            <a:avLst/>
-          </a:prstGeom>
-          <a:noFill/>
-          <a:ln/>
-        </p:spPr>
-        <p:txBody>
-          <a:bodyPr wrap="square" rtlCol="0" anchor="ctr"/>
-          <a:lstStyle/>
-          <a:p>
-            <a:pPr algn="ctr" indent="0" marL="0">
-              <a:buNone/>
-            </a:pPr>
-            <a:r>
-              <a:rPr lang="en-US" sz="1000" dirty="0">
-                <a:solidFill>
-                  <a:srgbClr val="9B9690"/>
-                </a:solidFill>
-                <a:latin typeface="Calibri" pitchFamily="34" charset="0"/>
-                <a:ea typeface="Calibri" pitchFamily="34" charset="-122"/>
-                <a:cs typeface="Calibri" pitchFamily="34" charset="-120"/>
-              </a:rPr>
-              <a:t>1 m = 100 cm</a:t>
-            </a:r>
-            <a:endParaRPr lang="en-US" sz="1000" dirty="0"/>
-          </a:p>
-        </p:txBody>
-      </p:sp>
-      <p:sp>
-        <p:nvSpPr>
-          <p:cNvPr id="14" name="Shape 12"/>
-          <p:cNvSpPr/>
-          <p:nvPr/>
-        </p:nvSpPr>
-        <p:spPr>
-          <a:xfrm>
-            <a:off x="6035040" y="1280160"/>
-            <a:ext cx="2377440" cy="2377440"/>
-          </a:xfrm>
-          <a:prstGeom prst="rect">
-            <a:avLst/>
-          </a:prstGeom>
-          <a:solidFill>
-            <a:srgbClr val="FFFFFF"/>
-          </a:solidFill>
-          <a:ln/>
-          <a:effectLst>
-            <a:outerShdw sx="100000" sy="100000" kx="0" ky="0" algn="bl" rotWithShape="0" blurRad="50800" dist="25400" dir="8100000">
-              <a:srgbClr val="000000">
-                <a:alpha val="10000"/>
-              </a:srgbClr>
-            </a:outerShdw>
-          </a:effectLst>
-        </p:spPr>
-      </p:sp>
-      <p:sp>
-        <p:nvSpPr>
-          <p:cNvPr id="15" name="Text 13"/>
-          <p:cNvSpPr/>
-          <p:nvPr/>
-        </p:nvSpPr>
-        <p:spPr>
-          <a:xfrm>
-            <a:off x="6035040" y="1463040"/>
-            <a:ext cx="2377440" cy="914400"/>
-          </a:xfrm>
-          <a:prstGeom prst="rect">
-            <a:avLst/>
-          </a:prstGeom>
-          <a:noFill/>
-          <a:ln/>
-        </p:spPr>
-        <p:txBody>
-          <a:bodyPr wrap="square" rtlCol="0" anchor="ctr"/>
-          <a:lstStyle/>
-          <a:p>
-            <a:pPr algn="ctr" indent="0" marL="0">
-              <a:buNone/>
-            </a:pPr>
-            <a:r>
-              <a:rPr lang="en-US" sz="3600" b="1" dirty="0">
-                <a:solidFill>
-                  <a:srgbClr val="2A9D8F"/>
-                </a:solidFill>
-                <a:latin typeface="Georgia" pitchFamily="34" charset="0"/>
-                <a:ea typeface="Georgia" pitchFamily="34" charset="-122"/>
-                <a:cs typeface="Georgia" pitchFamily="34" charset="-120"/>
-              </a:rPr>
-              <a:t>×10</a:t>
-            </a:r>
-            <a:endParaRPr lang="en-US" sz="3600" dirty="0"/>
-          </a:p>
-        </p:txBody>
-      </p:sp>
-      <p:sp>
-        <p:nvSpPr>
-          <p:cNvPr id="16" name="Text 14"/>
-          <p:cNvSpPr/>
-          <p:nvPr/>
-        </p:nvSpPr>
-        <p:spPr>
-          <a:xfrm>
-            <a:off x="6035040" y="2423160"/>
-            <a:ext cx="2377440" cy="365760"/>
-          </a:xfrm>
-          <a:prstGeom prst="rect">
-            <a:avLst/>
-          </a:prstGeom>
-          <a:noFill/>
-          <a:ln/>
-        </p:spPr>
-        <p:txBody>
-          <a:bodyPr wrap="square" rtlCol="0" anchor="ctr"/>
-          <a:lstStyle/>
-          <a:p>
-            <a:pPr algn="ctr" indent="0" marL="0">
-              <a:buNone/>
-            </a:pPr>
-            <a:r>
-              <a:rPr lang="en-US" sz="1200" b="1" dirty="0">
-                <a:solidFill>
-                  <a:srgbClr val="6B6660"/>
-                </a:solidFill>
-                <a:latin typeface="Calibri" pitchFamily="34" charset="0"/>
-                <a:ea typeface="Calibri" pitchFamily="34" charset="-122"/>
-                <a:cs typeface="Calibri" pitchFamily="34" charset="-120"/>
-              </a:rPr>
-              <a:t>CM → MM</a:t>
-            </a:r>
-            <a:endParaRPr lang="en-US" sz="1200" dirty="0"/>
-          </a:p>
-        </p:txBody>
-      </p:sp>
-      <p:sp>
-        <p:nvSpPr>
-          <p:cNvPr id="17" name="Text 15"/>
-          <p:cNvSpPr/>
-          <p:nvPr/>
-        </p:nvSpPr>
-        <p:spPr>
-          <a:xfrm>
-            <a:off x="6126480" y="2834640"/>
-            <a:ext cx="2194560" cy="640080"/>
-          </a:xfrm>
-          <a:prstGeom prst="rect">
-            <a:avLst/>
-          </a:prstGeom>
-          <a:noFill/>
-          <a:ln/>
-        </p:spPr>
-        <p:txBody>
-          <a:bodyPr wrap="square" rtlCol="0" anchor="ctr"/>
-          <a:lstStyle/>
-          <a:p>
-            <a:pPr algn="ctr" indent="0" marL="0">
-              <a:buNone/>
-            </a:pPr>
-            <a:r>
-              <a:rPr lang="en-US" sz="1000" dirty="0">
-                <a:solidFill>
-                  <a:srgbClr val="9B9690"/>
-                </a:solidFill>
-                <a:latin typeface="Calibri" pitchFamily="34" charset="0"/>
-                <a:ea typeface="Calibri" pitchFamily="34" charset="-122"/>
-                <a:cs typeface="Calibri" pitchFamily="34" charset="-120"/>
-              </a:rPr>
-              <a:t>1 cm = 10 mm</a:t>
-            </a:r>
-            <a:endParaRPr lang="en-US" sz="1000" dirty="0"/>
-          </a:p>
-        </p:txBody>
-      </p:sp>
-      <p:sp>
-        <p:nvSpPr>
-          <p:cNvPr id="18" name="Text 16"/>
-          <p:cNvSpPr/>
-          <p:nvPr/>
-        </p:nvSpPr>
-        <p:spPr>
-          <a:xfrm>
-            <a:off x="731520" y="4114800"/>
-            <a:ext cx="7680960" cy="457200"/>
-          </a:xfrm>
-          <a:prstGeom prst="rect">
-            <a:avLst/>
-          </a:prstGeom>
-          <a:noFill/>
-          <a:ln/>
-        </p:spPr>
-        <p:txBody>
-          <a:bodyPr wrap="square" rtlCol="0" anchor="ctr"/>
-          <a:lstStyle/>
-          <a:p>
-            <a:pPr algn="ctr" indent="0" marL="0">
-              <a:buNone/>
-            </a:pPr>
-            <a:r>
-              <a:rPr lang="en-US" sz="1200" i="1" dirty="0">
-                <a:solidFill>
-                  <a:srgbClr val="6B6660"/>
-                </a:solidFill>
-                <a:latin typeface="Calibri" pitchFamily="34" charset="0"/>
-                <a:ea typeface="Calibri" pitchFamily="34" charset="-122"/>
-                <a:cs typeface="Calibri" pitchFamily="34" charset="-120"/>
-              </a:rPr>
-              <a:t>Always convert to the same unit before comparing measurements.</a:t>
-            </a:r>
-            <a:endParaRPr lang="en-US" sz="1200" dirty="0"/>
+              <a:t>Only measuring once: take at least 3 readings and find the mean.</a:t>
+            </a:r>
+            <a:endParaRPr lang="en-US" sz="1500" dirty="0"/>
           </a:p>
         </p:txBody>
       </p:sp>
@@ -6222,47 +5387,7 @@
         <p:spPr>
           <a:xfrm>
             <a:off x="0" y="0"/>
-            <a:ext cx="9144000" cy="822960"/>
-          </a:xfrm>
-          <a:prstGeom prst="rect">
-            <a:avLst/>
-          </a:prstGeom>
-          <a:solidFill>
-            <a:srgbClr val="FFFFFF"/>
-          </a:solidFill>
-          <a:ln/>
-        </p:spPr>
-      </p:sp>
-      <p:sp>
-        <p:nvSpPr>
-          <p:cNvPr id="3" name="Shape 1"/>
-          <p:cNvSpPr/>
-          <p:nvPr/>
-        </p:nvSpPr>
-        <p:spPr>
-          <a:xfrm>
-            <a:off x="0" y="804672"/>
-            <a:ext cx="9144000" cy="27432"/>
-          </a:xfrm>
-          <a:prstGeom prst="rect">
-            <a:avLst/>
-          </a:prstGeom>
-          <a:solidFill>
-            <a:srgbClr val="E5E2DC"/>
-          </a:solidFill>
-          <a:ln/>
-        </p:spPr>
-      </p:sp>
-      <p:sp>
-        <p:nvSpPr>
-          <p:cNvPr id="4" name="Shape 2"/>
-          <p:cNvSpPr/>
-          <p:nvPr/>
-        </p:nvSpPr>
-        <p:spPr>
-          <a:xfrm>
-            <a:off x="548640" y="201168"/>
-            <a:ext cx="54864" cy="420624"/>
+            <a:ext cx="73152" cy="5148072"/>
           </a:xfrm>
           <a:prstGeom prst="rect">
             <a:avLst/>
@@ -6275,73 +5400,14 @@
       </p:sp>
       <p:sp>
         <p:nvSpPr>
-          <p:cNvPr id="5" name="Text 3"/>
+          <p:cNvPr id="3" name="Text 1"/>
           <p:cNvSpPr/>
           <p:nvPr/>
         </p:nvSpPr>
         <p:spPr>
           <a:xfrm>
-            <a:off x="777240" y="137160"/>
-            <a:ext cx="7772400" cy="548640"/>
-          </a:xfrm>
-          <a:prstGeom prst="rect">
-            <a:avLst/>
-          </a:prstGeom>
-          <a:noFill/>
-          <a:ln/>
-        </p:spPr>
-        <p:txBody>
-          <a:bodyPr wrap="square" lIns="0" tIns="0" rIns="0" bIns="0" rtlCol="0" anchor="ctr"/>
-          <a:lstStyle/>
-          <a:p>
-            <a:pPr indent="0" marL="0">
-              <a:buNone/>
-            </a:pPr>
-            <a:r>
-              <a:rPr lang="en-US" sz="2000" b="1" dirty="0">
-                <a:solidFill>
-                  <a:srgbClr val="1B2A4A"/>
-                </a:solidFill>
-                <a:latin typeface="Georgia" pitchFamily="34" charset="0"/>
-                <a:ea typeface="Georgia" pitchFamily="34" charset="-122"/>
-                <a:cs typeface="Georgia" pitchFamily="34" charset="-120"/>
-              </a:rPr>
-              <a:t>Check Your Understanding</a:t>
-            </a:r>
-            <a:endParaRPr lang="en-US" sz="2000" dirty="0"/>
-          </a:p>
-        </p:txBody>
-      </p:sp>
-      <p:sp>
-        <p:nvSpPr>
-          <p:cNvPr id="6" name="Shape 4"/>
-          <p:cNvSpPr/>
-          <p:nvPr/>
-        </p:nvSpPr>
-        <p:spPr>
-          <a:xfrm>
-            <a:off x="731520" y="1051560"/>
-            <a:ext cx="7680960" cy="438912"/>
-          </a:xfrm>
-          <a:prstGeom prst="rect">
-            <a:avLst/>
-          </a:prstGeom>
-          <a:solidFill>
-            <a:srgbClr val="FFFFFF"/>
-          </a:solidFill>
-          <a:ln/>
-        </p:spPr>
-      </p:sp>
-      <p:sp>
-        <p:nvSpPr>
-          <p:cNvPr id="7" name="Text 5"/>
-          <p:cNvSpPr/>
-          <p:nvPr/>
-        </p:nvSpPr>
-        <p:spPr>
-          <a:xfrm>
-            <a:off x="868680" y="1051560"/>
-            <a:ext cx="320040" cy="438912"/>
+            <a:off x="548640" y="274320"/>
+            <a:ext cx="9144000" cy="640080"/>
           </a:xfrm>
           <a:prstGeom prst="rect">
             <a:avLst/>
@@ -6357,27 +5423,50 @@
               <a:buNone/>
             </a:pPr>
             <a:r>
-              <a:rPr lang="en-US" sz="1400" dirty="0">
+              <a:rPr lang="en-US" sz="2400" b="1" dirty="0">
                 <a:solidFill>
-                  <a:srgbClr val="2A9D8F"/>
+                  <a:srgbClr val="1B2A4A"/>
                 </a:solidFill>
+                <a:latin typeface="Georgia" pitchFamily="34" charset="0"/>
+                <a:ea typeface="Georgia" pitchFamily="34" charset="-122"/>
+                <a:cs typeface="Georgia" pitchFamily="34" charset="-120"/>
               </a:rPr>
-              <a:t>☐</a:t>
-            </a:r>
-            <a:endParaRPr lang="en-US" sz="1400" dirty="0"/>
+              <a:t>Check Your Understanding</a:t>
+            </a:r>
+            <a:endParaRPr lang="en-US" sz="2400" dirty="0"/>
           </a:p>
         </p:txBody>
       </p:sp>
       <p:sp>
         <p:nvSpPr>
-          <p:cNvPr id="8" name="Text 6"/>
+          <p:cNvPr id="4" name="Shape 2"/>
           <p:cNvSpPr/>
           <p:nvPr/>
         </p:nvSpPr>
         <p:spPr>
           <a:xfrm>
-            <a:off x="1234440" y="1051560"/>
-            <a:ext cx="6949440" cy="438912"/>
+            <a:off x="548640" y="960120"/>
+            <a:ext cx="2286000" cy="36576"/>
+          </a:xfrm>
+          <a:prstGeom prst="rect">
+            <a:avLst/>
+          </a:prstGeom>
+          <a:solidFill>
+            <a:srgbClr val="2A9D8F"/>
+          </a:solidFill>
+          <a:ln/>
+        </p:spPr>
+      </p:sp>
+      <p:sp>
+        <p:nvSpPr>
+          <p:cNvPr id="5" name="Text 3"/>
+          <p:cNvSpPr/>
+          <p:nvPr/>
+        </p:nvSpPr>
+        <p:spPr>
+          <a:xfrm>
+            <a:off x="548640" y="1188720"/>
+            <a:ext cx="365760" cy="457200"/>
           </a:xfrm>
           <a:prstGeom prst="rect">
             <a:avLst/>
@@ -6393,50 +5482,30 @@
               <a:buNone/>
             </a:pPr>
             <a:r>
-              <a:rPr lang="en-US" sz="1300" dirty="0">
+              <a:rPr lang="en-US" sz="1600" dirty="0">
                 <a:solidFill>
-                  <a:srgbClr val="3D3A36"/>
+                  <a:srgbClr val="2A9D8F"/>
                 </a:solidFill>
-                <a:latin typeface="Calibri" pitchFamily="34" charset="0"/>
-                <a:ea typeface="Calibri" pitchFamily="34" charset="-122"/>
-                <a:cs typeface="Calibri" pitchFamily="34" charset="-120"/>
+                <a:latin typeface="Arial" pitchFamily="34" charset="0"/>
+                <a:ea typeface="Arial" pitchFamily="34" charset="-122"/>
+                <a:cs typeface="Arial" pitchFamily="34" charset="-120"/>
               </a:rPr>
-              <a:t>I know the SI units for length, mass, time, and temperature</a:t>
-            </a:r>
-            <a:endParaRPr lang="en-US" sz="1300" dirty="0"/>
+              <a:t>☐</a:t>
+            </a:r>
+            <a:endParaRPr lang="en-US" sz="1600" dirty="0"/>
           </a:p>
         </p:txBody>
       </p:sp>
       <p:sp>
         <p:nvSpPr>
-          <p:cNvPr id="9" name="Shape 7"/>
+          <p:cNvPr id="6" name="Text 4"/>
           <p:cNvSpPr/>
           <p:nvPr/>
         </p:nvSpPr>
         <p:spPr>
           <a:xfrm>
-            <a:off x="731520" y="1554480"/>
-            <a:ext cx="7680960" cy="438912"/>
-          </a:xfrm>
-          <a:prstGeom prst="rect">
-            <a:avLst/>
-          </a:prstGeom>
-          <a:solidFill>
-            <a:srgbClr val="F8F6F3"/>
-          </a:solidFill>
-          <a:ln/>
-        </p:spPr>
-      </p:sp>
-      <p:sp>
-        <p:nvSpPr>
-          <p:cNvPr id="10" name="Text 8"/>
-          <p:cNvSpPr/>
-          <p:nvPr/>
-        </p:nvSpPr>
-        <p:spPr>
-          <a:xfrm>
-            <a:off x="868680" y="1554480"/>
-            <a:ext cx="320040" cy="438912"/>
+            <a:off x="1005840" y="1188720"/>
+            <a:ext cx="9601200" cy="457200"/>
           </a:xfrm>
           <a:prstGeom prst="rect">
             <a:avLst/>
@@ -6449,15 +5518,21 @@
           <a:lstStyle/>
           <a:p>
             <a:pPr indent="0" marL="0">
+              <a:lnSpc>
+                <a:spcPct val="130000"/>
+              </a:lnSpc>
               <a:buNone/>
             </a:pPr>
             <a:r>
               <a:rPr lang="en-US" sz="1400" dirty="0">
                 <a:solidFill>
-                  <a:srgbClr val="2A9D8F"/>
+                  <a:srgbClr val="3D3A36"/>
                 </a:solidFill>
+                <a:latin typeface="Arial" pitchFamily="34" charset="0"/>
+                <a:ea typeface="Arial" pitchFamily="34" charset="-122"/>
+                <a:cs typeface="Arial" pitchFamily="34" charset="-120"/>
               </a:rPr>
-              <a:t>☐</a:t>
+              <a:t>I can name the SI unit for length, mass, volume, and temperature.</a:t>
             </a:r>
             <a:endParaRPr lang="en-US" sz="1400" dirty="0"/>
           </a:p>
@@ -6465,14 +5540,14 @@
       </p:sp>
       <p:sp>
         <p:nvSpPr>
-          <p:cNvPr id="11" name="Text 9"/>
+          <p:cNvPr id="7" name="Text 5"/>
           <p:cNvSpPr/>
           <p:nvPr/>
         </p:nvSpPr>
         <p:spPr>
           <a:xfrm>
-            <a:off x="1234440" y="1554480"/>
-            <a:ext cx="6949440" cy="438912"/>
+            <a:off x="548640" y="1783080"/>
+            <a:ext cx="365760" cy="457200"/>
           </a:xfrm>
           <a:prstGeom prst="rect">
             <a:avLst/>
@@ -6488,50 +5563,30 @@
               <a:buNone/>
             </a:pPr>
             <a:r>
-              <a:rPr lang="en-US" sz="1300" dirty="0">
+              <a:rPr lang="en-US" sz="1600" dirty="0">
                 <a:solidFill>
-                  <a:srgbClr val="3D3A36"/>
+                  <a:srgbClr val="2A9D8F"/>
                 </a:solidFill>
-                <a:latin typeface="Calibri" pitchFamily="34" charset="0"/>
-                <a:ea typeface="Calibri" pitchFamily="34" charset="-122"/>
-                <a:cs typeface="Calibri" pitchFamily="34" charset="-120"/>
+                <a:latin typeface="Arial" pitchFamily="34" charset="0"/>
+                <a:ea typeface="Arial" pitchFamily="34" charset="-122"/>
+                <a:cs typeface="Arial" pitchFamily="34" charset="-120"/>
               </a:rPr>
-              <a:t>I can read a measuring cylinder at the meniscus</a:t>
-            </a:r>
-            <a:endParaRPr lang="en-US" sz="1300" dirty="0"/>
+              <a:t>☐</a:t>
+            </a:r>
+            <a:endParaRPr lang="en-US" sz="1600" dirty="0"/>
           </a:p>
         </p:txBody>
       </p:sp>
       <p:sp>
         <p:nvSpPr>
-          <p:cNvPr id="12" name="Shape 10"/>
+          <p:cNvPr id="8" name="Text 6"/>
           <p:cNvSpPr/>
           <p:nvPr/>
         </p:nvSpPr>
         <p:spPr>
           <a:xfrm>
-            <a:off x="731520" y="2057400"/>
-            <a:ext cx="7680960" cy="438912"/>
-          </a:xfrm>
-          <a:prstGeom prst="rect">
-            <a:avLst/>
-          </a:prstGeom>
-          <a:solidFill>
-            <a:srgbClr val="FFFFFF"/>
-          </a:solidFill>
-          <a:ln/>
-        </p:spPr>
-      </p:sp>
-      <p:sp>
-        <p:nvSpPr>
-          <p:cNvPr id="13" name="Text 11"/>
-          <p:cNvSpPr/>
-          <p:nvPr/>
-        </p:nvSpPr>
-        <p:spPr>
-          <a:xfrm>
-            <a:off x="868680" y="2057400"/>
-            <a:ext cx="320040" cy="438912"/>
+            <a:off x="1005840" y="1783080"/>
+            <a:ext cx="9601200" cy="457200"/>
           </a:xfrm>
           <a:prstGeom prst="rect">
             <a:avLst/>
@@ -6544,15 +5599,21 @@
           <a:lstStyle/>
           <a:p>
             <a:pPr indent="0" marL="0">
+              <a:lnSpc>
+                <a:spcPct val="130000"/>
+              </a:lnSpc>
               <a:buNone/>
             </a:pPr>
             <a:r>
               <a:rPr lang="en-US" sz="1400" dirty="0">
                 <a:solidFill>
-                  <a:srgbClr val="2A9D8F"/>
+                  <a:srgbClr val="3D3A36"/>
                 </a:solidFill>
+                <a:latin typeface="Arial" pitchFamily="34" charset="0"/>
+                <a:ea typeface="Arial" pitchFamily="34" charset="-122"/>
+                <a:cs typeface="Arial" pitchFamily="34" charset="-120"/>
               </a:rPr>
-              <a:t>☐</a:t>
+              <a:t>I can read a measuring cylinder correctly (meniscus).</a:t>
             </a:r>
             <a:endParaRPr lang="en-US" sz="1400" dirty="0"/>
           </a:p>
@@ -6560,14 +5621,14 @@
       </p:sp>
       <p:sp>
         <p:nvSpPr>
-          <p:cNvPr id="14" name="Text 12"/>
+          <p:cNvPr id="9" name="Text 7"/>
           <p:cNvSpPr/>
           <p:nvPr/>
         </p:nvSpPr>
         <p:spPr>
           <a:xfrm>
-            <a:off x="1234440" y="2057400"/>
-            <a:ext cx="6949440" cy="438912"/>
+            <a:off x="548640" y="2377440"/>
+            <a:ext cx="365760" cy="457200"/>
           </a:xfrm>
           <a:prstGeom prst="rect">
             <a:avLst/>
@@ -6583,50 +5644,30 @@
               <a:buNone/>
             </a:pPr>
             <a:r>
-              <a:rPr lang="en-US" sz="1300" dirty="0">
+              <a:rPr lang="en-US" sz="1600" dirty="0">
                 <a:solidFill>
-                  <a:srgbClr val="3D3A36"/>
+                  <a:srgbClr val="2A9D8F"/>
                 </a:solidFill>
-                <a:latin typeface="Calibri" pitchFamily="34" charset="0"/>
-                <a:ea typeface="Calibri" pitchFamily="34" charset="-122"/>
-                <a:cs typeface="Calibri" pitchFamily="34" charset="-120"/>
+                <a:latin typeface="Arial" pitchFamily="34" charset="0"/>
+                <a:ea typeface="Arial" pitchFamily="34" charset="-122"/>
+                <a:cs typeface="Arial" pitchFamily="34" charset="-120"/>
               </a:rPr>
-              <a:t>I understand the difference between accuracy and precision</a:t>
-            </a:r>
-            <a:endParaRPr lang="en-US" sz="1300" dirty="0"/>
+              <a:t>☐</a:t>
+            </a:r>
+            <a:endParaRPr lang="en-US" sz="1600" dirty="0"/>
           </a:p>
         </p:txBody>
       </p:sp>
       <p:sp>
         <p:nvSpPr>
-          <p:cNvPr id="15" name="Shape 13"/>
+          <p:cNvPr id="10" name="Text 8"/>
           <p:cNvSpPr/>
           <p:nvPr/>
         </p:nvSpPr>
         <p:spPr>
           <a:xfrm>
-            <a:off x="731520" y="2560320"/>
-            <a:ext cx="7680960" cy="438912"/>
-          </a:xfrm>
-          <a:prstGeom prst="rect">
-            <a:avLst/>
-          </a:prstGeom>
-          <a:solidFill>
-            <a:srgbClr val="F8F6F3"/>
-          </a:solidFill>
-          <a:ln/>
-        </p:spPr>
-      </p:sp>
-      <p:sp>
-        <p:nvSpPr>
-          <p:cNvPr id="16" name="Text 14"/>
-          <p:cNvSpPr/>
-          <p:nvPr/>
-        </p:nvSpPr>
-        <p:spPr>
-          <a:xfrm>
-            <a:off x="868680" y="2560320"/>
-            <a:ext cx="320040" cy="438912"/>
+            <a:off x="1005840" y="2377440"/>
+            <a:ext cx="9601200" cy="457200"/>
           </a:xfrm>
           <a:prstGeom prst="rect">
             <a:avLst/>
@@ -6639,15 +5680,21 @@
           <a:lstStyle/>
           <a:p>
             <a:pPr indent="0" marL="0">
+              <a:lnSpc>
+                <a:spcPct val="130000"/>
+              </a:lnSpc>
               <a:buNone/>
             </a:pPr>
             <a:r>
               <a:rPr lang="en-US" sz="1400" dirty="0">
                 <a:solidFill>
-                  <a:srgbClr val="2A9D8F"/>
+                  <a:srgbClr val="3D3A36"/>
                 </a:solidFill>
+                <a:latin typeface="Arial" pitchFamily="34" charset="0"/>
+                <a:ea typeface="Arial" pitchFamily="34" charset="-122"/>
+                <a:cs typeface="Arial" pitchFamily="34" charset="-120"/>
               </a:rPr>
-              <a:t>☐</a:t>
+              <a:t>I can explain the difference between accuracy and precision.</a:t>
             </a:r>
             <a:endParaRPr lang="en-US" sz="1400" dirty="0"/>
           </a:p>
@@ -6655,14 +5702,14 @@
       </p:sp>
       <p:sp>
         <p:nvSpPr>
-          <p:cNvPr id="17" name="Text 15"/>
+          <p:cNvPr id="11" name="Text 9"/>
           <p:cNvSpPr/>
           <p:nvPr/>
         </p:nvSpPr>
         <p:spPr>
           <a:xfrm>
-            <a:off x="1234440" y="2560320"/>
-            <a:ext cx="6949440" cy="438912"/>
+            <a:off x="548640" y="2971800"/>
+            <a:ext cx="365760" cy="457200"/>
           </a:xfrm>
           <a:prstGeom prst="rect">
             <a:avLst/>
@@ -6678,50 +5725,30 @@
               <a:buNone/>
             </a:pPr>
             <a:r>
-              <a:rPr lang="en-US" sz="1300" dirty="0">
+              <a:rPr lang="en-US" sz="1600" dirty="0">
                 <a:solidFill>
-                  <a:srgbClr val="3D3A36"/>
+                  <a:srgbClr val="2A9D8F"/>
                 </a:solidFill>
-                <a:latin typeface="Calibri" pitchFamily="34" charset="0"/>
-                <a:ea typeface="Calibri" pitchFamily="34" charset="-122"/>
-                <a:cs typeface="Calibri" pitchFamily="34" charset="-120"/>
+                <a:latin typeface="Arial" pitchFamily="34" charset="0"/>
+                <a:ea typeface="Arial" pitchFamily="34" charset="-122"/>
+                <a:cs typeface="Arial" pitchFamily="34" charset="-120"/>
               </a:rPr>
-              <a:t>I can convert between common metric units</a:t>
-            </a:r>
-            <a:endParaRPr lang="en-US" sz="1300" dirty="0"/>
+              <a:t>☐</a:t>
+            </a:r>
+            <a:endParaRPr lang="en-US" sz="1600" dirty="0"/>
           </a:p>
         </p:txBody>
       </p:sp>
       <p:sp>
         <p:nvSpPr>
-          <p:cNvPr id="18" name="Shape 16"/>
+          <p:cNvPr id="12" name="Text 10"/>
           <p:cNvSpPr/>
           <p:nvPr/>
         </p:nvSpPr>
         <p:spPr>
           <a:xfrm>
-            <a:off x="731520" y="3063240"/>
-            <a:ext cx="7680960" cy="438912"/>
-          </a:xfrm>
-          <a:prstGeom prst="rect">
-            <a:avLst/>
-          </a:prstGeom>
-          <a:solidFill>
-            <a:srgbClr val="FFFFFF"/>
-          </a:solidFill>
-          <a:ln/>
-        </p:spPr>
-      </p:sp>
-      <p:sp>
-        <p:nvSpPr>
-          <p:cNvPr id="19" name="Text 17"/>
-          <p:cNvSpPr/>
-          <p:nvPr/>
-        </p:nvSpPr>
-        <p:spPr>
-          <a:xfrm>
-            <a:off x="868680" y="3063240"/>
-            <a:ext cx="320040" cy="438912"/>
+            <a:off x="1005840" y="2971800"/>
+            <a:ext cx="9601200" cy="457200"/>
           </a:xfrm>
           <a:prstGeom prst="rect">
             <a:avLst/>
@@ -6734,136 +5761,23 @@
           <a:lstStyle/>
           <a:p>
             <a:pPr indent="0" marL="0">
+              <a:lnSpc>
+                <a:spcPct val="130000"/>
+              </a:lnSpc>
               <a:buNone/>
             </a:pPr>
             <a:r>
               <a:rPr lang="en-US" sz="1400" dirty="0">
-                <a:solidFill>
-                  <a:srgbClr val="2A9D8F"/>
-                </a:solidFill>
-              </a:rPr>
-              <a:t>☐</a:t>
-            </a:r>
-            <a:endParaRPr lang="en-US" sz="1400" dirty="0"/>
-          </a:p>
-        </p:txBody>
-      </p:sp>
-      <p:sp>
-        <p:nvSpPr>
-          <p:cNvPr id="20" name="Text 18"/>
-          <p:cNvSpPr/>
-          <p:nvPr/>
-        </p:nvSpPr>
-        <p:spPr>
-          <a:xfrm>
-            <a:off x="1234440" y="3063240"/>
-            <a:ext cx="6949440" cy="438912"/>
-          </a:xfrm>
-          <a:prstGeom prst="rect">
-            <a:avLst/>
-          </a:prstGeom>
-          <a:noFill/>
-          <a:ln/>
-        </p:spPr>
-        <p:txBody>
-          <a:bodyPr wrap="square" rtlCol="0" anchor="ctr"/>
-          <a:lstStyle/>
-          <a:p>
-            <a:pPr indent="0" marL="0">
-              <a:buNone/>
-            </a:pPr>
-            <a:r>
-              <a:rPr lang="en-US" sz="1300" dirty="0">
                 <a:solidFill>
                   <a:srgbClr val="3D3A36"/>
                 </a:solidFill>
-                <a:latin typeface="Calibri" pitchFamily="34" charset="0"/>
-                <a:ea typeface="Calibri" pitchFamily="34" charset="-122"/>
-                <a:cs typeface="Calibri" pitchFamily="34" charset="-120"/>
+                <a:latin typeface="Arial" pitchFamily="34" charset="0"/>
+                <a:ea typeface="Arial" pitchFamily="34" charset="-122"/>
+                <a:cs typeface="Arial" pitchFamily="34" charset="-120"/>
               </a:rPr>
-              <a:t>I always include units with my measurements</a:t>
-            </a:r>
-            <a:endParaRPr lang="en-US" sz="1300" dirty="0"/>
-          </a:p>
-        </p:txBody>
-      </p:sp>
-      <p:sp>
-        <p:nvSpPr>
-          <p:cNvPr id="21" name="Shape 19"/>
-          <p:cNvSpPr/>
-          <p:nvPr/>
-        </p:nvSpPr>
-        <p:spPr>
-          <a:xfrm>
-            <a:off x="731520" y="3749040"/>
-            <a:ext cx="7680960" cy="594360"/>
-          </a:xfrm>
-          <a:prstGeom prst="rect">
-            <a:avLst/>
-          </a:prstGeom>
-          <a:solidFill>
-            <a:srgbClr val="E8F5F3"/>
-          </a:solidFill>
-          <a:ln/>
-          <a:effectLst>
-            <a:outerShdw sx="100000" sy="100000" kx="0" ky="0" algn="bl" rotWithShape="0" blurRad="50800" dist="25400" dir="8100000">
-              <a:srgbClr val="000000">
-                <a:alpha val="10000"/>
-              </a:srgbClr>
-            </a:outerShdw>
-          </a:effectLst>
-        </p:spPr>
-      </p:sp>
-      <p:sp>
-        <p:nvSpPr>
-          <p:cNvPr id="22" name="Text 20"/>
-          <p:cNvSpPr/>
-          <p:nvPr/>
-        </p:nvSpPr>
-        <p:spPr>
-          <a:xfrm>
-            <a:off x="914400" y="3749040"/>
-            <a:ext cx="7315200" cy="594360"/>
-          </a:xfrm>
-          <a:prstGeom prst="rect">
-            <a:avLst/>
-          </a:prstGeom>
-          <a:noFill/>
-          <a:ln/>
-        </p:spPr>
-        <p:txBody>
-          <a:bodyPr wrap="square" rtlCol="0" anchor="ctr"/>
-          <a:lstStyle/>
-          <a:p>
-            <a:pPr indent="0" marL="0">
-              <a:buNone/>
-            </a:pPr>
-            <a:r>
-              <a:rPr lang="en-US" sz="1200" b="1" dirty="0">
-                <a:solidFill>
-                  <a:srgbClr val="2A9D8F"/>
-                </a:solidFill>
-                <a:latin typeface="Calibri" pitchFamily="34" charset="0"/>
-                <a:ea typeface="Calibri" pitchFamily="34" charset="-122"/>
-                <a:cs typeface="Calibri" pitchFamily="34" charset="-120"/>
-              </a:rPr>
-              <a:t>Key Idea: </a:t>
-            </a:r>
-            <a:pPr indent="0" marL="0">
-              <a:buNone/>
-            </a:pPr>
-            <a:r>
-              <a:rPr lang="en-US" sz="1200" i="1" dirty="0">
-                <a:solidFill>
-                  <a:srgbClr val="3D3A36"/>
-                </a:solidFill>
-                <a:latin typeface="Calibri" pitchFamily="34" charset="0"/>
-                <a:ea typeface="Calibri" pitchFamily="34" charset="-122"/>
-                <a:cs typeface="Calibri" pitchFamily="34" charset="-120"/>
-              </a:rPr>
-              <a:t>Without accurate measurement, our data is meaningless.</a:t>
-            </a:r>
-            <a:endParaRPr lang="en-US" sz="1200" dirty="0"/>
+              <a:t>I can identify common measurement errors.</a:t>
+            </a:r>
+            <a:endParaRPr lang="en-US" sz="1400" dirty="0"/>
           </a:p>
         </p:txBody>
       </p:sp>
@@ -6878,6 +5792,13 @@
 <file path=ppt/slides/slide8.xml><?xml version="1.0" encoding="utf-8"?>
 <p:sld xmlns:a="http://schemas.openxmlformats.org/drawingml/2006/main" xmlns:r="http://schemas.openxmlformats.org/officeDocument/2006/relationships" xmlns:p="http://schemas.openxmlformats.org/presentationml/2006/main">
   <p:cSld name="Slide 8">
+    <p:bg>
+      <p:bgPr>
+        <a:solidFill>
+          <a:srgbClr val="111D35"/>
+        </a:solidFill>
+      </p:bgPr>
+    </p:bg>
     <p:spTree>
       <p:nvGrpSpPr>
         <p:cNvPr id="1" name=""/>
@@ -6894,76 +5815,14 @@
       </p:grpSpPr>
       <p:sp>
         <p:nvSpPr>
-          <p:cNvPr id="2" name="Shape 0"/>
+          <p:cNvPr id="2" name="Text 0"/>
           <p:cNvSpPr/>
           <p:nvPr/>
         </p:nvSpPr>
         <p:spPr>
           <a:xfrm>
-            <a:off x="0" y="0"/>
-            <a:ext cx="9144000" cy="5143500"/>
-          </a:xfrm>
-          <a:prstGeom prst="rect">
-            <a:avLst/>
-          </a:prstGeom>
-          <a:solidFill>
-            <a:srgbClr val="1B2A4A"/>
-          </a:solidFill>
-          <a:ln/>
-        </p:spPr>
-      </p:sp>
-      <p:sp>
-        <p:nvSpPr>
-          <p:cNvPr id="3" name="Shape 1"/>
-          <p:cNvSpPr/>
-          <p:nvPr/>
-        </p:nvSpPr>
-        <p:spPr>
-          <a:xfrm>
-            <a:off x="0" y="4777740"/>
-            <a:ext cx="9144000" cy="365760"/>
-          </a:xfrm>
-          <a:prstGeom prst="rect">
-            <a:avLst/>
-          </a:prstGeom>
-          <a:solidFill>
-            <a:srgbClr val="2A9D8F"/>
-          </a:solidFill>
-          <a:ln/>
-        </p:spPr>
-      </p:sp>
-      <p:sp>
-        <p:nvSpPr>
-          <p:cNvPr id="4" name="Shape 2"/>
-          <p:cNvSpPr/>
-          <p:nvPr/>
-        </p:nvSpPr>
-        <p:spPr>
-          <a:xfrm>
-            <a:off x="-914400" y="-914400"/>
-            <a:ext cx="3657600" cy="3657600"/>
-          </a:xfrm>
-          <a:prstGeom prst="ellipse">
-            <a:avLst/>
-          </a:prstGeom>
-          <a:solidFill>
-            <a:srgbClr val="2A9D8F">
-              <a:alpha val="10000"/>
-            </a:srgbClr>
-          </a:solidFill>
-          <a:ln/>
-        </p:spPr>
-      </p:sp>
-      <p:sp>
-        <p:nvSpPr>
-          <p:cNvPr id="5" name="Text 3"/>
-          <p:cNvSpPr/>
-          <p:nvPr/>
-        </p:nvSpPr>
-        <p:spPr>
-          <a:xfrm>
-            <a:off x="731520" y="1463040"/>
-            <a:ext cx="7680960" cy="822960"/>
+            <a:off x="731520" y="1371600"/>
+            <a:ext cx="9144000" cy="914400"/>
           </a:xfrm>
           <a:prstGeom prst="rect">
             <a:avLst/>
@@ -6975,11 +5834,11 @@
           <a:bodyPr wrap="square" rtlCol="0" anchor="ctr"/>
           <a:lstStyle/>
           <a:p>
-            <a:pPr algn="ctr" indent="0" marL="0">
+            <a:pPr indent="0" marL="0">
               <a:buNone/>
             </a:pPr>
             <a:r>
-              <a:rPr lang="en-US" sz="3400" b="1" dirty="0">
+              <a:rPr lang="en-US" sz="3200" b="1" dirty="0">
                 <a:solidFill>
                   <a:srgbClr val="FFFFFF"/>
                 </a:solidFill>
@@ -6989,20 +5848,20 @@
               </a:rPr>
               <a:t>Review &amp; Practise</a:t>
             </a:r>
-            <a:endParaRPr lang="en-US" sz="3400" dirty="0"/>
+            <a:endParaRPr lang="en-US" sz="3200" dirty="0"/>
           </a:p>
         </p:txBody>
       </p:sp>
       <p:sp>
         <p:nvSpPr>
-          <p:cNvPr id="6" name="Text 4"/>
+          <p:cNvPr id="3" name="Text 1"/>
           <p:cNvSpPr/>
           <p:nvPr/>
         </p:nvSpPr>
         <p:spPr>
           <a:xfrm>
-            <a:off x="731520" y="2468880"/>
-            <a:ext cx="7680960" cy="457200"/>
+            <a:off x="731520" y="2377440"/>
+            <a:ext cx="7315200" cy="548640"/>
           </a:xfrm>
           <a:prstGeom prst="rect">
             <a:avLst/>
@@ -7014,34 +5873,36 @@
           <a:bodyPr wrap="square" rtlCol="0" anchor="ctr"/>
           <a:lstStyle/>
           <a:p>
-            <a:pPr algn="ctr" indent="0" marL="0">
+            <a:pPr indent="0" marL="0">
               <a:buNone/>
             </a:pPr>
             <a:r>
-              <a:rPr lang="en-US" sz="1800" dirty="0">
+              <a:rPr lang="en-US" sz="1500" dirty="0">
                 <a:solidFill>
-                  <a:srgbClr val="2A9D8F"/>
+                  <a:srgbClr val="FFFFFF">
+                    <a:alpha val="60000"/>
+                  </a:srgbClr>
                 </a:solidFill>
-                <a:latin typeface="Calibri" pitchFamily="34" charset="0"/>
-                <a:ea typeface="Calibri" pitchFamily="34" charset="-122"/>
-                <a:cs typeface="Calibri" pitchFamily="34" charset="-120"/>
+                <a:latin typeface="Arial" pitchFamily="34" charset="0"/>
+                <a:ea typeface="Arial" pitchFamily="34" charset="-122"/>
+                <a:cs typeface="Arial" pitchFamily="34" charset="-120"/>
               </a:rPr>
-              <a:t>mrzocchi.com</a:t>
-            </a:r>
-            <a:endParaRPr lang="en-US" sz="1800" dirty="0"/>
+              <a:t>Use the Self-Quiz, Review Games, and Practice Builder to test yourself.</a:t>
+            </a:r>
+            <a:endParaRPr lang="en-US" sz="1500" dirty="0"/>
           </a:p>
         </p:txBody>
       </p:sp>
       <p:sp>
         <p:nvSpPr>
-          <p:cNvPr id="7" name="Text 5"/>
+          <p:cNvPr id="4" name="Text 2"/>
           <p:cNvSpPr/>
           <p:nvPr/>
         </p:nvSpPr>
         <p:spPr>
           <a:xfrm>
-            <a:off x="731520" y="3108960"/>
-            <a:ext cx="7680960" cy="457200"/>
+            <a:off x="731520" y="3291840"/>
+            <a:ext cx="3657600" cy="457200"/>
           </a:xfrm>
           <a:prstGeom prst="rect">
             <a:avLst/>
@@ -7053,21 +5914,21 @@
           <a:bodyPr wrap="square" rtlCol="0" anchor="ctr"/>
           <a:lstStyle/>
           <a:p>
-            <a:pPr algn="ctr" indent="0" marL="0">
+            <a:pPr indent="0" marL="0">
               <a:buNone/>
             </a:pPr>
             <a:r>
-              <a:rPr lang="en-US" sz="1300" dirty="0">
+              <a:rPr lang="en-US" sz="1800" b="1" dirty="0">
                 <a:solidFill>
-                  <a:srgbClr val="9B9690"/>
+                  <a:srgbClr val="E9C46A"/>
                 </a:solidFill>
-                <a:latin typeface="Calibri" pitchFamily="34" charset="0"/>
-                <a:ea typeface="Calibri" pitchFamily="34" charset="-122"/>
-                <a:cs typeface="Calibri" pitchFamily="34" charset="-120"/>
+                <a:latin typeface="Georgia" pitchFamily="34" charset="0"/>
+                <a:ea typeface="Georgia" pitchFamily="34" charset="-122"/>
+                <a:cs typeface="Georgia" pitchFamily="34" charset="-120"/>
               </a:rPr>
-              <a:t>Use the Self-Quiz, Review Games, and Practice Builder to test yourself.</a:t>
-            </a:r>
-            <a:endParaRPr lang="en-US" sz="1300" dirty="0"/>
+              <a:t>mrzocchi.com</a:t>
+            </a:r>
+            <a:endParaRPr lang="en-US" sz="1800" dirty="0"/>
           </a:p>
         </p:txBody>
       </p:sp>
